--- a/output/wordlabs-sign-3day.pptx
+++ b/output/wordlabs-sign-3day.pptx
@@ -4240,7 +4240,7 @@
                 <a:ea typeface="Calibri" pitchFamily="34" charset="-122"/>
                 <a:cs typeface="Calibri" pitchFamily="34" charset="-120"/>
               </a:rPr>
-              <a:t>"mark, symbol, indicate"</a:t>
+              <a:t>"mark, symbol, or signal"</a:t>
             </a:r>
             <a:endParaRPr lang="en-US" sz="2200" dirty="0"/>
           </a:p>
@@ -5288,7 +5288,7 @@
                 <a:ea typeface="Calibri" pitchFamily="34" charset="-122"/>
                 <a:cs typeface="Calibri" pitchFamily="34" charset="-120"/>
               </a:rPr>
-              <a:t>Word Labs  •  wordlabs.app  •  Root: 'sign' = mark, symbol, indicate</a:t>
+              <a:t>Word Labs  •  wordlabs.app  •  Root: 'sign' = mark, symbol, or signal</a:t>
             </a:r>
             <a:endParaRPr lang="en-US" sz="800" dirty="0"/>
           </a:p>
@@ -5928,7 +5928,7 @@
                 <a:ea typeface="Calibri" pitchFamily="34" charset="-122"/>
                 <a:cs typeface="Calibri" pitchFamily="34" charset="-120"/>
               </a:rPr>
-              <a:t>Word Labs  •  wordlabs.app  •  Root: 'sign' = mark, symbol, indicate</a:t>
+              <a:t>Word Labs  •  wordlabs.app  •  Root: 'sign' = mark, symbol, or signal</a:t>
             </a:r>
             <a:endParaRPr lang="en-US" sz="800" dirty="0"/>
           </a:p>
@@ -6071,7 +6071,7 @@
                 <a:ea typeface="Calibri" pitchFamily="34" charset="-122"/>
                 <a:cs typeface="Calibri" pitchFamily="34" charset="-120"/>
               </a:rPr>
-              <a:t> used a special </a:t>
+              <a:t> created a </a:t>
             </a:r>
             <a:pPr algn="l" indent="0" marL="0">
               <a:buNone/>
@@ -6088,7 +6088,7 @@
                 <a:ea typeface="Calibri" pitchFamily="34" charset="-122"/>
                 <a:cs typeface="Calibri" pitchFamily="34" charset="-120"/>
               </a:rPr>
-              <a:t>signature</a:t>
+              <a:t>significant</a:t>
             </a:r>
             <a:pPr algn="l" indent="0" marL="0">
               <a:buNone/>
@@ -6102,7 +6102,7 @@
                 <a:ea typeface="Calibri" pitchFamily="34" charset="-122"/>
                 <a:cs typeface="Calibri" pitchFamily="34" charset="-120"/>
               </a:rPr>
-              <a:t> to mark all of her artwork.</a:t>
+              <a:t> new logo for the school.</a:t>
             </a:r>
             <a:endParaRPr lang="en-US" sz="1800" dirty="0"/>
           </a:p>
@@ -6385,7 +6385,7 @@
                 <a:ea typeface="Trebuchet MS" pitchFamily="34" charset="-122"/>
                 <a:cs typeface="Trebuchet MS" pitchFamily="34" charset="-120"/>
               </a:rPr>
-              <a:t>signature</a:t>
+              <a:t>significant</a:t>
             </a:r>
             <a:endParaRPr lang="en-US" sz="1400" dirty="0"/>
           </a:p>
@@ -6716,7 +6716,7 @@
                 <a:ea typeface="Calibri" pitchFamily="34" charset="-122"/>
                 <a:cs typeface="Calibri" pitchFamily="34" charset="-120"/>
               </a:rPr>
-              <a:t>Word Labs  •  wordlabs.app  •  Root: 'sign' = mark, symbol, indicate</a:t>
+              <a:t>Word Labs  •  wordlabs.app  •  Root: 'sign' = mark, symbol, or signal</a:t>
             </a:r>
             <a:endParaRPr lang="en-US" sz="800" dirty="0"/>
           </a:p>
@@ -7543,7 +7543,7 @@
                 <a:ea typeface="Calibri" pitchFamily="34" charset="-122"/>
                 <a:cs typeface="Calibri" pitchFamily="34" charset="-120"/>
               </a:rPr>
-              <a:t>Word Labs  •  wordlabs.app  •  Root: 'sign' = mark, symbol, indicate</a:t>
+              <a:t>Word Labs  •  wordlabs.app  •  Root: 'sign' = mark, symbol, or signal</a:t>
             </a:r>
             <a:endParaRPr lang="en-US" sz="800" dirty="0"/>
           </a:p>
@@ -7860,7 +7860,7 @@
                 <a:ea typeface="Calibri" pitchFamily="34" charset="-122"/>
                 <a:cs typeface="Calibri" pitchFamily="34" charset="-120"/>
               </a:rPr>
-              <a:t>down, away, from</a:t>
+              <a:t>down, away, or completely</a:t>
             </a:r>
             <a:endParaRPr lang="en-US" sz="850" dirty="0"/>
           </a:p>
@@ -7972,7 +7972,7 @@
                 <a:ea typeface="Calibri" pitchFamily="34" charset="-122"/>
                 <a:cs typeface="Calibri" pitchFamily="34" charset="-120"/>
               </a:rPr>
-              <a:t>mark, symbol</a:t>
+              <a:t>mark or symbol</a:t>
             </a:r>
             <a:endParaRPr lang="en-US" sz="850" dirty="0"/>
           </a:p>
@@ -8084,7 +8084,7 @@
                 <a:ea typeface="Calibri" pitchFamily="34" charset="-122"/>
                 <a:cs typeface="Calibri" pitchFamily="34" charset="-120"/>
               </a:rPr>
-              <a:t>person who does something</a:t>
+              <a:t>a person who does something</a:t>
             </a:r>
             <a:endParaRPr lang="en-US" sz="850" dirty="0"/>
           </a:p>
@@ -8640,7 +8640,7 @@
                 <a:ea typeface="Calibri" pitchFamily="34" charset="-122"/>
                 <a:cs typeface="Calibri" pitchFamily="34" charset="-120"/>
               </a:rPr>
-              <a:t>Word Labs  •  wordlabs.app  •  Root: 'sign' = mark, symbol, indicate</a:t>
+              <a:t>Word Labs  •  wordlabs.app  •  Root: 'sign' = mark, symbol, or signal</a:t>
             </a:r>
             <a:endParaRPr lang="en-US" sz="800" dirty="0"/>
           </a:p>
@@ -8957,7 +8957,7 @@
                 <a:ea typeface="Calibri" pitchFamily="34" charset="-122"/>
                 <a:cs typeface="Calibri" pitchFamily="34" charset="-120"/>
               </a:rPr>
-              <a:t>down, away, from</a:t>
+              <a:t>down, away, or completely</a:t>
             </a:r>
             <a:endParaRPr lang="en-US" sz="850" dirty="0"/>
           </a:p>
@@ -9069,7 +9069,7 @@
                 <a:ea typeface="Calibri" pitchFamily="34" charset="-122"/>
                 <a:cs typeface="Calibri" pitchFamily="34" charset="-120"/>
               </a:rPr>
-              <a:t>mark, symbol</a:t>
+              <a:t>mark or symbol</a:t>
             </a:r>
             <a:endParaRPr lang="en-US" sz="850" dirty="0"/>
           </a:p>
@@ -9181,7 +9181,7 @@
                 <a:ea typeface="Calibri" pitchFamily="34" charset="-122"/>
                 <a:cs typeface="Calibri" pitchFamily="34" charset="-120"/>
               </a:rPr>
-              <a:t>person who does something</a:t>
+              <a:t>a person who does something</a:t>
             </a:r>
             <a:endParaRPr lang="en-US" sz="850" dirty="0"/>
           </a:p>
@@ -9974,7 +9974,7 @@
                 <a:ea typeface="Calibri" pitchFamily="34" charset="-122"/>
                 <a:cs typeface="Calibri" pitchFamily="34" charset="-120"/>
               </a:rPr>
-              <a:t>Word Labs  •  wordlabs.app  •  Root: 'sign' = mark, symbol, indicate</a:t>
+              <a:t>Word Labs  •  wordlabs.app  •  Root: 'sign' = mark, symbol, or signal</a:t>
             </a:r>
             <a:endParaRPr lang="en-US" sz="800" dirty="0"/>
           </a:p>
@@ -10291,7 +10291,7 @@
                 <a:ea typeface="Calibri" pitchFamily="34" charset="-122"/>
                 <a:cs typeface="Calibri" pitchFamily="34" charset="-120"/>
               </a:rPr>
-              <a:t>down, away, from</a:t>
+              <a:t>down, away, or completely</a:t>
             </a:r>
             <a:endParaRPr lang="en-US" sz="850" dirty="0"/>
           </a:p>
@@ -10403,7 +10403,7 @@
                 <a:ea typeface="Calibri" pitchFamily="34" charset="-122"/>
                 <a:cs typeface="Calibri" pitchFamily="34" charset="-120"/>
               </a:rPr>
-              <a:t>mark, symbol</a:t>
+              <a:t>mark or symbol</a:t>
             </a:r>
             <a:endParaRPr lang="en-US" sz="850" dirty="0"/>
           </a:p>
@@ -10515,7 +10515,7 @@
                 <a:ea typeface="Calibri" pitchFamily="34" charset="-122"/>
                 <a:cs typeface="Calibri" pitchFamily="34" charset="-120"/>
               </a:rPr>
-              <a:t>person who does something</a:t>
+              <a:t>a person who does something</a:t>
             </a:r>
             <a:endParaRPr lang="en-US" sz="850" dirty="0"/>
           </a:p>
@@ -11319,7 +11319,7 @@
                 <a:ea typeface="Calibri" pitchFamily="34" charset="-122"/>
                 <a:cs typeface="Calibri" pitchFamily="34" charset="-120"/>
               </a:rPr>
-              <a:t>/ī/</a:t>
+              <a:t>/ie/</a:t>
             </a:r>
             <a:endParaRPr lang="en-US" sz="750" dirty="0"/>
           </a:p>
@@ -11743,7 +11743,7 @@
                 <a:ea typeface="Calibri" pitchFamily="34" charset="-122"/>
                 <a:cs typeface="Calibri" pitchFamily="34" charset="-120"/>
               </a:rPr>
-              <a:t>Word Labs  •  wordlabs.app  •  Root: 'sign' = mark, symbol, indicate</a:t>
+              <a:t>Word Labs  •  wordlabs.app  •  Root: 'sign' = mark, symbol, or signal</a:t>
             </a:r>
             <a:endParaRPr lang="en-US" sz="800" dirty="0"/>
           </a:p>
@@ -11882,7 +11882,7 @@
                 <a:ea typeface="Trebuchet MS" pitchFamily="34" charset="-122"/>
                 <a:cs typeface="Trebuchet MS" pitchFamily="34" charset="-120"/>
               </a:rPr>
-              <a:t>signature</a:t>
+              <a:t>significant</a:t>
             </a:r>
             <a:endParaRPr lang="en-US" sz="2800" dirty="0"/>
           </a:p>
@@ -12570,7 +12570,7 @@
                 <a:ea typeface="Calibri" pitchFamily="34" charset="-122"/>
                 <a:cs typeface="Calibri" pitchFamily="34" charset="-120"/>
               </a:rPr>
-              <a:t>Word Labs  •  wordlabs.app  •  Root: 'sign' = mark, symbol, indicate</a:t>
+              <a:t>Word Labs  •  wordlabs.app  •  Root: 'sign' = mark, symbol, or signal</a:t>
             </a:r>
             <a:endParaRPr lang="en-US" sz="800" dirty="0"/>
           </a:p>
@@ -12709,7 +12709,7 @@
                 <a:ea typeface="Trebuchet MS" pitchFamily="34" charset="-122"/>
                 <a:cs typeface="Trebuchet MS" pitchFamily="34" charset="-120"/>
               </a:rPr>
-              <a:t>signature</a:t>
+              <a:t>significant</a:t>
             </a:r>
             <a:endParaRPr lang="en-US" sz="2800" dirty="0"/>
           </a:p>
@@ -12789,7 +12789,7 @@
         </p:nvSpPr>
         <p:spPr>
           <a:xfrm>
-            <a:off x="2938272" y="2258568"/>
+            <a:off x="2221992" y="2258568"/>
             <a:ext cx="1828800" cy="292608"/>
           </a:xfrm>
           <a:prstGeom prst="rect">
@@ -12823,7 +12823,7 @@
         </p:nvSpPr>
         <p:spPr>
           <a:xfrm>
-            <a:off x="2938272" y="2258568"/>
+            <a:off x="2221992" y="2258568"/>
             <a:ext cx="1828800" cy="292608"/>
           </a:xfrm>
           <a:prstGeom prst="rect">
@@ -12862,7 +12862,7 @@
         </p:nvSpPr>
         <p:spPr>
           <a:xfrm>
-            <a:off x="2938272" y="2569464"/>
+            <a:off x="2221992" y="2569464"/>
             <a:ext cx="1828800" cy="201168"/>
           </a:xfrm>
           <a:prstGeom prst="rect">
@@ -12887,7 +12887,7 @@
                 <a:ea typeface="Calibri" pitchFamily="34" charset="-122"/>
                 <a:cs typeface="Calibri" pitchFamily="34" charset="-120"/>
               </a:rPr>
-              <a:t>mark, symbol</a:t>
+              <a:t>mark or symbol</a:t>
             </a:r>
             <a:endParaRPr lang="en-US" sz="850" dirty="0"/>
           </a:p>
@@ -12901,7 +12901,7 @@
         </p:nvSpPr>
         <p:spPr>
           <a:xfrm>
-            <a:off x="5803392" y="2258568"/>
+            <a:off x="4370832" y="2258568"/>
             <a:ext cx="1828800" cy="292608"/>
           </a:xfrm>
           <a:prstGeom prst="rect">
@@ -12935,7 +12935,7 @@
         </p:nvSpPr>
         <p:spPr>
           <a:xfrm>
-            <a:off x="5803392" y="2258568"/>
+            <a:off x="4370832" y="2258568"/>
             <a:ext cx="1828800" cy="292608"/>
           </a:xfrm>
           <a:prstGeom prst="rect">
@@ -12960,7 +12960,7 @@
                 <a:ea typeface="Trebuchet MS" pitchFamily="34" charset="-122"/>
                 <a:cs typeface="Trebuchet MS" pitchFamily="34" charset="-120"/>
               </a:rPr>
-              <a:t>ature</a:t>
+              <a:t>ific</a:t>
             </a:r>
             <a:endParaRPr lang="en-US" sz="1300" dirty="0"/>
           </a:p>
@@ -12974,7 +12974,7 @@
         </p:nvSpPr>
         <p:spPr>
           <a:xfrm>
-            <a:off x="5803392" y="2569464"/>
+            <a:off x="4370832" y="2569464"/>
             <a:ext cx="1828800" cy="201168"/>
           </a:xfrm>
           <a:prstGeom prst="rect">
@@ -12999,7 +12999,7 @@
                 <a:ea typeface="Calibri" pitchFamily="34" charset="-122"/>
                 <a:cs typeface="Calibri" pitchFamily="34" charset="-120"/>
               </a:rPr>
-              <a:t>result or process of</a:t>
+              <a:t>making or causing</a:t>
             </a:r>
             <a:endParaRPr lang="en-US" sz="850" dirty="0"/>
           </a:p>
@@ -13008,6 +13008,118 @@
       <p:sp>
         <p:nvSpPr>
           <p:cNvPr id="22" name="Shape 20"/>
+          <p:cNvSpPr/>
+          <p:nvPr/>
+        </p:nvSpPr>
+        <p:spPr>
+          <a:xfrm>
+            <a:off x="6519672" y="2258568"/>
+            <a:ext cx="1828800" cy="292608"/>
+          </a:xfrm>
+          <a:prstGeom prst="rect">
+            <a:avLst>
+              <a:gd name="adj" fmla="val 25000"/>
+            </a:avLst>
+          </a:prstGeom>
+          <a:solidFill>
+            <a:srgbClr val="FCE7F3"/>
+          </a:solidFill>
+          <a:ln w="19050">
+            <a:solidFill>
+              <a:srgbClr val="DB2777"/>
+            </a:solidFill>
+            <a:prstDash val="solid"/>
+          </a:ln>
+          <a:effectLst>
+            <a:outerShdw sx="100000" sy="100000" kx="0" ky="0" algn="bl" rotWithShape="0" blurRad="101600" dist="38100" dir="8100000">
+              <a:srgbClr val="000000">
+                <a:alpha val="12000"/>
+              </a:srgbClr>
+            </a:outerShdw>
+          </a:effectLst>
+        </p:spPr>
+      </p:sp>
+      <p:sp>
+        <p:nvSpPr>
+          <p:cNvPr id="23" name="Text 21"/>
+          <p:cNvSpPr/>
+          <p:nvPr/>
+        </p:nvSpPr>
+        <p:spPr>
+          <a:xfrm>
+            <a:off x="6519672" y="2258568"/>
+            <a:ext cx="1828800" cy="292608"/>
+          </a:xfrm>
+          <a:prstGeom prst="rect">
+            <a:avLst/>
+          </a:prstGeom>
+          <a:noFill/>
+          <a:ln/>
+        </p:spPr>
+        <p:txBody>
+          <a:bodyPr wrap="square" lIns="0" tIns="0" rIns="0" bIns="0" rtlCol="0" anchor="ctr"/>
+          <a:lstStyle/>
+          <a:p>
+            <a:pPr algn="ctr" indent="0" marL="0">
+              <a:buNone/>
+            </a:pPr>
+            <a:r>
+              <a:rPr lang="en-US" sz="1300" b="1" dirty="0">
+                <a:solidFill>
+                  <a:srgbClr val="9D174D"/>
+                </a:solidFill>
+                <a:latin typeface="Trebuchet MS" pitchFamily="34" charset="0"/>
+                <a:ea typeface="Trebuchet MS" pitchFamily="34" charset="-122"/>
+                <a:cs typeface="Trebuchet MS" pitchFamily="34" charset="-120"/>
+              </a:rPr>
+              <a:t>ant</a:t>
+            </a:r>
+            <a:endParaRPr lang="en-US" sz="1300" dirty="0"/>
+          </a:p>
+        </p:txBody>
+      </p:sp>
+      <p:sp>
+        <p:nvSpPr>
+          <p:cNvPr id="24" name="Text 22"/>
+          <p:cNvSpPr/>
+          <p:nvPr/>
+        </p:nvSpPr>
+        <p:spPr>
+          <a:xfrm>
+            <a:off x="6519672" y="2569464"/>
+            <a:ext cx="1828800" cy="201168"/>
+          </a:xfrm>
+          <a:prstGeom prst="rect">
+            <a:avLst/>
+          </a:prstGeom>
+          <a:noFill/>
+          <a:ln/>
+        </p:spPr>
+        <p:txBody>
+          <a:bodyPr wrap="square" lIns="0" tIns="0" rIns="0" bIns="0" rtlCol="0" anchor="t"/>
+          <a:lstStyle/>
+          <a:p>
+            <a:pPr algn="ctr" indent="0" marL="0">
+              <a:buNone/>
+            </a:pPr>
+            <a:r>
+              <a:rPr lang="en-US" sz="850" dirty="0">
+                <a:solidFill>
+                  <a:srgbClr val="475569"/>
+                </a:solidFill>
+                <a:latin typeface="Calibri" pitchFamily="34" charset="0"/>
+                <a:ea typeface="Calibri" pitchFamily="34" charset="-122"/>
+                <a:cs typeface="Calibri" pitchFamily="34" charset="-120"/>
+              </a:rPr>
+              <a:t>being or having a quality</a:t>
+            </a:r>
+            <a:endParaRPr lang="en-US" sz="850" dirty="0"/>
+          </a:p>
+        </p:txBody>
+      </p:sp>
+      <p:sp>
+        <p:nvSpPr>
+          <p:cNvPr id="25" name="Shape 23"/>
           <p:cNvSpPr/>
           <p:nvPr/>
         </p:nvSpPr>
@@ -13034,7 +13146,7 @@
       </p:sp>
       <p:sp>
         <p:nvSpPr>
-          <p:cNvPr id="23" name="Text 21"/>
+          <p:cNvPr id="26" name="Text 24"/>
           <p:cNvSpPr/>
           <p:nvPr/>
         </p:nvSpPr>
@@ -13073,7 +13185,7 @@
       </p:sp>
       <p:sp>
         <p:nvSpPr>
-          <p:cNvPr id="24" name="Shape 22"/>
+          <p:cNvPr id="27" name="Shape 25"/>
           <p:cNvSpPr/>
           <p:nvPr/>
         </p:nvSpPr>
@@ -13100,7 +13212,7 @@
       </p:sp>
       <p:sp>
         <p:nvSpPr>
-          <p:cNvPr id="25" name="Text 23"/>
+          <p:cNvPr id="28" name="Text 26"/>
           <p:cNvSpPr/>
           <p:nvPr/>
         </p:nvSpPr>
@@ -13139,7 +13251,7 @@
       </p:sp>
       <p:sp>
         <p:nvSpPr>
-          <p:cNvPr id="26" name="Shape 24"/>
+          <p:cNvPr id="29" name="Shape 27"/>
           <p:cNvSpPr/>
           <p:nvPr/>
         </p:nvSpPr>
@@ -13166,7 +13278,7 @@
       </p:sp>
       <p:sp>
         <p:nvSpPr>
-          <p:cNvPr id="27" name="Text 25"/>
+          <p:cNvPr id="30" name="Text 28"/>
           <p:cNvSpPr/>
           <p:nvPr/>
         </p:nvSpPr>
@@ -13205,7 +13317,7 @@
       </p:sp>
       <p:sp>
         <p:nvSpPr>
-          <p:cNvPr id="28" name="Shape 26"/>
+          <p:cNvPr id="31" name="Shape 29"/>
           <p:cNvSpPr/>
           <p:nvPr/>
         </p:nvSpPr>
@@ -13232,7 +13344,7 @@
       </p:sp>
       <p:sp>
         <p:nvSpPr>
-          <p:cNvPr id="29" name="Text 27"/>
+          <p:cNvPr id="32" name="Text 30"/>
           <p:cNvSpPr/>
           <p:nvPr/>
         </p:nvSpPr>
@@ -13555,7 +13667,7 @@
                 <a:ea typeface="Calibri" pitchFamily="34" charset="-122"/>
                 <a:cs typeface="Calibri" pitchFamily="34" charset="-120"/>
               </a:rPr>
-              <a:t>Word Labs  •  wordlabs.app  •  Root: 'sign' = mark, symbol, indicate</a:t>
+              <a:t>Word Labs  •  wordlabs.app  •  Root: 'sign' = mark, symbol, or signal</a:t>
             </a:r>
             <a:endParaRPr lang="en-US" sz="800" dirty="0"/>
           </a:p>
@@ -13694,7 +13806,7 @@
                 <a:ea typeface="Trebuchet MS" pitchFamily="34" charset="-122"/>
                 <a:cs typeface="Trebuchet MS" pitchFamily="34" charset="-120"/>
               </a:rPr>
-              <a:t>signature</a:t>
+              <a:t>significant</a:t>
             </a:r>
             <a:endParaRPr lang="en-US" sz="2800" dirty="0"/>
           </a:p>
@@ -13774,7 +13886,7 @@
         </p:nvSpPr>
         <p:spPr>
           <a:xfrm>
-            <a:off x="2938272" y="2258568"/>
+            <a:off x="2221992" y="2258568"/>
             <a:ext cx="1828800" cy="292608"/>
           </a:xfrm>
           <a:prstGeom prst="rect">
@@ -13808,7 +13920,7 @@
         </p:nvSpPr>
         <p:spPr>
           <a:xfrm>
-            <a:off x="2938272" y="2258568"/>
+            <a:off x="2221992" y="2258568"/>
             <a:ext cx="1828800" cy="292608"/>
           </a:xfrm>
           <a:prstGeom prst="rect">
@@ -13847,7 +13959,7 @@
         </p:nvSpPr>
         <p:spPr>
           <a:xfrm>
-            <a:off x="2938272" y="2569464"/>
+            <a:off x="2221992" y="2569464"/>
             <a:ext cx="1828800" cy="201168"/>
           </a:xfrm>
           <a:prstGeom prst="rect">
@@ -13872,7 +13984,7 @@
                 <a:ea typeface="Calibri" pitchFamily="34" charset="-122"/>
                 <a:cs typeface="Calibri" pitchFamily="34" charset="-120"/>
               </a:rPr>
-              <a:t>mark, symbol</a:t>
+              <a:t>mark or symbol</a:t>
             </a:r>
             <a:endParaRPr lang="en-US" sz="850" dirty="0"/>
           </a:p>
@@ -13886,7 +13998,7 @@
         </p:nvSpPr>
         <p:spPr>
           <a:xfrm>
-            <a:off x="5803392" y="2258568"/>
+            <a:off x="4370832" y="2258568"/>
             <a:ext cx="1828800" cy="292608"/>
           </a:xfrm>
           <a:prstGeom prst="rect">
@@ -13920,7 +14032,7 @@
         </p:nvSpPr>
         <p:spPr>
           <a:xfrm>
-            <a:off x="5803392" y="2258568"/>
+            <a:off x="4370832" y="2258568"/>
             <a:ext cx="1828800" cy="292608"/>
           </a:xfrm>
           <a:prstGeom prst="rect">
@@ -13945,7 +14057,7 @@
                 <a:ea typeface="Trebuchet MS" pitchFamily="34" charset="-122"/>
                 <a:cs typeface="Trebuchet MS" pitchFamily="34" charset="-120"/>
               </a:rPr>
-              <a:t>ature</a:t>
+              <a:t>ific</a:t>
             </a:r>
             <a:endParaRPr lang="en-US" sz="1300" dirty="0"/>
           </a:p>
@@ -13959,7 +14071,7 @@
         </p:nvSpPr>
         <p:spPr>
           <a:xfrm>
-            <a:off x="5803392" y="2569464"/>
+            <a:off x="4370832" y="2569464"/>
             <a:ext cx="1828800" cy="201168"/>
           </a:xfrm>
           <a:prstGeom prst="rect">
@@ -13984,7 +14096,7 @@
                 <a:ea typeface="Calibri" pitchFamily="34" charset="-122"/>
                 <a:cs typeface="Calibri" pitchFamily="34" charset="-120"/>
               </a:rPr>
-              <a:t>result or process of</a:t>
+              <a:t>making or causing</a:t>
             </a:r>
             <a:endParaRPr lang="en-US" sz="850" dirty="0"/>
           </a:p>
@@ -13993,6 +14105,118 @@
       <p:sp>
         <p:nvSpPr>
           <p:cNvPr id="22" name="Shape 20"/>
+          <p:cNvSpPr/>
+          <p:nvPr/>
+        </p:nvSpPr>
+        <p:spPr>
+          <a:xfrm>
+            <a:off x="6519672" y="2258568"/>
+            <a:ext cx="1828800" cy="292608"/>
+          </a:xfrm>
+          <a:prstGeom prst="rect">
+            <a:avLst>
+              <a:gd name="adj" fmla="val 25000"/>
+            </a:avLst>
+          </a:prstGeom>
+          <a:solidFill>
+            <a:srgbClr val="FCE7F3"/>
+          </a:solidFill>
+          <a:ln w="19050">
+            <a:solidFill>
+              <a:srgbClr val="DB2777"/>
+            </a:solidFill>
+            <a:prstDash val="solid"/>
+          </a:ln>
+          <a:effectLst>
+            <a:outerShdw sx="100000" sy="100000" kx="0" ky="0" algn="bl" rotWithShape="0" blurRad="101600" dist="38100" dir="8100000">
+              <a:srgbClr val="000000">
+                <a:alpha val="12000"/>
+              </a:srgbClr>
+            </a:outerShdw>
+          </a:effectLst>
+        </p:spPr>
+      </p:sp>
+      <p:sp>
+        <p:nvSpPr>
+          <p:cNvPr id="23" name="Text 21"/>
+          <p:cNvSpPr/>
+          <p:nvPr/>
+        </p:nvSpPr>
+        <p:spPr>
+          <a:xfrm>
+            <a:off x="6519672" y="2258568"/>
+            <a:ext cx="1828800" cy="292608"/>
+          </a:xfrm>
+          <a:prstGeom prst="rect">
+            <a:avLst/>
+          </a:prstGeom>
+          <a:noFill/>
+          <a:ln/>
+        </p:spPr>
+        <p:txBody>
+          <a:bodyPr wrap="square" lIns="0" tIns="0" rIns="0" bIns="0" rtlCol="0" anchor="ctr"/>
+          <a:lstStyle/>
+          <a:p>
+            <a:pPr algn="ctr" indent="0" marL="0">
+              <a:buNone/>
+            </a:pPr>
+            <a:r>
+              <a:rPr lang="en-US" sz="1300" b="1" dirty="0">
+                <a:solidFill>
+                  <a:srgbClr val="9D174D"/>
+                </a:solidFill>
+                <a:latin typeface="Trebuchet MS" pitchFamily="34" charset="0"/>
+                <a:ea typeface="Trebuchet MS" pitchFamily="34" charset="-122"/>
+                <a:cs typeface="Trebuchet MS" pitchFamily="34" charset="-120"/>
+              </a:rPr>
+              <a:t>ant</a:t>
+            </a:r>
+            <a:endParaRPr lang="en-US" sz="1300" dirty="0"/>
+          </a:p>
+        </p:txBody>
+      </p:sp>
+      <p:sp>
+        <p:nvSpPr>
+          <p:cNvPr id="24" name="Text 22"/>
+          <p:cNvSpPr/>
+          <p:nvPr/>
+        </p:nvSpPr>
+        <p:spPr>
+          <a:xfrm>
+            <a:off x="6519672" y="2569464"/>
+            <a:ext cx="1828800" cy="201168"/>
+          </a:xfrm>
+          <a:prstGeom prst="rect">
+            <a:avLst/>
+          </a:prstGeom>
+          <a:noFill/>
+          <a:ln/>
+        </p:spPr>
+        <p:txBody>
+          <a:bodyPr wrap="square" lIns="0" tIns="0" rIns="0" bIns="0" rtlCol="0" anchor="t"/>
+          <a:lstStyle/>
+          <a:p>
+            <a:pPr algn="ctr" indent="0" marL="0">
+              <a:buNone/>
+            </a:pPr>
+            <a:r>
+              <a:rPr lang="en-US" sz="850" dirty="0">
+                <a:solidFill>
+                  <a:srgbClr val="475569"/>
+                </a:solidFill>
+                <a:latin typeface="Calibri" pitchFamily="34" charset="0"/>
+                <a:ea typeface="Calibri" pitchFamily="34" charset="-122"/>
+                <a:cs typeface="Calibri" pitchFamily="34" charset="-120"/>
+              </a:rPr>
+              <a:t>being or having a quality</a:t>
+            </a:r>
+            <a:endParaRPr lang="en-US" sz="850" dirty="0"/>
+          </a:p>
+        </p:txBody>
+      </p:sp>
+      <p:sp>
+        <p:nvSpPr>
+          <p:cNvPr id="25" name="Shape 23"/>
           <p:cNvSpPr/>
           <p:nvPr/>
         </p:nvSpPr>
@@ -14019,7 +14243,7 @@
       </p:sp>
       <p:sp>
         <p:nvSpPr>
-          <p:cNvPr id="23" name="Text 21"/>
+          <p:cNvPr id="26" name="Text 24"/>
           <p:cNvSpPr/>
           <p:nvPr/>
         </p:nvSpPr>
@@ -14058,7 +14282,7 @@
       </p:sp>
       <p:sp>
         <p:nvSpPr>
-          <p:cNvPr id="24" name="Shape 22"/>
+          <p:cNvPr id="27" name="Shape 25"/>
           <p:cNvSpPr/>
           <p:nvPr/>
         </p:nvSpPr>
@@ -14085,14 +14309,14 @@
       </p:sp>
       <p:sp>
         <p:nvSpPr>
-          <p:cNvPr id="25" name="Shape 23"/>
-          <p:cNvSpPr/>
-          <p:nvPr/>
-        </p:nvSpPr>
-        <p:spPr>
-          <a:xfrm>
-            <a:off x="2313432" y="3364992"/>
-            <a:ext cx="1645920" cy="475488"/>
+          <p:cNvPr id="28" name="Shape 26"/>
+          <p:cNvSpPr/>
+          <p:nvPr/>
+        </p:nvSpPr>
+        <p:spPr>
+          <a:xfrm>
+            <a:off x="1975104" y="3364992"/>
+            <a:ext cx="1554480" cy="475488"/>
           </a:xfrm>
           <a:prstGeom prst="rect">
             <a:avLst>
@@ -14112,14 +14336,14 @@
       </p:sp>
       <p:sp>
         <p:nvSpPr>
-          <p:cNvPr id="26" name="Text 24"/>
-          <p:cNvSpPr/>
-          <p:nvPr/>
-        </p:nvSpPr>
-        <p:spPr>
-          <a:xfrm>
-            <a:off x="2313432" y="3364992"/>
-            <a:ext cx="1645920" cy="475488"/>
+          <p:cNvPr id="29" name="Text 27"/>
+          <p:cNvSpPr/>
+          <p:nvPr/>
+        </p:nvSpPr>
+        <p:spPr>
+          <a:xfrm>
+            <a:off x="1975104" y="3364992"/>
+            <a:ext cx="1554480" cy="475488"/>
           </a:xfrm>
           <a:prstGeom prst="rect">
             <a:avLst/>
@@ -14151,14 +14375,14 @@
       </p:sp>
       <p:sp>
         <p:nvSpPr>
-          <p:cNvPr id="27" name="Text 25"/>
-          <p:cNvSpPr/>
-          <p:nvPr/>
-        </p:nvSpPr>
-        <p:spPr>
-          <a:xfrm>
-            <a:off x="3959352" y="3364992"/>
-            <a:ext cx="411480" cy="475488"/>
+          <p:cNvPr id="30" name="Text 28"/>
+          <p:cNvSpPr/>
+          <p:nvPr/>
+        </p:nvSpPr>
+        <p:spPr>
+          <a:xfrm>
+            <a:off x="3529584" y="3364992"/>
+            <a:ext cx="73152" cy="475488"/>
           </a:xfrm>
           <a:prstGeom prst="rect">
             <a:avLst/>
@@ -14190,14 +14414,14 @@
       </p:sp>
       <p:sp>
         <p:nvSpPr>
-          <p:cNvPr id="28" name="Shape 26"/>
-          <p:cNvSpPr/>
-          <p:nvPr/>
-        </p:nvSpPr>
-        <p:spPr>
-          <a:xfrm>
-            <a:off x="4370832" y="3364992"/>
-            <a:ext cx="1645920" cy="475488"/>
+          <p:cNvPr id="31" name="Shape 29"/>
+          <p:cNvSpPr/>
+          <p:nvPr/>
+        </p:nvSpPr>
+        <p:spPr>
+          <a:xfrm>
+            <a:off x="3602736" y="3364992"/>
+            <a:ext cx="1554480" cy="475488"/>
           </a:xfrm>
           <a:prstGeom prst="rect">
             <a:avLst>
@@ -14217,14 +14441,14 @@
       </p:sp>
       <p:sp>
         <p:nvSpPr>
-          <p:cNvPr id="29" name="Text 27"/>
-          <p:cNvSpPr/>
-          <p:nvPr/>
-        </p:nvSpPr>
-        <p:spPr>
-          <a:xfrm>
-            <a:off x="4370832" y="3364992"/>
-            <a:ext cx="1645920" cy="475488"/>
+          <p:cNvPr id="32" name="Text 30"/>
+          <p:cNvSpPr/>
+          <p:nvPr/>
+        </p:nvSpPr>
+        <p:spPr>
+          <a:xfrm>
+            <a:off x="3602736" y="3364992"/>
+            <a:ext cx="1554480" cy="475488"/>
           </a:xfrm>
           <a:prstGeom prst="rect">
             <a:avLst/>
@@ -14248,7 +14472,7 @@
                 <a:ea typeface="Trebuchet MS" pitchFamily="34" charset="-122"/>
                 <a:cs typeface="Trebuchet MS" pitchFamily="34" charset="-120"/>
               </a:rPr>
-              <a:t>na</a:t>
+              <a:t>nif</a:t>
             </a:r>
             <a:endParaRPr lang="en-US" sz="1400" dirty="0"/>
           </a:p>
@@ -14256,14 +14480,14 @@
       </p:sp>
       <p:sp>
         <p:nvSpPr>
-          <p:cNvPr id="30" name="Text 28"/>
-          <p:cNvSpPr/>
-          <p:nvPr/>
-        </p:nvSpPr>
-        <p:spPr>
-          <a:xfrm>
-            <a:off x="6016752" y="3364992"/>
-            <a:ext cx="411480" cy="475488"/>
+          <p:cNvPr id="33" name="Text 31"/>
+          <p:cNvSpPr/>
+          <p:nvPr/>
+        </p:nvSpPr>
+        <p:spPr>
+          <a:xfrm>
+            <a:off x="5157216" y="3364992"/>
+            <a:ext cx="73152" cy="475488"/>
           </a:xfrm>
           <a:prstGeom prst="rect">
             <a:avLst/>
@@ -14295,14 +14519,14 @@
       </p:sp>
       <p:sp>
         <p:nvSpPr>
-          <p:cNvPr id="31" name="Shape 29"/>
-          <p:cNvSpPr/>
-          <p:nvPr/>
-        </p:nvSpPr>
-        <p:spPr>
-          <a:xfrm>
-            <a:off x="6428232" y="3364992"/>
-            <a:ext cx="1645920" cy="475488"/>
+          <p:cNvPr id="34" name="Shape 32"/>
+          <p:cNvSpPr/>
+          <p:nvPr/>
+        </p:nvSpPr>
+        <p:spPr>
+          <a:xfrm>
+            <a:off x="5230368" y="3364992"/>
+            <a:ext cx="1554480" cy="475488"/>
           </a:xfrm>
           <a:prstGeom prst="rect">
             <a:avLst>
@@ -14322,14 +14546,14 @@
       </p:sp>
       <p:sp>
         <p:nvSpPr>
-          <p:cNvPr id="32" name="Text 30"/>
-          <p:cNvSpPr/>
-          <p:nvPr/>
-        </p:nvSpPr>
-        <p:spPr>
-          <a:xfrm>
-            <a:off x="6428232" y="3364992"/>
-            <a:ext cx="1645920" cy="475488"/>
+          <p:cNvPr id="35" name="Text 33"/>
+          <p:cNvSpPr/>
+          <p:nvPr/>
+        </p:nvSpPr>
+        <p:spPr>
+          <a:xfrm>
+            <a:off x="5230368" y="3364992"/>
+            <a:ext cx="1554480" cy="475488"/>
           </a:xfrm>
           <a:prstGeom prst="rect">
             <a:avLst/>
@@ -14353,7 +14577,7 @@
                 <a:ea typeface="Trebuchet MS" pitchFamily="34" charset="-122"/>
                 <a:cs typeface="Trebuchet MS" pitchFamily="34" charset="-120"/>
               </a:rPr>
-              <a:t>ture</a:t>
+              <a:t>i</a:t>
             </a:r>
             <a:endParaRPr lang="en-US" sz="1400" dirty="0"/>
           </a:p>
@@ -14361,7 +14585,112 @@
       </p:sp>
       <p:sp>
         <p:nvSpPr>
-          <p:cNvPr id="33" name="Shape 31"/>
+          <p:cNvPr id="36" name="Text 34"/>
+          <p:cNvSpPr/>
+          <p:nvPr/>
+        </p:nvSpPr>
+        <p:spPr>
+          <a:xfrm>
+            <a:off x="6784848" y="3364992"/>
+            <a:ext cx="73152" cy="475488"/>
+          </a:xfrm>
+          <a:prstGeom prst="rect">
+            <a:avLst/>
+          </a:prstGeom>
+          <a:noFill/>
+          <a:ln/>
+        </p:spPr>
+        <p:txBody>
+          <a:bodyPr wrap="square" lIns="0" tIns="0" rIns="0" bIns="0" rtlCol="0" anchor="ctr"/>
+          <a:lstStyle/>
+          <a:p>
+            <a:pPr algn="ctr" indent="0" marL="0">
+              <a:buNone/>
+            </a:pPr>
+            <a:r>
+              <a:rPr lang="en-US" sz="1600" b="1" dirty="0">
+                <a:solidFill>
+                  <a:srgbClr val="0D9488"/>
+                </a:solidFill>
+                <a:latin typeface="Trebuchet MS" pitchFamily="34" charset="0"/>
+                <a:ea typeface="Trebuchet MS" pitchFamily="34" charset="-122"/>
+                <a:cs typeface="Trebuchet MS" pitchFamily="34" charset="-120"/>
+              </a:rPr>
+              <a:t>·</a:t>
+            </a:r>
+            <a:endParaRPr lang="en-US" sz="1600" dirty="0"/>
+          </a:p>
+        </p:txBody>
+      </p:sp>
+      <p:sp>
+        <p:nvSpPr>
+          <p:cNvPr id="37" name="Shape 35"/>
+          <p:cNvSpPr/>
+          <p:nvPr/>
+        </p:nvSpPr>
+        <p:spPr>
+          <a:xfrm>
+            <a:off x="6858000" y="3364992"/>
+            <a:ext cx="1554480" cy="475488"/>
+          </a:xfrm>
+          <a:prstGeom prst="rect">
+            <a:avLst>
+              <a:gd name="adj" fmla="val 9615"/>
+            </a:avLst>
+          </a:prstGeom>
+          <a:solidFill>
+            <a:srgbClr val="FFFFFF"/>
+          </a:solidFill>
+          <a:ln w="12700">
+            <a:solidFill>
+              <a:srgbClr val="0D9488"/>
+            </a:solidFill>
+            <a:prstDash val="solid"/>
+          </a:ln>
+        </p:spPr>
+      </p:sp>
+      <p:sp>
+        <p:nvSpPr>
+          <p:cNvPr id="38" name="Text 36"/>
+          <p:cNvSpPr/>
+          <p:nvPr/>
+        </p:nvSpPr>
+        <p:spPr>
+          <a:xfrm>
+            <a:off x="6858000" y="3364992"/>
+            <a:ext cx="1554480" cy="475488"/>
+          </a:xfrm>
+          <a:prstGeom prst="rect">
+            <a:avLst/>
+          </a:prstGeom>
+          <a:noFill/>
+          <a:ln/>
+        </p:spPr>
+        <p:txBody>
+          <a:bodyPr wrap="square" lIns="0" tIns="0" rIns="0" bIns="0" rtlCol="0" anchor="ctr"/>
+          <a:lstStyle/>
+          <a:p>
+            <a:pPr algn="ctr" indent="0" marL="0">
+              <a:buNone/>
+            </a:pPr>
+            <a:r>
+              <a:rPr lang="en-US" sz="1400" b="1" dirty="0">
+                <a:solidFill>
+                  <a:srgbClr val="0D9488"/>
+                </a:solidFill>
+                <a:latin typeface="Trebuchet MS" pitchFamily="34" charset="0"/>
+                <a:ea typeface="Trebuchet MS" pitchFamily="34" charset="-122"/>
+                <a:cs typeface="Trebuchet MS" pitchFamily="34" charset="-120"/>
+              </a:rPr>
+              <a:t>cant</a:t>
+            </a:r>
+            <a:endParaRPr lang="en-US" sz="1400" dirty="0"/>
+          </a:p>
+        </p:txBody>
+      </p:sp>
+      <p:sp>
+        <p:nvSpPr>
+          <p:cNvPr id="39" name="Shape 37"/>
           <p:cNvSpPr/>
           <p:nvPr/>
         </p:nvSpPr>
@@ -14388,7 +14717,7 @@
       </p:sp>
       <p:sp>
         <p:nvSpPr>
-          <p:cNvPr id="34" name="Text 32"/>
+          <p:cNvPr id="40" name="Text 38"/>
           <p:cNvSpPr/>
           <p:nvPr/>
         </p:nvSpPr>
@@ -14427,7 +14756,7 @@
       </p:sp>
       <p:sp>
         <p:nvSpPr>
-          <p:cNvPr id="35" name="Shape 33"/>
+          <p:cNvPr id="41" name="Shape 39"/>
           <p:cNvSpPr/>
           <p:nvPr/>
         </p:nvSpPr>
@@ -14454,7 +14783,7 @@
       </p:sp>
       <p:sp>
         <p:nvSpPr>
-          <p:cNvPr id="36" name="Text 34"/>
+          <p:cNvPr id="42" name="Text 40"/>
           <p:cNvSpPr/>
           <p:nvPr/>
         </p:nvSpPr>
@@ -14686,7 +15015,7 @@
                 <a:ea typeface="Calibri" pitchFamily="34" charset="-122"/>
                 <a:cs typeface="Calibri" pitchFamily="34" charset="-120"/>
               </a:rPr>
-              <a:t>Root 'sign' — mark, symbol, indicate</a:t>
+              <a:t>Root 'sign' — mark, symbol, or signal</a:t>
             </a:r>
             <a:endParaRPr lang="en-US" sz="1600" dirty="0"/>
           </a:p>
@@ -15042,7 +15371,7 @@
                 <a:ea typeface="Calibri" pitchFamily="34" charset="-122"/>
                 <a:cs typeface="Calibri" pitchFamily="34" charset="-120"/>
               </a:rPr>
-              <a:t>Word Labs  •  wordlabs.app  •  Root: 'sign' = mark, symbol, indicate</a:t>
+              <a:t>Word Labs  •  wordlabs.app  •  Root: 'sign' = mark, symbol, or signal</a:t>
             </a:r>
             <a:endParaRPr lang="en-US" sz="800" dirty="0"/>
           </a:p>
@@ -15181,7 +15510,7 @@
                 <a:ea typeface="Trebuchet MS" pitchFamily="34" charset="-122"/>
                 <a:cs typeface="Trebuchet MS" pitchFamily="34" charset="-120"/>
               </a:rPr>
-              <a:t>signature</a:t>
+              <a:t>significant</a:t>
             </a:r>
             <a:endParaRPr lang="en-US" sz="2800" dirty="0"/>
           </a:p>
@@ -15261,7 +15590,7 @@
         </p:nvSpPr>
         <p:spPr>
           <a:xfrm>
-            <a:off x="2938272" y="2258568"/>
+            <a:off x="2221992" y="2258568"/>
             <a:ext cx="1828800" cy="292608"/>
           </a:xfrm>
           <a:prstGeom prst="rect">
@@ -15295,7 +15624,7 @@
         </p:nvSpPr>
         <p:spPr>
           <a:xfrm>
-            <a:off x="2938272" y="2258568"/>
+            <a:off x="2221992" y="2258568"/>
             <a:ext cx="1828800" cy="292608"/>
           </a:xfrm>
           <a:prstGeom prst="rect">
@@ -15334,7 +15663,7 @@
         </p:nvSpPr>
         <p:spPr>
           <a:xfrm>
-            <a:off x="2938272" y="2569464"/>
+            <a:off x="2221992" y="2569464"/>
             <a:ext cx="1828800" cy="201168"/>
           </a:xfrm>
           <a:prstGeom prst="rect">
@@ -15359,7 +15688,7 @@
                 <a:ea typeface="Calibri" pitchFamily="34" charset="-122"/>
                 <a:cs typeface="Calibri" pitchFamily="34" charset="-120"/>
               </a:rPr>
-              <a:t>mark, symbol</a:t>
+              <a:t>mark or symbol</a:t>
             </a:r>
             <a:endParaRPr lang="en-US" sz="850" dirty="0"/>
           </a:p>
@@ -15373,7 +15702,7 @@
         </p:nvSpPr>
         <p:spPr>
           <a:xfrm>
-            <a:off x="5803392" y="2258568"/>
+            <a:off x="4370832" y="2258568"/>
             <a:ext cx="1828800" cy="292608"/>
           </a:xfrm>
           <a:prstGeom prst="rect">
@@ -15407,7 +15736,7 @@
         </p:nvSpPr>
         <p:spPr>
           <a:xfrm>
-            <a:off x="5803392" y="2258568"/>
+            <a:off x="4370832" y="2258568"/>
             <a:ext cx="1828800" cy="292608"/>
           </a:xfrm>
           <a:prstGeom prst="rect">
@@ -15432,7 +15761,7 @@
                 <a:ea typeface="Trebuchet MS" pitchFamily="34" charset="-122"/>
                 <a:cs typeface="Trebuchet MS" pitchFamily="34" charset="-120"/>
               </a:rPr>
-              <a:t>ature</a:t>
+              <a:t>ific</a:t>
             </a:r>
             <a:endParaRPr lang="en-US" sz="1300" dirty="0"/>
           </a:p>
@@ -15446,7 +15775,7 @@
         </p:nvSpPr>
         <p:spPr>
           <a:xfrm>
-            <a:off x="5803392" y="2569464"/>
+            <a:off x="4370832" y="2569464"/>
             <a:ext cx="1828800" cy="201168"/>
           </a:xfrm>
           <a:prstGeom prst="rect">
@@ -15471,7 +15800,7 @@
                 <a:ea typeface="Calibri" pitchFamily="34" charset="-122"/>
                 <a:cs typeface="Calibri" pitchFamily="34" charset="-120"/>
               </a:rPr>
-              <a:t>result or process of</a:t>
+              <a:t>making or causing</a:t>
             </a:r>
             <a:endParaRPr lang="en-US" sz="850" dirty="0"/>
           </a:p>
@@ -15480,6 +15809,118 @@
       <p:sp>
         <p:nvSpPr>
           <p:cNvPr id="22" name="Shape 20"/>
+          <p:cNvSpPr/>
+          <p:nvPr/>
+        </p:nvSpPr>
+        <p:spPr>
+          <a:xfrm>
+            <a:off x="6519672" y="2258568"/>
+            <a:ext cx="1828800" cy="292608"/>
+          </a:xfrm>
+          <a:prstGeom prst="rect">
+            <a:avLst>
+              <a:gd name="adj" fmla="val 25000"/>
+            </a:avLst>
+          </a:prstGeom>
+          <a:solidFill>
+            <a:srgbClr val="FCE7F3"/>
+          </a:solidFill>
+          <a:ln w="19050">
+            <a:solidFill>
+              <a:srgbClr val="DB2777"/>
+            </a:solidFill>
+            <a:prstDash val="solid"/>
+          </a:ln>
+          <a:effectLst>
+            <a:outerShdw sx="100000" sy="100000" kx="0" ky="0" algn="bl" rotWithShape="0" blurRad="101600" dist="38100" dir="8100000">
+              <a:srgbClr val="000000">
+                <a:alpha val="12000"/>
+              </a:srgbClr>
+            </a:outerShdw>
+          </a:effectLst>
+        </p:spPr>
+      </p:sp>
+      <p:sp>
+        <p:nvSpPr>
+          <p:cNvPr id="23" name="Text 21"/>
+          <p:cNvSpPr/>
+          <p:nvPr/>
+        </p:nvSpPr>
+        <p:spPr>
+          <a:xfrm>
+            <a:off x="6519672" y="2258568"/>
+            <a:ext cx="1828800" cy="292608"/>
+          </a:xfrm>
+          <a:prstGeom prst="rect">
+            <a:avLst/>
+          </a:prstGeom>
+          <a:noFill/>
+          <a:ln/>
+        </p:spPr>
+        <p:txBody>
+          <a:bodyPr wrap="square" lIns="0" tIns="0" rIns="0" bIns="0" rtlCol="0" anchor="ctr"/>
+          <a:lstStyle/>
+          <a:p>
+            <a:pPr algn="ctr" indent="0" marL="0">
+              <a:buNone/>
+            </a:pPr>
+            <a:r>
+              <a:rPr lang="en-US" sz="1300" b="1" dirty="0">
+                <a:solidFill>
+                  <a:srgbClr val="9D174D"/>
+                </a:solidFill>
+                <a:latin typeface="Trebuchet MS" pitchFamily="34" charset="0"/>
+                <a:ea typeface="Trebuchet MS" pitchFamily="34" charset="-122"/>
+                <a:cs typeface="Trebuchet MS" pitchFamily="34" charset="-120"/>
+              </a:rPr>
+              <a:t>ant</a:t>
+            </a:r>
+            <a:endParaRPr lang="en-US" sz="1300" dirty="0"/>
+          </a:p>
+        </p:txBody>
+      </p:sp>
+      <p:sp>
+        <p:nvSpPr>
+          <p:cNvPr id="24" name="Text 22"/>
+          <p:cNvSpPr/>
+          <p:nvPr/>
+        </p:nvSpPr>
+        <p:spPr>
+          <a:xfrm>
+            <a:off x="6519672" y="2569464"/>
+            <a:ext cx="1828800" cy="201168"/>
+          </a:xfrm>
+          <a:prstGeom prst="rect">
+            <a:avLst/>
+          </a:prstGeom>
+          <a:noFill/>
+          <a:ln/>
+        </p:spPr>
+        <p:txBody>
+          <a:bodyPr wrap="square" lIns="0" tIns="0" rIns="0" bIns="0" rtlCol="0" anchor="t"/>
+          <a:lstStyle/>
+          <a:p>
+            <a:pPr algn="ctr" indent="0" marL="0">
+              <a:buNone/>
+            </a:pPr>
+            <a:r>
+              <a:rPr lang="en-US" sz="850" dirty="0">
+                <a:solidFill>
+                  <a:srgbClr val="475569"/>
+                </a:solidFill>
+                <a:latin typeface="Calibri" pitchFamily="34" charset="0"/>
+                <a:ea typeface="Calibri" pitchFamily="34" charset="-122"/>
+                <a:cs typeface="Calibri" pitchFamily="34" charset="-120"/>
+              </a:rPr>
+              <a:t>being or having a quality</a:t>
+            </a:r>
+            <a:endParaRPr lang="en-US" sz="850" dirty="0"/>
+          </a:p>
+        </p:txBody>
+      </p:sp>
+      <p:sp>
+        <p:nvSpPr>
+          <p:cNvPr id="25" name="Shape 23"/>
           <p:cNvSpPr/>
           <p:nvPr/>
         </p:nvSpPr>
@@ -15506,7 +15947,7 @@
       </p:sp>
       <p:sp>
         <p:nvSpPr>
-          <p:cNvPr id="23" name="Text 21"/>
+          <p:cNvPr id="26" name="Text 24"/>
           <p:cNvSpPr/>
           <p:nvPr/>
         </p:nvSpPr>
@@ -15545,7 +15986,7 @@
       </p:sp>
       <p:sp>
         <p:nvSpPr>
-          <p:cNvPr id="24" name="Shape 22"/>
+          <p:cNvPr id="27" name="Shape 25"/>
           <p:cNvSpPr/>
           <p:nvPr/>
         </p:nvSpPr>
@@ -15572,14 +16013,14 @@
       </p:sp>
       <p:sp>
         <p:nvSpPr>
-          <p:cNvPr id="25" name="Shape 23"/>
-          <p:cNvSpPr/>
-          <p:nvPr/>
-        </p:nvSpPr>
-        <p:spPr>
-          <a:xfrm>
-            <a:off x="2313432" y="3364992"/>
-            <a:ext cx="1645920" cy="475488"/>
+          <p:cNvPr id="28" name="Shape 26"/>
+          <p:cNvSpPr/>
+          <p:nvPr/>
+        </p:nvSpPr>
+        <p:spPr>
+          <a:xfrm>
+            <a:off x="1975104" y="3364992"/>
+            <a:ext cx="1554480" cy="475488"/>
           </a:xfrm>
           <a:prstGeom prst="rect">
             <a:avLst>
@@ -15599,14 +16040,14 @@
       </p:sp>
       <p:sp>
         <p:nvSpPr>
-          <p:cNvPr id="26" name="Text 24"/>
-          <p:cNvSpPr/>
-          <p:nvPr/>
-        </p:nvSpPr>
-        <p:spPr>
-          <a:xfrm>
-            <a:off x="2313432" y="3364992"/>
-            <a:ext cx="1645920" cy="475488"/>
+          <p:cNvPr id="29" name="Text 27"/>
+          <p:cNvSpPr/>
+          <p:nvPr/>
+        </p:nvSpPr>
+        <p:spPr>
+          <a:xfrm>
+            <a:off x="1975104" y="3364992"/>
+            <a:ext cx="1554480" cy="475488"/>
           </a:xfrm>
           <a:prstGeom prst="rect">
             <a:avLst/>
@@ -15638,14 +16079,14 @@
       </p:sp>
       <p:sp>
         <p:nvSpPr>
-          <p:cNvPr id="27" name="Text 25"/>
-          <p:cNvSpPr/>
-          <p:nvPr/>
-        </p:nvSpPr>
-        <p:spPr>
-          <a:xfrm>
-            <a:off x="3959352" y="3364992"/>
-            <a:ext cx="411480" cy="475488"/>
+          <p:cNvPr id="30" name="Text 28"/>
+          <p:cNvSpPr/>
+          <p:nvPr/>
+        </p:nvSpPr>
+        <p:spPr>
+          <a:xfrm>
+            <a:off x="3529584" y="3364992"/>
+            <a:ext cx="73152" cy="475488"/>
           </a:xfrm>
           <a:prstGeom prst="rect">
             <a:avLst/>
@@ -15677,14 +16118,14 @@
       </p:sp>
       <p:sp>
         <p:nvSpPr>
-          <p:cNvPr id="28" name="Shape 26"/>
-          <p:cNvSpPr/>
-          <p:nvPr/>
-        </p:nvSpPr>
-        <p:spPr>
-          <a:xfrm>
-            <a:off x="4370832" y="3364992"/>
-            <a:ext cx="1645920" cy="475488"/>
+          <p:cNvPr id="31" name="Shape 29"/>
+          <p:cNvSpPr/>
+          <p:nvPr/>
+        </p:nvSpPr>
+        <p:spPr>
+          <a:xfrm>
+            <a:off x="3602736" y="3364992"/>
+            <a:ext cx="1554480" cy="475488"/>
           </a:xfrm>
           <a:prstGeom prst="rect">
             <a:avLst>
@@ -15704,14 +16145,14 @@
       </p:sp>
       <p:sp>
         <p:nvSpPr>
-          <p:cNvPr id="29" name="Text 27"/>
-          <p:cNvSpPr/>
-          <p:nvPr/>
-        </p:nvSpPr>
-        <p:spPr>
-          <a:xfrm>
-            <a:off x="4370832" y="3364992"/>
-            <a:ext cx="1645920" cy="475488"/>
+          <p:cNvPr id="32" name="Text 30"/>
+          <p:cNvSpPr/>
+          <p:nvPr/>
+        </p:nvSpPr>
+        <p:spPr>
+          <a:xfrm>
+            <a:off x="3602736" y="3364992"/>
+            <a:ext cx="1554480" cy="475488"/>
           </a:xfrm>
           <a:prstGeom prst="rect">
             <a:avLst/>
@@ -15735,7 +16176,7 @@
                 <a:ea typeface="Trebuchet MS" pitchFamily="34" charset="-122"/>
                 <a:cs typeface="Trebuchet MS" pitchFamily="34" charset="-120"/>
               </a:rPr>
-              <a:t>na</a:t>
+              <a:t>nif</a:t>
             </a:r>
             <a:endParaRPr lang="en-US" sz="1400" dirty="0"/>
           </a:p>
@@ -15743,14 +16184,14 @@
       </p:sp>
       <p:sp>
         <p:nvSpPr>
-          <p:cNvPr id="30" name="Text 28"/>
-          <p:cNvSpPr/>
-          <p:nvPr/>
-        </p:nvSpPr>
-        <p:spPr>
-          <a:xfrm>
-            <a:off x="6016752" y="3364992"/>
-            <a:ext cx="411480" cy="475488"/>
+          <p:cNvPr id="33" name="Text 31"/>
+          <p:cNvSpPr/>
+          <p:nvPr/>
+        </p:nvSpPr>
+        <p:spPr>
+          <a:xfrm>
+            <a:off x="5157216" y="3364992"/>
+            <a:ext cx="73152" cy="475488"/>
           </a:xfrm>
           <a:prstGeom prst="rect">
             <a:avLst/>
@@ -15782,14 +16223,14 @@
       </p:sp>
       <p:sp>
         <p:nvSpPr>
-          <p:cNvPr id="31" name="Shape 29"/>
-          <p:cNvSpPr/>
-          <p:nvPr/>
-        </p:nvSpPr>
-        <p:spPr>
-          <a:xfrm>
-            <a:off x="6428232" y="3364992"/>
-            <a:ext cx="1645920" cy="475488"/>
+          <p:cNvPr id="34" name="Shape 32"/>
+          <p:cNvSpPr/>
+          <p:nvPr/>
+        </p:nvSpPr>
+        <p:spPr>
+          <a:xfrm>
+            <a:off x="5230368" y="3364992"/>
+            <a:ext cx="1554480" cy="475488"/>
           </a:xfrm>
           <a:prstGeom prst="rect">
             <a:avLst>
@@ -15809,14 +16250,14 @@
       </p:sp>
       <p:sp>
         <p:nvSpPr>
-          <p:cNvPr id="32" name="Text 30"/>
-          <p:cNvSpPr/>
-          <p:nvPr/>
-        </p:nvSpPr>
-        <p:spPr>
-          <a:xfrm>
-            <a:off x="6428232" y="3364992"/>
-            <a:ext cx="1645920" cy="475488"/>
+          <p:cNvPr id="35" name="Text 33"/>
+          <p:cNvSpPr/>
+          <p:nvPr/>
+        </p:nvSpPr>
+        <p:spPr>
+          <a:xfrm>
+            <a:off x="5230368" y="3364992"/>
+            <a:ext cx="1554480" cy="475488"/>
           </a:xfrm>
           <a:prstGeom prst="rect">
             <a:avLst/>
@@ -15840,7 +16281,7 @@
                 <a:ea typeface="Trebuchet MS" pitchFamily="34" charset="-122"/>
                 <a:cs typeface="Trebuchet MS" pitchFamily="34" charset="-120"/>
               </a:rPr>
-              <a:t>ture</a:t>
+              <a:t>i</a:t>
             </a:r>
             <a:endParaRPr lang="en-US" sz="1400" dirty="0"/>
           </a:p>
@@ -15848,7 +16289,112 @@
       </p:sp>
       <p:sp>
         <p:nvSpPr>
-          <p:cNvPr id="33" name="Shape 31"/>
+          <p:cNvPr id="36" name="Text 34"/>
+          <p:cNvSpPr/>
+          <p:nvPr/>
+        </p:nvSpPr>
+        <p:spPr>
+          <a:xfrm>
+            <a:off x="6784848" y="3364992"/>
+            <a:ext cx="73152" cy="475488"/>
+          </a:xfrm>
+          <a:prstGeom prst="rect">
+            <a:avLst/>
+          </a:prstGeom>
+          <a:noFill/>
+          <a:ln/>
+        </p:spPr>
+        <p:txBody>
+          <a:bodyPr wrap="square" lIns="0" tIns="0" rIns="0" bIns="0" rtlCol="0" anchor="ctr"/>
+          <a:lstStyle/>
+          <a:p>
+            <a:pPr algn="ctr" indent="0" marL="0">
+              <a:buNone/>
+            </a:pPr>
+            <a:r>
+              <a:rPr lang="en-US" sz="1600" b="1" dirty="0">
+                <a:solidFill>
+                  <a:srgbClr val="0D9488"/>
+                </a:solidFill>
+                <a:latin typeface="Trebuchet MS" pitchFamily="34" charset="0"/>
+                <a:ea typeface="Trebuchet MS" pitchFamily="34" charset="-122"/>
+                <a:cs typeface="Trebuchet MS" pitchFamily="34" charset="-120"/>
+              </a:rPr>
+              <a:t>·</a:t>
+            </a:r>
+            <a:endParaRPr lang="en-US" sz="1600" dirty="0"/>
+          </a:p>
+        </p:txBody>
+      </p:sp>
+      <p:sp>
+        <p:nvSpPr>
+          <p:cNvPr id="37" name="Shape 35"/>
+          <p:cNvSpPr/>
+          <p:nvPr/>
+        </p:nvSpPr>
+        <p:spPr>
+          <a:xfrm>
+            <a:off x="6858000" y="3364992"/>
+            <a:ext cx="1554480" cy="475488"/>
+          </a:xfrm>
+          <a:prstGeom prst="rect">
+            <a:avLst>
+              <a:gd name="adj" fmla="val 9615"/>
+            </a:avLst>
+          </a:prstGeom>
+          <a:solidFill>
+            <a:srgbClr val="FFFFFF"/>
+          </a:solidFill>
+          <a:ln w="12700">
+            <a:solidFill>
+              <a:srgbClr val="0D9488"/>
+            </a:solidFill>
+            <a:prstDash val="solid"/>
+          </a:ln>
+        </p:spPr>
+      </p:sp>
+      <p:sp>
+        <p:nvSpPr>
+          <p:cNvPr id="38" name="Text 36"/>
+          <p:cNvSpPr/>
+          <p:nvPr/>
+        </p:nvSpPr>
+        <p:spPr>
+          <a:xfrm>
+            <a:off x="6858000" y="3364992"/>
+            <a:ext cx="1554480" cy="475488"/>
+          </a:xfrm>
+          <a:prstGeom prst="rect">
+            <a:avLst/>
+          </a:prstGeom>
+          <a:noFill/>
+          <a:ln/>
+        </p:spPr>
+        <p:txBody>
+          <a:bodyPr wrap="square" lIns="0" tIns="0" rIns="0" bIns="0" rtlCol="0" anchor="ctr"/>
+          <a:lstStyle/>
+          <a:p>
+            <a:pPr algn="ctr" indent="0" marL="0">
+              <a:buNone/>
+            </a:pPr>
+            <a:r>
+              <a:rPr lang="en-US" sz="1400" b="1" dirty="0">
+                <a:solidFill>
+                  <a:srgbClr val="0D9488"/>
+                </a:solidFill>
+                <a:latin typeface="Trebuchet MS" pitchFamily="34" charset="0"/>
+                <a:ea typeface="Trebuchet MS" pitchFamily="34" charset="-122"/>
+                <a:cs typeface="Trebuchet MS" pitchFamily="34" charset="-120"/>
+              </a:rPr>
+              <a:t>cant</a:t>
+            </a:r>
+            <a:endParaRPr lang="en-US" sz="1400" dirty="0"/>
+          </a:p>
+        </p:txBody>
+      </p:sp>
+      <p:sp>
+        <p:nvSpPr>
+          <p:cNvPr id="39" name="Shape 37"/>
           <p:cNvSpPr/>
           <p:nvPr/>
         </p:nvSpPr>
@@ -15875,7 +16421,7 @@
       </p:sp>
       <p:sp>
         <p:nvSpPr>
-          <p:cNvPr id="34" name="Text 32"/>
+          <p:cNvPr id="40" name="Text 38"/>
           <p:cNvSpPr/>
           <p:nvPr/>
         </p:nvSpPr>
@@ -15914,18 +16460,18 @@
       </p:sp>
       <p:sp>
         <p:nvSpPr>
-          <p:cNvPr id="35" name="Shape 33"/>
+          <p:cNvPr id="41" name="Shape 39"/>
           <p:cNvSpPr/>
           <p:nvPr/>
         </p:nvSpPr>
         <p:spPr>
           <a:xfrm>
             <a:off x="1874520" y="4096512"/>
-            <a:ext cx="6903720" cy="658368"/>
+            <a:ext cx="6903720" cy="804672"/>
           </a:xfrm>
           <a:prstGeom prst="rect">
             <a:avLst>
-              <a:gd name="adj" fmla="val 8333"/>
+              <a:gd name="adj" fmla="val 6818"/>
             </a:avLst>
           </a:prstGeom>
           <a:solidFill>
@@ -15941,18 +16487,18 @@
       </p:sp>
       <p:sp>
         <p:nvSpPr>
-          <p:cNvPr id="36" name="Shape 34"/>
-          <p:cNvSpPr/>
-          <p:nvPr/>
-        </p:nvSpPr>
-        <p:spPr>
-          <a:xfrm>
-            <a:off x="2124837" y="4169664"/>
-            <a:ext cx="685800" cy="475488"/>
+          <p:cNvPr id="42" name="Shape 40"/>
+          <p:cNvSpPr/>
+          <p:nvPr/>
+        </p:nvSpPr>
+        <p:spPr>
+          <a:xfrm>
+            <a:off x="1951828" y="4169664"/>
+            <a:ext cx="603504" cy="384048"/>
           </a:xfrm>
           <a:prstGeom prst="rect">
             <a:avLst>
-              <a:gd name="adj" fmla="val 7692"/>
+              <a:gd name="adj" fmla="val 9524"/>
             </a:avLst>
           </a:prstGeom>
           <a:solidFill>
@@ -15968,14 +16514,14 @@
       </p:sp>
       <p:sp>
         <p:nvSpPr>
-          <p:cNvPr id="37" name="Text 35"/>
-          <p:cNvSpPr/>
-          <p:nvPr/>
-        </p:nvSpPr>
-        <p:spPr>
-          <a:xfrm>
-            <a:off x="2124837" y="4169664"/>
-            <a:ext cx="685800" cy="475488"/>
+          <p:cNvPr id="43" name="Text 41"/>
+          <p:cNvSpPr/>
+          <p:nvPr/>
+        </p:nvSpPr>
+        <p:spPr>
+          <a:xfrm>
+            <a:off x="1951828" y="4169664"/>
+            <a:ext cx="603504" cy="384048"/>
           </a:xfrm>
           <a:prstGeom prst="rect">
             <a:avLst/>
@@ -16007,18 +16553,18 @@
       </p:sp>
       <p:sp>
         <p:nvSpPr>
-          <p:cNvPr id="38" name="Shape 36"/>
-          <p:cNvSpPr/>
-          <p:nvPr/>
-        </p:nvSpPr>
-        <p:spPr>
-          <a:xfrm>
-            <a:off x="3033522" y="4169664"/>
-            <a:ext cx="685800" cy="475488"/>
+          <p:cNvPr id="44" name="Shape 42"/>
+          <p:cNvSpPr/>
+          <p:nvPr/>
+        </p:nvSpPr>
+        <p:spPr>
+          <a:xfrm>
+            <a:off x="2605209" y="4169664"/>
+            <a:ext cx="603504" cy="384048"/>
           </a:xfrm>
           <a:prstGeom prst="rect">
             <a:avLst>
-              <a:gd name="adj" fmla="val 7692"/>
+              <a:gd name="adj" fmla="val 9524"/>
             </a:avLst>
           </a:prstGeom>
           <a:solidFill>
@@ -16034,14 +16580,14 @@
       </p:sp>
       <p:sp>
         <p:nvSpPr>
-          <p:cNvPr id="39" name="Text 37"/>
-          <p:cNvSpPr/>
-          <p:nvPr/>
-        </p:nvSpPr>
-        <p:spPr>
-          <a:xfrm>
-            <a:off x="3033522" y="4169664"/>
-            <a:ext cx="685800" cy="475488"/>
+          <p:cNvPr id="45" name="Text 43"/>
+          <p:cNvSpPr/>
+          <p:nvPr/>
+        </p:nvSpPr>
+        <p:spPr>
+          <a:xfrm>
+            <a:off x="2605209" y="4169664"/>
+            <a:ext cx="603504" cy="384048"/>
           </a:xfrm>
           <a:prstGeom prst="rect">
             <a:avLst/>
@@ -16065,7 +16611,7 @@
                 <a:ea typeface="Trebuchet MS" pitchFamily="34" charset="-122"/>
                 <a:cs typeface="Trebuchet MS" pitchFamily="34" charset="-120"/>
               </a:rPr>
-              <a:t>i</a:t>
+              <a:t>ig</a:t>
             </a:r>
             <a:endParaRPr lang="en-US" sz="900" dirty="0"/>
           </a:p>
@@ -16073,18 +16619,18 @@
       </p:sp>
       <p:sp>
         <p:nvSpPr>
-          <p:cNvPr id="40" name="Shape 38"/>
-          <p:cNvSpPr/>
-          <p:nvPr/>
-        </p:nvSpPr>
-        <p:spPr>
-          <a:xfrm>
-            <a:off x="3942207" y="4169664"/>
-            <a:ext cx="685800" cy="475488"/>
+          <p:cNvPr id="46" name="Shape 44"/>
+          <p:cNvSpPr/>
+          <p:nvPr/>
+        </p:nvSpPr>
+        <p:spPr>
+          <a:xfrm>
+            <a:off x="3258589" y="4169664"/>
+            <a:ext cx="603504" cy="384048"/>
           </a:xfrm>
           <a:prstGeom prst="rect">
             <a:avLst>
-              <a:gd name="adj" fmla="val 7692"/>
+              <a:gd name="adj" fmla="val 9524"/>
             </a:avLst>
           </a:prstGeom>
           <a:solidFill>
@@ -16100,14 +16646,14 @@
       </p:sp>
       <p:sp>
         <p:nvSpPr>
-          <p:cNvPr id="41" name="Text 39"/>
-          <p:cNvSpPr/>
-          <p:nvPr/>
-        </p:nvSpPr>
-        <p:spPr>
-          <a:xfrm>
-            <a:off x="3942207" y="4169664"/>
-            <a:ext cx="685800" cy="475488"/>
+          <p:cNvPr id="47" name="Text 45"/>
+          <p:cNvSpPr/>
+          <p:nvPr/>
+        </p:nvSpPr>
+        <p:spPr>
+          <a:xfrm>
+            <a:off x="3258589" y="4169664"/>
+            <a:ext cx="603504" cy="384048"/>
           </a:xfrm>
           <a:prstGeom prst="rect">
             <a:avLst/>
@@ -16131,7 +16677,7 @@
                 <a:ea typeface="Trebuchet MS" pitchFamily="34" charset="-122"/>
                 <a:cs typeface="Trebuchet MS" pitchFamily="34" charset="-120"/>
               </a:rPr>
-              <a:t>g</a:t>
+              <a:t>n</a:t>
             </a:r>
             <a:endParaRPr lang="en-US" sz="900" dirty="0"/>
           </a:p>
@@ -16139,18 +16685,18 @@
       </p:sp>
       <p:sp>
         <p:nvSpPr>
-          <p:cNvPr id="42" name="Shape 40"/>
-          <p:cNvSpPr/>
-          <p:nvPr/>
-        </p:nvSpPr>
-        <p:spPr>
-          <a:xfrm>
-            <a:off x="4850892" y="4169664"/>
-            <a:ext cx="685800" cy="475488"/>
+          <p:cNvPr id="48" name="Shape 46"/>
+          <p:cNvSpPr/>
+          <p:nvPr/>
+        </p:nvSpPr>
+        <p:spPr>
+          <a:xfrm>
+            <a:off x="3911969" y="4169664"/>
+            <a:ext cx="603504" cy="384048"/>
           </a:xfrm>
           <a:prstGeom prst="rect">
             <a:avLst>
-              <a:gd name="adj" fmla="val 7692"/>
+              <a:gd name="adj" fmla="val 9524"/>
             </a:avLst>
           </a:prstGeom>
           <a:solidFill>
@@ -16166,14 +16712,14 @@
       </p:sp>
       <p:sp>
         <p:nvSpPr>
-          <p:cNvPr id="43" name="Text 41"/>
-          <p:cNvSpPr/>
-          <p:nvPr/>
-        </p:nvSpPr>
-        <p:spPr>
-          <a:xfrm>
-            <a:off x="4850892" y="4169664"/>
-            <a:ext cx="685800" cy="475488"/>
+          <p:cNvPr id="49" name="Text 47"/>
+          <p:cNvSpPr/>
+          <p:nvPr/>
+        </p:nvSpPr>
+        <p:spPr>
+          <a:xfrm>
+            <a:off x="3911969" y="4169664"/>
+            <a:ext cx="603504" cy="384048"/>
           </a:xfrm>
           <a:prstGeom prst="rect">
             <a:avLst/>
@@ -16197,7 +16743,7 @@
                 <a:ea typeface="Trebuchet MS" pitchFamily="34" charset="-122"/>
                 <a:cs typeface="Trebuchet MS" pitchFamily="34" charset="-120"/>
               </a:rPr>
-              <a:t>n</a:t>
+              <a:t>i</a:t>
             </a:r>
             <a:endParaRPr lang="en-US" sz="900" dirty="0"/>
           </a:p>
@@ -16205,18 +16751,18 @@
       </p:sp>
       <p:sp>
         <p:nvSpPr>
-          <p:cNvPr id="44" name="Shape 42"/>
-          <p:cNvSpPr/>
-          <p:nvPr/>
-        </p:nvSpPr>
-        <p:spPr>
-          <a:xfrm>
-            <a:off x="5759577" y="4169664"/>
-            <a:ext cx="685800" cy="475488"/>
+          <p:cNvPr id="50" name="Shape 48"/>
+          <p:cNvSpPr/>
+          <p:nvPr/>
+        </p:nvSpPr>
+        <p:spPr>
+          <a:xfrm>
+            <a:off x="4565350" y="4169664"/>
+            <a:ext cx="603504" cy="384048"/>
           </a:xfrm>
           <a:prstGeom prst="rect">
             <a:avLst>
-              <a:gd name="adj" fmla="val 7692"/>
+              <a:gd name="adj" fmla="val 9524"/>
             </a:avLst>
           </a:prstGeom>
           <a:solidFill>
@@ -16232,14 +16778,14 @@
       </p:sp>
       <p:sp>
         <p:nvSpPr>
-          <p:cNvPr id="45" name="Text 43"/>
-          <p:cNvSpPr/>
-          <p:nvPr/>
-        </p:nvSpPr>
-        <p:spPr>
-          <a:xfrm>
-            <a:off x="5759577" y="4169664"/>
-            <a:ext cx="685800" cy="475488"/>
+          <p:cNvPr id="51" name="Text 49"/>
+          <p:cNvSpPr/>
+          <p:nvPr/>
+        </p:nvSpPr>
+        <p:spPr>
+          <a:xfrm>
+            <a:off x="4565350" y="4169664"/>
+            <a:ext cx="603504" cy="384048"/>
           </a:xfrm>
           <a:prstGeom prst="rect">
             <a:avLst/>
@@ -16263,7 +16809,7 @@
                 <a:ea typeface="Trebuchet MS" pitchFamily="34" charset="-122"/>
                 <a:cs typeface="Trebuchet MS" pitchFamily="34" charset="-120"/>
               </a:rPr>
-              <a:t>a</a:t>
+              <a:t>f</a:t>
             </a:r>
             <a:endParaRPr lang="en-US" sz="900" dirty="0"/>
           </a:p>
@@ -16271,18 +16817,18 @@
       </p:sp>
       <p:sp>
         <p:nvSpPr>
-          <p:cNvPr id="46" name="Shape 44"/>
-          <p:cNvSpPr/>
-          <p:nvPr/>
-        </p:nvSpPr>
-        <p:spPr>
-          <a:xfrm>
-            <a:off x="6668262" y="4169664"/>
-            <a:ext cx="685800" cy="475488"/>
+          <p:cNvPr id="52" name="Shape 50"/>
+          <p:cNvSpPr/>
+          <p:nvPr/>
+        </p:nvSpPr>
+        <p:spPr>
+          <a:xfrm>
+            <a:off x="5218730" y="4169664"/>
+            <a:ext cx="603504" cy="384048"/>
           </a:xfrm>
           <a:prstGeom prst="rect">
             <a:avLst>
-              <a:gd name="adj" fmla="val 7692"/>
+              <a:gd name="adj" fmla="val 9524"/>
             </a:avLst>
           </a:prstGeom>
           <a:solidFill>
@@ -16298,14 +16844,14 @@
       </p:sp>
       <p:sp>
         <p:nvSpPr>
-          <p:cNvPr id="47" name="Text 45"/>
-          <p:cNvSpPr/>
-          <p:nvPr/>
-        </p:nvSpPr>
-        <p:spPr>
-          <a:xfrm>
-            <a:off x="6668262" y="4169664"/>
-            <a:ext cx="685800" cy="475488"/>
+          <p:cNvPr id="53" name="Text 51"/>
+          <p:cNvSpPr/>
+          <p:nvPr/>
+        </p:nvSpPr>
+        <p:spPr>
+          <a:xfrm>
+            <a:off x="5218730" y="4169664"/>
+            <a:ext cx="603504" cy="384048"/>
           </a:xfrm>
           <a:prstGeom prst="rect">
             <a:avLst/>
@@ -16329,7 +16875,7 @@
                 <a:ea typeface="Trebuchet MS" pitchFamily="34" charset="-122"/>
                 <a:cs typeface="Trebuchet MS" pitchFamily="34" charset="-120"/>
               </a:rPr>
-              <a:t>t</a:t>
+              <a:t>i</a:t>
             </a:r>
             <a:endParaRPr lang="en-US" sz="900" dirty="0"/>
           </a:p>
@@ -16337,18 +16883,18 @@
       </p:sp>
       <p:sp>
         <p:nvSpPr>
-          <p:cNvPr id="48" name="Shape 46"/>
-          <p:cNvSpPr/>
-          <p:nvPr/>
-        </p:nvSpPr>
-        <p:spPr>
-          <a:xfrm>
-            <a:off x="7576947" y="4169664"/>
-            <a:ext cx="685800" cy="475488"/>
+          <p:cNvPr id="54" name="Shape 52"/>
+          <p:cNvSpPr/>
+          <p:nvPr/>
+        </p:nvSpPr>
+        <p:spPr>
+          <a:xfrm>
+            <a:off x="5872111" y="4169664"/>
+            <a:ext cx="603504" cy="384048"/>
           </a:xfrm>
           <a:prstGeom prst="rect">
             <a:avLst>
-              <a:gd name="adj" fmla="val 7692"/>
+              <a:gd name="adj" fmla="val 9524"/>
             </a:avLst>
           </a:prstGeom>
           <a:solidFill>
@@ -16364,14 +16910,14 @@
       </p:sp>
       <p:sp>
         <p:nvSpPr>
-          <p:cNvPr id="49" name="Text 47"/>
-          <p:cNvSpPr/>
-          <p:nvPr/>
-        </p:nvSpPr>
-        <p:spPr>
-          <a:xfrm>
-            <a:off x="7576947" y="4169664"/>
-            <a:ext cx="685800" cy="475488"/>
+          <p:cNvPr id="55" name="Text 53"/>
+          <p:cNvSpPr/>
+          <p:nvPr/>
+        </p:nvSpPr>
+        <p:spPr>
+          <a:xfrm>
+            <a:off x="5872111" y="4169664"/>
+            <a:ext cx="603504" cy="384048"/>
           </a:xfrm>
           <a:prstGeom prst="rect">
             <a:avLst/>
@@ -16395,7 +16941,244 @@
                 <a:ea typeface="Trebuchet MS" pitchFamily="34" charset="-122"/>
                 <a:cs typeface="Trebuchet MS" pitchFamily="34" charset="-120"/>
               </a:rPr>
-              <a:t>ure</a:t>
+              <a:t>c</a:t>
+            </a:r>
+            <a:endParaRPr lang="en-US" sz="900" dirty="0"/>
+          </a:p>
+        </p:txBody>
+      </p:sp>
+      <p:sp>
+        <p:nvSpPr>
+          <p:cNvPr id="56" name="Text 54"/>
+          <p:cNvSpPr/>
+          <p:nvPr/>
+        </p:nvSpPr>
+        <p:spPr>
+          <a:xfrm>
+            <a:off x="5872111" y="4572000"/>
+            <a:ext cx="603504" cy="219456"/>
+          </a:xfrm>
+          <a:prstGeom prst="rect">
+            <a:avLst/>
+          </a:prstGeom>
+          <a:noFill/>
+          <a:ln/>
+        </p:spPr>
+        <p:txBody>
+          <a:bodyPr wrap="square" lIns="0" tIns="0" rIns="0" bIns="0" rtlCol="0" anchor="t"/>
+          <a:lstStyle/>
+          <a:p>
+            <a:pPr algn="ctr" indent="0" marL="0">
+              <a:buNone/>
+            </a:pPr>
+            <a:r>
+              <a:rPr lang="en-US" sz="750" i="1" dirty="0">
+                <a:solidFill>
+                  <a:srgbClr val="94A3B8"/>
+                </a:solidFill>
+                <a:latin typeface="Calibri" pitchFamily="34" charset="0"/>
+                <a:ea typeface="Calibri" pitchFamily="34" charset="-122"/>
+                <a:cs typeface="Calibri" pitchFamily="34" charset="-120"/>
+              </a:rPr>
+              <a:t>/k/</a:t>
+            </a:r>
+            <a:endParaRPr lang="en-US" sz="750" dirty="0"/>
+          </a:p>
+        </p:txBody>
+      </p:sp>
+      <p:sp>
+        <p:nvSpPr>
+          <p:cNvPr id="57" name="Shape 55"/>
+          <p:cNvSpPr/>
+          <p:nvPr/>
+        </p:nvSpPr>
+        <p:spPr>
+          <a:xfrm>
+            <a:off x="6525491" y="4169664"/>
+            <a:ext cx="603504" cy="384048"/>
+          </a:xfrm>
+          <a:prstGeom prst="rect">
+            <a:avLst>
+              <a:gd name="adj" fmla="val 9524"/>
+            </a:avLst>
+          </a:prstGeom>
+          <a:solidFill>
+            <a:srgbClr val="FFFFFF"/>
+          </a:solidFill>
+          <a:ln w="12700">
+            <a:solidFill>
+              <a:srgbClr val="DB2777"/>
+            </a:solidFill>
+            <a:prstDash val="solid"/>
+          </a:ln>
+        </p:spPr>
+      </p:sp>
+      <p:sp>
+        <p:nvSpPr>
+          <p:cNvPr id="58" name="Text 56"/>
+          <p:cNvSpPr/>
+          <p:nvPr/>
+        </p:nvSpPr>
+        <p:spPr>
+          <a:xfrm>
+            <a:off x="6525491" y="4169664"/>
+            <a:ext cx="603504" cy="384048"/>
+          </a:xfrm>
+          <a:prstGeom prst="rect">
+            <a:avLst/>
+          </a:prstGeom>
+          <a:noFill/>
+          <a:ln/>
+        </p:spPr>
+        <p:txBody>
+          <a:bodyPr wrap="square" lIns="0" tIns="0" rIns="0" bIns="0" rtlCol="0" anchor="ctr"/>
+          <a:lstStyle/>
+          <a:p>
+            <a:pPr algn="ctr" indent="0" marL="0">
+              <a:buNone/>
+            </a:pPr>
+            <a:r>
+              <a:rPr lang="en-US" sz="900" b="1" dirty="0">
+                <a:solidFill>
+                  <a:srgbClr val="9D174D"/>
+                </a:solidFill>
+                <a:latin typeface="Trebuchet MS" pitchFamily="34" charset="0"/>
+                <a:ea typeface="Trebuchet MS" pitchFamily="34" charset="-122"/>
+                <a:cs typeface="Trebuchet MS" pitchFamily="34" charset="-120"/>
+              </a:rPr>
+              <a:t>a</a:t>
+            </a:r>
+            <a:endParaRPr lang="en-US" sz="900" dirty="0"/>
+          </a:p>
+        </p:txBody>
+      </p:sp>
+      <p:sp>
+        <p:nvSpPr>
+          <p:cNvPr id="59" name="Shape 57"/>
+          <p:cNvSpPr/>
+          <p:nvPr/>
+        </p:nvSpPr>
+        <p:spPr>
+          <a:xfrm>
+            <a:off x="7178871" y="4169664"/>
+            <a:ext cx="603504" cy="384048"/>
+          </a:xfrm>
+          <a:prstGeom prst="rect">
+            <a:avLst>
+              <a:gd name="adj" fmla="val 9524"/>
+            </a:avLst>
+          </a:prstGeom>
+          <a:solidFill>
+            <a:srgbClr val="FFFFFF"/>
+          </a:solidFill>
+          <a:ln w="12700">
+            <a:solidFill>
+              <a:srgbClr val="DB2777"/>
+            </a:solidFill>
+            <a:prstDash val="solid"/>
+          </a:ln>
+        </p:spPr>
+      </p:sp>
+      <p:sp>
+        <p:nvSpPr>
+          <p:cNvPr id="60" name="Text 58"/>
+          <p:cNvSpPr/>
+          <p:nvPr/>
+        </p:nvSpPr>
+        <p:spPr>
+          <a:xfrm>
+            <a:off x="7178871" y="4169664"/>
+            <a:ext cx="603504" cy="384048"/>
+          </a:xfrm>
+          <a:prstGeom prst="rect">
+            <a:avLst/>
+          </a:prstGeom>
+          <a:noFill/>
+          <a:ln/>
+        </p:spPr>
+        <p:txBody>
+          <a:bodyPr wrap="square" lIns="0" tIns="0" rIns="0" bIns="0" rtlCol="0" anchor="ctr"/>
+          <a:lstStyle/>
+          <a:p>
+            <a:pPr algn="ctr" indent="0" marL="0">
+              <a:buNone/>
+            </a:pPr>
+            <a:r>
+              <a:rPr lang="en-US" sz="900" b="1" dirty="0">
+                <a:solidFill>
+                  <a:srgbClr val="9D174D"/>
+                </a:solidFill>
+                <a:latin typeface="Trebuchet MS" pitchFamily="34" charset="0"/>
+                <a:ea typeface="Trebuchet MS" pitchFamily="34" charset="-122"/>
+                <a:cs typeface="Trebuchet MS" pitchFamily="34" charset="-120"/>
+              </a:rPr>
+              <a:t>n</a:t>
+            </a:r>
+            <a:endParaRPr lang="en-US" sz="900" dirty="0"/>
+          </a:p>
+        </p:txBody>
+      </p:sp>
+      <p:sp>
+        <p:nvSpPr>
+          <p:cNvPr id="61" name="Shape 59"/>
+          <p:cNvSpPr/>
+          <p:nvPr/>
+        </p:nvSpPr>
+        <p:spPr>
+          <a:xfrm>
+            <a:off x="7832252" y="4169664"/>
+            <a:ext cx="603504" cy="384048"/>
+          </a:xfrm>
+          <a:prstGeom prst="rect">
+            <a:avLst>
+              <a:gd name="adj" fmla="val 9524"/>
+            </a:avLst>
+          </a:prstGeom>
+          <a:solidFill>
+            <a:srgbClr val="FFFFFF"/>
+          </a:solidFill>
+          <a:ln w="12700">
+            <a:solidFill>
+              <a:srgbClr val="DB2777"/>
+            </a:solidFill>
+            <a:prstDash val="solid"/>
+          </a:ln>
+        </p:spPr>
+      </p:sp>
+      <p:sp>
+        <p:nvSpPr>
+          <p:cNvPr id="62" name="Text 60"/>
+          <p:cNvSpPr/>
+          <p:nvPr/>
+        </p:nvSpPr>
+        <p:spPr>
+          <a:xfrm>
+            <a:off x="7832252" y="4169664"/>
+            <a:ext cx="603504" cy="384048"/>
+          </a:xfrm>
+          <a:prstGeom prst="rect">
+            <a:avLst/>
+          </a:prstGeom>
+          <a:noFill/>
+          <a:ln/>
+        </p:spPr>
+        <p:txBody>
+          <a:bodyPr wrap="square" lIns="0" tIns="0" rIns="0" bIns="0" rtlCol="0" anchor="ctr"/>
+          <a:lstStyle/>
+          <a:p>
+            <a:pPr algn="ctr" indent="0" marL="0">
+              <a:buNone/>
+            </a:pPr>
+            <a:r>
+              <a:rPr lang="en-US" sz="900" b="1" dirty="0">
+                <a:solidFill>
+                  <a:srgbClr val="9D174D"/>
+                </a:solidFill>
+                <a:latin typeface="Trebuchet MS" pitchFamily="34" charset="0"/>
+                <a:ea typeface="Trebuchet MS" pitchFamily="34" charset="-122"/>
+                <a:cs typeface="Trebuchet MS" pitchFamily="34" charset="-120"/>
+              </a:rPr>
+              <a:t>t</a:t>
             </a:r>
             <a:endParaRPr lang="en-US" sz="900" dirty="0"/>
           </a:p>
@@ -16969,7 +17752,7 @@
                 <a:ea typeface="Calibri" pitchFamily="34" charset="-122"/>
                 <a:cs typeface="Calibri" pitchFamily="34" charset="-120"/>
               </a:rPr>
-              <a:t>Word Labs  •  wordlabs.app  •  Root: 'sign' = mark, symbol, indicate</a:t>
+              <a:t>Word Labs  •  wordlabs.app  •  Root: 'sign' = mark, symbol, or signal</a:t>
             </a:r>
             <a:endParaRPr lang="en-US" sz="800" dirty="0"/>
           </a:p>
@@ -17609,7 +18392,7 @@
                 <a:ea typeface="Calibri" pitchFamily="34" charset="-122"/>
                 <a:cs typeface="Calibri" pitchFamily="34" charset="-120"/>
               </a:rPr>
-              <a:t>Word Labs  •  wordlabs.app  •  Root: 'sign' = mark, symbol, indicate</a:t>
+              <a:t>Word Labs  •  wordlabs.app  •  Root: 'sign' = mark, symbol, or signal</a:t>
             </a:r>
             <a:endParaRPr lang="en-US" sz="800" dirty="0"/>
           </a:p>
@@ -17721,7 +18504,7 @@
                 <a:ea typeface="Calibri" pitchFamily="34" charset="-122"/>
                 <a:cs typeface="Calibri" pitchFamily="34" charset="-120"/>
               </a:rPr>
-              <a:t>After receiving her </a:t>
+              <a:t>After she </a:t>
             </a:r>
             <a:pPr algn="l" indent="0" marL="0">
               <a:buNone/>
@@ -17738,7 +18521,7 @@
                 <a:ea typeface="Calibri" pitchFamily="34" charset="-122"/>
                 <a:cs typeface="Calibri" pitchFamily="34" charset="-120"/>
               </a:rPr>
-              <a:t>assignment</a:t>
+              <a:t>resigned</a:t>
             </a:r>
             <a:pPr algn="l" indent="0" marL="0">
               <a:buNone/>
@@ -17752,7 +18535,7 @@
                 <a:ea typeface="Calibri" pitchFamily="34" charset="-122"/>
                 <a:cs typeface="Calibri" pitchFamily="34" charset="-120"/>
               </a:rPr>
-              <a:t>, Maya began to </a:t>
+              <a:t>, the council had to </a:t>
             </a:r>
             <a:pPr algn="l" indent="0" marL="0">
               <a:buNone/>
@@ -17769,7 +18552,7 @@
                 <a:ea typeface="Calibri" pitchFamily="34" charset="-122"/>
                 <a:cs typeface="Calibri" pitchFamily="34" charset="-120"/>
               </a:rPr>
-              <a:t>redesign</a:t>
+              <a:t>reassign</a:t>
             </a:r>
             <a:pPr algn="l" indent="0" marL="0">
               <a:buNone/>
@@ -17783,7 +18566,7 @@
                 <a:ea typeface="Calibri" pitchFamily="34" charset="-122"/>
                 <a:cs typeface="Calibri" pitchFamily="34" charset="-120"/>
               </a:rPr>
-              <a:t> her poster, adding a bold </a:t>
+              <a:t> the project and create a new </a:t>
             </a:r>
             <a:pPr algn="l" indent="0" marL="0">
               <a:buNone/>
@@ -17800,7 +18583,7 @@
                 <a:ea typeface="Calibri" pitchFamily="34" charset="-122"/>
                 <a:cs typeface="Calibri" pitchFamily="34" charset="-120"/>
               </a:rPr>
-              <a:t>signal</a:t>
+              <a:t>assignment</a:t>
             </a:r>
             <a:pPr algn="l" indent="0" marL="0">
               <a:buNone/>
@@ -17814,7 +18597,7 @@
                 <a:ea typeface="Calibri" pitchFamily="34" charset="-122"/>
                 <a:cs typeface="Calibri" pitchFamily="34" charset="-120"/>
               </a:rPr>
-              <a:t> at the top.</a:t>
+              <a:t> for the team.</a:t>
             </a:r>
             <a:endParaRPr lang="en-US" sz="1800" dirty="0"/>
           </a:p>
@@ -17969,7 +18752,7 @@
                 <a:ea typeface="Trebuchet MS" pitchFamily="34" charset="-122"/>
                 <a:cs typeface="Trebuchet MS" pitchFamily="34" charset="-120"/>
               </a:rPr>
-              <a:t>assignment</a:t>
+              <a:t>resigned</a:t>
             </a:r>
             <a:endParaRPr lang="en-US" sz="1400" dirty="0"/>
           </a:p>
@@ -18097,7 +18880,7 @@
                 <a:ea typeface="Trebuchet MS" pitchFamily="34" charset="-122"/>
                 <a:cs typeface="Trebuchet MS" pitchFamily="34" charset="-120"/>
               </a:rPr>
-              <a:t>redesign</a:t>
+              <a:t>reassign</a:t>
             </a:r>
             <a:endParaRPr lang="en-US" sz="1400" dirty="0"/>
           </a:p>
@@ -18225,7 +19008,7 @@
                 <a:ea typeface="Trebuchet MS" pitchFamily="34" charset="-122"/>
                 <a:cs typeface="Trebuchet MS" pitchFamily="34" charset="-120"/>
               </a:rPr>
-              <a:t>signal</a:t>
+              <a:t>assignment</a:t>
             </a:r>
             <a:endParaRPr lang="en-US" sz="1400" dirty="0"/>
           </a:p>
@@ -18556,7 +19339,7 @@
                 <a:ea typeface="Calibri" pitchFamily="34" charset="-122"/>
                 <a:cs typeface="Calibri" pitchFamily="34" charset="-120"/>
               </a:rPr>
-              <a:t>Word Labs  •  wordlabs.app  •  Root: 'sign' = mark, symbol, indicate</a:t>
+              <a:t>Word Labs  •  wordlabs.app  •  Root: 'sign' = mark, symbol, or signal</a:t>
             </a:r>
             <a:endParaRPr lang="en-US" sz="800" dirty="0"/>
           </a:p>
@@ -18695,7 +19478,7 @@
                 <a:ea typeface="Trebuchet MS" pitchFamily="34" charset="-122"/>
                 <a:cs typeface="Trebuchet MS" pitchFamily="34" charset="-120"/>
               </a:rPr>
-              <a:t>assignment</a:t>
+              <a:t>resigned</a:t>
             </a:r>
             <a:endParaRPr lang="en-US" sz="2800" dirty="0"/>
           </a:p>
@@ -19383,7 +20166,7 @@
                 <a:ea typeface="Calibri" pitchFamily="34" charset="-122"/>
                 <a:cs typeface="Calibri" pitchFamily="34" charset="-120"/>
               </a:rPr>
-              <a:t>Word Labs  •  wordlabs.app  •  Root: 'sign' = mark, symbol, indicate</a:t>
+              <a:t>Word Labs  •  wordlabs.app  •  Root: 'sign' = mark, symbol, or signal</a:t>
             </a:r>
             <a:endParaRPr lang="en-US" sz="800" dirty="0"/>
           </a:p>
@@ -19522,7 +20305,7 @@
                 <a:ea typeface="Trebuchet MS" pitchFamily="34" charset="-122"/>
                 <a:cs typeface="Trebuchet MS" pitchFamily="34" charset="-120"/>
               </a:rPr>
-              <a:t>assignment</a:t>
+              <a:t>resigned</a:t>
             </a:r>
             <a:endParaRPr lang="en-US" sz="2800" dirty="0"/>
           </a:p>
@@ -19661,7 +20444,7 @@
                 <a:ea typeface="Trebuchet MS" pitchFamily="34" charset="-122"/>
                 <a:cs typeface="Trebuchet MS" pitchFamily="34" charset="-120"/>
               </a:rPr>
-              <a:t>as</a:t>
+              <a:t>re</a:t>
             </a:r>
             <a:endParaRPr lang="en-US" sz="1300" dirty="0"/>
           </a:p>
@@ -19700,7 +20483,7 @@
                 <a:ea typeface="Calibri" pitchFamily="34" charset="-122"/>
                 <a:cs typeface="Calibri" pitchFamily="34" charset="-120"/>
               </a:rPr>
-              <a:t>to, towards</a:t>
+              <a:t>again or back</a:t>
             </a:r>
             <a:endParaRPr lang="en-US" sz="850" dirty="0"/>
           </a:p>
@@ -19708,46 +20491,7 @@
       </p:sp>
       <p:sp>
         <p:nvSpPr>
-          <p:cNvPr id="19" name="Text 17"/>
-          <p:cNvSpPr/>
-          <p:nvPr/>
-        </p:nvSpPr>
-        <p:spPr>
-          <a:xfrm>
-            <a:off x="2221992" y="2752344"/>
-            <a:ext cx="1828800" cy="182880"/>
-          </a:xfrm>
-          <a:prstGeom prst="rect">
-            <a:avLst/>
-          </a:prstGeom>
-          <a:noFill/>
-          <a:ln/>
-        </p:spPr>
-        <p:txBody>
-          <a:bodyPr wrap="square" lIns="0" tIns="0" rIns="0" bIns="0" rtlCol="0" anchor="t"/>
-          <a:lstStyle/>
-          <a:p>
-            <a:pPr algn="ctr" indent="0" marL="0">
-              <a:buNone/>
-            </a:pPr>
-            <a:r>
-              <a:rPr lang="en-US" sz="700" i="1" dirty="0">
-                <a:solidFill>
-                  <a:srgbClr val="94A3B8"/>
-                </a:solidFill>
-                <a:latin typeface="Calibri" pitchFamily="34" charset="0"/>
-                <a:ea typeface="Calibri" pitchFamily="34" charset="-122"/>
-                <a:cs typeface="Calibri" pitchFamily="34" charset="-120"/>
-              </a:rPr>
-              <a:t>ad → as before 's'</a:t>
-            </a:r>
-            <a:endParaRPr lang="en-US" sz="700" dirty="0"/>
-          </a:p>
-        </p:txBody>
-      </p:sp>
-      <p:sp>
-        <p:nvSpPr>
-          <p:cNvPr id="20" name="Shape 18"/>
+          <p:cNvPr id="19" name="Shape 17"/>
           <p:cNvSpPr/>
           <p:nvPr/>
         </p:nvSpPr>
@@ -19781,7 +20525,7 @@
       </p:sp>
       <p:sp>
         <p:nvSpPr>
-          <p:cNvPr id="21" name="Text 19"/>
+          <p:cNvPr id="20" name="Text 18"/>
           <p:cNvSpPr/>
           <p:nvPr/>
         </p:nvSpPr>
@@ -19820,7 +20564,7 @@
       </p:sp>
       <p:sp>
         <p:nvSpPr>
-          <p:cNvPr id="22" name="Text 20"/>
+          <p:cNvPr id="21" name="Text 19"/>
           <p:cNvSpPr/>
           <p:nvPr/>
         </p:nvSpPr>
@@ -19851,7 +20595,7 @@
                 <a:ea typeface="Calibri" pitchFamily="34" charset="-122"/>
                 <a:cs typeface="Calibri" pitchFamily="34" charset="-120"/>
               </a:rPr>
-              <a:t>mark, symbol</a:t>
+              <a:t>mark or symbol</a:t>
             </a:r>
             <a:endParaRPr lang="en-US" sz="850" dirty="0"/>
           </a:p>
@@ -19859,7 +20603,7 @@
       </p:sp>
       <p:sp>
         <p:nvSpPr>
-          <p:cNvPr id="23" name="Shape 21"/>
+          <p:cNvPr id="22" name="Shape 20"/>
           <p:cNvSpPr/>
           <p:nvPr/>
         </p:nvSpPr>
@@ -19893,7 +20637,7 @@
       </p:sp>
       <p:sp>
         <p:nvSpPr>
-          <p:cNvPr id="24" name="Text 22"/>
+          <p:cNvPr id="23" name="Text 21"/>
           <p:cNvSpPr/>
           <p:nvPr/>
         </p:nvSpPr>
@@ -19924,7 +20668,7 @@
                 <a:ea typeface="Trebuchet MS" pitchFamily="34" charset="-122"/>
                 <a:cs typeface="Trebuchet MS" pitchFamily="34" charset="-120"/>
               </a:rPr>
-              <a:t>ment</a:t>
+              <a:t>ed</a:t>
             </a:r>
             <a:endParaRPr lang="en-US" sz="1300" dirty="0"/>
           </a:p>
@@ -19932,7 +20676,7 @@
       </p:sp>
       <p:sp>
         <p:nvSpPr>
-          <p:cNvPr id="25" name="Text 23"/>
+          <p:cNvPr id="24" name="Text 22"/>
           <p:cNvSpPr/>
           <p:nvPr/>
         </p:nvSpPr>
@@ -19963,7 +20707,7 @@
                 <a:ea typeface="Calibri" pitchFamily="34" charset="-122"/>
                 <a:cs typeface="Calibri" pitchFamily="34" charset="-120"/>
               </a:rPr>
-              <a:t>result or action of</a:t>
+              <a:t>past tense</a:t>
             </a:r>
             <a:endParaRPr lang="en-US" sz="850" dirty="0"/>
           </a:p>
@@ -19971,7 +20715,7 @@
       </p:sp>
       <p:sp>
         <p:nvSpPr>
-          <p:cNvPr id="26" name="Shape 24"/>
+          <p:cNvPr id="25" name="Shape 23"/>
           <p:cNvSpPr/>
           <p:nvPr/>
         </p:nvSpPr>
@@ -19998,7 +20742,7 @@
       </p:sp>
       <p:sp>
         <p:nvSpPr>
-          <p:cNvPr id="27" name="Text 25"/>
+          <p:cNvPr id="26" name="Text 24"/>
           <p:cNvSpPr/>
           <p:nvPr/>
         </p:nvSpPr>
@@ -20037,7 +20781,7 @@
       </p:sp>
       <p:sp>
         <p:nvSpPr>
-          <p:cNvPr id="28" name="Shape 26"/>
+          <p:cNvPr id="27" name="Shape 25"/>
           <p:cNvSpPr/>
           <p:nvPr/>
         </p:nvSpPr>
@@ -20064,7 +20808,7 @@
       </p:sp>
       <p:sp>
         <p:nvSpPr>
-          <p:cNvPr id="29" name="Text 27"/>
+          <p:cNvPr id="28" name="Text 26"/>
           <p:cNvSpPr/>
           <p:nvPr/>
         </p:nvSpPr>
@@ -20103,7 +20847,7 @@
       </p:sp>
       <p:sp>
         <p:nvSpPr>
-          <p:cNvPr id="30" name="Shape 28"/>
+          <p:cNvPr id="29" name="Shape 27"/>
           <p:cNvSpPr/>
           <p:nvPr/>
         </p:nvSpPr>
@@ -20130,7 +20874,7 @@
       </p:sp>
       <p:sp>
         <p:nvSpPr>
-          <p:cNvPr id="31" name="Text 29"/>
+          <p:cNvPr id="30" name="Text 28"/>
           <p:cNvSpPr/>
           <p:nvPr/>
         </p:nvSpPr>
@@ -20169,7 +20913,7 @@
       </p:sp>
       <p:sp>
         <p:nvSpPr>
-          <p:cNvPr id="32" name="Shape 30"/>
+          <p:cNvPr id="31" name="Shape 29"/>
           <p:cNvSpPr/>
           <p:nvPr/>
         </p:nvSpPr>
@@ -20196,7 +20940,7 @@
       </p:sp>
       <p:sp>
         <p:nvSpPr>
-          <p:cNvPr id="33" name="Text 31"/>
+          <p:cNvPr id="32" name="Text 30"/>
           <p:cNvSpPr/>
           <p:nvPr/>
         </p:nvSpPr>
@@ -20519,7 +21263,7 @@
                 <a:ea typeface="Calibri" pitchFamily="34" charset="-122"/>
                 <a:cs typeface="Calibri" pitchFamily="34" charset="-120"/>
               </a:rPr>
-              <a:t>Word Labs  •  wordlabs.app  •  Root: 'sign' = mark, symbol, indicate</a:t>
+              <a:t>Word Labs  •  wordlabs.app  •  Root: 'sign' = mark, symbol, or signal</a:t>
             </a:r>
             <a:endParaRPr lang="en-US" sz="800" dirty="0"/>
           </a:p>
@@ -20658,7 +21402,7 @@
                 <a:ea typeface="Trebuchet MS" pitchFamily="34" charset="-122"/>
                 <a:cs typeface="Trebuchet MS" pitchFamily="34" charset="-120"/>
               </a:rPr>
-              <a:t>assignment</a:t>
+              <a:t>resigned</a:t>
             </a:r>
             <a:endParaRPr lang="en-US" sz="2800" dirty="0"/>
           </a:p>
@@ -20797,7 +21541,7 @@
                 <a:ea typeface="Trebuchet MS" pitchFamily="34" charset="-122"/>
                 <a:cs typeface="Trebuchet MS" pitchFamily="34" charset="-120"/>
               </a:rPr>
-              <a:t>as</a:t>
+              <a:t>re</a:t>
             </a:r>
             <a:endParaRPr lang="en-US" sz="1300" dirty="0"/>
           </a:p>
@@ -20836,7 +21580,7 @@
                 <a:ea typeface="Calibri" pitchFamily="34" charset="-122"/>
                 <a:cs typeface="Calibri" pitchFamily="34" charset="-120"/>
               </a:rPr>
-              <a:t>to, towards</a:t>
+              <a:t>again or back</a:t>
             </a:r>
             <a:endParaRPr lang="en-US" sz="850" dirty="0"/>
           </a:p>
@@ -20844,46 +21588,7 @@
       </p:sp>
       <p:sp>
         <p:nvSpPr>
-          <p:cNvPr id="19" name="Text 17"/>
-          <p:cNvSpPr/>
-          <p:nvPr/>
-        </p:nvSpPr>
-        <p:spPr>
-          <a:xfrm>
-            <a:off x="2221992" y="2752344"/>
-            <a:ext cx="1828800" cy="182880"/>
-          </a:xfrm>
-          <a:prstGeom prst="rect">
-            <a:avLst/>
-          </a:prstGeom>
-          <a:noFill/>
-          <a:ln/>
-        </p:spPr>
-        <p:txBody>
-          <a:bodyPr wrap="square" lIns="0" tIns="0" rIns="0" bIns="0" rtlCol="0" anchor="t"/>
-          <a:lstStyle/>
-          <a:p>
-            <a:pPr algn="ctr" indent="0" marL="0">
-              <a:buNone/>
-            </a:pPr>
-            <a:r>
-              <a:rPr lang="en-US" sz="700" i="1" dirty="0">
-                <a:solidFill>
-                  <a:srgbClr val="94A3B8"/>
-                </a:solidFill>
-                <a:latin typeface="Calibri" pitchFamily="34" charset="0"/>
-                <a:ea typeface="Calibri" pitchFamily="34" charset="-122"/>
-                <a:cs typeface="Calibri" pitchFamily="34" charset="-120"/>
-              </a:rPr>
-              <a:t>ad → as before 's'</a:t>
-            </a:r>
-            <a:endParaRPr lang="en-US" sz="700" dirty="0"/>
-          </a:p>
-        </p:txBody>
-      </p:sp>
-      <p:sp>
-        <p:nvSpPr>
-          <p:cNvPr id="20" name="Shape 18"/>
+          <p:cNvPr id="19" name="Shape 17"/>
           <p:cNvSpPr/>
           <p:nvPr/>
         </p:nvSpPr>
@@ -20917,7 +21622,7 @@
       </p:sp>
       <p:sp>
         <p:nvSpPr>
-          <p:cNvPr id="21" name="Text 19"/>
+          <p:cNvPr id="20" name="Text 18"/>
           <p:cNvSpPr/>
           <p:nvPr/>
         </p:nvSpPr>
@@ -20956,7 +21661,7 @@
       </p:sp>
       <p:sp>
         <p:nvSpPr>
-          <p:cNvPr id="22" name="Text 20"/>
+          <p:cNvPr id="21" name="Text 19"/>
           <p:cNvSpPr/>
           <p:nvPr/>
         </p:nvSpPr>
@@ -20987,7 +21692,7 @@
                 <a:ea typeface="Calibri" pitchFamily="34" charset="-122"/>
                 <a:cs typeface="Calibri" pitchFamily="34" charset="-120"/>
               </a:rPr>
-              <a:t>mark, symbol</a:t>
+              <a:t>mark or symbol</a:t>
             </a:r>
             <a:endParaRPr lang="en-US" sz="850" dirty="0"/>
           </a:p>
@@ -20995,7 +21700,7 @@
       </p:sp>
       <p:sp>
         <p:nvSpPr>
-          <p:cNvPr id="23" name="Shape 21"/>
+          <p:cNvPr id="22" name="Shape 20"/>
           <p:cNvSpPr/>
           <p:nvPr/>
         </p:nvSpPr>
@@ -21029,7 +21734,7 @@
       </p:sp>
       <p:sp>
         <p:nvSpPr>
-          <p:cNvPr id="24" name="Text 22"/>
+          <p:cNvPr id="23" name="Text 21"/>
           <p:cNvSpPr/>
           <p:nvPr/>
         </p:nvSpPr>
@@ -21060,7 +21765,7 @@
                 <a:ea typeface="Trebuchet MS" pitchFamily="34" charset="-122"/>
                 <a:cs typeface="Trebuchet MS" pitchFamily="34" charset="-120"/>
               </a:rPr>
-              <a:t>ment</a:t>
+              <a:t>ed</a:t>
             </a:r>
             <a:endParaRPr lang="en-US" sz="1300" dirty="0"/>
           </a:p>
@@ -21068,7 +21773,7 @@
       </p:sp>
       <p:sp>
         <p:nvSpPr>
-          <p:cNvPr id="25" name="Text 23"/>
+          <p:cNvPr id="24" name="Text 22"/>
           <p:cNvSpPr/>
           <p:nvPr/>
         </p:nvSpPr>
@@ -21099,7 +21804,7 @@
                 <a:ea typeface="Calibri" pitchFamily="34" charset="-122"/>
                 <a:cs typeface="Calibri" pitchFamily="34" charset="-120"/>
               </a:rPr>
-              <a:t>result or action of</a:t>
+              <a:t>past tense</a:t>
             </a:r>
             <a:endParaRPr lang="en-US" sz="850" dirty="0"/>
           </a:p>
@@ -21107,7 +21812,7 @@
       </p:sp>
       <p:sp>
         <p:nvSpPr>
-          <p:cNvPr id="26" name="Shape 24"/>
+          <p:cNvPr id="25" name="Shape 23"/>
           <p:cNvSpPr/>
           <p:nvPr/>
         </p:nvSpPr>
@@ -21134,7 +21839,7 @@
       </p:sp>
       <p:sp>
         <p:nvSpPr>
-          <p:cNvPr id="27" name="Text 25"/>
+          <p:cNvPr id="26" name="Text 24"/>
           <p:cNvSpPr/>
           <p:nvPr/>
         </p:nvSpPr>
@@ -21173,7 +21878,7 @@
       </p:sp>
       <p:sp>
         <p:nvSpPr>
-          <p:cNvPr id="28" name="Shape 26"/>
+          <p:cNvPr id="27" name="Shape 25"/>
           <p:cNvSpPr/>
           <p:nvPr/>
         </p:nvSpPr>
@@ -21200,13 +21905,13 @@
       </p:sp>
       <p:sp>
         <p:nvSpPr>
-          <p:cNvPr id="29" name="Shape 27"/>
-          <p:cNvSpPr/>
-          <p:nvPr/>
-        </p:nvSpPr>
-        <p:spPr>
-          <a:xfrm>
-            <a:off x="2313432" y="3364992"/>
+          <p:cNvPr id="28" name="Shape 26"/>
+          <p:cNvSpPr/>
+          <p:nvPr/>
+        </p:nvSpPr>
+        <p:spPr>
+          <a:xfrm>
+            <a:off x="2999232" y="3364992"/>
             <a:ext cx="1645920" cy="475488"/>
           </a:xfrm>
           <a:prstGeom prst="rect">
@@ -21227,13 +21932,13 @@
       </p:sp>
       <p:sp>
         <p:nvSpPr>
-          <p:cNvPr id="30" name="Text 28"/>
-          <p:cNvSpPr/>
-          <p:nvPr/>
-        </p:nvSpPr>
-        <p:spPr>
-          <a:xfrm>
-            <a:off x="2313432" y="3364992"/>
+          <p:cNvPr id="29" name="Text 27"/>
+          <p:cNvSpPr/>
+          <p:nvPr/>
+        </p:nvSpPr>
+        <p:spPr>
+          <a:xfrm>
+            <a:off x="2999232" y="3364992"/>
             <a:ext cx="1645920" cy="475488"/>
           </a:xfrm>
           <a:prstGeom prst="rect">
@@ -21258,7 +21963,7 @@
                 <a:ea typeface="Trebuchet MS" pitchFamily="34" charset="-122"/>
                 <a:cs typeface="Trebuchet MS" pitchFamily="34" charset="-120"/>
               </a:rPr>
-              <a:t>as</a:t>
+              <a:t>re</a:t>
             </a:r>
             <a:endParaRPr lang="en-US" sz="1400" dirty="0"/>
           </a:p>
@@ -21266,14 +21971,14 @@
       </p:sp>
       <p:sp>
         <p:nvSpPr>
-          <p:cNvPr id="31" name="Text 29"/>
-          <p:cNvSpPr/>
-          <p:nvPr/>
-        </p:nvSpPr>
-        <p:spPr>
-          <a:xfrm>
-            <a:off x="3959352" y="3364992"/>
-            <a:ext cx="411480" cy="475488"/>
+          <p:cNvPr id="30" name="Text 28"/>
+          <p:cNvSpPr/>
+          <p:nvPr/>
+        </p:nvSpPr>
+        <p:spPr>
+          <a:xfrm>
+            <a:off x="4645152" y="3364992"/>
+            <a:ext cx="1097280" cy="475488"/>
           </a:xfrm>
           <a:prstGeom prst="rect">
             <a:avLst/>
@@ -21305,13 +22010,13 @@
       </p:sp>
       <p:sp>
         <p:nvSpPr>
-          <p:cNvPr id="32" name="Shape 30"/>
-          <p:cNvSpPr/>
-          <p:nvPr/>
-        </p:nvSpPr>
-        <p:spPr>
-          <a:xfrm>
-            <a:off x="4370832" y="3364992"/>
+          <p:cNvPr id="31" name="Shape 29"/>
+          <p:cNvSpPr/>
+          <p:nvPr/>
+        </p:nvSpPr>
+        <p:spPr>
+          <a:xfrm>
+            <a:off x="5742432" y="3364992"/>
             <a:ext cx="1645920" cy="475488"/>
           </a:xfrm>
           <a:prstGeom prst="rect">
@@ -21332,13 +22037,13 @@
       </p:sp>
       <p:sp>
         <p:nvSpPr>
-          <p:cNvPr id="33" name="Text 31"/>
-          <p:cNvSpPr/>
-          <p:nvPr/>
-        </p:nvSpPr>
-        <p:spPr>
-          <a:xfrm>
-            <a:off x="4370832" y="3364992"/>
+          <p:cNvPr id="32" name="Text 30"/>
+          <p:cNvSpPr/>
+          <p:nvPr/>
+        </p:nvSpPr>
+        <p:spPr>
+          <a:xfrm>
+            <a:off x="5742432" y="3364992"/>
             <a:ext cx="1645920" cy="475488"/>
           </a:xfrm>
           <a:prstGeom prst="rect">
@@ -21363,7 +22068,7 @@
                 <a:ea typeface="Trebuchet MS" pitchFamily="34" charset="-122"/>
                 <a:cs typeface="Trebuchet MS" pitchFamily="34" charset="-120"/>
               </a:rPr>
-              <a:t>sign</a:t>
+              <a:t>signed</a:t>
             </a:r>
             <a:endParaRPr lang="en-US" sz="1400" dirty="0"/>
           </a:p>
@@ -21371,40 +22076,67 @@
       </p:sp>
       <p:sp>
         <p:nvSpPr>
+          <p:cNvPr id="33" name="Shape 31"/>
+          <p:cNvSpPr/>
+          <p:nvPr/>
+        </p:nvSpPr>
+        <p:spPr>
+          <a:xfrm>
+            <a:off x="365760" y="4096512"/>
+            <a:ext cx="1371600" cy="804672"/>
+          </a:xfrm>
+          <a:prstGeom prst="rect">
+            <a:avLst>
+              <a:gd name="adj" fmla="val 6818"/>
+            </a:avLst>
+          </a:prstGeom>
+          <a:solidFill>
+            <a:srgbClr val="E2E8F0"/>
+          </a:solidFill>
+          <a:ln w="12700">
+            <a:solidFill>
+              <a:srgbClr val="E2E8F0"/>
+            </a:solidFill>
+            <a:prstDash val="solid"/>
+          </a:ln>
+        </p:spPr>
+      </p:sp>
+      <p:sp>
+        <p:nvSpPr>
           <p:cNvPr id="34" name="Text 32"/>
           <p:cNvSpPr/>
           <p:nvPr/>
         </p:nvSpPr>
         <p:spPr>
           <a:xfrm>
-            <a:off x="6016752" y="3364992"/>
-            <a:ext cx="411480" cy="475488"/>
-          </a:xfrm>
-          <a:prstGeom prst="rect">
-            <a:avLst/>
-          </a:prstGeom>
-          <a:noFill/>
-          <a:ln/>
-        </p:spPr>
-        <p:txBody>
-          <a:bodyPr wrap="square" lIns="0" tIns="0" rIns="0" bIns="0" rtlCol="0" anchor="ctr"/>
-          <a:lstStyle/>
-          <a:p>
-            <a:pPr algn="ctr" indent="0" marL="0">
-              <a:buNone/>
-            </a:pPr>
-            <a:r>
-              <a:rPr lang="en-US" sz="1600" b="1" dirty="0">
-                <a:solidFill>
-                  <a:srgbClr val="0D9488"/>
+            <a:off x="365760" y="4096512"/>
+            <a:ext cx="1371600" cy="804672"/>
+          </a:xfrm>
+          <a:prstGeom prst="rect">
+            <a:avLst/>
+          </a:prstGeom>
+          <a:noFill/>
+          <a:ln/>
+        </p:spPr>
+        <p:txBody>
+          <a:bodyPr wrap="square" lIns="0" tIns="0" rIns="0" bIns="0" rtlCol="0" anchor="ctr"/>
+          <a:lstStyle/>
+          <a:p>
+            <a:pPr algn="ctr" indent="0" marL="0">
+              <a:buNone/>
+            </a:pPr>
+            <a:r>
+              <a:rPr lang="en-US" sz="1100" b="1" dirty="0">
+                <a:solidFill>
+                  <a:srgbClr val="475569"/>
                 </a:solidFill>
                 <a:latin typeface="Trebuchet MS" pitchFamily="34" charset="0"/>
                 <a:ea typeface="Trebuchet MS" pitchFamily="34" charset="-122"/>
                 <a:cs typeface="Trebuchet MS" pitchFamily="34" charset="-120"/>
               </a:rPr>
-              <a:t>·</a:t>
-            </a:r>
-            <a:endParaRPr lang="en-US" sz="1600" dirty="0"/>
+              <a:t>Phonemes</a:t>
+            </a:r>
+            <a:endParaRPr lang="en-US" sz="1100" dirty="0"/>
           </a:p>
         </p:txBody>
       </p:sp>
@@ -21416,74 +22148,8 @@
         </p:nvSpPr>
         <p:spPr>
           <a:xfrm>
-            <a:off x="6428232" y="3364992"/>
-            <a:ext cx="1645920" cy="475488"/>
-          </a:xfrm>
-          <a:prstGeom prst="rect">
-            <a:avLst>
-              <a:gd name="adj" fmla="val 9615"/>
-            </a:avLst>
-          </a:prstGeom>
-          <a:solidFill>
-            <a:srgbClr val="FFFFFF"/>
-          </a:solidFill>
-          <a:ln w="12700">
-            <a:solidFill>
-              <a:srgbClr val="0D9488"/>
-            </a:solidFill>
-            <a:prstDash val="solid"/>
-          </a:ln>
-        </p:spPr>
-      </p:sp>
-      <p:sp>
-        <p:nvSpPr>
-          <p:cNvPr id="36" name="Text 34"/>
-          <p:cNvSpPr/>
-          <p:nvPr/>
-        </p:nvSpPr>
-        <p:spPr>
-          <a:xfrm>
-            <a:off x="6428232" y="3364992"/>
-            <a:ext cx="1645920" cy="475488"/>
-          </a:xfrm>
-          <a:prstGeom prst="rect">
-            <a:avLst/>
-          </a:prstGeom>
-          <a:noFill/>
-          <a:ln/>
-        </p:spPr>
-        <p:txBody>
-          <a:bodyPr wrap="square" lIns="0" tIns="0" rIns="0" bIns="0" rtlCol="0" anchor="ctr"/>
-          <a:lstStyle/>
-          <a:p>
-            <a:pPr algn="ctr" indent="0" marL="0">
-              <a:buNone/>
-            </a:pPr>
-            <a:r>
-              <a:rPr lang="en-US" sz="1400" b="1" dirty="0">
-                <a:solidFill>
-                  <a:srgbClr val="0D9488"/>
-                </a:solidFill>
-                <a:latin typeface="Trebuchet MS" pitchFamily="34" charset="0"/>
-                <a:ea typeface="Trebuchet MS" pitchFamily="34" charset="-122"/>
-                <a:cs typeface="Trebuchet MS" pitchFamily="34" charset="-120"/>
-              </a:rPr>
-              <a:t>ment</a:t>
-            </a:r>
-            <a:endParaRPr lang="en-US" sz="1400" dirty="0"/>
-          </a:p>
-        </p:txBody>
-      </p:sp>
-      <p:sp>
-        <p:nvSpPr>
-          <p:cNvPr id="37" name="Shape 35"/>
-          <p:cNvSpPr/>
-          <p:nvPr/>
-        </p:nvSpPr>
-        <p:spPr>
-          <a:xfrm>
-            <a:off x="365760" y="4096512"/>
-            <a:ext cx="1371600" cy="804672"/>
+            <a:off x="1874520" y="4096512"/>
+            <a:ext cx="6903720" cy="804672"/>
           </a:xfrm>
           <a:prstGeom prst="rect">
             <a:avLst>
@@ -21491,85 +22157,19 @@
             </a:avLst>
           </a:prstGeom>
           <a:solidFill>
-            <a:srgbClr val="E2E8F0"/>
+            <a:srgbClr val="F8FAFC"/>
           </a:solidFill>
           <a:ln w="12700">
             <a:solidFill>
               <a:srgbClr val="E2E8F0"/>
             </a:solidFill>
-            <a:prstDash val="solid"/>
-          </a:ln>
-        </p:spPr>
-      </p:sp>
-      <p:sp>
-        <p:nvSpPr>
-          <p:cNvPr id="38" name="Text 36"/>
-          <p:cNvSpPr/>
-          <p:nvPr/>
-        </p:nvSpPr>
-        <p:spPr>
-          <a:xfrm>
-            <a:off x="365760" y="4096512"/>
-            <a:ext cx="1371600" cy="804672"/>
-          </a:xfrm>
-          <a:prstGeom prst="rect">
-            <a:avLst/>
-          </a:prstGeom>
-          <a:noFill/>
-          <a:ln/>
-        </p:spPr>
-        <p:txBody>
-          <a:bodyPr wrap="square" lIns="0" tIns="0" rIns="0" bIns="0" rtlCol="0" anchor="ctr"/>
-          <a:lstStyle/>
-          <a:p>
-            <a:pPr algn="ctr" indent="0" marL="0">
-              <a:buNone/>
-            </a:pPr>
-            <a:r>
-              <a:rPr lang="en-US" sz="1100" b="1" dirty="0">
-                <a:solidFill>
-                  <a:srgbClr val="475569"/>
-                </a:solidFill>
-                <a:latin typeface="Trebuchet MS" pitchFamily="34" charset="0"/>
-                <a:ea typeface="Trebuchet MS" pitchFamily="34" charset="-122"/>
-                <a:cs typeface="Trebuchet MS" pitchFamily="34" charset="-120"/>
-              </a:rPr>
-              <a:t>Phonemes</a:t>
-            </a:r>
-            <a:endParaRPr lang="en-US" sz="1100" dirty="0"/>
-          </a:p>
-        </p:txBody>
-      </p:sp>
-      <p:sp>
-        <p:nvSpPr>
-          <p:cNvPr id="39" name="Shape 37"/>
-          <p:cNvSpPr/>
-          <p:nvPr/>
-        </p:nvSpPr>
-        <p:spPr>
-          <a:xfrm>
-            <a:off x="1874520" y="4096512"/>
-            <a:ext cx="6903720" cy="804672"/>
-          </a:xfrm>
-          <a:prstGeom prst="rect">
-            <a:avLst>
-              <a:gd name="adj" fmla="val 6818"/>
-            </a:avLst>
-          </a:prstGeom>
-          <a:solidFill>
-            <a:srgbClr val="F8FAFC"/>
-          </a:solidFill>
-          <a:ln w="12700">
-            <a:solidFill>
-              <a:srgbClr val="E2E8F0"/>
-            </a:solidFill>
             <a:prstDash val="dash"/>
           </a:ln>
         </p:spPr>
       </p:sp>
       <p:sp>
         <p:nvSpPr>
-          <p:cNvPr id="40" name="Text 38"/>
+          <p:cNvPr id="36" name="Text 34"/>
           <p:cNvSpPr/>
           <p:nvPr/>
         </p:nvSpPr>
@@ -21892,7 +22492,7 @@
                 <a:ea typeface="Calibri" pitchFamily="34" charset="-122"/>
                 <a:cs typeface="Calibri" pitchFamily="34" charset="-120"/>
               </a:rPr>
-              <a:t>Word Labs  •  wordlabs.app  •  Root: 'sign' = mark, symbol, indicate</a:t>
+              <a:t>Word Labs  •  wordlabs.app  •  Root: 'sign' = mark, symbol, or signal</a:t>
             </a:r>
             <a:endParaRPr lang="en-US" sz="800" dirty="0"/>
           </a:p>
@@ -22031,7 +22631,7 @@
                 <a:ea typeface="Trebuchet MS" pitchFamily="34" charset="-122"/>
                 <a:cs typeface="Trebuchet MS" pitchFamily="34" charset="-120"/>
               </a:rPr>
-              <a:t>assignment</a:t>
+              <a:t>resigned</a:t>
             </a:r>
             <a:endParaRPr lang="en-US" sz="2800" dirty="0"/>
           </a:p>
@@ -22170,7 +22770,7 @@
                 <a:ea typeface="Trebuchet MS" pitchFamily="34" charset="-122"/>
                 <a:cs typeface="Trebuchet MS" pitchFamily="34" charset="-120"/>
               </a:rPr>
-              <a:t>as</a:t>
+              <a:t>re</a:t>
             </a:r>
             <a:endParaRPr lang="en-US" sz="1300" dirty="0"/>
           </a:p>
@@ -22209,7 +22809,7 @@
                 <a:ea typeface="Calibri" pitchFamily="34" charset="-122"/>
                 <a:cs typeface="Calibri" pitchFamily="34" charset="-120"/>
               </a:rPr>
-              <a:t>to, towards</a:t>
+              <a:t>again or back</a:t>
             </a:r>
             <a:endParaRPr lang="en-US" sz="850" dirty="0"/>
           </a:p>
@@ -22217,46 +22817,7 @@
       </p:sp>
       <p:sp>
         <p:nvSpPr>
-          <p:cNvPr id="19" name="Text 17"/>
-          <p:cNvSpPr/>
-          <p:nvPr/>
-        </p:nvSpPr>
-        <p:spPr>
-          <a:xfrm>
-            <a:off x="2221992" y="2752344"/>
-            <a:ext cx="1828800" cy="182880"/>
-          </a:xfrm>
-          <a:prstGeom prst="rect">
-            <a:avLst/>
-          </a:prstGeom>
-          <a:noFill/>
-          <a:ln/>
-        </p:spPr>
-        <p:txBody>
-          <a:bodyPr wrap="square" lIns="0" tIns="0" rIns="0" bIns="0" rtlCol="0" anchor="t"/>
-          <a:lstStyle/>
-          <a:p>
-            <a:pPr algn="ctr" indent="0" marL="0">
-              <a:buNone/>
-            </a:pPr>
-            <a:r>
-              <a:rPr lang="en-US" sz="700" i="1" dirty="0">
-                <a:solidFill>
-                  <a:srgbClr val="94A3B8"/>
-                </a:solidFill>
-                <a:latin typeface="Calibri" pitchFamily="34" charset="0"/>
-                <a:ea typeface="Calibri" pitchFamily="34" charset="-122"/>
-                <a:cs typeface="Calibri" pitchFamily="34" charset="-120"/>
-              </a:rPr>
-              <a:t>ad → as before 's'</a:t>
-            </a:r>
-            <a:endParaRPr lang="en-US" sz="700" dirty="0"/>
-          </a:p>
-        </p:txBody>
-      </p:sp>
-      <p:sp>
-        <p:nvSpPr>
-          <p:cNvPr id="20" name="Shape 18"/>
+          <p:cNvPr id="19" name="Shape 17"/>
           <p:cNvSpPr/>
           <p:nvPr/>
         </p:nvSpPr>
@@ -22290,7 +22851,7 @@
       </p:sp>
       <p:sp>
         <p:nvSpPr>
-          <p:cNvPr id="21" name="Text 19"/>
+          <p:cNvPr id="20" name="Text 18"/>
           <p:cNvSpPr/>
           <p:nvPr/>
         </p:nvSpPr>
@@ -22329,7 +22890,7 @@
       </p:sp>
       <p:sp>
         <p:nvSpPr>
-          <p:cNvPr id="22" name="Text 20"/>
+          <p:cNvPr id="21" name="Text 19"/>
           <p:cNvSpPr/>
           <p:nvPr/>
         </p:nvSpPr>
@@ -22360,7 +22921,7 @@
                 <a:ea typeface="Calibri" pitchFamily="34" charset="-122"/>
                 <a:cs typeface="Calibri" pitchFamily="34" charset="-120"/>
               </a:rPr>
-              <a:t>mark, symbol</a:t>
+              <a:t>mark or symbol</a:t>
             </a:r>
             <a:endParaRPr lang="en-US" sz="850" dirty="0"/>
           </a:p>
@@ -22368,7 +22929,7 @@
       </p:sp>
       <p:sp>
         <p:nvSpPr>
-          <p:cNvPr id="23" name="Shape 21"/>
+          <p:cNvPr id="22" name="Shape 20"/>
           <p:cNvSpPr/>
           <p:nvPr/>
         </p:nvSpPr>
@@ -22402,7 +22963,7 @@
       </p:sp>
       <p:sp>
         <p:nvSpPr>
-          <p:cNvPr id="24" name="Text 22"/>
+          <p:cNvPr id="23" name="Text 21"/>
           <p:cNvSpPr/>
           <p:nvPr/>
         </p:nvSpPr>
@@ -22433,7 +22994,7 @@
                 <a:ea typeface="Trebuchet MS" pitchFamily="34" charset="-122"/>
                 <a:cs typeface="Trebuchet MS" pitchFamily="34" charset="-120"/>
               </a:rPr>
-              <a:t>ment</a:t>
+              <a:t>ed</a:t>
             </a:r>
             <a:endParaRPr lang="en-US" sz="1300" dirty="0"/>
           </a:p>
@@ -22441,7 +23002,7 @@
       </p:sp>
       <p:sp>
         <p:nvSpPr>
-          <p:cNvPr id="25" name="Text 23"/>
+          <p:cNvPr id="24" name="Text 22"/>
           <p:cNvSpPr/>
           <p:nvPr/>
         </p:nvSpPr>
@@ -22472,7 +23033,7 @@
                 <a:ea typeface="Calibri" pitchFamily="34" charset="-122"/>
                 <a:cs typeface="Calibri" pitchFamily="34" charset="-120"/>
               </a:rPr>
-              <a:t>result or action of</a:t>
+              <a:t>past tense</a:t>
             </a:r>
             <a:endParaRPr lang="en-US" sz="850" dirty="0"/>
           </a:p>
@@ -22480,7 +23041,7 @@
       </p:sp>
       <p:sp>
         <p:nvSpPr>
-          <p:cNvPr id="26" name="Shape 24"/>
+          <p:cNvPr id="25" name="Shape 23"/>
           <p:cNvSpPr/>
           <p:nvPr/>
         </p:nvSpPr>
@@ -22507,7 +23068,7 @@
       </p:sp>
       <p:sp>
         <p:nvSpPr>
-          <p:cNvPr id="27" name="Text 25"/>
+          <p:cNvPr id="26" name="Text 24"/>
           <p:cNvSpPr/>
           <p:nvPr/>
         </p:nvSpPr>
@@ -22546,7 +23107,7 @@
       </p:sp>
       <p:sp>
         <p:nvSpPr>
-          <p:cNvPr id="28" name="Shape 26"/>
+          <p:cNvPr id="27" name="Shape 25"/>
           <p:cNvSpPr/>
           <p:nvPr/>
         </p:nvSpPr>
@@ -22573,13 +23134,13 @@
       </p:sp>
       <p:sp>
         <p:nvSpPr>
-          <p:cNvPr id="29" name="Shape 27"/>
-          <p:cNvSpPr/>
-          <p:nvPr/>
-        </p:nvSpPr>
-        <p:spPr>
-          <a:xfrm>
-            <a:off x="2313432" y="3364992"/>
+          <p:cNvPr id="28" name="Shape 26"/>
+          <p:cNvSpPr/>
+          <p:nvPr/>
+        </p:nvSpPr>
+        <p:spPr>
+          <a:xfrm>
+            <a:off x="2999232" y="3364992"/>
             <a:ext cx="1645920" cy="475488"/>
           </a:xfrm>
           <a:prstGeom prst="rect">
@@ -22600,13 +23161,13 @@
       </p:sp>
       <p:sp>
         <p:nvSpPr>
-          <p:cNvPr id="30" name="Text 28"/>
-          <p:cNvSpPr/>
-          <p:nvPr/>
-        </p:nvSpPr>
-        <p:spPr>
-          <a:xfrm>
-            <a:off x="2313432" y="3364992"/>
+          <p:cNvPr id="29" name="Text 27"/>
+          <p:cNvSpPr/>
+          <p:nvPr/>
+        </p:nvSpPr>
+        <p:spPr>
+          <a:xfrm>
+            <a:off x="2999232" y="3364992"/>
             <a:ext cx="1645920" cy="475488"/>
           </a:xfrm>
           <a:prstGeom prst="rect">
@@ -22631,7 +23192,7 @@
                 <a:ea typeface="Trebuchet MS" pitchFamily="34" charset="-122"/>
                 <a:cs typeface="Trebuchet MS" pitchFamily="34" charset="-120"/>
               </a:rPr>
-              <a:t>as</a:t>
+              <a:t>re</a:t>
             </a:r>
             <a:endParaRPr lang="en-US" sz="1400" dirty="0"/>
           </a:p>
@@ -22639,14 +23200,14 @@
       </p:sp>
       <p:sp>
         <p:nvSpPr>
-          <p:cNvPr id="31" name="Text 29"/>
-          <p:cNvSpPr/>
-          <p:nvPr/>
-        </p:nvSpPr>
-        <p:spPr>
-          <a:xfrm>
-            <a:off x="3959352" y="3364992"/>
-            <a:ext cx="411480" cy="475488"/>
+          <p:cNvPr id="30" name="Text 28"/>
+          <p:cNvSpPr/>
+          <p:nvPr/>
+        </p:nvSpPr>
+        <p:spPr>
+          <a:xfrm>
+            <a:off x="4645152" y="3364992"/>
+            <a:ext cx="1097280" cy="475488"/>
           </a:xfrm>
           <a:prstGeom prst="rect">
             <a:avLst/>
@@ -22678,13 +23239,13 @@
       </p:sp>
       <p:sp>
         <p:nvSpPr>
-          <p:cNvPr id="32" name="Shape 30"/>
-          <p:cNvSpPr/>
-          <p:nvPr/>
-        </p:nvSpPr>
-        <p:spPr>
-          <a:xfrm>
-            <a:off x="4370832" y="3364992"/>
+          <p:cNvPr id="31" name="Shape 29"/>
+          <p:cNvSpPr/>
+          <p:nvPr/>
+        </p:nvSpPr>
+        <p:spPr>
+          <a:xfrm>
+            <a:off x="5742432" y="3364992"/>
             <a:ext cx="1645920" cy="475488"/>
           </a:xfrm>
           <a:prstGeom prst="rect">
@@ -22705,13 +23266,13 @@
       </p:sp>
       <p:sp>
         <p:nvSpPr>
-          <p:cNvPr id="33" name="Text 31"/>
-          <p:cNvSpPr/>
-          <p:nvPr/>
-        </p:nvSpPr>
-        <p:spPr>
-          <a:xfrm>
-            <a:off x="4370832" y="3364992"/>
+          <p:cNvPr id="32" name="Text 30"/>
+          <p:cNvSpPr/>
+          <p:nvPr/>
+        </p:nvSpPr>
+        <p:spPr>
+          <a:xfrm>
+            <a:off x="5742432" y="3364992"/>
             <a:ext cx="1645920" cy="475488"/>
           </a:xfrm>
           <a:prstGeom prst="rect">
@@ -22736,7 +23297,7 @@
                 <a:ea typeface="Trebuchet MS" pitchFamily="34" charset="-122"/>
                 <a:cs typeface="Trebuchet MS" pitchFamily="34" charset="-120"/>
               </a:rPr>
-              <a:t>sign</a:t>
+              <a:t>signed</a:t>
             </a:r>
             <a:endParaRPr lang="en-US" sz="1400" dirty="0"/>
           </a:p>
@@ -22744,40 +23305,67 @@
       </p:sp>
       <p:sp>
         <p:nvSpPr>
+          <p:cNvPr id="33" name="Shape 31"/>
+          <p:cNvSpPr/>
+          <p:nvPr/>
+        </p:nvSpPr>
+        <p:spPr>
+          <a:xfrm>
+            <a:off x="365760" y="4096512"/>
+            <a:ext cx="1371600" cy="804672"/>
+          </a:xfrm>
+          <a:prstGeom prst="rect">
+            <a:avLst>
+              <a:gd name="adj" fmla="val 6818"/>
+            </a:avLst>
+          </a:prstGeom>
+          <a:solidFill>
+            <a:srgbClr val="E2E8F0"/>
+          </a:solidFill>
+          <a:ln w="12700">
+            <a:solidFill>
+              <a:srgbClr val="E2E8F0"/>
+            </a:solidFill>
+            <a:prstDash val="solid"/>
+          </a:ln>
+        </p:spPr>
+      </p:sp>
+      <p:sp>
+        <p:nvSpPr>
           <p:cNvPr id="34" name="Text 32"/>
           <p:cNvSpPr/>
           <p:nvPr/>
         </p:nvSpPr>
         <p:spPr>
           <a:xfrm>
-            <a:off x="6016752" y="3364992"/>
-            <a:ext cx="411480" cy="475488"/>
-          </a:xfrm>
-          <a:prstGeom prst="rect">
-            <a:avLst/>
-          </a:prstGeom>
-          <a:noFill/>
-          <a:ln/>
-        </p:spPr>
-        <p:txBody>
-          <a:bodyPr wrap="square" lIns="0" tIns="0" rIns="0" bIns="0" rtlCol="0" anchor="ctr"/>
-          <a:lstStyle/>
-          <a:p>
-            <a:pPr algn="ctr" indent="0" marL="0">
-              <a:buNone/>
-            </a:pPr>
-            <a:r>
-              <a:rPr lang="en-US" sz="1600" b="1" dirty="0">
-                <a:solidFill>
-                  <a:srgbClr val="0D9488"/>
+            <a:off x="365760" y="4096512"/>
+            <a:ext cx="1371600" cy="804672"/>
+          </a:xfrm>
+          <a:prstGeom prst="rect">
+            <a:avLst/>
+          </a:prstGeom>
+          <a:noFill/>
+          <a:ln/>
+        </p:spPr>
+        <p:txBody>
+          <a:bodyPr wrap="square" lIns="0" tIns="0" rIns="0" bIns="0" rtlCol="0" anchor="ctr"/>
+          <a:lstStyle/>
+          <a:p>
+            <a:pPr algn="ctr" indent="0" marL="0">
+              <a:buNone/>
+            </a:pPr>
+            <a:r>
+              <a:rPr lang="en-US" sz="1100" b="1" dirty="0">
+                <a:solidFill>
+                  <a:srgbClr val="475569"/>
                 </a:solidFill>
                 <a:latin typeface="Trebuchet MS" pitchFamily="34" charset="0"/>
                 <a:ea typeface="Trebuchet MS" pitchFamily="34" charset="-122"/>
                 <a:cs typeface="Trebuchet MS" pitchFamily="34" charset="-120"/>
               </a:rPr>
-              <a:t>·</a:t>
-            </a:r>
-            <a:endParaRPr lang="en-US" sz="1600" dirty="0"/>
+              <a:t>Phonemes</a:t>
+            </a:r>
+            <a:endParaRPr lang="en-US" sz="1100" dirty="0"/>
           </a:p>
         </p:txBody>
       </p:sp>
@@ -22789,156 +23377,156 @@
         </p:nvSpPr>
         <p:spPr>
           <a:xfrm>
-            <a:off x="6428232" y="3364992"/>
-            <a:ext cx="1645920" cy="475488"/>
+            <a:off x="1874520" y="4096512"/>
+            <a:ext cx="6903720" cy="804672"/>
           </a:xfrm>
           <a:prstGeom prst="rect">
             <a:avLst>
-              <a:gd name="adj" fmla="val 9615"/>
+              <a:gd name="adj" fmla="val 6818"/>
             </a:avLst>
           </a:prstGeom>
           <a:solidFill>
+            <a:srgbClr val="FCE7F3"/>
+          </a:solidFill>
+          <a:ln w="12700">
+            <a:solidFill>
+              <a:srgbClr val="DB2777"/>
+            </a:solidFill>
+            <a:prstDash val="solid"/>
+          </a:ln>
+        </p:spPr>
+      </p:sp>
+      <p:sp>
+        <p:nvSpPr>
+          <p:cNvPr id="36" name="Shape 34"/>
+          <p:cNvSpPr/>
+          <p:nvPr/>
+        </p:nvSpPr>
+        <p:spPr>
+          <a:xfrm>
+            <a:off x="2254649" y="4169664"/>
+            <a:ext cx="685800" cy="384048"/>
+          </a:xfrm>
+          <a:prstGeom prst="rect">
+            <a:avLst>
+              <a:gd name="adj" fmla="val 9524"/>
+            </a:avLst>
+          </a:prstGeom>
+          <a:solidFill>
             <a:srgbClr val="FFFFFF"/>
           </a:solidFill>
           <a:ln w="12700">
             <a:solidFill>
-              <a:srgbClr val="0D9488"/>
-            </a:solidFill>
-            <a:prstDash val="solid"/>
-          </a:ln>
-        </p:spPr>
-      </p:sp>
-      <p:sp>
-        <p:nvSpPr>
-          <p:cNvPr id="36" name="Text 34"/>
-          <p:cNvSpPr/>
-          <p:nvPr/>
-        </p:nvSpPr>
-        <p:spPr>
-          <a:xfrm>
-            <a:off x="6428232" y="3364992"/>
-            <a:ext cx="1645920" cy="475488"/>
-          </a:xfrm>
-          <a:prstGeom prst="rect">
-            <a:avLst/>
-          </a:prstGeom>
-          <a:noFill/>
-          <a:ln/>
-        </p:spPr>
-        <p:txBody>
-          <a:bodyPr wrap="square" lIns="0" tIns="0" rIns="0" bIns="0" rtlCol="0" anchor="ctr"/>
-          <a:lstStyle/>
-          <a:p>
-            <a:pPr algn="ctr" indent="0" marL="0">
-              <a:buNone/>
-            </a:pPr>
-            <a:r>
-              <a:rPr lang="en-US" sz="1400" b="1" dirty="0">
-                <a:solidFill>
-                  <a:srgbClr val="0D9488"/>
+              <a:srgbClr val="DB2777"/>
+            </a:solidFill>
+            <a:prstDash val="solid"/>
+          </a:ln>
+        </p:spPr>
+      </p:sp>
+      <p:sp>
+        <p:nvSpPr>
+          <p:cNvPr id="37" name="Text 35"/>
+          <p:cNvSpPr/>
+          <p:nvPr/>
+        </p:nvSpPr>
+        <p:spPr>
+          <a:xfrm>
+            <a:off x="2254649" y="4169664"/>
+            <a:ext cx="685800" cy="384048"/>
+          </a:xfrm>
+          <a:prstGeom prst="rect">
+            <a:avLst/>
+          </a:prstGeom>
+          <a:noFill/>
+          <a:ln/>
+        </p:spPr>
+        <p:txBody>
+          <a:bodyPr wrap="square" lIns="0" tIns="0" rIns="0" bIns="0" rtlCol="0" anchor="ctr"/>
+          <a:lstStyle/>
+          <a:p>
+            <a:pPr algn="ctr" indent="0" marL="0">
+              <a:buNone/>
+            </a:pPr>
+            <a:r>
+              <a:rPr lang="en-US" sz="900" b="1" dirty="0">
+                <a:solidFill>
+                  <a:srgbClr val="9D174D"/>
                 </a:solidFill>
                 <a:latin typeface="Trebuchet MS" pitchFamily="34" charset="0"/>
                 <a:ea typeface="Trebuchet MS" pitchFamily="34" charset="-122"/>
                 <a:cs typeface="Trebuchet MS" pitchFamily="34" charset="-120"/>
               </a:rPr>
-              <a:t>ment</a:t>
-            </a:r>
-            <a:endParaRPr lang="en-US" sz="1400" dirty="0"/>
-          </a:p>
-        </p:txBody>
-      </p:sp>
-      <p:sp>
-        <p:nvSpPr>
-          <p:cNvPr id="37" name="Shape 35"/>
-          <p:cNvSpPr/>
-          <p:nvPr/>
-        </p:nvSpPr>
-        <p:spPr>
-          <a:xfrm>
-            <a:off x="365760" y="4096512"/>
-            <a:ext cx="1371600" cy="804672"/>
+              <a:t>r</a:t>
+            </a:r>
+            <a:endParaRPr lang="en-US" sz="900" dirty="0"/>
+          </a:p>
+        </p:txBody>
+      </p:sp>
+      <p:sp>
+        <p:nvSpPr>
+          <p:cNvPr id="38" name="Shape 36"/>
+          <p:cNvSpPr/>
+          <p:nvPr/>
+        </p:nvSpPr>
+        <p:spPr>
+          <a:xfrm>
+            <a:off x="3293146" y="4169664"/>
+            <a:ext cx="685800" cy="384048"/>
           </a:xfrm>
           <a:prstGeom prst="rect">
             <a:avLst>
-              <a:gd name="adj" fmla="val 6818"/>
+              <a:gd name="adj" fmla="val 9524"/>
             </a:avLst>
           </a:prstGeom>
           <a:solidFill>
-            <a:srgbClr val="E2E8F0"/>
-          </a:solidFill>
-          <a:ln w="12700">
-            <a:solidFill>
-              <a:srgbClr val="E2E8F0"/>
-            </a:solidFill>
-            <a:prstDash val="solid"/>
-          </a:ln>
-        </p:spPr>
-      </p:sp>
-      <p:sp>
-        <p:nvSpPr>
-          <p:cNvPr id="38" name="Text 36"/>
-          <p:cNvSpPr/>
-          <p:nvPr/>
-        </p:nvSpPr>
-        <p:spPr>
-          <a:xfrm>
-            <a:off x="365760" y="4096512"/>
-            <a:ext cx="1371600" cy="804672"/>
-          </a:xfrm>
-          <a:prstGeom prst="rect">
-            <a:avLst/>
-          </a:prstGeom>
-          <a:noFill/>
-          <a:ln/>
-        </p:spPr>
-        <p:txBody>
-          <a:bodyPr wrap="square" lIns="0" tIns="0" rIns="0" bIns="0" rtlCol="0" anchor="ctr"/>
-          <a:lstStyle/>
-          <a:p>
-            <a:pPr algn="ctr" indent="0" marL="0">
-              <a:buNone/>
-            </a:pPr>
-            <a:r>
-              <a:rPr lang="en-US" sz="1100" b="1" dirty="0">
-                <a:solidFill>
-                  <a:srgbClr val="475569"/>
+            <a:srgbClr val="FFFFFF"/>
+          </a:solidFill>
+          <a:ln w="12700">
+            <a:solidFill>
+              <a:srgbClr val="DB2777"/>
+            </a:solidFill>
+            <a:prstDash val="solid"/>
+          </a:ln>
+        </p:spPr>
+      </p:sp>
+      <p:sp>
+        <p:nvSpPr>
+          <p:cNvPr id="39" name="Text 37"/>
+          <p:cNvSpPr/>
+          <p:nvPr/>
+        </p:nvSpPr>
+        <p:spPr>
+          <a:xfrm>
+            <a:off x="3293146" y="4169664"/>
+            <a:ext cx="685800" cy="384048"/>
+          </a:xfrm>
+          <a:prstGeom prst="rect">
+            <a:avLst/>
+          </a:prstGeom>
+          <a:noFill/>
+          <a:ln/>
+        </p:spPr>
+        <p:txBody>
+          <a:bodyPr wrap="square" lIns="0" tIns="0" rIns="0" bIns="0" rtlCol="0" anchor="ctr"/>
+          <a:lstStyle/>
+          <a:p>
+            <a:pPr algn="ctr" indent="0" marL="0">
+              <a:buNone/>
+            </a:pPr>
+            <a:r>
+              <a:rPr lang="en-US" sz="900" b="1" dirty="0">
+                <a:solidFill>
+                  <a:srgbClr val="9D174D"/>
                 </a:solidFill>
                 <a:latin typeface="Trebuchet MS" pitchFamily="34" charset="0"/>
                 <a:ea typeface="Trebuchet MS" pitchFamily="34" charset="-122"/>
                 <a:cs typeface="Trebuchet MS" pitchFamily="34" charset="-120"/>
               </a:rPr>
-              <a:t>Phonemes</a:t>
-            </a:r>
-            <a:endParaRPr lang="en-US" sz="1100" dirty="0"/>
-          </a:p>
-        </p:txBody>
-      </p:sp>
-      <p:sp>
-        <p:nvSpPr>
-          <p:cNvPr id="39" name="Shape 37"/>
-          <p:cNvSpPr/>
-          <p:nvPr/>
-        </p:nvSpPr>
-        <p:spPr>
-          <a:xfrm>
-            <a:off x="1874520" y="4096512"/>
-            <a:ext cx="6903720" cy="804672"/>
-          </a:xfrm>
-          <a:prstGeom prst="rect">
-            <a:avLst>
-              <a:gd name="adj" fmla="val 6818"/>
-            </a:avLst>
-          </a:prstGeom>
-          <a:solidFill>
-            <a:srgbClr val="FCE7F3"/>
-          </a:solidFill>
-          <a:ln w="12700">
-            <a:solidFill>
-              <a:srgbClr val="DB2777"/>
-            </a:solidFill>
-            <a:prstDash val="solid"/>
-          </a:ln>
-        </p:spPr>
+              <a:t>e</a:t>
+            </a:r>
+            <a:endParaRPr lang="en-US" sz="900" dirty="0"/>
+          </a:p>
+        </p:txBody>
       </p:sp>
       <p:sp>
         <p:nvSpPr>
@@ -22948,7 +23536,7 @@
         </p:nvSpPr>
         <p:spPr>
           <a:xfrm>
-            <a:off x="2023872" y="4169664"/>
+            <a:off x="4331643" y="4169664"/>
             <a:ext cx="685800" cy="384048"/>
           </a:xfrm>
           <a:prstGeom prst="rect">
@@ -22975,7 +23563,7 @@
         </p:nvSpPr>
         <p:spPr>
           <a:xfrm>
-            <a:off x="2023872" y="4169664"/>
+            <a:off x="4331643" y="4169664"/>
             <a:ext cx="685800" cy="384048"/>
           </a:xfrm>
           <a:prstGeom prst="rect">
@@ -23000,7 +23588,7 @@
                 <a:ea typeface="Trebuchet MS" pitchFamily="34" charset="-122"/>
                 <a:cs typeface="Trebuchet MS" pitchFamily="34" charset="-120"/>
               </a:rPr>
-              <a:t>a</a:t>
+              <a:t>s</a:t>
             </a:r>
             <a:endParaRPr lang="en-US" sz="900" dirty="0"/>
           </a:p>
@@ -23008,13 +23596,52 @@
       </p:sp>
       <p:sp>
         <p:nvSpPr>
-          <p:cNvPr id="42" name="Shape 40"/>
-          <p:cNvSpPr/>
-          <p:nvPr/>
-        </p:nvSpPr>
-        <p:spPr>
-          <a:xfrm>
-            <a:off x="2831592" y="4169664"/>
+          <p:cNvPr id="42" name="Text 40"/>
+          <p:cNvSpPr/>
+          <p:nvPr/>
+        </p:nvSpPr>
+        <p:spPr>
+          <a:xfrm>
+            <a:off x="4331643" y="4572000"/>
+            <a:ext cx="685800" cy="219456"/>
+          </a:xfrm>
+          <a:prstGeom prst="rect">
+            <a:avLst/>
+          </a:prstGeom>
+          <a:noFill/>
+          <a:ln/>
+        </p:spPr>
+        <p:txBody>
+          <a:bodyPr wrap="square" lIns="0" tIns="0" rIns="0" bIns="0" rtlCol="0" anchor="t"/>
+          <a:lstStyle/>
+          <a:p>
+            <a:pPr algn="ctr" indent="0" marL="0">
+              <a:buNone/>
+            </a:pPr>
+            <a:r>
+              <a:rPr lang="en-US" sz="750" i="1" dirty="0">
+                <a:solidFill>
+                  <a:srgbClr val="94A3B8"/>
+                </a:solidFill>
+                <a:latin typeface="Calibri" pitchFamily="34" charset="0"/>
+                <a:ea typeface="Calibri" pitchFamily="34" charset="-122"/>
+                <a:cs typeface="Calibri" pitchFamily="34" charset="-120"/>
+              </a:rPr>
+              <a:t>/z/</a:t>
+            </a:r>
+            <a:endParaRPr lang="en-US" sz="750" dirty="0"/>
+          </a:p>
+        </p:txBody>
+      </p:sp>
+      <p:sp>
+        <p:nvSpPr>
+          <p:cNvPr id="43" name="Shape 41"/>
+          <p:cNvSpPr/>
+          <p:nvPr/>
+        </p:nvSpPr>
+        <p:spPr>
+          <a:xfrm>
+            <a:off x="5370141" y="4169664"/>
             <a:ext cx="685800" cy="384048"/>
           </a:xfrm>
           <a:prstGeom prst="rect">
@@ -23035,13 +23662,13 @@
       </p:sp>
       <p:sp>
         <p:nvSpPr>
-          <p:cNvPr id="43" name="Text 41"/>
-          <p:cNvSpPr/>
-          <p:nvPr/>
-        </p:nvSpPr>
-        <p:spPr>
-          <a:xfrm>
-            <a:off x="2831592" y="4169664"/>
+          <p:cNvPr id="44" name="Text 42"/>
+          <p:cNvSpPr/>
+          <p:nvPr/>
+        </p:nvSpPr>
+        <p:spPr>
+          <a:xfrm>
+            <a:off x="5370141" y="4169664"/>
             <a:ext cx="685800" cy="384048"/>
           </a:xfrm>
           <a:prstGeom prst="rect">
@@ -23066,7 +23693,7 @@
                 <a:ea typeface="Trebuchet MS" pitchFamily="34" charset="-122"/>
                 <a:cs typeface="Trebuchet MS" pitchFamily="34" charset="-120"/>
               </a:rPr>
-              <a:t>ss</a:t>
+              <a:t>igh</a:t>
             </a:r>
             <a:endParaRPr lang="en-US" sz="900" dirty="0"/>
           </a:p>
@@ -23074,13 +23701,13 @@
       </p:sp>
       <p:sp>
         <p:nvSpPr>
-          <p:cNvPr id="44" name="Text 42"/>
-          <p:cNvSpPr/>
-          <p:nvPr/>
-        </p:nvSpPr>
-        <p:spPr>
-          <a:xfrm>
-            <a:off x="2831592" y="4572000"/>
+          <p:cNvPr id="45" name="Text 43"/>
+          <p:cNvSpPr/>
+          <p:nvPr/>
+        </p:nvSpPr>
+        <p:spPr>
+          <a:xfrm>
+            <a:off x="5370141" y="4572000"/>
             <a:ext cx="685800" cy="219456"/>
           </a:xfrm>
           <a:prstGeom prst="rect">
@@ -23105,7 +23732,7 @@
                 <a:ea typeface="Calibri" pitchFamily="34" charset="-122"/>
                 <a:cs typeface="Calibri" pitchFamily="34" charset="-120"/>
               </a:rPr>
-              <a:t>/s/</a:t>
+              <a:t>/ie/</a:t>
             </a:r>
             <a:endParaRPr lang="en-US" sz="750" dirty="0"/>
           </a:p>
@@ -23113,13 +23740,13 @@
       </p:sp>
       <p:sp>
         <p:nvSpPr>
-          <p:cNvPr id="45" name="Shape 43"/>
-          <p:cNvSpPr/>
-          <p:nvPr/>
-        </p:nvSpPr>
-        <p:spPr>
-          <a:xfrm>
-            <a:off x="3639312" y="4169664"/>
+          <p:cNvPr id="46" name="Shape 44"/>
+          <p:cNvSpPr/>
+          <p:nvPr/>
+        </p:nvSpPr>
+        <p:spPr>
+          <a:xfrm>
+            <a:off x="6408638" y="4169664"/>
             <a:ext cx="685800" cy="384048"/>
           </a:xfrm>
           <a:prstGeom prst="rect">
@@ -23140,13 +23767,13 @@
       </p:sp>
       <p:sp>
         <p:nvSpPr>
-          <p:cNvPr id="46" name="Text 44"/>
-          <p:cNvSpPr/>
-          <p:nvPr/>
-        </p:nvSpPr>
-        <p:spPr>
-          <a:xfrm>
-            <a:off x="3639312" y="4169664"/>
+          <p:cNvPr id="47" name="Text 45"/>
+          <p:cNvSpPr/>
+          <p:nvPr/>
+        </p:nvSpPr>
+        <p:spPr>
+          <a:xfrm>
+            <a:off x="6408638" y="4169664"/>
             <a:ext cx="685800" cy="384048"/>
           </a:xfrm>
           <a:prstGeom prst="rect">
@@ -23171,7 +23798,7 @@
                 <a:ea typeface="Trebuchet MS" pitchFamily="34" charset="-122"/>
                 <a:cs typeface="Trebuchet MS" pitchFamily="34" charset="-120"/>
               </a:rPr>
-              <a:t>igh</a:t>
+              <a:t>n</a:t>
             </a:r>
             <a:endParaRPr lang="en-US" sz="900" dirty="0"/>
           </a:p>
@@ -23179,52 +23806,13 @@
       </p:sp>
       <p:sp>
         <p:nvSpPr>
-          <p:cNvPr id="47" name="Text 45"/>
-          <p:cNvSpPr/>
-          <p:nvPr/>
-        </p:nvSpPr>
-        <p:spPr>
-          <a:xfrm>
-            <a:off x="3639312" y="4572000"/>
-            <a:ext cx="685800" cy="219456"/>
-          </a:xfrm>
-          <a:prstGeom prst="rect">
-            <a:avLst/>
-          </a:prstGeom>
-          <a:noFill/>
-          <a:ln/>
-        </p:spPr>
-        <p:txBody>
-          <a:bodyPr wrap="square" lIns="0" tIns="0" rIns="0" bIns="0" rtlCol="0" anchor="t"/>
-          <a:lstStyle/>
-          <a:p>
-            <a:pPr algn="ctr" indent="0" marL="0">
-              <a:buNone/>
-            </a:pPr>
-            <a:r>
-              <a:rPr lang="en-US" sz="750" i="1" dirty="0">
-                <a:solidFill>
-                  <a:srgbClr val="94A3B8"/>
-                </a:solidFill>
-                <a:latin typeface="Calibri" pitchFamily="34" charset="0"/>
-                <a:ea typeface="Calibri" pitchFamily="34" charset="-122"/>
-                <a:cs typeface="Calibri" pitchFamily="34" charset="-120"/>
-              </a:rPr>
-              <a:t>/ī/</a:t>
-            </a:r>
-            <a:endParaRPr lang="en-US" sz="750" dirty="0"/>
-          </a:p>
-        </p:txBody>
-      </p:sp>
-      <p:sp>
-        <p:nvSpPr>
           <p:cNvPr id="48" name="Shape 46"/>
           <p:cNvSpPr/>
           <p:nvPr/>
         </p:nvSpPr>
         <p:spPr>
           <a:xfrm>
-            <a:off x="4447032" y="4169664"/>
+            <a:off x="7447135" y="4169664"/>
             <a:ext cx="685800" cy="384048"/>
           </a:xfrm>
           <a:prstGeom prst="rect">
@@ -23251,7 +23839,7 @@
         </p:nvSpPr>
         <p:spPr>
           <a:xfrm>
-            <a:off x="4447032" y="4169664"/>
+            <a:off x="7447135" y="4169664"/>
             <a:ext cx="685800" cy="384048"/>
           </a:xfrm>
           <a:prstGeom prst="rect">
@@ -23276,271 +23864,7 @@
                 <a:ea typeface="Trebuchet MS" pitchFamily="34" charset="-122"/>
                 <a:cs typeface="Trebuchet MS" pitchFamily="34" charset="-120"/>
               </a:rPr>
-              <a:t>n</a:t>
-            </a:r>
-            <a:endParaRPr lang="en-US" sz="900" dirty="0"/>
-          </a:p>
-        </p:txBody>
-      </p:sp>
-      <p:sp>
-        <p:nvSpPr>
-          <p:cNvPr id="50" name="Shape 48"/>
-          <p:cNvSpPr/>
-          <p:nvPr/>
-        </p:nvSpPr>
-        <p:spPr>
-          <a:xfrm>
-            <a:off x="5254752" y="4169664"/>
-            <a:ext cx="685800" cy="384048"/>
-          </a:xfrm>
-          <a:prstGeom prst="rect">
-            <a:avLst>
-              <a:gd name="adj" fmla="val 9524"/>
-            </a:avLst>
-          </a:prstGeom>
-          <a:solidFill>
-            <a:srgbClr val="FFFFFF"/>
-          </a:solidFill>
-          <a:ln w="12700">
-            <a:solidFill>
-              <a:srgbClr val="DB2777"/>
-            </a:solidFill>
-            <a:prstDash val="solid"/>
-          </a:ln>
-        </p:spPr>
-      </p:sp>
-      <p:sp>
-        <p:nvSpPr>
-          <p:cNvPr id="51" name="Text 49"/>
-          <p:cNvSpPr/>
-          <p:nvPr/>
-        </p:nvSpPr>
-        <p:spPr>
-          <a:xfrm>
-            <a:off x="5254752" y="4169664"/>
-            <a:ext cx="685800" cy="384048"/>
-          </a:xfrm>
-          <a:prstGeom prst="rect">
-            <a:avLst/>
-          </a:prstGeom>
-          <a:noFill/>
-          <a:ln/>
-        </p:spPr>
-        <p:txBody>
-          <a:bodyPr wrap="square" lIns="0" tIns="0" rIns="0" bIns="0" rtlCol="0" anchor="ctr"/>
-          <a:lstStyle/>
-          <a:p>
-            <a:pPr algn="ctr" indent="0" marL="0">
-              <a:buNone/>
-            </a:pPr>
-            <a:r>
-              <a:rPr lang="en-US" sz="900" b="1" dirty="0">
-                <a:solidFill>
-                  <a:srgbClr val="9D174D"/>
-                </a:solidFill>
-                <a:latin typeface="Trebuchet MS" pitchFamily="34" charset="0"/>
-                <a:ea typeface="Trebuchet MS" pitchFamily="34" charset="-122"/>
-                <a:cs typeface="Trebuchet MS" pitchFamily="34" charset="-120"/>
-              </a:rPr>
-              <a:t>m</a:t>
-            </a:r>
-            <a:endParaRPr lang="en-US" sz="900" dirty="0"/>
-          </a:p>
-        </p:txBody>
-      </p:sp>
-      <p:sp>
-        <p:nvSpPr>
-          <p:cNvPr id="52" name="Shape 50"/>
-          <p:cNvSpPr/>
-          <p:nvPr/>
-        </p:nvSpPr>
-        <p:spPr>
-          <a:xfrm>
-            <a:off x="6062472" y="4169664"/>
-            <a:ext cx="685800" cy="384048"/>
-          </a:xfrm>
-          <a:prstGeom prst="rect">
-            <a:avLst>
-              <a:gd name="adj" fmla="val 9524"/>
-            </a:avLst>
-          </a:prstGeom>
-          <a:solidFill>
-            <a:srgbClr val="FFFFFF"/>
-          </a:solidFill>
-          <a:ln w="12700">
-            <a:solidFill>
-              <a:srgbClr val="DB2777"/>
-            </a:solidFill>
-            <a:prstDash val="solid"/>
-          </a:ln>
-        </p:spPr>
-      </p:sp>
-      <p:sp>
-        <p:nvSpPr>
-          <p:cNvPr id="53" name="Text 51"/>
-          <p:cNvSpPr/>
-          <p:nvPr/>
-        </p:nvSpPr>
-        <p:spPr>
-          <a:xfrm>
-            <a:off x="6062472" y="4169664"/>
-            <a:ext cx="685800" cy="384048"/>
-          </a:xfrm>
-          <a:prstGeom prst="rect">
-            <a:avLst/>
-          </a:prstGeom>
-          <a:noFill/>
-          <a:ln/>
-        </p:spPr>
-        <p:txBody>
-          <a:bodyPr wrap="square" lIns="0" tIns="0" rIns="0" bIns="0" rtlCol="0" anchor="ctr"/>
-          <a:lstStyle/>
-          <a:p>
-            <a:pPr algn="ctr" indent="0" marL="0">
-              <a:buNone/>
-            </a:pPr>
-            <a:r>
-              <a:rPr lang="en-US" sz="900" b="1" dirty="0">
-                <a:solidFill>
-                  <a:srgbClr val="9D174D"/>
-                </a:solidFill>
-                <a:latin typeface="Trebuchet MS" pitchFamily="34" charset="0"/>
-                <a:ea typeface="Trebuchet MS" pitchFamily="34" charset="-122"/>
-                <a:cs typeface="Trebuchet MS" pitchFamily="34" charset="-120"/>
-              </a:rPr>
-              <a:t>e</a:t>
-            </a:r>
-            <a:endParaRPr lang="en-US" sz="900" dirty="0"/>
-          </a:p>
-        </p:txBody>
-      </p:sp>
-      <p:sp>
-        <p:nvSpPr>
-          <p:cNvPr id="54" name="Shape 52"/>
-          <p:cNvSpPr/>
-          <p:nvPr/>
-        </p:nvSpPr>
-        <p:spPr>
-          <a:xfrm>
-            <a:off x="6870192" y="4169664"/>
-            <a:ext cx="685800" cy="384048"/>
-          </a:xfrm>
-          <a:prstGeom prst="rect">
-            <a:avLst>
-              <a:gd name="adj" fmla="val 9524"/>
-            </a:avLst>
-          </a:prstGeom>
-          <a:solidFill>
-            <a:srgbClr val="FFFFFF"/>
-          </a:solidFill>
-          <a:ln w="12700">
-            <a:solidFill>
-              <a:srgbClr val="DB2777"/>
-            </a:solidFill>
-            <a:prstDash val="solid"/>
-          </a:ln>
-        </p:spPr>
-      </p:sp>
-      <p:sp>
-        <p:nvSpPr>
-          <p:cNvPr id="55" name="Text 53"/>
-          <p:cNvSpPr/>
-          <p:nvPr/>
-        </p:nvSpPr>
-        <p:spPr>
-          <a:xfrm>
-            <a:off x="6870192" y="4169664"/>
-            <a:ext cx="685800" cy="384048"/>
-          </a:xfrm>
-          <a:prstGeom prst="rect">
-            <a:avLst/>
-          </a:prstGeom>
-          <a:noFill/>
-          <a:ln/>
-        </p:spPr>
-        <p:txBody>
-          <a:bodyPr wrap="square" lIns="0" tIns="0" rIns="0" bIns="0" rtlCol="0" anchor="ctr"/>
-          <a:lstStyle/>
-          <a:p>
-            <a:pPr algn="ctr" indent="0" marL="0">
-              <a:buNone/>
-            </a:pPr>
-            <a:r>
-              <a:rPr lang="en-US" sz="900" b="1" dirty="0">
-                <a:solidFill>
-                  <a:srgbClr val="9D174D"/>
-                </a:solidFill>
-                <a:latin typeface="Trebuchet MS" pitchFamily="34" charset="0"/>
-                <a:ea typeface="Trebuchet MS" pitchFamily="34" charset="-122"/>
-                <a:cs typeface="Trebuchet MS" pitchFamily="34" charset="-120"/>
-              </a:rPr>
-              <a:t>n</a:t>
-            </a:r>
-            <a:endParaRPr lang="en-US" sz="900" dirty="0"/>
-          </a:p>
-        </p:txBody>
-      </p:sp>
-      <p:sp>
-        <p:nvSpPr>
-          <p:cNvPr id="56" name="Shape 54"/>
-          <p:cNvSpPr/>
-          <p:nvPr/>
-        </p:nvSpPr>
-        <p:spPr>
-          <a:xfrm>
-            <a:off x="7677912" y="4169664"/>
-            <a:ext cx="685800" cy="384048"/>
-          </a:xfrm>
-          <a:prstGeom prst="rect">
-            <a:avLst>
-              <a:gd name="adj" fmla="val 9524"/>
-            </a:avLst>
-          </a:prstGeom>
-          <a:solidFill>
-            <a:srgbClr val="FFFFFF"/>
-          </a:solidFill>
-          <a:ln w="12700">
-            <a:solidFill>
-              <a:srgbClr val="DB2777"/>
-            </a:solidFill>
-            <a:prstDash val="solid"/>
-          </a:ln>
-        </p:spPr>
-      </p:sp>
-      <p:sp>
-        <p:nvSpPr>
-          <p:cNvPr id="57" name="Text 55"/>
-          <p:cNvSpPr/>
-          <p:nvPr/>
-        </p:nvSpPr>
-        <p:spPr>
-          <a:xfrm>
-            <a:off x="7677912" y="4169664"/>
-            <a:ext cx="685800" cy="384048"/>
-          </a:xfrm>
-          <a:prstGeom prst="rect">
-            <a:avLst/>
-          </a:prstGeom>
-          <a:noFill/>
-          <a:ln/>
-        </p:spPr>
-        <p:txBody>
-          <a:bodyPr wrap="square" lIns="0" tIns="0" rIns="0" bIns="0" rtlCol="0" anchor="ctr"/>
-          <a:lstStyle/>
-          <a:p>
-            <a:pPr algn="ctr" indent="0" marL="0">
-              <a:buNone/>
-            </a:pPr>
-            <a:r>
-              <a:rPr lang="en-US" sz="900" b="1" dirty="0">
-                <a:solidFill>
-                  <a:srgbClr val="9D174D"/>
-                </a:solidFill>
-                <a:latin typeface="Trebuchet MS" pitchFamily="34" charset="0"/>
-                <a:ea typeface="Trebuchet MS" pitchFamily="34" charset="-122"/>
-                <a:cs typeface="Trebuchet MS" pitchFamily="34" charset="-120"/>
-              </a:rPr>
-              <a:t>t</a:t>
+              <a:t>d</a:t>
             </a:r>
             <a:endParaRPr lang="en-US" sz="900" dirty="0"/>
           </a:p>
@@ -23832,7 +24156,7 @@
                 <a:ea typeface="Calibri" pitchFamily="34" charset="-122"/>
                 <a:cs typeface="Calibri" pitchFamily="34" charset="-120"/>
               </a:rPr>
-              <a:t>Word Labs  •  wordlabs.app  •  Root: 'sign' = mark, symbol, indicate</a:t>
+              <a:t>Word Labs  •  wordlabs.app  •  Root: 'sign' = mark, symbol, or signal</a:t>
             </a:r>
             <a:endParaRPr lang="en-US" sz="800" dirty="0"/>
           </a:p>
@@ -23971,7 +24295,7 @@
                 <a:ea typeface="Trebuchet MS" pitchFamily="34" charset="-122"/>
                 <a:cs typeface="Trebuchet MS" pitchFamily="34" charset="-120"/>
               </a:rPr>
-              <a:t>redesign</a:t>
+              <a:t>reassign</a:t>
             </a:r>
             <a:endParaRPr lang="en-US" sz="2800" dirty="0"/>
           </a:p>
@@ -24659,7 +24983,7 @@
                 <a:ea typeface="Calibri" pitchFamily="34" charset="-122"/>
                 <a:cs typeface="Calibri" pitchFamily="34" charset="-120"/>
               </a:rPr>
-              <a:t>Word Labs  •  wordlabs.app  •  Root: 'sign' = mark, symbol, indicate</a:t>
+              <a:t>Word Labs  •  wordlabs.app  •  Root: 'sign' = mark, symbol, or signal</a:t>
             </a:r>
             <a:endParaRPr lang="en-US" sz="800" dirty="0"/>
           </a:p>
@@ -24798,7 +25122,7 @@
                 <a:ea typeface="Trebuchet MS" pitchFamily="34" charset="-122"/>
                 <a:cs typeface="Trebuchet MS" pitchFamily="34" charset="-120"/>
               </a:rPr>
-              <a:t>redesign</a:t>
+              <a:t>reassign</a:t>
             </a:r>
             <a:endParaRPr lang="en-US" sz="2800" dirty="0"/>
           </a:p>
@@ -25049,7 +25373,7 @@
                 <a:ea typeface="Trebuchet MS" pitchFamily="34" charset="-122"/>
                 <a:cs typeface="Trebuchet MS" pitchFamily="34" charset="-120"/>
               </a:rPr>
-              <a:t>de</a:t>
+              <a:t>as</a:t>
             </a:r>
             <a:endParaRPr lang="en-US" sz="1300" dirty="0"/>
           </a:p>
@@ -25088,7 +25412,7 @@
                 <a:ea typeface="Calibri" pitchFamily="34" charset="-122"/>
                 <a:cs typeface="Calibri" pitchFamily="34" charset="-120"/>
               </a:rPr>
-              <a:t>down, away, from</a:t>
+              <a:t>to or towards</a:t>
             </a:r>
             <a:endParaRPr lang="en-US" sz="850" dirty="0"/>
           </a:p>
@@ -25096,7 +25420,46 @@
       </p:sp>
       <p:sp>
         <p:nvSpPr>
-          <p:cNvPr id="22" name="Shape 20"/>
+          <p:cNvPr id="22" name="Text 20"/>
+          <p:cNvSpPr/>
+          <p:nvPr/>
+        </p:nvSpPr>
+        <p:spPr>
+          <a:xfrm>
+            <a:off x="4370832" y="2752344"/>
+            <a:ext cx="1828800" cy="182880"/>
+          </a:xfrm>
+          <a:prstGeom prst="rect">
+            <a:avLst/>
+          </a:prstGeom>
+          <a:noFill/>
+          <a:ln/>
+        </p:spPr>
+        <p:txBody>
+          <a:bodyPr wrap="square" lIns="0" tIns="0" rIns="0" bIns="0" rtlCol="0" anchor="t"/>
+          <a:lstStyle/>
+          <a:p>
+            <a:pPr algn="ctr" indent="0" marL="0">
+              <a:buNone/>
+            </a:pPr>
+            <a:r>
+              <a:rPr lang="en-US" sz="700" i="1" dirty="0">
+                <a:solidFill>
+                  <a:srgbClr val="94A3B8"/>
+                </a:solidFill>
+                <a:latin typeface="Calibri" pitchFamily="34" charset="0"/>
+                <a:ea typeface="Calibri" pitchFamily="34" charset="-122"/>
+                <a:cs typeface="Calibri" pitchFamily="34" charset="-120"/>
+              </a:rPr>
+              <a:t>ad → as before 's'</a:t>
+            </a:r>
+            <a:endParaRPr lang="en-US" sz="700" dirty="0"/>
+          </a:p>
+        </p:txBody>
+      </p:sp>
+      <p:sp>
+        <p:nvSpPr>
+          <p:cNvPr id="23" name="Shape 21"/>
           <p:cNvSpPr/>
           <p:nvPr/>
         </p:nvSpPr>
@@ -25130,7 +25493,7 @@
       </p:sp>
       <p:sp>
         <p:nvSpPr>
-          <p:cNvPr id="23" name="Text 21"/>
+          <p:cNvPr id="24" name="Text 22"/>
           <p:cNvSpPr/>
           <p:nvPr/>
         </p:nvSpPr>
@@ -25169,7 +25532,7 @@
       </p:sp>
       <p:sp>
         <p:nvSpPr>
-          <p:cNvPr id="24" name="Text 22"/>
+          <p:cNvPr id="25" name="Text 23"/>
           <p:cNvSpPr/>
           <p:nvPr/>
         </p:nvSpPr>
@@ -25200,7 +25563,7 @@
                 <a:ea typeface="Calibri" pitchFamily="34" charset="-122"/>
                 <a:cs typeface="Calibri" pitchFamily="34" charset="-120"/>
               </a:rPr>
-              <a:t>mark, symbol</a:t>
+              <a:t>mark or symbol</a:t>
             </a:r>
             <a:endParaRPr lang="en-US" sz="850" dirty="0"/>
           </a:p>
@@ -25208,7 +25571,7 @@
       </p:sp>
       <p:sp>
         <p:nvSpPr>
-          <p:cNvPr id="25" name="Shape 23"/>
+          <p:cNvPr id="26" name="Shape 24"/>
           <p:cNvSpPr/>
           <p:nvPr/>
         </p:nvSpPr>
@@ -25235,7 +25598,7 @@
       </p:sp>
       <p:sp>
         <p:nvSpPr>
-          <p:cNvPr id="26" name="Text 24"/>
+          <p:cNvPr id="27" name="Text 25"/>
           <p:cNvSpPr/>
           <p:nvPr/>
         </p:nvSpPr>
@@ -25274,7 +25637,7 @@
       </p:sp>
       <p:sp>
         <p:nvSpPr>
-          <p:cNvPr id="27" name="Shape 25"/>
+          <p:cNvPr id="28" name="Shape 26"/>
           <p:cNvSpPr/>
           <p:nvPr/>
         </p:nvSpPr>
@@ -25301,7 +25664,7 @@
       </p:sp>
       <p:sp>
         <p:nvSpPr>
-          <p:cNvPr id="28" name="Text 26"/>
+          <p:cNvPr id="29" name="Text 27"/>
           <p:cNvSpPr/>
           <p:nvPr/>
         </p:nvSpPr>
@@ -25340,7 +25703,7 @@
       </p:sp>
       <p:sp>
         <p:nvSpPr>
-          <p:cNvPr id="29" name="Shape 27"/>
+          <p:cNvPr id="30" name="Shape 28"/>
           <p:cNvSpPr/>
           <p:nvPr/>
         </p:nvSpPr>
@@ -25367,7 +25730,7 @@
       </p:sp>
       <p:sp>
         <p:nvSpPr>
-          <p:cNvPr id="30" name="Text 28"/>
+          <p:cNvPr id="31" name="Text 29"/>
           <p:cNvSpPr/>
           <p:nvPr/>
         </p:nvSpPr>
@@ -25406,7 +25769,7 @@
       </p:sp>
       <p:sp>
         <p:nvSpPr>
-          <p:cNvPr id="31" name="Shape 29"/>
+          <p:cNvPr id="32" name="Shape 30"/>
           <p:cNvSpPr/>
           <p:nvPr/>
         </p:nvSpPr>
@@ -25433,7 +25796,7 @@
       </p:sp>
       <p:sp>
         <p:nvSpPr>
-          <p:cNvPr id="32" name="Text 30"/>
+          <p:cNvPr id="33" name="Text 31"/>
           <p:cNvSpPr/>
           <p:nvPr/>
         </p:nvSpPr>
@@ -25756,7 +26119,7 @@
                 <a:ea typeface="Calibri" pitchFamily="34" charset="-122"/>
                 <a:cs typeface="Calibri" pitchFamily="34" charset="-120"/>
               </a:rPr>
-              <a:t>Word Labs  •  wordlabs.app  •  Root: 'sign' = mark, symbol, indicate</a:t>
+              <a:t>Word Labs  •  wordlabs.app  •  Root: 'sign' = mark, symbol, or signal</a:t>
             </a:r>
             <a:endParaRPr lang="en-US" sz="800" dirty="0"/>
           </a:p>
@@ -25829,7 +26192,7 @@
                 <a:ea typeface="Trebuchet MS" pitchFamily="34" charset="-122"/>
                 <a:cs typeface="Trebuchet MS" pitchFamily="34" charset="-120"/>
               </a:rPr>
-              <a:t>We are learning that the root 'sign' means 'mark, symbol, indicate'.</a:t>
+              <a:t>We are learning that the root 'sign' means 'mark, symbol, or signal'.</a:t>
             </a:r>
             <a:endParaRPr lang="en-US" sz="2000" dirty="0"/>
           </a:p>
@@ -26475,7 +26838,7 @@
                 <a:ea typeface="Calibri" pitchFamily="34" charset="-122"/>
                 <a:cs typeface="Calibri" pitchFamily="34" charset="-120"/>
               </a:rPr>
-              <a:t>Word Labs  •  wordlabs.app  •  Root: 'sign' = mark, symbol, indicate</a:t>
+              <a:t>Word Labs  •  wordlabs.app  •  Root: 'sign' = mark, symbol, or signal</a:t>
             </a:r>
             <a:endParaRPr lang="en-US" sz="800" dirty="0"/>
           </a:p>
@@ -26614,7 +26977,7 @@
                 <a:ea typeface="Trebuchet MS" pitchFamily="34" charset="-122"/>
                 <a:cs typeface="Trebuchet MS" pitchFamily="34" charset="-120"/>
               </a:rPr>
-              <a:t>redesign</a:t>
+              <a:t>reassign</a:t>
             </a:r>
             <a:endParaRPr lang="en-US" sz="2800" dirty="0"/>
           </a:p>
@@ -26865,7 +27228,7 @@
                 <a:ea typeface="Trebuchet MS" pitchFamily="34" charset="-122"/>
                 <a:cs typeface="Trebuchet MS" pitchFamily="34" charset="-120"/>
               </a:rPr>
-              <a:t>de</a:t>
+              <a:t>as</a:t>
             </a:r>
             <a:endParaRPr lang="en-US" sz="1300" dirty="0"/>
           </a:p>
@@ -26904,7 +27267,7 @@
                 <a:ea typeface="Calibri" pitchFamily="34" charset="-122"/>
                 <a:cs typeface="Calibri" pitchFamily="34" charset="-120"/>
               </a:rPr>
-              <a:t>down, away, from</a:t>
+              <a:t>to or towards</a:t>
             </a:r>
             <a:endParaRPr lang="en-US" sz="850" dirty="0"/>
           </a:p>
@@ -26912,7 +27275,46 @@
       </p:sp>
       <p:sp>
         <p:nvSpPr>
-          <p:cNvPr id="22" name="Shape 20"/>
+          <p:cNvPr id="22" name="Text 20"/>
+          <p:cNvSpPr/>
+          <p:nvPr/>
+        </p:nvSpPr>
+        <p:spPr>
+          <a:xfrm>
+            <a:off x="4370832" y="2752344"/>
+            <a:ext cx="1828800" cy="182880"/>
+          </a:xfrm>
+          <a:prstGeom prst="rect">
+            <a:avLst/>
+          </a:prstGeom>
+          <a:noFill/>
+          <a:ln/>
+        </p:spPr>
+        <p:txBody>
+          <a:bodyPr wrap="square" lIns="0" tIns="0" rIns="0" bIns="0" rtlCol="0" anchor="t"/>
+          <a:lstStyle/>
+          <a:p>
+            <a:pPr algn="ctr" indent="0" marL="0">
+              <a:buNone/>
+            </a:pPr>
+            <a:r>
+              <a:rPr lang="en-US" sz="700" i="1" dirty="0">
+                <a:solidFill>
+                  <a:srgbClr val="94A3B8"/>
+                </a:solidFill>
+                <a:latin typeface="Calibri" pitchFamily="34" charset="0"/>
+                <a:ea typeface="Calibri" pitchFamily="34" charset="-122"/>
+                <a:cs typeface="Calibri" pitchFamily="34" charset="-120"/>
+              </a:rPr>
+              <a:t>ad → as before 's'</a:t>
+            </a:r>
+            <a:endParaRPr lang="en-US" sz="700" dirty="0"/>
+          </a:p>
+        </p:txBody>
+      </p:sp>
+      <p:sp>
+        <p:nvSpPr>
+          <p:cNvPr id="23" name="Shape 21"/>
           <p:cNvSpPr/>
           <p:nvPr/>
         </p:nvSpPr>
@@ -26946,7 +27348,7 @@
       </p:sp>
       <p:sp>
         <p:nvSpPr>
-          <p:cNvPr id="23" name="Text 21"/>
+          <p:cNvPr id="24" name="Text 22"/>
           <p:cNvSpPr/>
           <p:nvPr/>
         </p:nvSpPr>
@@ -26985,7 +27387,7 @@
       </p:sp>
       <p:sp>
         <p:nvSpPr>
-          <p:cNvPr id="24" name="Text 22"/>
+          <p:cNvPr id="25" name="Text 23"/>
           <p:cNvSpPr/>
           <p:nvPr/>
         </p:nvSpPr>
@@ -27016,7 +27418,7 @@
                 <a:ea typeface="Calibri" pitchFamily="34" charset="-122"/>
                 <a:cs typeface="Calibri" pitchFamily="34" charset="-120"/>
               </a:rPr>
-              <a:t>mark, symbol</a:t>
+              <a:t>mark or symbol</a:t>
             </a:r>
             <a:endParaRPr lang="en-US" sz="850" dirty="0"/>
           </a:p>
@@ -27024,7 +27426,7 @@
       </p:sp>
       <p:sp>
         <p:nvSpPr>
-          <p:cNvPr id="25" name="Shape 23"/>
+          <p:cNvPr id="26" name="Shape 24"/>
           <p:cNvSpPr/>
           <p:nvPr/>
         </p:nvSpPr>
@@ -27051,7 +27453,7 @@
       </p:sp>
       <p:sp>
         <p:nvSpPr>
-          <p:cNvPr id="26" name="Text 24"/>
+          <p:cNvPr id="27" name="Text 25"/>
           <p:cNvSpPr/>
           <p:nvPr/>
         </p:nvSpPr>
@@ -27090,7 +27492,7 @@
       </p:sp>
       <p:sp>
         <p:nvSpPr>
-          <p:cNvPr id="27" name="Shape 25"/>
+          <p:cNvPr id="28" name="Shape 26"/>
           <p:cNvSpPr/>
           <p:nvPr/>
         </p:nvSpPr>
@@ -27117,7 +27519,7 @@
       </p:sp>
       <p:sp>
         <p:nvSpPr>
-          <p:cNvPr id="28" name="Shape 26"/>
+          <p:cNvPr id="29" name="Shape 27"/>
           <p:cNvSpPr/>
           <p:nvPr/>
         </p:nvSpPr>
@@ -27144,7 +27546,7 @@
       </p:sp>
       <p:sp>
         <p:nvSpPr>
-          <p:cNvPr id="29" name="Text 27"/>
+          <p:cNvPr id="30" name="Text 28"/>
           <p:cNvSpPr/>
           <p:nvPr/>
         </p:nvSpPr>
@@ -27183,7 +27585,7 @@
       </p:sp>
       <p:sp>
         <p:nvSpPr>
-          <p:cNvPr id="30" name="Text 28"/>
+          <p:cNvPr id="31" name="Text 29"/>
           <p:cNvSpPr/>
           <p:nvPr/>
         </p:nvSpPr>
@@ -27222,7 +27624,7 @@
       </p:sp>
       <p:sp>
         <p:nvSpPr>
-          <p:cNvPr id="31" name="Shape 29"/>
+          <p:cNvPr id="32" name="Shape 30"/>
           <p:cNvSpPr/>
           <p:nvPr/>
         </p:nvSpPr>
@@ -27249,7 +27651,7 @@
       </p:sp>
       <p:sp>
         <p:nvSpPr>
-          <p:cNvPr id="32" name="Text 30"/>
+          <p:cNvPr id="33" name="Text 31"/>
           <p:cNvSpPr/>
           <p:nvPr/>
         </p:nvSpPr>
@@ -27280,7 +27682,7 @@
                 <a:ea typeface="Trebuchet MS" pitchFamily="34" charset="-122"/>
                 <a:cs typeface="Trebuchet MS" pitchFamily="34" charset="-120"/>
               </a:rPr>
-              <a:t>de</a:t>
+              <a:t>as</a:t>
             </a:r>
             <a:endParaRPr lang="en-US" sz="1400" dirty="0"/>
           </a:p>
@@ -27288,7 +27690,7 @@
       </p:sp>
       <p:sp>
         <p:nvSpPr>
-          <p:cNvPr id="33" name="Text 31"/>
+          <p:cNvPr id="34" name="Text 32"/>
           <p:cNvSpPr/>
           <p:nvPr/>
         </p:nvSpPr>
@@ -27327,7 +27729,7 @@
       </p:sp>
       <p:sp>
         <p:nvSpPr>
-          <p:cNvPr id="34" name="Shape 32"/>
+          <p:cNvPr id="35" name="Shape 33"/>
           <p:cNvSpPr/>
           <p:nvPr/>
         </p:nvSpPr>
@@ -27354,7 +27756,7 @@
       </p:sp>
       <p:sp>
         <p:nvSpPr>
-          <p:cNvPr id="35" name="Text 33"/>
+          <p:cNvPr id="36" name="Text 34"/>
           <p:cNvSpPr/>
           <p:nvPr/>
         </p:nvSpPr>
@@ -27393,7 +27795,7 @@
       </p:sp>
       <p:sp>
         <p:nvSpPr>
-          <p:cNvPr id="36" name="Shape 34"/>
+          <p:cNvPr id="37" name="Shape 35"/>
           <p:cNvSpPr/>
           <p:nvPr/>
         </p:nvSpPr>
@@ -27420,7 +27822,7 @@
       </p:sp>
       <p:sp>
         <p:nvSpPr>
-          <p:cNvPr id="37" name="Text 35"/>
+          <p:cNvPr id="38" name="Text 36"/>
           <p:cNvSpPr/>
           <p:nvPr/>
         </p:nvSpPr>
@@ -27459,7 +27861,7 @@
       </p:sp>
       <p:sp>
         <p:nvSpPr>
-          <p:cNvPr id="38" name="Shape 36"/>
+          <p:cNvPr id="39" name="Shape 37"/>
           <p:cNvSpPr/>
           <p:nvPr/>
         </p:nvSpPr>
@@ -27486,7 +27888,7 @@
       </p:sp>
       <p:sp>
         <p:nvSpPr>
-          <p:cNvPr id="39" name="Text 37"/>
+          <p:cNvPr id="40" name="Text 38"/>
           <p:cNvSpPr/>
           <p:nvPr/>
         </p:nvSpPr>
@@ -27809,7 +28211,7 @@
                 <a:ea typeface="Calibri" pitchFamily="34" charset="-122"/>
                 <a:cs typeface="Calibri" pitchFamily="34" charset="-120"/>
               </a:rPr>
-              <a:t>Word Labs  •  wordlabs.app  •  Root: 'sign' = mark, symbol, indicate</a:t>
+              <a:t>Word Labs  •  wordlabs.app  •  Root: 'sign' = mark, symbol, or signal</a:t>
             </a:r>
             <a:endParaRPr lang="en-US" sz="800" dirty="0"/>
           </a:p>
@@ -27948,7 +28350,7 @@
                 <a:ea typeface="Trebuchet MS" pitchFamily="34" charset="-122"/>
                 <a:cs typeface="Trebuchet MS" pitchFamily="34" charset="-120"/>
               </a:rPr>
-              <a:t>redesign</a:t>
+              <a:t>reassign</a:t>
             </a:r>
             <a:endParaRPr lang="en-US" sz="2800" dirty="0"/>
           </a:p>
@@ -28199,7 +28601,7 @@
                 <a:ea typeface="Trebuchet MS" pitchFamily="34" charset="-122"/>
                 <a:cs typeface="Trebuchet MS" pitchFamily="34" charset="-120"/>
               </a:rPr>
-              <a:t>de</a:t>
+              <a:t>as</a:t>
             </a:r>
             <a:endParaRPr lang="en-US" sz="1300" dirty="0"/>
           </a:p>
@@ -28238,7 +28640,7 @@
                 <a:ea typeface="Calibri" pitchFamily="34" charset="-122"/>
                 <a:cs typeface="Calibri" pitchFamily="34" charset="-120"/>
               </a:rPr>
-              <a:t>down, away, from</a:t>
+              <a:t>to or towards</a:t>
             </a:r>
             <a:endParaRPr lang="en-US" sz="850" dirty="0"/>
           </a:p>
@@ -28246,7 +28648,46 @@
       </p:sp>
       <p:sp>
         <p:nvSpPr>
-          <p:cNvPr id="22" name="Shape 20"/>
+          <p:cNvPr id="22" name="Text 20"/>
+          <p:cNvSpPr/>
+          <p:nvPr/>
+        </p:nvSpPr>
+        <p:spPr>
+          <a:xfrm>
+            <a:off x="4370832" y="2752344"/>
+            <a:ext cx="1828800" cy="182880"/>
+          </a:xfrm>
+          <a:prstGeom prst="rect">
+            <a:avLst/>
+          </a:prstGeom>
+          <a:noFill/>
+          <a:ln/>
+        </p:spPr>
+        <p:txBody>
+          <a:bodyPr wrap="square" lIns="0" tIns="0" rIns="0" bIns="0" rtlCol="0" anchor="t"/>
+          <a:lstStyle/>
+          <a:p>
+            <a:pPr algn="ctr" indent="0" marL="0">
+              <a:buNone/>
+            </a:pPr>
+            <a:r>
+              <a:rPr lang="en-US" sz="700" i="1" dirty="0">
+                <a:solidFill>
+                  <a:srgbClr val="94A3B8"/>
+                </a:solidFill>
+                <a:latin typeface="Calibri" pitchFamily="34" charset="0"/>
+                <a:ea typeface="Calibri" pitchFamily="34" charset="-122"/>
+                <a:cs typeface="Calibri" pitchFamily="34" charset="-120"/>
+              </a:rPr>
+              <a:t>ad → as before 's'</a:t>
+            </a:r>
+            <a:endParaRPr lang="en-US" sz="700" dirty="0"/>
+          </a:p>
+        </p:txBody>
+      </p:sp>
+      <p:sp>
+        <p:nvSpPr>
+          <p:cNvPr id="23" name="Shape 21"/>
           <p:cNvSpPr/>
           <p:nvPr/>
         </p:nvSpPr>
@@ -28280,7 +28721,7 @@
       </p:sp>
       <p:sp>
         <p:nvSpPr>
-          <p:cNvPr id="23" name="Text 21"/>
+          <p:cNvPr id="24" name="Text 22"/>
           <p:cNvSpPr/>
           <p:nvPr/>
         </p:nvSpPr>
@@ -28319,7 +28760,7 @@
       </p:sp>
       <p:sp>
         <p:nvSpPr>
-          <p:cNvPr id="24" name="Text 22"/>
+          <p:cNvPr id="25" name="Text 23"/>
           <p:cNvSpPr/>
           <p:nvPr/>
         </p:nvSpPr>
@@ -28350,7 +28791,7 @@
                 <a:ea typeface="Calibri" pitchFamily="34" charset="-122"/>
                 <a:cs typeface="Calibri" pitchFamily="34" charset="-120"/>
               </a:rPr>
-              <a:t>mark, symbol</a:t>
+              <a:t>mark or symbol</a:t>
             </a:r>
             <a:endParaRPr lang="en-US" sz="850" dirty="0"/>
           </a:p>
@@ -28358,7 +28799,7 @@
       </p:sp>
       <p:sp>
         <p:nvSpPr>
-          <p:cNvPr id="25" name="Shape 23"/>
+          <p:cNvPr id="26" name="Shape 24"/>
           <p:cNvSpPr/>
           <p:nvPr/>
         </p:nvSpPr>
@@ -28385,7 +28826,7 @@
       </p:sp>
       <p:sp>
         <p:nvSpPr>
-          <p:cNvPr id="26" name="Text 24"/>
+          <p:cNvPr id="27" name="Text 25"/>
           <p:cNvSpPr/>
           <p:nvPr/>
         </p:nvSpPr>
@@ -28424,7 +28865,7 @@
       </p:sp>
       <p:sp>
         <p:nvSpPr>
-          <p:cNvPr id="27" name="Shape 25"/>
+          <p:cNvPr id="28" name="Shape 26"/>
           <p:cNvSpPr/>
           <p:nvPr/>
         </p:nvSpPr>
@@ -28451,7 +28892,7 @@
       </p:sp>
       <p:sp>
         <p:nvSpPr>
-          <p:cNvPr id="28" name="Shape 26"/>
+          <p:cNvPr id="29" name="Shape 27"/>
           <p:cNvSpPr/>
           <p:nvPr/>
         </p:nvSpPr>
@@ -28478,7 +28919,7 @@
       </p:sp>
       <p:sp>
         <p:nvSpPr>
-          <p:cNvPr id="29" name="Text 27"/>
+          <p:cNvPr id="30" name="Text 28"/>
           <p:cNvSpPr/>
           <p:nvPr/>
         </p:nvSpPr>
@@ -28517,7 +28958,7 @@
       </p:sp>
       <p:sp>
         <p:nvSpPr>
-          <p:cNvPr id="30" name="Text 28"/>
+          <p:cNvPr id="31" name="Text 29"/>
           <p:cNvSpPr/>
           <p:nvPr/>
         </p:nvSpPr>
@@ -28556,7 +28997,7 @@
       </p:sp>
       <p:sp>
         <p:nvSpPr>
-          <p:cNvPr id="31" name="Shape 29"/>
+          <p:cNvPr id="32" name="Shape 30"/>
           <p:cNvSpPr/>
           <p:nvPr/>
         </p:nvSpPr>
@@ -28583,7 +29024,7 @@
       </p:sp>
       <p:sp>
         <p:nvSpPr>
-          <p:cNvPr id="32" name="Text 30"/>
+          <p:cNvPr id="33" name="Text 31"/>
           <p:cNvSpPr/>
           <p:nvPr/>
         </p:nvSpPr>
@@ -28614,7 +29055,7 @@
                 <a:ea typeface="Trebuchet MS" pitchFamily="34" charset="-122"/>
                 <a:cs typeface="Trebuchet MS" pitchFamily="34" charset="-120"/>
               </a:rPr>
-              <a:t>de</a:t>
+              <a:t>as</a:t>
             </a:r>
             <a:endParaRPr lang="en-US" sz="1400" dirty="0"/>
           </a:p>
@@ -28622,7 +29063,7 @@
       </p:sp>
       <p:sp>
         <p:nvSpPr>
-          <p:cNvPr id="33" name="Text 31"/>
+          <p:cNvPr id="34" name="Text 32"/>
           <p:cNvSpPr/>
           <p:nvPr/>
         </p:nvSpPr>
@@ -28661,7 +29102,7 @@
       </p:sp>
       <p:sp>
         <p:nvSpPr>
-          <p:cNvPr id="34" name="Shape 32"/>
+          <p:cNvPr id="35" name="Shape 33"/>
           <p:cNvSpPr/>
           <p:nvPr/>
         </p:nvSpPr>
@@ -28688,7 +29129,7 @@
       </p:sp>
       <p:sp>
         <p:nvSpPr>
-          <p:cNvPr id="35" name="Text 33"/>
+          <p:cNvPr id="36" name="Text 34"/>
           <p:cNvSpPr/>
           <p:nvPr/>
         </p:nvSpPr>
@@ -28727,7 +29168,7 @@
       </p:sp>
       <p:sp>
         <p:nvSpPr>
-          <p:cNvPr id="36" name="Shape 34"/>
+          <p:cNvPr id="37" name="Shape 35"/>
           <p:cNvSpPr/>
           <p:nvPr/>
         </p:nvSpPr>
@@ -28754,7 +29195,7 @@
       </p:sp>
       <p:sp>
         <p:nvSpPr>
-          <p:cNvPr id="37" name="Text 35"/>
+          <p:cNvPr id="38" name="Text 36"/>
           <p:cNvSpPr/>
           <p:nvPr/>
         </p:nvSpPr>
@@ -28793,7 +29234,7 @@
       </p:sp>
       <p:sp>
         <p:nvSpPr>
-          <p:cNvPr id="38" name="Shape 36"/>
+          <p:cNvPr id="39" name="Shape 37"/>
           <p:cNvSpPr/>
           <p:nvPr/>
         </p:nvSpPr>
@@ -28820,13 +29261,13 @@
       </p:sp>
       <p:sp>
         <p:nvSpPr>
-          <p:cNvPr id="39" name="Shape 37"/>
-          <p:cNvSpPr/>
-          <p:nvPr/>
-        </p:nvSpPr>
-        <p:spPr>
-          <a:xfrm>
-            <a:off x="2124837" y="4169664"/>
+          <p:cNvPr id="40" name="Shape 38"/>
+          <p:cNvSpPr/>
+          <p:nvPr/>
+        </p:nvSpPr>
+        <p:spPr>
+          <a:xfrm>
+            <a:off x="2254649" y="4169664"/>
             <a:ext cx="685800" cy="384048"/>
           </a:xfrm>
           <a:prstGeom prst="rect">
@@ -28847,13 +29288,13 @@
       </p:sp>
       <p:sp>
         <p:nvSpPr>
-          <p:cNvPr id="40" name="Text 38"/>
-          <p:cNvSpPr/>
-          <p:nvPr/>
-        </p:nvSpPr>
-        <p:spPr>
-          <a:xfrm>
-            <a:off x="2124837" y="4169664"/>
+          <p:cNvPr id="41" name="Text 39"/>
+          <p:cNvSpPr/>
+          <p:nvPr/>
+        </p:nvSpPr>
+        <p:spPr>
+          <a:xfrm>
+            <a:off x="2254649" y="4169664"/>
             <a:ext cx="685800" cy="384048"/>
           </a:xfrm>
           <a:prstGeom prst="rect">
@@ -28886,13 +29327,13 @@
       </p:sp>
       <p:sp>
         <p:nvSpPr>
-          <p:cNvPr id="41" name="Shape 39"/>
-          <p:cNvSpPr/>
-          <p:nvPr/>
-        </p:nvSpPr>
-        <p:spPr>
-          <a:xfrm>
-            <a:off x="3033522" y="4169664"/>
+          <p:cNvPr id="42" name="Shape 40"/>
+          <p:cNvSpPr/>
+          <p:nvPr/>
+        </p:nvSpPr>
+        <p:spPr>
+          <a:xfrm>
+            <a:off x="3293146" y="4169664"/>
             <a:ext cx="685800" cy="384048"/>
           </a:xfrm>
           <a:prstGeom prst="rect">
@@ -28913,13 +29354,13 @@
       </p:sp>
       <p:sp>
         <p:nvSpPr>
-          <p:cNvPr id="42" name="Text 40"/>
-          <p:cNvSpPr/>
-          <p:nvPr/>
-        </p:nvSpPr>
-        <p:spPr>
-          <a:xfrm>
-            <a:off x="3033522" y="4169664"/>
+          <p:cNvPr id="43" name="Text 41"/>
+          <p:cNvSpPr/>
+          <p:nvPr/>
+        </p:nvSpPr>
+        <p:spPr>
+          <a:xfrm>
+            <a:off x="3293146" y="4169664"/>
             <a:ext cx="685800" cy="384048"/>
           </a:xfrm>
           <a:prstGeom prst="rect">
@@ -28952,13 +29393,13 @@
       </p:sp>
       <p:sp>
         <p:nvSpPr>
-          <p:cNvPr id="43" name="Shape 41"/>
-          <p:cNvSpPr/>
-          <p:nvPr/>
-        </p:nvSpPr>
-        <p:spPr>
-          <a:xfrm>
-            <a:off x="3942207" y="4169664"/>
+          <p:cNvPr id="44" name="Shape 42"/>
+          <p:cNvSpPr/>
+          <p:nvPr/>
+        </p:nvSpPr>
+        <p:spPr>
+          <a:xfrm>
+            <a:off x="4331643" y="4169664"/>
             <a:ext cx="685800" cy="384048"/>
           </a:xfrm>
           <a:prstGeom prst="rect">
@@ -28979,13 +29420,13 @@
       </p:sp>
       <p:sp>
         <p:nvSpPr>
-          <p:cNvPr id="44" name="Text 42"/>
-          <p:cNvSpPr/>
-          <p:nvPr/>
-        </p:nvSpPr>
-        <p:spPr>
-          <a:xfrm>
-            <a:off x="3942207" y="4169664"/>
+          <p:cNvPr id="45" name="Text 43"/>
+          <p:cNvSpPr/>
+          <p:nvPr/>
+        </p:nvSpPr>
+        <p:spPr>
+          <a:xfrm>
+            <a:off x="4331643" y="4169664"/>
             <a:ext cx="685800" cy="384048"/>
           </a:xfrm>
           <a:prstGeom prst="rect">
@@ -29010,7 +29451,7 @@
                 <a:ea typeface="Trebuchet MS" pitchFamily="34" charset="-122"/>
                 <a:cs typeface="Trebuchet MS" pitchFamily="34" charset="-120"/>
               </a:rPr>
-              <a:t>d</a:t>
+              <a:t>a</a:t>
             </a:r>
             <a:endParaRPr lang="en-US" sz="900" dirty="0"/>
           </a:p>
@@ -29018,13 +29459,13 @@
       </p:sp>
       <p:sp>
         <p:nvSpPr>
-          <p:cNvPr id="45" name="Shape 43"/>
-          <p:cNvSpPr/>
-          <p:nvPr/>
-        </p:nvSpPr>
-        <p:spPr>
-          <a:xfrm>
-            <a:off x="4850892" y="4169664"/>
+          <p:cNvPr id="46" name="Shape 44"/>
+          <p:cNvSpPr/>
+          <p:nvPr/>
+        </p:nvSpPr>
+        <p:spPr>
+          <a:xfrm>
+            <a:off x="5370141" y="4169664"/>
             <a:ext cx="685800" cy="384048"/>
           </a:xfrm>
           <a:prstGeom prst="rect">
@@ -29045,13 +29486,13 @@
       </p:sp>
       <p:sp>
         <p:nvSpPr>
-          <p:cNvPr id="46" name="Text 44"/>
-          <p:cNvSpPr/>
-          <p:nvPr/>
-        </p:nvSpPr>
-        <p:spPr>
-          <a:xfrm>
-            <a:off x="4850892" y="4169664"/>
+          <p:cNvPr id="47" name="Text 45"/>
+          <p:cNvSpPr/>
+          <p:nvPr/>
+        </p:nvSpPr>
+        <p:spPr>
+          <a:xfrm>
+            <a:off x="5370141" y="4169664"/>
             <a:ext cx="685800" cy="384048"/>
           </a:xfrm>
           <a:prstGeom prst="rect">
@@ -29076,7 +29517,7 @@
                 <a:ea typeface="Trebuchet MS" pitchFamily="34" charset="-122"/>
                 <a:cs typeface="Trebuchet MS" pitchFamily="34" charset="-120"/>
               </a:rPr>
-              <a:t>e</a:t>
+              <a:t>s</a:t>
             </a:r>
             <a:endParaRPr lang="en-US" sz="900" dirty="0"/>
           </a:p>
@@ -29084,13 +29525,52 @@
       </p:sp>
       <p:sp>
         <p:nvSpPr>
-          <p:cNvPr id="47" name="Shape 45"/>
-          <p:cNvSpPr/>
-          <p:nvPr/>
-        </p:nvSpPr>
-        <p:spPr>
-          <a:xfrm>
-            <a:off x="5759577" y="4169664"/>
+          <p:cNvPr id="48" name="Text 46"/>
+          <p:cNvSpPr/>
+          <p:nvPr/>
+        </p:nvSpPr>
+        <p:spPr>
+          <a:xfrm>
+            <a:off x="5370141" y="4572000"/>
+            <a:ext cx="685800" cy="219456"/>
+          </a:xfrm>
+          <a:prstGeom prst="rect">
+            <a:avLst/>
+          </a:prstGeom>
+          <a:noFill/>
+          <a:ln/>
+        </p:spPr>
+        <p:txBody>
+          <a:bodyPr wrap="square" lIns="0" tIns="0" rIns="0" bIns="0" rtlCol="0" anchor="t"/>
+          <a:lstStyle/>
+          <a:p>
+            <a:pPr algn="ctr" indent="0" marL="0">
+              <a:buNone/>
+            </a:pPr>
+            <a:r>
+              <a:rPr lang="en-US" sz="750" i="1" dirty="0">
+                <a:solidFill>
+                  <a:srgbClr val="94A3B8"/>
+                </a:solidFill>
+                <a:latin typeface="Calibri" pitchFamily="34" charset="0"/>
+                <a:ea typeface="Calibri" pitchFamily="34" charset="-122"/>
+                <a:cs typeface="Calibri" pitchFamily="34" charset="-120"/>
+              </a:rPr>
+              <a:t>/z/</a:t>
+            </a:r>
+            <a:endParaRPr lang="en-US" sz="750" dirty="0"/>
+          </a:p>
+        </p:txBody>
+      </p:sp>
+      <p:sp>
+        <p:nvSpPr>
+          <p:cNvPr id="49" name="Shape 47"/>
+          <p:cNvSpPr/>
+          <p:nvPr/>
+        </p:nvSpPr>
+        <p:spPr>
+          <a:xfrm>
+            <a:off x="6408638" y="4169664"/>
             <a:ext cx="685800" cy="384048"/>
           </a:xfrm>
           <a:prstGeom prst="rect">
@@ -29111,13 +29591,13 @@
       </p:sp>
       <p:sp>
         <p:nvSpPr>
-          <p:cNvPr id="48" name="Text 46"/>
-          <p:cNvSpPr/>
-          <p:nvPr/>
-        </p:nvSpPr>
-        <p:spPr>
-          <a:xfrm>
-            <a:off x="5759577" y="4169664"/>
+          <p:cNvPr id="50" name="Text 48"/>
+          <p:cNvSpPr/>
+          <p:nvPr/>
+        </p:nvSpPr>
+        <p:spPr>
+          <a:xfrm>
+            <a:off x="6408638" y="4169664"/>
             <a:ext cx="685800" cy="384048"/>
           </a:xfrm>
           <a:prstGeom prst="rect">
@@ -29142,7 +29622,7 @@
                 <a:ea typeface="Trebuchet MS" pitchFamily="34" charset="-122"/>
                 <a:cs typeface="Trebuchet MS" pitchFamily="34" charset="-120"/>
               </a:rPr>
-              <a:t>s</a:t>
+              <a:t>igh</a:t>
             </a:r>
             <a:endParaRPr lang="en-US" sz="900" dirty="0"/>
           </a:p>
@@ -29150,13 +29630,13 @@
       </p:sp>
       <p:sp>
         <p:nvSpPr>
-          <p:cNvPr id="49" name="Text 47"/>
-          <p:cNvSpPr/>
-          <p:nvPr/>
-        </p:nvSpPr>
-        <p:spPr>
-          <a:xfrm>
-            <a:off x="5759577" y="4572000"/>
+          <p:cNvPr id="51" name="Text 49"/>
+          <p:cNvSpPr/>
+          <p:nvPr/>
+        </p:nvSpPr>
+        <p:spPr>
+          <a:xfrm>
+            <a:off x="6408638" y="4572000"/>
             <a:ext cx="685800" cy="219456"/>
           </a:xfrm>
           <a:prstGeom prst="rect">
@@ -29181,7 +29661,7 @@
                 <a:ea typeface="Calibri" pitchFamily="34" charset="-122"/>
                 <a:cs typeface="Calibri" pitchFamily="34" charset="-120"/>
               </a:rPr>
-              <a:t>/z/</a:t>
+              <a:t>/ie/</a:t>
             </a:r>
             <a:endParaRPr lang="en-US" sz="750" dirty="0"/>
           </a:p>
@@ -29189,13 +29669,13 @@
       </p:sp>
       <p:sp>
         <p:nvSpPr>
-          <p:cNvPr id="50" name="Shape 48"/>
-          <p:cNvSpPr/>
-          <p:nvPr/>
-        </p:nvSpPr>
-        <p:spPr>
-          <a:xfrm>
-            <a:off x="6668262" y="4169664"/>
+          <p:cNvPr id="52" name="Shape 50"/>
+          <p:cNvSpPr/>
+          <p:nvPr/>
+        </p:nvSpPr>
+        <p:spPr>
+          <a:xfrm>
+            <a:off x="7447135" y="4169664"/>
             <a:ext cx="685800" cy="384048"/>
           </a:xfrm>
           <a:prstGeom prst="rect">
@@ -29216,118 +29696,13 @@
       </p:sp>
       <p:sp>
         <p:nvSpPr>
-          <p:cNvPr id="51" name="Text 49"/>
-          <p:cNvSpPr/>
-          <p:nvPr/>
-        </p:nvSpPr>
-        <p:spPr>
-          <a:xfrm>
-            <a:off x="6668262" y="4169664"/>
-            <a:ext cx="685800" cy="384048"/>
-          </a:xfrm>
-          <a:prstGeom prst="rect">
-            <a:avLst/>
-          </a:prstGeom>
-          <a:noFill/>
-          <a:ln/>
-        </p:spPr>
-        <p:txBody>
-          <a:bodyPr wrap="square" lIns="0" tIns="0" rIns="0" bIns="0" rtlCol="0" anchor="ctr"/>
-          <a:lstStyle/>
-          <a:p>
-            <a:pPr algn="ctr" indent="0" marL="0">
-              <a:buNone/>
-            </a:pPr>
-            <a:r>
-              <a:rPr lang="en-US" sz="900" b="1" dirty="0">
-                <a:solidFill>
-                  <a:srgbClr val="9D174D"/>
-                </a:solidFill>
-                <a:latin typeface="Trebuchet MS" pitchFamily="34" charset="0"/>
-                <a:ea typeface="Trebuchet MS" pitchFamily="34" charset="-122"/>
-                <a:cs typeface="Trebuchet MS" pitchFamily="34" charset="-120"/>
-              </a:rPr>
-              <a:t>igh</a:t>
-            </a:r>
-            <a:endParaRPr lang="en-US" sz="900" dirty="0"/>
-          </a:p>
-        </p:txBody>
-      </p:sp>
-      <p:sp>
-        <p:nvSpPr>
-          <p:cNvPr id="52" name="Text 50"/>
-          <p:cNvSpPr/>
-          <p:nvPr/>
-        </p:nvSpPr>
-        <p:spPr>
-          <a:xfrm>
-            <a:off x="6668262" y="4572000"/>
-            <a:ext cx="685800" cy="219456"/>
-          </a:xfrm>
-          <a:prstGeom prst="rect">
-            <a:avLst/>
-          </a:prstGeom>
-          <a:noFill/>
-          <a:ln/>
-        </p:spPr>
-        <p:txBody>
-          <a:bodyPr wrap="square" lIns="0" tIns="0" rIns="0" bIns="0" rtlCol="0" anchor="t"/>
-          <a:lstStyle/>
-          <a:p>
-            <a:pPr algn="ctr" indent="0" marL="0">
-              <a:buNone/>
-            </a:pPr>
-            <a:r>
-              <a:rPr lang="en-US" sz="750" i="1" dirty="0">
-                <a:solidFill>
-                  <a:srgbClr val="94A3B8"/>
-                </a:solidFill>
-                <a:latin typeface="Calibri" pitchFamily="34" charset="0"/>
-                <a:ea typeface="Calibri" pitchFamily="34" charset="-122"/>
-                <a:cs typeface="Calibri" pitchFamily="34" charset="-120"/>
-              </a:rPr>
-              <a:t>/ī/</a:t>
-            </a:r>
-            <a:endParaRPr lang="en-US" sz="750" dirty="0"/>
-          </a:p>
-        </p:txBody>
-      </p:sp>
-      <p:sp>
-        <p:nvSpPr>
-          <p:cNvPr id="53" name="Shape 51"/>
-          <p:cNvSpPr/>
-          <p:nvPr/>
-        </p:nvSpPr>
-        <p:spPr>
-          <a:xfrm>
-            <a:off x="7576947" y="4169664"/>
-            <a:ext cx="685800" cy="384048"/>
-          </a:xfrm>
-          <a:prstGeom prst="rect">
-            <a:avLst>
-              <a:gd name="adj" fmla="val 9524"/>
-            </a:avLst>
-          </a:prstGeom>
-          <a:solidFill>
-            <a:srgbClr val="FFFFFF"/>
-          </a:solidFill>
-          <a:ln w="12700">
-            <a:solidFill>
-              <a:srgbClr val="DB2777"/>
-            </a:solidFill>
-            <a:prstDash val="solid"/>
-          </a:ln>
-        </p:spPr>
-      </p:sp>
-      <p:sp>
-        <p:nvSpPr>
-          <p:cNvPr id="54" name="Text 52"/>
-          <p:cNvSpPr/>
-          <p:nvPr/>
-        </p:nvSpPr>
-        <p:spPr>
-          <a:xfrm>
-            <a:off x="7576947" y="4169664"/>
+          <p:cNvPr id="53" name="Text 51"/>
+          <p:cNvSpPr/>
+          <p:nvPr/>
+        </p:nvSpPr>
+        <p:spPr>
+          <a:xfrm>
+            <a:off x="7447135" y="4169664"/>
             <a:ext cx="685800" cy="384048"/>
           </a:xfrm>
           <a:prstGeom prst="rect">
@@ -29644,7 +30019,7 @@
                 <a:ea typeface="Calibri" pitchFamily="34" charset="-122"/>
                 <a:cs typeface="Calibri" pitchFamily="34" charset="-120"/>
               </a:rPr>
-              <a:t>Word Labs  •  wordlabs.app  •  Root: 'sign' = mark, symbol, indicate</a:t>
+              <a:t>Word Labs  •  wordlabs.app  •  Root: 'sign' = mark, symbol, or signal</a:t>
             </a:r>
             <a:endParaRPr lang="en-US" sz="800" dirty="0"/>
           </a:p>
@@ -29783,7 +30158,7 @@
                 <a:ea typeface="Trebuchet MS" pitchFamily="34" charset="-122"/>
                 <a:cs typeface="Trebuchet MS" pitchFamily="34" charset="-120"/>
               </a:rPr>
-              <a:t>signal</a:t>
+              <a:t>assignment</a:t>
             </a:r>
             <a:endParaRPr lang="en-US" sz="2800" dirty="0"/>
           </a:p>
@@ -30471,7 +30846,7 @@
                 <a:ea typeface="Calibri" pitchFamily="34" charset="-122"/>
                 <a:cs typeface="Calibri" pitchFamily="34" charset="-120"/>
               </a:rPr>
-              <a:t>Word Labs  •  wordlabs.app  •  Root: 'sign' = mark, symbol, indicate</a:t>
+              <a:t>Word Labs  •  wordlabs.app  •  Root: 'sign' = mark, symbol, or signal</a:t>
             </a:r>
             <a:endParaRPr lang="en-US" sz="800" dirty="0"/>
           </a:p>
@@ -30610,7 +30985,7 @@
                 <a:ea typeface="Trebuchet MS" pitchFamily="34" charset="-122"/>
                 <a:cs typeface="Trebuchet MS" pitchFamily="34" charset="-120"/>
               </a:rPr>
-              <a:t>signal</a:t>
+              <a:t>assignment</a:t>
             </a:r>
             <a:endParaRPr lang="en-US" sz="2800" dirty="0"/>
           </a:p>
@@ -30690,7 +31065,7 @@
         </p:nvSpPr>
         <p:spPr>
           <a:xfrm>
-            <a:off x="2938272" y="2258568"/>
+            <a:off x="2221992" y="2258568"/>
             <a:ext cx="1828800" cy="292608"/>
           </a:xfrm>
           <a:prstGeom prst="rect">
@@ -30699,11 +31074,11 @@
             </a:avLst>
           </a:prstGeom>
           <a:solidFill>
-            <a:srgbClr val="CCFBF1"/>
+            <a:srgbClr val="DDD6FE"/>
           </a:solidFill>
           <a:ln w="19050">
             <a:solidFill>
-              <a:srgbClr val="0D9488"/>
+              <a:srgbClr val="7C3AED"/>
             </a:solidFill>
             <a:prstDash val="solid"/>
           </a:ln>
@@ -30724,7 +31099,7 @@
         </p:nvSpPr>
         <p:spPr>
           <a:xfrm>
-            <a:off x="2938272" y="2258568"/>
+            <a:off x="2221992" y="2258568"/>
             <a:ext cx="1828800" cy="292608"/>
           </a:xfrm>
           <a:prstGeom prst="rect">
@@ -30743,13 +31118,13 @@
             <a:r>
               <a:rPr lang="en-US" sz="1300" b="1" dirty="0">
                 <a:solidFill>
-                  <a:srgbClr val="0F766E"/>
+                  <a:srgbClr val="4C1D95"/>
                 </a:solidFill>
                 <a:latin typeface="Trebuchet MS" pitchFamily="34" charset="0"/>
                 <a:ea typeface="Trebuchet MS" pitchFamily="34" charset="-122"/>
                 <a:cs typeface="Trebuchet MS" pitchFamily="34" charset="-120"/>
               </a:rPr>
-              <a:t>sign</a:t>
+              <a:t>as</a:t>
             </a:r>
             <a:endParaRPr lang="en-US" sz="1300" dirty="0"/>
           </a:p>
@@ -30763,7 +31138,7 @@
         </p:nvSpPr>
         <p:spPr>
           <a:xfrm>
-            <a:off x="2938272" y="2569464"/>
+            <a:off x="2221992" y="2569464"/>
             <a:ext cx="1828800" cy="201168"/>
           </a:xfrm>
           <a:prstGeom prst="rect">
@@ -30788,7 +31163,7 @@
                 <a:ea typeface="Calibri" pitchFamily="34" charset="-122"/>
                 <a:cs typeface="Calibri" pitchFamily="34" charset="-120"/>
               </a:rPr>
-              <a:t>mark, symbol</a:t>
+              <a:t>to or towards</a:t>
             </a:r>
             <a:endParaRPr lang="en-US" sz="850" dirty="0"/>
           </a:p>
@@ -30796,13 +31171,52 @@
       </p:sp>
       <p:sp>
         <p:nvSpPr>
-          <p:cNvPr id="19" name="Shape 17"/>
-          <p:cNvSpPr/>
-          <p:nvPr/>
-        </p:nvSpPr>
-        <p:spPr>
-          <a:xfrm>
-            <a:off x="5803392" y="2258568"/>
+          <p:cNvPr id="19" name="Text 17"/>
+          <p:cNvSpPr/>
+          <p:nvPr/>
+        </p:nvSpPr>
+        <p:spPr>
+          <a:xfrm>
+            <a:off x="2221992" y="2752344"/>
+            <a:ext cx="1828800" cy="182880"/>
+          </a:xfrm>
+          <a:prstGeom prst="rect">
+            <a:avLst/>
+          </a:prstGeom>
+          <a:noFill/>
+          <a:ln/>
+        </p:spPr>
+        <p:txBody>
+          <a:bodyPr wrap="square" lIns="0" tIns="0" rIns="0" bIns="0" rtlCol="0" anchor="t"/>
+          <a:lstStyle/>
+          <a:p>
+            <a:pPr algn="ctr" indent="0" marL="0">
+              <a:buNone/>
+            </a:pPr>
+            <a:r>
+              <a:rPr lang="en-US" sz="700" i="1" dirty="0">
+                <a:solidFill>
+                  <a:srgbClr val="94A3B8"/>
+                </a:solidFill>
+                <a:latin typeface="Calibri" pitchFamily="34" charset="0"/>
+                <a:ea typeface="Calibri" pitchFamily="34" charset="-122"/>
+                <a:cs typeface="Calibri" pitchFamily="34" charset="-120"/>
+              </a:rPr>
+              <a:t>ad → as before 's'</a:t>
+            </a:r>
+            <a:endParaRPr lang="en-US" sz="700" dirty="0"/>
+          </a:p>
+        </p:txBody>
+      </p:sp>
+      <p:sp>
+        <p:nvSpPr>
+          <p:cNvPr id="20" name="Shape 18"/>
+          <p:cNvSpPr/>
+          <p:nvPr/>
+        </p:nvSpPr>
+        <p:spPr>
+          <a:xfrm>
+            <a:off x="4370832" y="2258568"/>
             <a:ext cx="1828800" cy="292608"/>
           </a:xfrm>
           <a:prstGeom prst="rect">
@@ -30811,11 +31225,11 @@
             </a:avLst>
           </a:prstGeom>
           <a:solidFill>
-            <a:srgbClr val="FCE7F3"/>
+            <a:srgbClr val="CCFBF1"/>
           </a:solidFill>
           <a:ln w="19050">
             <a:solidFill>
-              <a:srgbClr val="DB2777"/>
+              <a:srgbClr val="0D9488"/>
             </a:solidFill>
             <a:prstDash val="solid"/>
           </a:ln>
@@ -30830,13 +31244,13 @@
       </p:sp>
       <p:sp>
         <p:nvSpPr>
-          <p:cNvPr id="20" name="Text 18"/>
-          <p:cNvSpPr/>
-          <p:nvPr/>
-        </p:nvSpPr>
-        <p:spPr>
-          <a:xfrm>
-            <a:off x="5803392" y="2258568"/>
+          <p:cNvPr id="21" name="Text 19"/>
+          <p:cNvSpPr/>
+          <p:nvPr/>
+        </p:nvSpPr>
+        <p:spPr>
+          <a:xfrm>
+            <a:off x="4370832" y="2258568"/>
             <a:ext cx="1828800" cy="292608"/>
           </a:xfrm>
           <a:prstGeom prst="rect">
@@ -30855,13 +31269,13 @@
             <a:r>
               <a:rPr lang="en-US" sz="1300" b="1" dirty="0">
                 <a:solidFill>
-                  <a:srgbClr val="9D174D"/>
+                  <a:srgbClr val="0F766E"/>
                 </a:solidFill>
                 <a:latin typeface="Trebuchet MS" pitchFamily="34" charset="0"/>
                 <a:ea typeface="Trebuchet MS" pitchFamily="34" charset="-122"/>
                 <a:cs typeface="Trebuchet MS" pitchFamily="34" charset="-120"/>
               </a:rPr>
-              <a:t>al</a:t>
+              <a:t>sign</a:t>
             </a:r>
             <a:endParaRPr lang="en-US" sz="1300" dirty="0"/>
           </a:p>
@@ -30869,13 +31283,13 @@
       </p:sp>
       <p:sp>
         <p:nvSpPr>
-          <p:cNvPr id="21" name="Text 19"/>
-          <p:cNvSpPr/>
-          <p:nvPr/>
-        </p:nvSpPr>
-        <p:spPr>
-          <a:xfrm>
-            <a:off x="5803392" y="2569464"/>
+          <p:cNvPr id="22" name="Text 20"/>
+          <p:cNvSpPr/>
+          <p:nvPr/>
+        </p:nvSpPr>
+        <p:spPr>
+          <a:xfrm>
+            <a:off x="4370832" y="2569464"/>
             <a:ext cx="1828800" cy="201168"/>
           </a:xfrm>
           <a:prstGeom prst="rect">
@@ -30900,7 +31314,7 @@
                 <a:ea typeface="Calibri" pitchFamily="34" charset="-122"/>
                 <a:cs typeface="Calibri" pitchFamily="34" charset="-120"/>
               </a:rPr>
-              <a:t>relating to</a:t>
+              <a:t>mark or symbol</a:t>
             </a:r>
             <a:endParaRPr lang="en-US" sz="850" dirty="0"/>
           </a:p>
@@ -30908,7 +31322,119 @@
       </p:sp>
       <p:sp>
         <p:nvSpPr>
-          <p:cNvPr id="22" name="Shape 20"/>
+          <p:cNvPr id="23" name="Shape 21"/>
+          <p:cNvSpPr/>
+          <p:nvPr/>
+        </p:nvSpPr>
+        <p:spPr>
+          <a:xfrm>
+            <a:off x="6519672" y="2258568"/>
+            <a:ext cx="1828800" cy="292608"/>
+          </a:xfrm>
+          <a:prstGeom prst="rect">
+            <a:avLst>
+              <a:gd name="adj" fmla="val 25000"/>
+            </a:avLst>
+          </a:prstGeom>
+          <a:solidFill>
+            <a:srgbClr val="FCE7F3"/>
+          </a:solidFill>
+          <a:ln w="19050">
+            <a:solidFill>
+              <a:srgbClr val="DB2777"/>
+            </a:solidFill>
+            <a:prstDash val="solid"/>
+          </a:ln>
+          <a:effectLst>
+            <a:outerShdw sx="100000" sy="100000" kx="0" ky="0" algn="bl" rotWithShape="0" blurRad="101600" dist="38100" dir="8100000">
+              <a:srgbClr val="000000">
+                <a:alpha val="12000"/>
+              </a:srgbClr>
+            </a:outerShdw>
+          </a:effectLst>
+        </p:spPr>
+      </p:sp>
+      <p:sp>
+        <p:nvSpPr>
+          <p:cNvPr id="24" name="Text 22"/>
+          <p:cNvSpPr/>
+          <p:nvPr/>
+        </p:nvSpPr>
+        <p:spPr>
+          <a:xfrm>
+            <a:off x="6519672" y="2258568"/>
+            <a:ext cx="1828800" cy="292608"/>
+          </a:xfrm>
+          <a:prstGeom prst="rect">
+            <a:avLst/>
+          </a:prstGeom>
+          <a:noFill/>
+          <a:ln/>
+        </p:spPr>
+        <p:txBody>
+          <a:bodyPr wrap="square" lIns="0" tIns="0" rIns="0" bIns="0" rtlCol="0" anchor="ctr"/>
+          <a:lstStyle/>
+          <a:p>
+            <a:pPr algn="ctr" indent="0" marL="0">
+              <a:buNone/>
+            </a:pPr>
+            <a:r>
+              <a:rPr lang="en-US" sz="1300" b="1" dirty="0">
+                <a:solidFill>
+                  <a:srgbClr val="9D174D"/>
+                </a:solidFill>
+                <a:latin typeface="Trebuchet MS" pitchFamily="34" charset="0"/>
+                <a:ea typeface="Trebuchet MS" pitchFamily="34" charset="-122"/>
+                <a:cs typeface="Trebuchet MS" pitchFamily="34" charset="-120"/>
+              </a:rPr>
+              <a:t>ment</a:t>
+            </a:r>
+            <a:endParaRPr lang="en-US" sz="1300" dirty="0"/>
+          </a:p>
+        </p:txBody>
+      </p:sp>
+      <p:sp>
+        <p:nvSpPr>
+          <p:cNvPr id="25" name="Text 23"/>
+          <p:cNvSpPr/>
+          <p:nvPr/>
+        </p:nvSpPr>
+        <p:spPr>
+          <a:xfrm>
+            <a:off x="6519672" y="2569464"/>
+            <a:ext cx="1828800" cy="201168"/>
+          </a:xfrm>
+          <a:prstGeom prst="rect">
+            <a:avLst/>
+          </a:prstGeom>
+          <a:noFill/>
+          <a:ln/>
+        </p:spPr>
+        <p:txBody>
+          <a:bodyPr wrap="square" lIns="0" tIns="0" rIns="0" bIns="0" rtlCol="0" anchor="t"/>
+          <a:lstStyle/>
+          <a:p>
+            <a:pPr algn="ctr" indent="0" marL="0">
+              <a:buNone/>
+            </a:pPr>
+            <a:r>
+              <a:rPr lang="en-US" sz="850" dirty="0">
+                <a:solidFill>
+                  <a:srgbClr val="475569"/>
+                </a:solidFill>
+                <a:latin typeface="Calibri" pitchFamily="34" charset="0"/>
+                <a:ea typeface="Calibri" pitchFamily="34" charset="-122"/>
+                <a:cs typeface="Calibri" pitchFamily="34" charset="-120"/>
+              </a:rPr>
+              <a:t>the result or act of something</a:t>
+            </a:r>
+            <a:endParaRPr lang="en-US" sz="850" dirty="0"/>
+          </a:p>
+        </p:txBody>
+      </p:sp>
+      <p:sp>
+        <p:nvSpPr>
+          <p:cNvPr id="26" name="Shape 24"/>
           <p:cNvSpPr/>
           <p:nvPr/>
         </p:nvSpPr>
@@ -30935,7 +31461,7 @@
       </p:sp>
       <p:sp>
         <p:nvSpPr>
-          <p:cNvPr id="23" name="Text 21"/>
+          <p:cNvPr id="27" name="Text 25"/>
           <p:cNvSpPr/>
           <p:nvPr/>
         </p:nvSpPr>
@@ -30974,7 +31500,7 @@
       </p:sp>
       <p:sp>
         <p:nvSpPr>
-          <p:cNvPr id="24" name="Shape 22"/>
+          <p:cNvPr id="28" name="Shape 26"/>
           <p:cNvSpPr/>
           <p:nvPr/>
         </p:nvSpPr>
@@ -31001,7 +31527,7 @@
       </p:sp>
       <p:sp>
         <p:nvSpPr>
-          <p:cNvPr id="25" name="Text 23"/>
+          <p:cNvPr id="29" name="Text 27"/>
           <p:cNvSpPr/>
           <p:nvPr/>
         </p:nvSpPr>
@@ -31040,7 +31566,7 @@
       </p:sp>
       <p:sp>
         <p:nvSpPr>
-          <p:cNvPr id="26" name="Shape 24"/>
+          <p:cNvPr id="30" name="Shape 28"/>
           <p:cNvSpPr/>
           <p:nvPr/>
         </p:nvSpPr>
@@ -31067,7 +31593,7 @@
       </p:sp>
       <p:sp>
         <p:nvSpPr>
-          <p:cNvPr id="27" name="Text 25"/>
+          <p:cNvPr id="31" name="Text 29"/>
           <p:cNvSpPr/>
           <p:nvPr/>
         </p:nvSpPr>
@@ -31106,7 +31632,7 @@
       </p:sp>
       <p:sp>
         <p:nvSpPr>
-          <p:cNvPr id="28" name="Shape 26"/>
+          <p:cNvPr id="32" name="Shape 30"/>
           <p:cNvSpPr/>
           <p:nvPr/>
         </p:nvSpPr>
@@ -31133,7 +31659,7 @@
       </p:sp>
       <p:sp>
         <p:nvSpPr>
-          <p:cNvPr id="29" name="Text 27"/>
+          <p:cNvPr id="33" name="Text 31"/>
           <p:cNvSpPr/>
           <p:nvPr/>
         </p:nvSpPr>
@@ -31456,7 +31982,7 @@
                 <a:ea typeface="Calibri" pitchFamily="34" charset="-122"/>
                 <a:cs typeface="Calibri" pitchFamily="34" charset="-120"/>
               </a:rPr>
-              <a:t>Word Labs  •  wordlabs.app  •  Root: 'sign' = mark, symbol, indicate</a:t>
+              <a:t>Word Labs  •  wordlabs.app  •  Root: 'sign' = mark, symbol, or signal</a:t>
             </a:r>
             <a:endParaRPr lang="en-US" sz="800" dirty="0"/>
           </a:p>
@@ -31595,7 +32121,7 @@
                 <a:ea typeface="Trebuchet MS" pitchFamily="34" charset="-122"/>
                 <a:cs typeface="Trebuchet MS" pitchFamily="34" charset="-120"/>
               </a:rPr>
-              <a:t>signal</a:t>
+              <a:t>assignment</a:t>
             </a:r>
             <a:endParaRPr lang="en-US" sz="2800" dirty="0"/>
           </a:p>
@@ -31675,7 +32201,7 @@
         </p:nvSpPr>
         <p:spPr>
           <a:xfrm>
-            <a:off x="2938272" y="2258568"/>
+            <a:off x="2221992" y="2258568"/>
             <a:ext cx="1828800" cy="292608"/>
           </a:xfrm>
           <a:prstGeom prst="rect">
@@ -31684,11 +32210,11 @@
             </a:avLst>
           </a:prstGeom>
           <a:solidFill>
-            <a:srgbClr val="CCFBF1"/>
+            <a:srgbClr val="DDD6FE"/>
           </a:solidFill>
           <a:ln w="19050">
             <a:solidFill>
-              <a:srgbClr val="0D9488"/>
+              <a:srgbClr val="7C3AED"/>
             </a:solidFill>
             <a:prstDash val="solid"/>
           </a:ln>
@@ -31709,7 +32235,7 @@
         </p:nvSpPr>
         <p:spPr>
           <a:xfrm>
-            <a:off x="2938272" y="2258568"/>
+            <a:off x="2221992" y="2258568"/>
             <a:ext cx="1828800" cy="292608"/>
           </a:xfrm>
           <a:prstGeom prst="rect">
@@ -31728,13 +32254,13 @@
             <a:r>
               <a:rPr lang="en-US" sz="1300" b="1" dirty="0">
                 <a:solidFill>
-                  <a:srgbClr val="0F766E"/>
+                  <a:srgbClr val="4C1D95"/>
                 </a:solidFill>
                 <a:latin typeface="Trebuchet MS" pitchFamily="34" charset="0"/>
                 <a:ea typeface="Trebuchet MS" pitchFamily="34" charset="-122"/>
                 <a:cs typeface="Trebuchet MS" pitchFamily="34" charset="-120"/>
               </a:rPr>
-              <a:t>sign</a:t>
+              <a:t>as</a:t>
             </a:r>
             <a:endParaRPr lang="en-US" sz="1300" dirty="0"/>
           </a:p>
@@ -31748,7 +32274,7 @@
         </p:nvSpPr>
         <p:spPr>
           <a:xfrm>
-            <a:off x="2938272" y="2569464"/>
+            <a:off x="2221992" y="2569464"/>
             <a:ext cx="1828800" cy="201168"/>
           </a:xfrm>
           <a:prstGeom prst="rect">
@@ -31773,7 +32299,7 @@
                 <a:ea typeface="Calibri" pitchFamily="34" charset="-122"/>
                 <a:cs typeface="Calibri" pitchFamily="34" charset="-120"/>
               </a:rPr>
-              <a:t>mark, symbol</a:t>
+              <a:t>to or towards</a:t>
             </a:r>
             <a:endParaRPr lang="en-US" sz="850" dirty="0"/>
           </a:p>
@@ -31781,13 +32307,52 @@
       </p:sp>
       <p:sp>
         <p:nvSpPr>
-          <p:cNvPr id="19" name="Shape 17"/>
-          <p:cNvSpPr/>
-          <p:nvPr/>
-        </p:nvSpPr>
-        <p:spPr>
-          <a:xfrm>
-            <a:off x="5803392" y="2258568"/>
+          <p:cNvPr id="19" name="Text 17"/>
+          <p:cNvSpPr/>
+          <p:nvPr/>
+        </p:nvSpPr>
+        <p:spPr>
+          <a:xfrm>
+            <a:off x="2221992" y="2752344"/>
+            <a:ext cx="1828800" cy="182880"/>
+          </a:xfrm>
+          <a:prstGeom prst="rect">
+            <a:avLst/>
+          </a:prstGeom>
+          <a:noFill/>
+          <a:ln/>
+        </p:spPr>
+        <p:txBody>
+          <a:bodyPr wrap="square" lIns="0" tIns="0" rIns="0" bIns="0" rtlCol="0" anchor="t"/>
+          <a:lstStyle/>
+          <a:p>
+            <a:pPr algn="ctr" indent="0" marL="0">
+              <a:buNone/>
+            </a:pPr>
+            <a:r>
+              <a:rPr lang="en-US" sz="700" i="1" dirty="0">
+                <a:solidFill>
+                  <a:srgbClr val="94A3B8"/>
+                </a:solidFill>
+                <a:latin typeface="Calibri" pitchFamily="34" charset="0"/>
+                <a:ea typeface="Calibri" pitchFamily="34" charset="-122"/>
+                <a:cs typeface="Calibri" pitchFamily="34" charset="-120"/>
+              </a:rPr>
+              <a:t>ad → as before 's'</a:t>
+            </a:r>
+            <a:endParaRPr lang="en-US" sz="700" dirty="0"/>
+          </a:p>
+        </p:txBody>
+      </p:sp>
+      <p:sp>
+        <p:nvSpPr>
+          <p:cNvPr id="20" name="Shape 18"/>
+          <p:cNvSpPr/>
+          <p:nvPr/>
+        </p:nvSpPr>
+        <p:spPr>
+          <a:xfrm>
+            <a:off x="4370832" y="2258568"/>
             <a:ext cx="1828800" cy="292608"/>
           </a:xfrm>
           <a:prstGeom prst="rect">
@@ -31796,11 +32361,11 @@
             </a:avLst>
           </a:prstGeom>
           <a:solidFill>
-            <a:srgbClr val="FCE7F3"/>
+            <a:srgbClr val="CCFBF1"/>
           </a:solidFill>
           <a:ln w="19050">
             <a:solidFill>
-              <a:srgbClr val="DB2777"/>
+              <a:srgbClr val="0D9488"/>
             </a:solidFill>
             <a:prstDash val="solid"/>
           </a:ln>
@@ -31815,13 +32380,13 @@
       </p:sp>
       <p:sp>
         <p:nvSpPr>
-          <p:cNvPr id="20" name="Text 18"/>
-          <p:cNvSpPr/>
-          <p:nvPr/>
-        </p:nvSpPr>
-        <p:spPr>
-          <a:xfrm>
-            <a:off x="5803392" y="2258568"/>
+          <p:cNvPr id="21" name="Text 19"/>
+          <p:cNvSpPr/>
+          <p:nvPr/>
+        </p:nvSpPr>
+        <p:spPr>
+          <a:xfrm>
+            <a:off x="4370832" y="2258568"/>
             <a:ext cx="1828800" cy="292608"/>
           </a:xfrm>
           <a:prstGeom prst="rect">
@@ -31840,13 +32405,13 @@
             <a:r>
               <a:rPr lang="en-US" sz="1300" b="1" dirty="0">
                 <a:solidFill>
-                  <a:srgbClr val="9D174D"/>
+                  <a:srgbClr val="0F766E"/>
                 </a:solidFill>
                 <a:latin typeface="Trebuchet MS" pitchFamily="34" charset="0"/>
                 <a:ea typeface="Trebuchet MS" pitchFamily="34" charset="-122"/>
                 <a:cs typeface="Trebuchet MS" pitchFamily="34" charset="-120"/>
               </a:rPr>
-              <a:t>al</a:t>
+              <a:t>sign</a:t>
             </a:r>
             <a:endParaRPr lang="en-US" sz="1300" dirty="0"/>
           </a:p>
@@ -31854,13 +32419,13 @@
       </p:sp>
       <p:sp>
         <p:nvSpPr>
-          <p:cNvPr id="21" name="Text 19"/>
-          <p:cNvSpPr/>
-          <p:nvPr/>
-        </p:nvSpPr>
-        <p:spPr>
-          <a:xfrm>
-            <a:off x="5803392" y="2569464"/>
+          <p:cNvPr id="22" name="Text 20"/>
+          <p:cNvSpPr/>
+          <p:nvPr/>
+        </p:nvSpPr>
+        <p:spPr>
+          <a:xfrm>
+            <a:off x="4370832" y="2569464"/>
             <a:ext cx="1828800" cy="201168"/>
           </a:xfrm>
           <a:prstGeom prst="rect">
@@ -31885,7 +32450,7 @@
                 <a:ea typeface="Calibri" pitchFamily="34" charset="-122"/>
                 <a:cs typeface="Calibri" pitchFamily="34" charset="-120"/>
               </a:rPr>
-              <a:t>relating to</a:t>
+              <a:t>mark or symbol</a:t>
             </a:r>
             <a:endParaRPr lang="en-US" sz="850" dirty="0"/>
           </a:p>
@@ -31893,7 +32458,119 @@
       </p:sp>
       <p:sp>
         <p:nvSpPr>
-          <p:cNvPr id="22" name="Shape 20"/>
+          <p:cNvPr id="23" name="Shape 21"/>
+          <p:cNvSpPr/>
+          <p:nvPr/>
+        </p:nvSpPr>
+        <p:spPr>
+          <a:xfrm>
+            <a:off x="6519672" y="2258568"/>
+            <a:ext cx="1828800" cy="292608"/>
+          </a:xfrm>
+          <a:prstGeom prst="rect">
+            <a:avLst>
+              <a:gd name="adj" fmla="val 25000"/>
+            </a:avLst>
+          </a:prstGeom>
+          <a:solidFill>
+            <a:srgbClr val="FCE7F3"/>
+          </a:solidFill>
+          <a:ln w="19050">
+            <a:solidFill>
+              <a:srgbClr val="DB2777"/>
+            </a:solidFill>
+            <a:prstDash val="solid"/>
+          </a:ln>
+          <a:effectLst>
+            <a:outerShdw sx="100000" sy="100000" kx="0" ky="0" algn="bl" rotWithShape="0" blurRad="101600" dist="38100" dir="8100000">
+              <a:srgbClr val="000000">
+                <a:alpha val="12000"/>
+              </a:srgbClr>
+            </a:outerShdw>
+          </a:effectLst>
+        </p:spPr>
+      </p:sp>
+      <p:sp>
+        <p:nvSpPr>
+          <p:cNvPr id="24" name="Text 22"/>
+          <p:cNvSpPr/>
+          <p:nvPr/>
+        </p:nvSpPr>
+        <p:spPr>
+          <a:xfrm>
+            <a:off x="6519672" y="2258568"/>
+            <a:ext cx="1828800" cy="292608"/>
+          </a:xfrm>
+          <a:prstGeom prst="rect">
+            <a:avLst/>
+          </a:prstGeom>
+          <a:noFill/>
+          <a:ln/>
+        </p:spPr>
+        <p:txBody>
+          <a:bodyPr wrap="square" lIns="0" tIns="0" rIns="0" bIns="0" rtlCol="0" anchor="ctr"/>
+          <a:lstStyle/>
+          <a:p>
+            <a:pPr algn="ctr" indent="0" marL="0">
+              <a:buNone/>
+            </a:pPr>
+            <a:r>
+              <a:rPr lang="en-US" sz="1300" b="1" dirty="0">
+                <a:solidFill>
+                  <a:srgbClr val="9D174D"/>
+                </a:solidFill>
+                <a:latin typeface="Trebuchet MS" pitchFamily="34" charset="0"/>
+                <a:ea typeface="Trebuchet MS" pitchFamily="34" charset="-122"/>
+                <a:cs typeface="Trebuchet MS" pitchFamily="34" charset="-120"/>
+              </a:rPr>
+              <a:t>ment</a:t>
+            </a:r>
+            <a:endParaRPr lang="en-US" sz="1300" dirty="0"/>
+          </a:p>
+        </p:txBody>
+      </p:sp>
+      <p:sp>
+        <p:nvSpPr>
+          <p:cNvPr id="25" name="Text 23"/>
+          <p:cNvSpPr/>
+          <p:nvPr/>
+        </p:nvSpPr>
+        <p:spPr>
+          <a:xfrm>
+            <a:off x="6519672" y="2569464"/>
+            <a:ext cx="1828800" cy="201168"/>
+          </a:xfrm>
+          <a:prstGeom prst="rect">
+            <a:avLst/>
+          </a:prstGeom>
+          <a:noFill/>
+          <a:ln/>
+        </p:spPr>
+        <p:txBody>
+          <a:bodyPr wrap="square" lIns="0" tIns="0" rIns="0" bIns="0" rtlCol="0" anchor="t"/>
+          <a:lstStyle/>
+          <a:p>
+            <a:pPr algn="ctr" indent="0" marL="0">
+              <a:buNone/>
+            </a:pPr>
+            <a:r>
+              <a:rPr lang="en-US" sz="850" dirty="0">
+                <a:solidFill>
+                  <a:srgbClr val="475569"/>
+                </a:solidFill>
+                <a:latin typeface="Calibri" pitchFamily="34" charset="0"/>
+                <a:ea typeface="Calibri" pitchFamily="34" charset="-122"/>
+                <a:cs typeface="Calibri" pitchFamily="34" charset="-120"/>
+              </a:rPr>
+              <a:t>the result or act of something</a:t>
+            </a:r>
+            <a:endParaRPr lang="en-US" sz="850" dirty="0"/>
+          </a:p>
+        </p:txBody>
+      </p:sp>
+      <p:sp>
+        <p:nvSpPr>
+          <p:cNvPr id="26" name="Shape 24"/>
           <p:cNvSpPr/>
           <p:nvPr/>
         </p:nvSpPr>
@@ -31920,7 +32597,7 @@
       </p:sp>
       <p:sp>
         <p:nvSpPr>
-          <p:cNvPr id="23" name="Text 21"/>
+          <p:cNvPr id="27" name="Text 25"/>
           <p:cNvSpPr/>
           <p:nvPr/>
         </p:nvSpPr>
@@ -31959,7 +32636,7 @@
       </p:sp>
       <p:sp>
         <p:nvSpPr>
-          <p:cNvPr id="24" name="Shape 22"/>
+          <p:cNvPr id="28" name="Shape 26"/>
           <p:cNvSpPr/>
           <p:nvPr/>
         </p:nvSpPr>
@@ -31986,13 +32663,13 @@
       </p:sp>
       <p:sp>
         <p:nvSpPr>
-          <p:cNvPr id="25" name="Shape 23"/>
-          <p:cNvSpPr/>
-          <p:nvPr/>
-        </p:nvSpPr>
-        <p:spPr>
-          <a:xfrm>
-            <a:off x="2999232" y="3364992"/>
+          <p:cNvPr id="29" name="Shape 27"/>
+          <p:cNvSpPr/>
+          <p:nvPr/>
+        </p:nvSpPr>
+        <p:spPr>
+          <a:xfrm>
+            <a:off x="2313432" y="3364992"/>
             <a:ext cx="1645920" cy="475488"/>
           </a:xfrm>
           <a:prstGeom prst="rect">
@@ -32013,13 +32690,13 @@
       </p:sp>
       <p:sp>
         <p:nvSpPr>
-          <p:cNvPr id="26" name="Text 24"/>
-          <p:cNvSpPr/>
-          <p:nvPr/>
-        </p:nvSpPr>
-        <p:spPr>
-          <a:xfrm>
-            <a:off x="2999232" y="3364992"/>
+          <p:cNvPr id="30" name="Text 28"/>
+          <p:cNvSpPr/>
+          <p:nvPr/>
+        </p:nvSpPr>
+        <p:spPr>
+          <a:xfrm>
+            <a:off x="2313432" y="3364992"/>
             <a:ext cx="1645920" cy="475488"/>
           </a:xfrm>
           <a:prstGeom prst="rect">
@@ -32044,7 +32721,7 @@
                 <a:ea typeface="Trebuchet MS" pitchFamily="34" charset="-122"/>
                 <a:cs typeface="Trebuchet MS" pitchFamily="34" charset="-120"/>
               </a:rPr>
-              <a:t>sig</a:t>
+              <a:t>as</a:t>
             </a:r>
             <a:endParaRPr lang="en-US" sz="1400" dirty="0"/>
           </a:p>
@@ -32052,14 +32729,14 @@
       </p:sp>
       <p:sp>
         <p:nvSpPr>
-          <p:cNvPr id="27" name="Text 25"/>
-          <p:cNvSpPr/>
-          <p:nvPr/>
-        </p:nvSpPr>
-        <p:spPr>
-          <a:xfrm>
-            <a:off x="4645152" y="3364992"/>
-            <a:ext cx="1097280" cy="475488"/>
+          <p:cNvPr id="31" name="Text 29"/>
+          <p:cNvSpPr/>
+          <p:nvPr/>
+        </p:nvSpPr>
+        <p:spPr>
+          <a:xfrm>
+            <a:off x="3959352" y="3364992"/>
+            <a:ext cx="411480" cy="475488"/>
           </a:xfrm>
           <a:prstGeom prst="rect">
             <a:avLst/>
@@ -32091,13 +32768,13 @@
       </p:sp>
       <p:sp>
         <p:nvSpPr>
-          <p:cNvPr id="28" name="Shape 26"/>
-          <p:cNvSpPr/>
-          <p:nvPr/>
-        </p:nvSpPr>
-        <p:spPr>
-          <a:xfrm>
-            <a:off x="5742432" y="3364992"/>
+          <p:cNvPr id="32" name="Shape 30"/>
+          <p:cNvSpPr/>
+          <p:nvPr/>
+        </p:nvSpPr>
+        <p:spPr>
+          <a:xfrm>
+            <a:off x="4370832" y="3364992"/>
             <a:ext cx="1645920" cy="475488"/>
           </a:xfrm>
           <a:prstGeom prst="rect">
@@ -32118,13 +32795,13 @@
       </p:sp>
       <p:sp>
         <p:nvSpPr>
-          <p:cNvPr id="29" name="Text 27"/>
-          <p:cNvSpPr/>
-          <p:nvPr/>
-        </p:nvSpPr>
-        <p:spPr>
-          <a:xfrm>
-            <a:off x="5742432" y="3364992"/>
+          <p:cNvPr id="33" name="Text 31"/>
+          <p:cNvSpPr/>
+          <p:nvPr/>
+        </p:nvSpPr>
+        <p:spPr>
+          <a:xfrm>
+            <a:off x="4370832" y="3364992"/>
             <a:ext cx="1645920" cy="475488"/>
           </a:xfrm>
           <a:prstGeom prst="rect">
@@ -32149,7 +32826,7 @@
                 <a:ea typeface="Trebuchet MS" pitchFamily="34" charset="-122"/>
                 <a:cs typeface="Trebuchet MS" pitchFamily="34" charset="-120"/>
               </a:rPr>
-              <a:t>nal</a:t>
+              <a:t>sign</a:t>
             </a:r>
             <a:endParaRPr lang="en-US" sz="1400" dirty="0"/>
           </a:p>
@@ -32157,7 +32834,112 @@
       </p:sp>
       <p:sp>
         <p:nvSpPr>
-          <p:cNvPr id="30" name="Shape 28"/>
+          <p:cNvPr id="34" name="Text 32"/>
+          <p:cNvSpPr/>
+          <p:nvPr/>
+        </p:nvSpPr>
+        <p:spPr>
+          <a:xfrm>
+            <a:off x="6016752" y="3364992"/>
+            <a:ext cx="411480" cy="475488"/>
+          </a:xfrm>
+          <a:prstGeom prst="rect">
+            <a:avLst/>
+          </a:prstGeom>
+          <a:noFill/>
+          <a:ln/>
+        </p:spPr>
+        <p:txBody>
+          <a:bodyPr wrap="square" lIns="0" tIns="0" rIns="0" bIns="0" rtlCol="0" anchor="ctr"/>
+          <a:lstStyle/>
+          <a:p>
+            <a:pPr algn="ctr" indent="0" marL="0">
+              <a:buNone/>
+            </a:pPr>
+            <a:r>
+              <a:rPr lang="en-US" sz="1600" b="1" dirty="0">
+                <a:solidFill>
+                  <a:srgbClr val="0D9488"/>
+                </a:solidFill>
+                <a:latin typeface="Trebuchet MS" pitchFamily="34" charset="0"/>
+                <a:ea typeface="Trebuchet MS" pitchFamily="34" charset="-122"/>
+                <a:cs typeface="Trebuchet MS" pitchFamily="34" charset="-120"/>
+              </a:rPr>
+              <a:t>·</a:t>
+            </a:r>
+            <a:endParaRPr lang="en-US" sz="1600" dirty="0"/>
+          </a:p>
+        </p:txBody>
+      </p:sp>
+      <p:sp>
+        <p:nvSpPr>
+          <p:cNvPr id="35" name="Shape 33"/>
+          <p:cNvSpPr/>
+          <p:nvPr/>
+        </p:nvSpPr>
+        <p:spPr>
+          <a:xfrm>
+            <a:off x="6428232" y="3364992"/>
+            <a:ext cx="1645920" cy="475488"/>
+          </a:xfrm>
+          <a:prstGeom prst="rect">
+            <a:avLst>
+              <a:gd name="adj" fmla="val 9615"/>
+            </a:avLst>
+          </a:prstGeom>
+          <a:solidFill>
+            <a:srgbClr val="FFFFFF"/>
+          </a:solidFill>
+          <a:ln w="12700">
+            <a:solidFill>
+              <a:srgbClr val="0D9488"/>
+            </a:solidFill>
+            <a:prstDash val="solid"/>
+          </a:ln>
+        </p:spPr>
+      </p:sp>
+      <p:sp>
+        <p:nvSpPr>
+          <p:cNvPr id="36" name="Text 34"/>
+          <p:cNvSpPr/>
+          <p:nvPr/>
+        </p:nvSpPr>
+        <p:spPr>
+          <a:xfrm>
+            <a:off x="6428232" y="3364992"/>
+            <a:ext cx="1645920" cy="475488"/>
+          </a:xfrm>
+          <a:prstGeom prst="rect">
+            <a:avLst/>
+          </a:prstGeom>
+          <a:noFill/>
+          <a:ln/>
+        </p:spPr>
+        <p:txBody>
+          <a:bodyPr wrap="square" lIns="0" tIns="0" rIns="0" bIns="0" rtlCol="0" anchor="ctr"/>
+          <a:lstStyle/>
+          <a:p>
+            <a:pPr algn="ctr" indent="0" marL="0">
+              <a:buNone/>
+            </a:pPr>
+            <a:r>
+              <a:rPr lang="en-US" sz="1400" b="1" dirty="0">
+                <a:solidFill>
+                  <a:srgbClr val="0D9488"/>
+                </a:solidFill>
+                <a:latin typeface="Trebuchet MS" pitchFamily="34" charset="0"/>
+                <a:ea typeface="Trebuchet MS" pitchFamily="34" charset="-122"/>
+                <a:cs typeface="Trebuchet MS" pitchFamily="34" charset="-120"/>
+              </a:rPr>
+              <a:t>ment</a:t>
+            </a:r>
+            <a:endParaRPr lang="en-US" sz="1400" dirty="0"/>
+          </a:p>
+        </p:txBody>
+      </p:sp>
+      <p:sp>
+        <p:nvSpPr>
+          <p:cNvPr id="37" name="Shape 35"/>
           <p:cNvSpPr/>
           <p:nvPr/>
         </p:nvSpPr>
@@ -32184,7 +32966,7 @@
       </p:sp>
       <p:sp>
         <p:nvSpPr>
-          <p:cNvPr id="31" name="Text 29"/>
+          <p:cNvPr id="38" name="Text 36"/>
           <p:cNvSpPr/>
           <p:nvPr/>
         </p:nvSpPr>
@@ -32223,7 +33005,7 @@
       </p:sp>
       <p:sp>
         <p:nvSpPr>
-          <p:cNvPr id="32" name="Shape 30"/>
+          <p:cNvPr id="39" name="Shape 37"/>
           <p:cNvSpPr/>
           <p:nvPr/>
         </p:nvSpPr>
@@ -32250,7 +33032,7 @@
       </p:sp>
       <p:sp>
         <p:nvSpPr>
-          <p:cNvPr id="33" name="Text 31"/>
+          <p:cNvPr id="40" name="Text 38"/>
           <p:cNvSpPr/>
           <p:nvPr/>
         </p:nvSpPr>
@@ -32573,7 +33355,7 @@
                 <a:ea typeface="Calibri" pitchFamily="34" charset="-122"/>
                 <a:cs typeface="Calibri" pitchFamily="34" charset="-120"/>
               </a:rPr>
-              <a:t>Word Labs  •  wordlabs.app  •  Root: 'sign' = mark, symbol, indicate</a:t>
+              <a:t>Word Labs  •  wordlabs.app  •  Root: 'sign' = mark, symbol, or signal</a:t>
             </a:r>
             <a:endParaRPr lang="en-US" sz="800" dirty="0"/>
           </a:p>
@@ -32712,7 +33494,7 @@
                 <a:ea typeface="Trebuchet MS" pitchFamily="34" charset="-122"/>
                 <a:cs typeface="Trebuchet MS" pitchFamily="34" charset="-120"/>
               </a:rPr>
-              <a:t>signal</a:t>
+              <a:t>assignment</a:t>
             </a:r>
             <a:endParaRPr lang="en-US" sz="2800" dirty="0"/>
           </a:p>
@@ -32792,7 +33574,7 @@
         </p:nvSpPr>
         <p:spPr>
           <a:xfrm>
-            <a:off x="2938272" y="2258568"/>
+            <a:off x="2221992" y="2258568"/>
             <a:ext cx="1828800" cy="292608"/>
           </a:xfrm>
           <a:prstGeom prst="rect">
@@ -32801,11 +33583,11 @@
             </a:avLst>
           </a:prstGeom>
           <a:solidFill>
-            <a:srgbClr val="CCFBF1"/>
+            <a:srgbClr val="DDD6FE"/>
           </a:solidFill>
           <a:ln w="19050">
             <a:solidFill>
-              <a:srgbClr val="0D9488"/>
+              <a:srgbClr val="7C3AED"/>
             </a:solidFill>
             <a:prstDash val="solid"/>
           </a:ln>
@@ -32826,7 +33608,7 @@
         </p:nvSpPr>
         <p:spPr>
           <a:xfrm>
-            <a:off x="2938272" y="2258568"/>
+            <a:off x="2221992" y="2258568"/>
             <a:ext cx="1828800" cy="292608"/>
           </a:xfrm>
           <a:prstGeom prst="rect">
@@ -32845,13 +33627,13 @@
             <a:r>
               <a:rPr lang="en-US" sz="1300" b="1" dirty="0">
                 <a:solidFill>
-                  <a:srgbClr val="0F766E"/>
+                  <a:srgbClr val="4C1D95"/>
                 </a:solidFill>
                 <a:latin typeface="Trebuchet MS" pitchFamily="34" charset="0"/>
                 <a:ea typeface="Trebuchet MS" pitchFamily="34" charset="-122"/>
                 <a:cs typeface="Trebuchet MS" pitchFamily="34" charset="-120"/>
               </a:rPr>
-              <a:t>sign</a:t>
+              <a:t>as</a:t>
             </a:r>
             <a:endParaRPr lang="en-US" sz="1300" dirty="0"/>
           </a:p>
@@ -32865,7 +33647,7 @@
         </p:nvSpPr>
         <p:spPr>
           <a:xfrm>
-            <a:off x="2938272" y="2569464"/>
+            <a:off x="2221992" y="2569464"/>
             <a:ext cx="1828800" cy="201168"/>
           </a:xfrm>
           <a:prstGeom prst="rect">
@@ -32890,7 +33672,7 @@
                 <a:ea typeface="Calibri" pitchFamily="34" charset="-122"/>
                 <a:cs typeface="Calibri" pitchFamily="34" charset="-120"/>
               </a:rPr>
-              <a:t>mark, symbol</a:t>
+              <a:t>to or towards</a:t>
             </a:r>
             <a:endParaRPr lang="en-US" sz="850" dirty="0"/>
           </a:p>
@@ -32898,13 +33680,52 @@
       </p:sp>
       <p:sp>
         <p:nvSpPr>
-          <p:cNvPr id="19" name="Shape 17"/>
-          <p:cNvSpPr/>
-          <p:nvPr/>
-        </p:nvSpPr>
-        <p:spPr>
-          <a:xfrm>
-            <a:off x="5803392" y="2258568"/>
+          <p:cNvPr id="19" name="Text 17"/>
+          <p:cNvSpPr/>
+          <p:nvPr/>
+        </p:nvSpPr>
+        <p:spPr>
+          <a:xfrm>
+            <a:off x="2221992" y="2752344"/>
+            <a:ext cx="1828800" cy="182880"/>
+          </a:xfrm>
+          <a:prstGeom prst="rect">
+            <a:avLst/>
+          </a:prstGeom>
+          <a:noFill/>
+          <a:ln/>
+        </p:spPr>
+        <p:txBody>
+          <a:bodyPr wrap="square" lIns="0" tIns="0" rIns="0" bIns="0" rtlCol="0" anchor="t"/>
+          <a:lstStyle/>
+          <a:p>
+            <a:pPr algn="ctr" indent="0" marL="0">
+              <a:buNone/>
+            </a:pPr>
+            <a:r>
+              <a:rPr lang="en-US" sz="700" i="1" dirty="0">
+                <a:solidFill>
+                  <a:srgbClr val="94A3B8"/>
+                </a:solidFill>
+                <a:latin typeface="Calibri" pitchFamily="34" charset="0"/>
+                <a:ea typeface="Calibri" pitchFamily="34" charset="-122"/>
+                <a:cs typeface="Calibri" pitchFamily="34" charset="-120"/>
+              </a:rPr>
+              <a:t>ad → as before 's'</a:t>
+            </a:r>
+            <a:endParaRPr lang="en-US" sz="700" dirty="0"/>
+          </a:p>
+        </p:txBody>
+      </p:sp>
+      <p:sp>
+        <p:nvSpPr>
+          <p:cNvPr id="20" name="Shape 18"/>
+          <p:cNvSpPr/>
+          <p:nvPr/>
+        </p:nvSpPr>
+        <p:spPr>
+          <a:xfrm>
+            <a:off x="4370832" y="2258568"/>
             <a:ext cx="1828800" cy="292608"/>
           </a:xfrm>
           <a:prstGeom prst="rect">
@@ -32913,11 +33734,11 @@
             </a:avLst>
           </a:prstGeom>
           <a:solidFill>
-            <a:srgbClr val="FCE7F3"/>
+            <a:srgbClr val="CCFBF1"/>
           </a:solidFill>
           <a:ln w="19050">
             <a:solidFill>
-              <a:srgbClr val="DB2777"/>
+              <a:srgbClr val="0D9488"/>
             </a:solidFill>
             <a:prstDash val="solid"/>
           </a:ln>
@@ -32932,13 +33753,13 @@
       </p:sp>
       <p:sp>
         <p:nvSpPr>
-          <p:cNvPr id="20" name="Text 18"/>
-          <p:cNvSpPr/>
-          <p:nvPr/>
-        </p:nvSpPr>
-        <p:spPr>
-          <a:xfrm>
-            <a:off x="5803392" y="2258568"/>
+          <p:cNvPr id="21" name="Text 19"/>
+          <p:cNvSpPr/>
+          <p:nvPr/>
+        </p:nvSpPr>
+        <p:spPr>
+          <a:xfrm>
+            <a:off x="4370832" y="2258568"/>
             <a:ext cx="1828800" cy="292608"/>
           </a:xfrm>
           <a:prstGeom prst="rect">
@@ -32957,13 +33778,13 @@
             <a:r>
               <a:rPr lang="en-US" sz="1300" b="1" dirty="0">
                 <a:solidFill>
-                  <a:srgbClr val="9D174D"/>
+                  <a:srgbClr val="0F766E"/>
                 </a:solidFill>
                 <a:latin typeface="Trebuchet MS" pitchFamily="34" charset="0"/>
                 <a:ea typeface="Trebuchet MS" pitchFamily="34" charset="-122"/>
                 <a:cs typeface="Trebuchet MS" pitchFamily="34" charset="-120"/>
               </a:rPr>
-              <a:t>al</a:t>
+              <a:t>sign</a:t>
             </a:r>
             <a:endParaRPr lang="en-US" sz="1300" dirty="0"/>
           </a:p>
@@ -32971,13 +33792,13 @@
       </p:sp>
       <p:sp>
         <p:nvSpPr>
-          <p:cNvPr id="21" name="Text 19"/>
-          <p:cNvSpPr/>
-          <p:nvPr/>
-        </p:nvSpPr>
-        <p:spPr>
-          <a:xfrm>
-            <a:off x="5803392" y="2569464"/>
+          <p:cNvPr id="22" name="Text 20"/>
+          <p:cNvSpPr/>
+          <p:nvPr/>
+        </p:nvSpPr>
+        <p:spPr>
+          <a:xfrm>
+            <a:off x="4370832" y="2569464"/>
             <a:ext cx="1828800" cy="201168"/>
           </a:xfrm>
           <a:prstGeom prst="rect">
@@ -33002,7 +33823,7 @@
                 <a:ea typeface="Calibri" pitchFamily="34" charset="-122"/>
                 <a:cs typeface="Calibri" pitchFamily="34" charset="-120"/>
               </a:rPr>
-              <a:t>relating to</a:t>
+              <a:t>mark or symbol</a:t>
             </a:r>
             <a:endParaRPr lang="en-US" sz="850" dirty="0"/>
           </a:p>
@@ -33010,7 +33831,119 @@
       </p:sp>
       <p:sp>
         <p:nvSpPr>
-          <p:cNvPr id="22" name="Shape 20"/>
+          <p:cNvPr id="23" name="Shape 21"/>
+          <p:cNvSpPr/>
+          <p:nvPr/>
+        </p:nvSpPr>
+        <p:spPr>
+          <a:xfrm>
+            <a:off x="6519672" y="2258568"/>
+            <a:ext cx="1828800" cy="292608"/>
+          </a:xfrm>
+          <a:prstGeom prst="rect">
+            <a:avLst>
+              <a:gd name="adj" fmla="val 25000"/>
+            </a:avLst>
+          </a:prstGeom>
+          <a:solidFill>
+            <a:srgbClr val="FCE7F3"/>
+          </a:solidFill>
+          <a:ln w="19050">
+            <a:solidFill>
+              <a:srgbClr val="DB2777"/>
+            </a:solidFill>
+            <a:prstDash val="solid"/>
+          </a:ln>
+          <a:effectLst>
+            <a:outerShdw sx="100000" sy="100000" kx="0" ky="0" algn="bl" rotWithShape="0" blurRad="101600" dist="38100" dir="8100000">
+              <a:srgbClr val="000000">
+                <a:alpha val="12000"/>
+              </a:srgbClr>
+            </a:outerShdw>
+          </a:effectLst>
+        </p:spPr>
+      </p:sp>
+      <p:sp>
+        <p:nvSpPr>
+          <p:cNvPr id="24" name="Text 22"/>
+          <p:cNvSpPr/>
+          <p:nvPr/>
+        </p:nvSpPr>
+        <p:spPr>
+          <a:xfrm>
+            <a:off x="6519672" y="2258568"/>
+            <a:ext cx="1828800" cy="292608"/>
+          </a:xfrm>
+          <a:prstGeom prst="rect">
+            <a:avLst/>
+          </a:prstGeom>
+          <a:noFill/>
+          <a:ln/>
+        </p:spPr>
+        <p:txBody>
+          <a:bodyPr wrap="square" lIns="0" tIns="0" rIns="0" bIns="0" rtlCol="0" anchor="ctr"/>
+          <a:lstStyle/>
+          <a:p>
+            <a:pPr algn="ctr" indent="0" marL="0">
+              <a:buNone/>
+            </a:pPr>
+            <a:r>
+              <a:rPr lang="en-US" sz="1300" b="1" dirty="0">
+                <a:solidFill>
+                  <a:srgbClr val="9D174D"/>
+                </a:solidFill>
+                <a:latin typeface="Trebuchet MS" pitchFamily="34" charset="0"/>
+                <a:ea typeface="Trebuchet MS" pitchFamily="34" charset="-122"/>
+                <a:cs typeface="Trebuchet MS" pitchFamily="34" charset="-120"/>
+              </a:rPr>
+              <a:t>ment</a:t>
+            </a:r>
+            <a:endParaRPr lang="en-US" sz="1300" dirty="0"/>
+          </a:p>
+        </p:txBody>
+      </p:sp>
+      <p:sp>
+        <p:nvSpPr>
+          <p:cNvPr id="25" name="Text 23"/>
+          <p:cNvSpPr/>
+          <p:nvPr/>
+        </p:nvSpPr>
+        <p:spPr>
+          <a:xfrm>
+            <a:off x="6519672" y="2569464"/>
+            <a:ext cx="1828800" cy="201168"/>
+          </a:xfrm>
+          <a:prstGeom prst="rect">
+            <a:avLst/>
+          </a:prstGeom>
+          <a:noFill/>
+          <a:ln/>
+        </p:spPr>
+        <p:txBody>
+          <a:bodyPr wrap="square" lIns="0" tIns="0" rIns="0" bIns="0" rtlCol="0" anchor="t"/>
+          <a:lstStyle/>
+          <a:p>
+            <a:pPr algn="ctr" indent="0" marL="0">
+              <a:buNone/>
+            </a:pPr>
+            <a:r>
+              <a:rPr lang="en-US" sz="850" dirty="0">
+                <a:solidFill>
+                  <a:srgbClr val="475569"/>
+                </a:solidFill>
+                <a:latin typeface="Calibri" pitchFamily="34" charset="0"/>
+                <a:ea typeface="Calibri" pitchFamily="34" charset="-122"/>
+                <a:cs typeface="Calibri" pitchFamily="34" charset="-120"/>
+              </a:rPr>
+              <a:t>the result or act of something</a:t>
+            </a:r>
+            <a:endParaRPr lang="en-US" sz="850" dirty="0"/>
+          </a:p>
+        </p:txBody>
+      </p:sp>
+      <p:sp>
+        <p:nvSpPr>
+          <p:cNvPr id="26" name="Shape 24"/>
           <p:cNvSpPr/>
           <p:nvPr/>
         </p:nvSpPr>
@@ -33037,7 +33970,7 @@
       </p:sp>
       <p:sp>
         <p:nvSpPr>
-          <p:cNvPr id="23" name="Text 21"/>
+          <p:cNvPr id="27" name="Text 25"/>
           <p:cNvSpPr/>
           <p:nvPr/>
         </p:nvSpPr>
@@ -33076,7 +34009,7 @@
       </p:sp>
       <p:sp>
         <p:nvSpPr>
-          <p:cNvPr id="24" name="Shape 22"/>
+          <p:cNvPr id="28" name="Shape 26"/>
           <p:cNvSpPr/>
           <p:nvPr/>
         </p:nvSpPr>
@@ -33103,13 +34036,13 @@
       </p:sp>
       <p:sp>
         <p:nvSpPr>
-          <p:cNvPr id="25" name="Shape 23"/>
-          <p:cNvSpPr/>
-          <p:nvPr/>
-        </p:nvSpPr>
-        <p:spPr>
-          <a:xfrm>
-            <a:off x="2999232" y="3364992"/>
+          <p:cNvPr id="29" name="Shape 27"/>
+          <p:cNvSpPr/>
+          <p:nvPr/>
+        </p:nvSpPr>
+        <p:spPr>
+          <a:xfrm>
+            <a:off x="2313432" y="3364992"/>
             <a:ext cx="1645920" cy="475488"/>
           </a:xfrm>
           <a:prstGeom prst="rect">
@@ -33130,13 +34063,13 @@
       </p:sp>
       <p:sp>
         <p:nvSpPr>
-          <p:cNvPr id="26" name="Text 24"/>
-          <p:cNvSpPr/>
-          <p:nvPr/>
-        </p:nvSpPr>
-        <p:spPr>
-          <a:xfrm>
-            <a:off x="2999232" y="3364992"/>
+          <p:cNvPr id="30" name="Text 28"/>
+          <p:cNvSpPr/>
+          <p:nvPr/>
+        </p:nvSpPr>
+        <p:spPr>
+          <a:xfrm>
+            <a:off x="2313432" y="3364992"/>
             <a:ext cx="1645920" cy="475488"/>
           </a:xfrm>
           <a:prstGeom prst="rect">
@@ -33161,7 +34094,7 @@
                 <a:ea typeface="Trebuchet MS" pitchFamily="34" charset="-122"/>
                 <a:cs typeface="Trebuchet MS" pitchFamily="34" charset="-120"/>
               </a:rPr>
-              <a:t>sig</a:t>
+              <a:t>as</a:t>
             </a:r>
             <a:endParaRPr lang="en-US" sz="1400" dirty="0"/>
           </a:p>
@@ -33169,14 +34102,14 @@
       </p:sp>
       <p:sp>
         <p:nvSpPr>
-          <p:cNvPr id="27" name="Text 25"/>
-          <p:cNvSpPr/>
-          <p:nvPr/>
-        </p:nvSpPr>
-        <p:spPr>
-          <a:xfrm>
-            <a:off x="4645152" y="3364992"/>
-            <a:ext cx="1097280" cy="475488"/>
+          <p:cNvPr id="31" name="Text 29"/>
+          <p:cNvSpPr/>
+          <p:nvPr/>
+        </p:nvSpPr>
+        <p:spPr>
+          <a:xfrm>
+            <a:off x="3959352" y="3364992"/>
+            <a:ext cx="411480" cy="475488"/>
           </a:xfrm>
           <a:prstGeom prst="rect">
             <a:avLst/>
@@ -33208,13 +34141,13 @@
       </p:sp>
       <p:sp>
         <p:nvSpPr>
-          <p:cNvPr id="28" name="Shape 26"/>
-          <p:cNvSpPr/>
-          <p:nvPr/>
-        </p:nvSpPr>
-        <p:spPr>
-          <a:xfrm>
-            <a:off x="5742432" y="3364992"/>
+          <p:cNvPr id="32" name="Shape 30"/>
+          <p:cNvSpPr/>
+          <p:nvPr/>
+        </p:nvSpPr>
+        <p:spPr>
+          <a:xfrm>
+            <a:off x="4370832" y="3364992"/>
             <a:ext cx="1645920" cy="475488"/>
           </a:xfrm>
           <a:prstGeom prst="rect">
@@ -33235,13 +34168,13 @@
       </p:sp>
       <p:sp>
         <p:nvSpPr>
-          <p:cNvPr id="29" name="Text 27"/>
-          <p:cNvSpPr/>
-          <p:nvPr/>
-        </p:nvSpPr>
-        <p:spPr>
-          <a:xfrm>
-            <a:off x="5742432" y="3364992"/>
+          <p:cNvPr id="33" name="Text 31"/>
+          <p:cNvSpPr/>
+          <p:nvPr/>
+        </p:nvSpPr>
+        <p:spPr>
+          <a:xfrm>
+            <a:off x="4370832" y="3364992"/>
             <a:ext cx="1645920" cy="475488"/>
           </a:xfrm>
           <a:prstGeom prst="rect">
@@ -33266,7 +34199,7 @@
                 <a:ea typeface="Trebuchet MS" pitchFamily="34" charset="-122"/>
                 <a:cs typeface="Trebuchet MS" pitchFamily="34" charset="-120"/>
               </a:rPr>
-              <a:t>nal</a:t>
+              <a:t>sign</a:t>
             </a:r>
             <a:endParaRPr lang="en-US" sz="1400" dirty="0"/>
           </a:p>
@@ -33274,7 +34207,112 @@
       </p:sp>
       <p:sp>
         <p:nvSpPr>
-          <p:cNvPr id="30" name="Shape 28"/>
+          <p:cNvPr id="34" name="Text 32"/>
+          <p:cNvSpPr/>
+          <p:nvPr/>
+        </p:nvSpPr>
+        <p:spPr>
+          <a:xfrm>
+            <a:off x="6016752" y="3364992"/>
+            <a:ext cx="411480" cy="475488"/>
+          </a:xfrm>
+          <a:prstGeom prst="rect">
+            <a:avLst/>
+          </a:prstGeom>
+          <a:noFill/>
+          <a:ln/>
+        </p:spPr>
+        <p:txBody>
+          <a:bodyPr wrap="square" lIns="0" tIns="0" rIns="0" bIns="0" rtlCol="0" anchor="ctr"/>
+          <a:lstStyle/>
+          <a:p>
+            <a:pPr algn="ctr" indent="0" marL="0">
+              <a:buNone/>
+            </a:pPr>
+            <a:r>
+              <a:rPr lang="en-US" sz="1600" b="1" dirty="0">
+                <a:solidFill>
+                  <a:srgbClr val="0D9488"/>
+                </a:solidFill>
+                <a:latin typeface="Trebuchet MS" pitchFamily="34" charset="0"/>
+                <a:ea typeface="Trebuchet MS" pitchFamily="34" charset="-122"/>
+                <a:cs typeface="Trebuchet MS" pitchFamily="34" charset="-120"/>
+              </a:rPr>
+              <a:t>·</a:t>
+            </a:r>
+            <a:endParaRPr lang="en-US" sz="1600" dirty="0"/>
+          </a:p>
+        </p:txBody>
+      </p:sp>
+      <p:sp>
+        <p:nvSpPr>
+          <p:cNvPr id="35" name="Shape 33"/>
+          <p:cNvSpPr/>
+          <p:nvPr/>
+        </p:nvSpPr>
+        <p:spPr>
+          <a:xfrm>
+            <a:off x="6428232" y="3364992"/>
+            <a:ext cx="1645920" cy="475488"/>
+          </a:xfrm>
+          <a:prstGeom prst="rect">
+            <a:avLst>
+              <a:gd name="adj" fmla="val 9615"/>
+            </a:avLst>
+          </a:prstGeom>
+          <a:solidFill>
+            <a:srgbClr val="FFFFFF"/>
+          </a:solidFill>
+          <a:ln w="12700">
+            <a:solidFill>
+              <a:srgbClr val="0D9488"/>
+            </a:solidFill>
+            <a:prstDash val="solid"/>
+          </a:ln>
+        </p:spPr>
+      </p:sp>
+      <p:sp>
+        <p:nvSpPr>
+          <p:cNvPr id="36" name="Text 34"/>
+          <p:cNvSpPr/>
+          <p:nvPr/>
+        </p:nvSpPr>
+        <p:spPr>
+          <a:xfrm>
+            <a:off x="6428232" y="3364992"/>
+            <a:ext cx="1645920" cy="475488"/>
+          </a:xfrm>
+          <a:prstGeom prst="rect">
+            <a:avLst/>
+          </a:prstGeom>
+          <a:noFill/>
+          <a:ln/>
+        </p:spPr>
+        <p:txBody>
+          <a:bodyPr wrap="square" lIns="0" tIns="0" rIns="0" bIns="0" rtlCol="0" anchor="ctr"/>
+          <a:lstStyle/>
+          <a:p>
+            <a:pPr algn="ctr" indent="0" marL="0">
+              <a:buNone/>
+            </a:pPr>
+            <a:r>
+              <a:rPr lang="en-US" sz="1400" b="1" dirty="0">
+                <a:solidFill>
+                  <a:srgbClr val="0D9488"/>
+                </a:solidFill>
+                <a:latin typeface="Trebuchet MS" pitchFamily="34" charset="0"/>
+                <a:ea typeface="Trebuchet MS" pitchFamily="34" charset="-122"/>
+                <a:cs typeface="Trebuchet MS" pitchFamily="34" charset="-120"/>
+              </a:rPr>
+              <a:t>ment</a:t>
+            </a:r>
+            <a:endParaRPr lang="en-US" sz="1400" dirty="0"/>
+          </a:p>
+        </p:txBody>
+      </p:sp>
+      <p:sp>
+        <p:nvSpPr>
+          <p:cNvPr id="37" name="Shape 35"/>
           <p:cNvSpPr/>
           <p:nvPr/>
         </p:nvSpPr>
@@ -33301,7 +34339,7 @@
       </p:sp>
       <p:sp>
         <p:nvSpPr>
-          <p:cNvPr id="31" name="Text 29"/>
+          <p:cNvPr id="38" name="Text 36"/>
           <p:cNvSpPr/>
           <p:nvPr/>
         </p:nvSpPr>
@@ -33340,18 +34378,18 @@
       </p:sp>
       <p:sp>
         <p:nvSpPr>
-          <p:cNvPr id="32" name="Shape 30"/>
+          <p:cNvPr id="39" name="Shape 37"/>
           <p:cNvSpPr/>
           <p:nvPr/>
         </p:nvSpPr>
         <p:spPr>
           <a:xfrm>
             <a:off x="1874520" y="4096512"/>
-            <a:ext cx="6903720" cy="658368"/>
+            <a:ext cx="6903720" cy="804672"/>
           </a:xfrm>
           <a:prstGeom prst="rect">
             <a:avLst>
-              <a:gd name="adj" fmla="val 8333"/>
+              <a:gd name="adj" fmla="val 6818"/>
             </a:avLst>
           </a:prstGeom>
           <a:solidFill>
@@ -33367,18 +34405,18 @@
       </p:sp>
       <p:sp>
         <p:nvSpPr>
-          <p:cNvPr id="33" name="Shape 31"/>
-          <p:cNvSpPr/>
-          <p:nvPr/>
-        </p:nvSpPr>
-        <p:spPr>
-          <a:xfrm>
-            <a:off x="2254649" y="4169664"/>
-            <a:ext cx="685800" cy="475488"/>
+          <p:cNvPr id="40" name="Shape 38"/>
+          <p:cNvSpPr/>
+          <p:nvPr/>
+        </p:nvSpPr>
+        <p:spPr>
+          <a:xfrm>
+            <a:off x="2023872" y="4169664"/>
+            <a:ext cx="685800" cy="384048"/>
           </a:xfrm>
           <a:prstGeom prst="rect">
             <a:avLst>
-              <a:gd name="adj" fmla="val 7692"/>
+              <a:gd name="adj" fmla="val 9524"/>
             </a:avLst>
           </a:prstGeom>
           <a:solidFill>
@@ -33394,14 +34432,14 @@
       </p:sp>
       <p:sp>
         <p:nvSpPr>
-          <p:cNvPr id="34" name="Text 32"/>
-          <p:cNvSpPr/>
-          <p:nvPr/>
-        </p:nvSpPr>
-        <p:spPr>
-          <a:xfrm>
-            <a:off x="2254649" y="4169664"/>
-            <a:ext cx="685800" cy="475488"/>
+          <p:cNvPr id="41" name="Text 39"/>
+          <p:cNvSpPr/>
+          <p:nvPr/>
+        </p:nvSpPr>
+        <p:spPr>
+          <a:xfrm>
+            <a:off x="2023872" y="4169664"/>
+            <a:ext cx="685800" cy="384048"/>
           </a:xfrm>
           <a:prstGeom prst="rect">
             <a:avLst/>
@@ -33425,7 +34463,7 @@
                 <a:ea typeface="Trebuchet MS" pitchFamily="34" charset="-122"/>
                 <a:cs typeface="Trebuchet MS" pitchFamily="34" charset="-120"/>
               </a:rPr>
-              <a:t>s</a:t>
+              <a:t>a</a:t>
             </a:r>
             <a:endParaRPr lang="en-US" sz="900" dirty="0"/>
           </a:p>
@@ -33433,18 +34471,18 @@
       </p:sp>
       <p:sp>
         <p:nvSpPr>
-          <p:cNvPr id="35" name="Shape 33"/>
-          <p:cNvSpPr/>
-          <p:nvPr/>
-        </p:nvSpPr>
-        <p:spPr>
-          <a:xfrm>
-            <a:off x="3293146" y="4169664"/>
-            <a:ext cx="685800" cy="475488"/>
+          <p:cNvPr id="42" name="Shape 40"/>
+          <p:cNvSpPr/>
+          <p:nvPr/>
+        </p:nvSpPr>
+        <p:spPr>
+          <a:xfrm>
+            <a:off x="2831592" y="4169664"/>
+            <a:ext cx="685800" cy="384048"/>
           </a:xfrm>
           <a:prstGeom prst="rect">
             <a:avLst>
-              <a:gd name="adj" fmla="val 7692"/>
+              <a:gd name="adj" fmla="val 9524"/>
             </a:avLst>
           </a:prstGeom>
           <a:solidFill>
@@ -33460,14 +34498,14 @@
       </p:sp>
       <p:sp>
         <p:nvSpPr>
-          <p:cNvPr id="36" name="Text 34"/>
-          <p:cNvSpPr/>
-          <p:nvPr/>
-        </p:nvSpPr>
-        <p:spPr>
-          <a:xfrm>
-            <a:off x="3293146" y="4169664"/>
-            <a:ext cx="685800" cy="475488"/>
+          <p:cNvPr id="43" name="Text 41"/>
+          <p:cNvSpPr/>
+          <p:nvPr/>
+        </p:nvSpPr>
+        <p:spPr>
+          <a:xfrm>
+            <a:off x="2831592" y="4169664"/>
+            <a:ext cx="685800" cy="384048"/>
           </a:xfrm>
           <a:prstGeom prst="rect">
             <a:avLst/>
@@ -33491,7 +34529,7 @@
                 <a:ea typeface="Trebuchet MS" pitchFamily="34" charset="-122"/>
                 <a:cs typeface="Trebuchet MS" pitchFamily="34" charset="-120"/>
               </a:rPr>
-              <a:t>i</a:t>
+              <a:t>s</a:t>
             </a:r>
             <a:endParaRPr lang="en-US" sz="900" dirty="0"/>
           </a:p>
@@ -33499,18 +34537,57 @@
       </p:sp>
       <p:sp>
         <p:nvSpPr>
-          <p:cNvPr id="37" name="Shape 35"/>
-          <p:cNvSpPr/>
-          <p:nvPr/>
-        </p:nvSpPr>
-        <p:spPr>
-          <a:xfrm>
-            <a:off x="4331643" y="4169664"/>
-            <a:ext cx="685800" cy="475488"/>
+          <p:cNvPr id="44" name="Text 42"/>
+          <p:cNvSpPr/>
+          <p:nvPr/>
+        </p:nvSpPr>
+        <p:spPr>
+          <a:xfrm>
+            <a:off x="2831592" y="4572000"/>
+            <a:ext cx="685800" cy="219456"/>
+          </a:xfrm>
+          <a:prstGeom prst="rect">
+            <a:avLst/>
+          </a:prstGeom>
+          <a:noFill/>
+          <a:ln/>
+        </p:spPr>
+        <p:txBody>
+          <a:bodyPr wrap="square" lIns="0" tIns="0" rIns="0" bIns="0" rtlCol="0" anchor="t"/>
+          <a:lstStyle/>
+          <a:p>
+            <a:pPr algn="ctr" indent="0" marL="0">
+              <a:buNone/>
+            </a:pPr>
+            <a:r>
+              <a:rPr lang="en-US" sz="750" i="1" dirty="0">
+                <a:solidFill>
+                  <a:srgbClr val="94A3B8"/>
+                </a:solidFill>
+                <a:latin typeface="Calibri" pitchFamily="34" charset="0"/>
+                <a:ea typeface="Calibri" pitchFamily="34" charset="-122"/>
+                <a:cs typeface="Calibri" pitchFamily="34" charset="-120"/>
+              </a:rPr>
+              <a:t>/z/</a:t>
+            </a:r>
+            <a:endParaRPr lang="en-US" sz="750" dirty="0"/>
+          </a:p>
+        </p:txBody>
+      </p:sp>
+      <p:sp>
+        <p:nvSpPr>
+          <p:cNvPr id="45" name="Shape 43"/>
+          <p:cNvSpPr/>
+          <p:nvPr/>
+        </p:nvSpPr>
+        <p:spPr>
+          <a:xfrm>
+            <a:off x="3639312" y="4169664"/>
+            <a:ext cx="685800" cy="384048"/>
           </a:xfrm>
           <a:prstGeom prst="rect">
             <a:avLst>
-              <a:gd name="adj" fmla="val 7692"/>
+              <a:gd name="adj" fmla="val 9524"/>
             </a:avLst>
           </a:prstGeom>
           <a:solidFill>
@@ -33526,14 +34603,14 @@
       </p:sp>
       <p:sp>
         <p:nvSpPr>
-          <p:cNvPr id="38" name="Text 36"/>
-          <p:cNvSpPr/>
-          <p:nvPr/>
-        </p:nvSpPr>
-        <p:spPr>
-          <a:xfrm>
-            <a:off x="4331643" y="4169664"/>
-            <a:ext cx="685800" cy="475488"/>
+          <p:cNvPr id="46" name="Text 44"/>
+          <p:cNvSpPr/>
+          <p:nvPr/>
+        </p:nvSpPr>
+        <p:spPr>
+          <a:xfrm>
+            <a:off x="3639312" y="4169664"/>
+            <a:ext cx="685800" cy="384048"/>
           </a:xfrm>
           <a:prstGeom prst="rect">
             <a:avLst/>
@@ -33557,7 +34634,7 @@
                 <a:ea typeface="Trebuchet MS" pitchFamily="34" charset="-122"/>
                 <a:cs typeface="Trebuchet MS" pitchFamily="34" charset="-120"/>
               </a:rPr>
-              <a:t>g</a:t>
+              <a:t>igh</a:t>
             </a:r>
             <a:endParaRPr lang="en-US" sz="900" dirty="0"/>
           </a:p>
@@ -33565,18 +34642,57 @@
       </p:sp>
       <p:sp>
         <p:nvSpPr>
-          <p:cNvPr id="39" name="Shape 37"/>
-          <p:cNvSpPr/>
-          <p:nvPr/>
-        </p:nvSpPr>
-        <p:spPr>
-          <a:xfrm>
-            <a:off x="5370141" y="4169664"/>
-            <a:ext cx="685800" cy="475488"/>
+          <p:cNvPr id="47" name="Text 45"/>
+          <p:cNvSpPr/>
+          <p:nvPr/>
+        </p:nvSpPr>
+        <p:spPr>
+          <a:xfrm>
+            <a:off x="3639312" y="4572000"/>
+            <a:ext cx="685800" cy="219456"/>
+          </a:xfrm>
+          <a:prstGeom prst="rect">
+            <a:avLst/>
+          </a:prstGeom>
+          <a:noFill/>
+          <a:ln/>
+        </p:spPr>
+        <p:txBody>
+          <a:bodyPr wrap="square" lIns="0" tIns="0" rIns="0" bIns="0" rtlCol="0" anchor="t"/>
+          <a:lstStyle/>
+          <a:p>
+            <a:pPr algn="ctr" indent="0" marL="0">
+              <a:buNone/>
+            </a:pPr>
+            <a:r>
+              <a:rPr lang="en-US" sz="750" i="1" dirty="0">
+                <a:solidFill>
+                  <a:srgbClr val="94A3B8"/>
+                </a:solidFill>
+                <a:latin typeface="Calibri" pitchFamily="34" charset="0"/>
+                <a:ea typeface="Calibri" pitchFamily="34" charset="-122"/>
+                <a:cs typeface="Calibri" pitchFamily="34" charset="-120"/>
+              </a:rPr>
+              <a:t>/ie/</a:t>
+            </a:r>
+            <a:endParaRPr lang="en-US" sz="750" dirty="0"/>
+          </a:p>
+        </p:txBody>
+      </p:sp>
+      <p:sp>
+        <p:nvSpPr>
+          <p:cNvPr id="48" name="Shape 46"/>
+          <p:cNvSpPr/>
+          <p:nvPr/>
+        </p:nvSpPr>
+        <p:spPr>
+          <a:xfrm>
+            <a:off x="4447032" y="4169664"/>
+            <a:ext cx="685800" cy="384048"/>
           </a:xfrm>
           <a:prstGeom prst="rect">
             <a:avLst>
-              <a:gd name="adj" fmla="val 7692"/>
+              <a:gd name="adj" fmla="val 9524"/>
             </a:avLst>
           </a:prstGeom>
           <a:solidFill>
@@ -33592,14 +34708,14 @@
       </p:sp>
       <p:sp>
         <p:nvSpPr>
-          <p:cNvPr id="40" name="Text 38"/>
-          <p:cNvSpPr/>
-          <p:nvPr/>
-        </p:nvSpPr>
-        <p:spPr>
-          <a:xfrm>
-            <a:off x="5370141" y="4169664"/>
-            <a:ext cx="685800" cy="475488"/>
+          <p:cNvPr id="49" name="Text 47"/>
+          <p:cNvSpPr/>
+          <p:nvPr/>
+        </p:nvSpPr>
+        <p:spPr>
+          <a:xfrm>
+            <a:off x="4447032" y="4169664"/>
+            <a:ext cx="685800" cy="384048"/>
           </a:xfrm>
           <a:prstGeom prst="rect">
             <a:avLst/>
@@ -33631,18 +34747,18 @@
       </p:sp>
       <p:sp>
         <p:nvSpPr>
-          <p:cNvPr id="41" name="Shape 39"/>
-          <p:cNvSpPr/>
-          <p:nvPr/>
-        </p:nvSpPr>
-        <p:spPr>
-          <a:xfrm>
-            <a:off x="6408638" y="4169664"/>
-            <a:ext cx="685800" cy="475488"/>
+          <p:cNvPr id="50" name="Shape 48"/>
+          <p:cNvSpPr/>
+          <p:nvPr/>
+        </p:nvSpPr>
+        <p:spPr>
+          <a:xfrm>
+            <a:off x="5254752" y="4169664"/>
+            <a:ext cx="685800" cy="384048"/>
           </a:xfrm>
           <a:prstGeom prst="rect">
             <a:avLst>
-              <a:gd name="adj" fmla="val 7692"/>
+              <a:gd name="adj" fmla="val 9524"/>
             </a:avLst>
           </a:prstGeom>
           <a:solidFill>
@@ -33658,14 +34774,14 @@
       </p:sp>
       <p:sp>
         <p:nvSpPr>
-          <p:cNvPr id="42" name="Text 40"/>
-          <p:cNvSpPr/>
-          <p:nvPr/>
-        </p:nvSpPr>
-        <p:spPr>
-          <a:xfrm>
-            <a:off x="6408638" y="4169664"/>
-            <a:ext cx="685800" cy="475488"/>
+          <p:cNvPr id="51" name="Text 49"/>
+          <p:cNvSpPr/>
+          <p:nvPr/>
+        </p:nvSpPr>
+        <p:spPr>
+          <a:xfrm>
+            <a:off x="5254752" y="4169664"/>
+            <a:ext cx="685800" cy="384048"/>
           </a:xfrm>
           <a:prstGeom prst="rect">
             <a:avLst/>
@@ -33689,7 +34805,7 @@
                 <a:ea typeface="Trebuchet MS" pitchFamily="34" charset="-122"/>
                 <a:cs typeface="Trebuchet MS" pitchFamily="34" charset="-120"/>
               </a:rPr>
-              <a:t>a</a:t>
+              <a:t>m</a:t>
             </a:r>
             <a:endParaRPr lang="en-US" sz="900" dirty="0"/>
           </a:p>
@@ -33697,18 +34813,18 @@
       </p:sp>
       <p:sp>
         <p:nvSpPr>
-          <p:cNvPr id="43" name="Shape 41"/>
-          <p:cNvSpPr/>
-          <p:nvPr/>
-        </p:nvSpPr>
-        <p:spPr>
-          <a:xfrm>
-            <a:off x="7447135" y="4169664"/>
-            <a:ext cx="685800" cy="475488"/>
+          <p:cNvPr id="52" name="Shape 50"/>
+          <p:cNvSpPr/>
+          <p:nvPr/>
+        </p:nvSpPr>
+        <p:spPr>
+          <a:xfrm>
+            <a:off x="6062472" y="4169664"/>
+            <a:ext cx="685800" cy="384048"/>
           </a:xfrm>
           <a:prstGeom prst="rect">
             <a:avLst>
-              <a:gd name="adj" fmla="val 7692"/>
+              <a:gd name="adj" fmla="val 9524"/>
             </a:avLst>
           </a:prstGeom>
           <a:solidFill>
@@ -33724,14 +34840,14 @@
       </p:sp>
       <p:sp>
         <p:nvSpPr>
-          <p:cNvPr id="44" name="Text 42"/>
-          <p:cNvSpPr/>
-          <p:nvPr/>
-        </p:nvSpPr>
-        <p:spPr>
-          <a:xfrm>
-            <a:off x="7447135" y="4169664"/>
-            <a:ext cx="685800" cy="475488"/>
+          <p:cNvPr id="53" name="Text 51"/>
+          <p:cNvSpPr/>
+          <p:nvPr/>
+        </p:nvSpPr>
+        <p:spPr>
+          <a:xfrm>
+            <a:off x="6062472" y="4169664"/>
+            <a:ext cx="685800" cy="384048"/>
           </a:xfrm>
           <a:prstGeom prst="rect">
             <a:avLst/>
@@ -33755,7 +34871,139 @@
                 <a:ea typeface="Trebuchet MS" pitchFamily="34" charset="-122"/>
                 <a:cs typeface="Trebuchet MS" pitchFamily="34" charset="-120"/>
               </a:rPr>
-              <a:t>l</a:t>
+              <a:t>e</a:t>
+            </a:r>
+            <a:endParaRPr lang="en-US" sz="900" dirty="0"/>
+          </a:p>
+        </p:txBody>
+      </p:sp>
+      <p:sp>
+        <p:nvSpPr>
+          <p:cNvPr id="54" name="Shape 52"/>
+          <p:cNvSpPr/>
+          <p:nvPr/>
+        </p:nvSpPr>
+        <p:spPr>
+          <a:xfrm>
+            <a:off x="6870192" y="4169664"/>
+            <a:ext cx="685800" cy="384048"/>
+          </a:xfrm>
+          <a:prstGeom prst="rect">
+            <a:avLst>
+              <a:gd name="adj" fmla="val 9524"/>
+            </a:avLst>
+          </a:prstGeom>
+          <a:solidFill>
+            <a:srgbClr val="FFFFFF"/>
+          </a:solidFill>
+          <a:ln w="12700">
+            <a:solidFill>
+              <a:srgbClr val="DB2777"/>
+            </a:solidFill>
+            <a:prstDash val="solid"/>
+          </a:ln>
+        </p:spPr>
+      </p:sp>
+      <p:sp>
+        <p:nvSpPr>
+          <p:cNvPr id="55" name="Text 53"/>
+          <p:cNvSpPr/>
+          <p:nvPr/>
+        </p:nvSpPr>
+        <p:spPr>
+          <a:xfrm>
+            <a:off x="6870192" y="4169664"/>
+            <a:ext cx="685800" cy="384048"/>
+          </a:xfrm>
+          <a:prstGeom prst="rect">
+            <a:avLst/>
+          </a:prstGeom>
+          <a:noFill/>
+          <a:ln/>
+        </p:spPr>
+        <p:txBody>
+          <a:bodyPr wrap="square" lIns="0" tIns="0" rIns="0" bIns="0" rtlCol="0" anchor="ctr"/>
+          <a:lstStyle/>
+          <a:p>
+            <a:pPr algn="ctr" indent="0" marL="0">
+              <a:buNone/>
+            </a:pPr>
+            <a:r>
+              <a:rPr lang="en-US" sz="900" b="1" dirty="0">
+                <a:solidFill>
+                  <a:srgbClr val="9D174D"/>
+                </a:solidFill>
+                <a:latin typeface="Trebuchet MS" pitchFamily="34" charset="0"/>
+                <a:ea typeface="Trebuchet MS" pitchFamily="34" charset="-122"/>
+                <a:cs typeface="Trebuchet MS" pitchFamily="34" charset="-120"/>
+              </a:rPr>
+              <a:t>n</a:t>
+            </a:r>
+            <a:endParaRPr lang="en-US" sz="900" dirty="0"/>
+          </a:p>
+        </p:txBody>
+      </p:sp>
+      <p:sp>
+        <p:nvSpPr>
+          <p:cNvPr id="56" name="Shape 54"/>
+          <p:cNvSpPr/>
+          <p:nvPr/>
+        </p:nvSpPr>
+        <p:spPr>
+          <a:xfrm>
+            <a:off x="7677912" y="4169664"/>
+            <a:ext cx="685800" cy="384048"/>
+          </a:xfrm>
+          <a:prstGeom prst="rect">
+            <a:avLst>
+              <a:gd name="adj" fmla="val 9524"/>
+            </a:avLst>
+          </a:prstGeom>
+          <a:solidFill>
+            <a:srgbClr val="FFFFFF"/>
+          </a:solidFill>
+          <a:ln w="12700">
+            <a:solidFill>
+              <a:srgbClr val="DB2777"/>
+            </a:solidFill>
+            <a:prstDash val="solid"/>
+          </a:ln>
+        </p:spPr>
+      </p:sp>
+      <p:sp>
+        <p:nvSpPr>
+          <p:cNvPr id="57" name="Text 55"/>
+          <p:cNvSpPr/>
+          <p:nvPr/>
+        </p:nvSpPr>
+        <p:spPr>
+          <a:xfrm>
+            <a:off x="7677912" y="4169664"/>
+            <a:ext cx="685800" cy="384048"/>
+          </a:xfrm>
+          <a:prstGeom prst="rect">
+            <a:avLst/>
+          </a:prstGeom>
+          <a:noFill/>
+          <a:ln/>
+        </p:spPr>
+        <p:txBody>
+          <a:bodyPr wrap="square" lIns="0" tIns="0" rIns="0" bIns="0" rtlCol="0" anchor="ctr"/>
+          <a:lstStyle/>
+          <a:p>
+            <a:pPr algn="ctr" indent="0" marL="0">
+              <a:buNone/>
+            </a:pPr>
+            <a:r>
+              <a:rPr lang="en-US" sz="900" b="1" dirty="0">
+                <a:solidFill>
+                  <a:srgbClr val="9D174D"/>
+                </a:solidFill>
+                <a:latin typeface="Trebuchet MS" pitchFamily="34" charset="0"/>
+                <a:ea typeface="Trebuchet MS" pitchFamily="34" charset="-122"/>
+                <a:cs typeface="Trebuchet MS" pitchFamily="34" charset="-120"/>
+              </a:rPr>
+              <a:t>t</a:t>
             </a:r>
             <a:endParaRPr lang="en-US" sz="900" dirty="0"/>
           </a:p>
@@ -34047,7 +35295,7 @@
                 <a:ea typeface="Calibri" pitchFamily="34" charset="-122"/>
                 <a:cs typeface="Calibri" pitchFamily="34" charset="-120"/>
               </a:rPr>
-              <a:t>Word Labs  •  wordlabs.app  •  Root: 'sign' = mark, symbol, indicate</a:t>
+              <a:t>Word Labs  •  wordlabs.app  •  Root: 'sign' = mark, symbol, or signal</a:t>
             </a:r>
             <a:endParaRPr lang="en-US" sz="800" dirty="0"/>
           </a:p>
@@ -35216,7 +36464,7 @@
                 <a:ea typeface="Calibri" pitchFamily="34" charset="-122"/>
                 <a:cs typeface="Calibri" pitchFamily="34" charset="-120"/>
               </a:rPr>
-              <a:t>Word Labs  •  wordlabs.app  •  Root: 'sign' = mark, symbol, indicate</a:t>
+              <a:t>Word Labs  •  wordlabs.app  •  Root: 'sign' = mark, symbol, or signal</a:t>
             </a:r>
             <a:endParaRPr lang="en-US" sz="800" dirty="0"/>
           </a:p>
@@ -35517,7 +36765,7 @@
                 <a:ea typeface="Trebuchet MS" pitchFamily="34" charset="-122"/>
                 <a:cs typeface="Trebuchet MS" pitchFamily="34" charset="-120"/>
               </a:rPr>
-              <a:t>as-</a:t>
+              <a:t>re-</a:t>
             </a:r>
             <a:endParaRPr lang="en-US" sz="1300" dirty="0"/>
           </a:p>
@@ -35645,7 +36893,7 @@
                 <a:ea typeface="Trebuchet MS" pitchFamily="34" charset="-122"/>
                 <a:cs typeface="Trebuchet MS" pitchFamily="34" charset="-120"/>
               </a:rPr>
-              <a:t>-al</a:t>
+              <a:t>-ed</a:t>
             </a:r>
             <a:endParaRPr lang="en-US" sz="1300" dirty="0"/>
           </a:p>
@@ -35709,7 +36957,7 @@
                 <a:ea typeface="Trebuchet MS" pitchFamily="34" charset="-122"/>
                 <a:cs typeface="Trebuchet MS" pitchFamily="34" charset="-120"/>
               </a:rPr>
-              <a:t>con-</a:t>
+              <a:t>de-</a:t>
             </a:r>
             <a:endParaRPr lang="en-US" sz="1300" dirty="0"/>
           </a:p>
@@ -35798,7 +37046,7 @@
                 <a:ea typeface="Trebuchet MS" pitchFamily="34" charset="-122"/>
                 <a:cs typeface="Trebuchet MS" pitchFamily="34" charset="-120"/>
               </a:rPr>
-              <a:t>-ed</a:t>
+              <a:t>-ing</a:t>
             </a:r>
             <a:endParaRPr lang="en-US" sz="1300" dirty="0"/>
           </a:p>
@@ -35862,7 +37110,7 @@
                 <a:ea typeface="Trebuchet MS" pitchFamily="34" charset="-122"/>
                 <a:cs typeface="Trebuchet MS" pitchFamily="34" charset="-120"/>
               </a:rPr>
-              <a:t>de-</a:t>
+              <a:t>as-</a:t>
             </a:r>
             <a:endParaRPr lang="en-US" sz="1300" dirty="0"/>
           </a:p>
@@ -35951,7 +37199,7 @@
                 <a:ea typeface="Trebuchet MS" pitchFamily="34" charset="-122"/>
                 <a:cs typeface="Trebuchet MS" pitchFamily="34" charset="-120"/>
               </a:rPr>
-              <a:t>-er</a:t>
+              <a:t>-ment</a:t>
             </a:r>
             <a:endParaRPr lang="en-US" sz="1300" dirty="0"/>
           </a:p>
@@ -36015,7 +37263,7 @@
                 <a:ea typeface="Trebuchet MS" pitchFamily="34" charset="-122"/>
                 <a:cs typeface="Trebuchet MS" pitchFamily="34" charset="-120"/>
               </a:rPr>
-              <a:t>re-</a:t>
+              <a:t>con-</a:t>
             </a:r>
             <a:endParaRPr lang="en-US" sz="1300" dirty="0"/>
           </a:p>
@@ -36104,7 +37352,7 @@
                 <a:ea typeface="Trebuchet MS" pitchFamily="34" charset="-122"/>
                 <a:cs typeface="Trebuchet MS" pitchFamily="34" charset="-120"/>
               </a:rPr>
-              <a:t>-ment</a:t>
+              <a:t>-al</a:t>
             </a:r>
             <a:endParaRPr lang="en-US" sz="1300" dirty="0"/>
           </a:p>
@@ -36494,7 +37742,7 @@
                 <a:ea typeface="Trebuchet MS" pitchFamily="34" charset="-122"/>
                 <a:cs typeface="Trebuchet MS" pitchFamily="34" charset="-120"/>
               </a:rPr>
-              <a:t>assignment</a:t>
+              <a:t>design</a:t>
             </a:r>
             <a:endParaRPr lang="en-US" sz="1200" dirty="0"/>
           </a:p>
@@ -36560,7 +37808,7 @@
                 <a:ea typeface="Trebuchet MS" pitchFamily="34" charset="-122"/>
                 <a:cs typeface="Trebuchet MS" pitchFamily="34" charset="-120"/>
               </a:rPr>
-              <a:t>design</a:t>
+              <a:t>assign</a:t>
             </a:r>
             <a:endParaRPr lang="en-US" sz="1200" dirty="0"/>
           </a:p>
@@ -36692,7 +37940,7 @@
                 <a:ea typeface="Trebuchet MS" pitchFamily="34" charset="-122"/>
                 <a:cs typeface="Trebuchet MS" pitchFamily="34" charset="-120"/>
               </a:rPr>
-              <a:t>consign</a:t>
+              <a:t>significant</a:t>
             </a:r>
             <a:endParaRPr lang="en-US" sz="1200" dirty="0"/>
           </a:p>
@@ -36824,7 +38072,7 @@
                 <a:ea typeface="Trebuchet MS" pitchFamily="34" charset="-122"/>
                 <a:cs typeface="Trebuchet MS" pitchFamily="34" charset="-120"/>
               </a:rPr>
-              <a:t>insignia</a:t>
+              <a:t>consign</a:t>
             </a:r>
             <a:endParaRPr lang="en-US" sz="1200" dirty="0"/>
           </a:p>
@@ -37116,7 +38364,7 @@
                 <a:ea typeface="Calibri" pitchFamily="34" charset="-122"/>
                 <a:cs typeface="Calibri" pitchFamily="34" charset="-120"/>
               </a:rPr>
-              <a:t>Word Labs  •  wordlabs.app  •  Root: 'sign' = mark, symbol, indicate</a:t>
+              <a:t>Word Labs  •  wordlabs.app  •  Root: 'sign' = mark, symbol, or signal</a:t>
             </a:r>
             <a:endParaRPr lang="en-US" sz="800" dirty="0"/>
           </a:p>
@@ -37280,7 +38528,7 @@
                 <a:ea typeface="Calibri" pitchFamily="34" charset="-122"/>
                 <a:cs typeface="Calibri" pitchFamily="34" charset="-120"/>
               </a:rPr>
-              <a:t>The core part of a word carrying its basic meaning. For example, 'sign' means 'mark, symbol, indicate'.</a:t>
+              <a:t>The core part of a word carrying its basic meaning. For example, 'sign' means 'mark, symbol, or signal'.</a:t>
             </a:r>
             <a:endParaRPr lang="en-US" sz="1350" dirty="0"/>
           </a:p>
@@ -37900,7 +39148,7 @@
                 <a:ea typeface="Calibri" pitchFamily="34" charset="-122"/>
                 <a:cs typeface="Calibri" pitchFamily="34" charset="-120"/>
               </a:rPr>
-              <a:t>Word Labs  •  wordlabs.app  •  Root: 'sign' = mark, symbol, indicate</a:t>
+              <a:t>Word Labs  •  wordlabs.app  •  Root: 'sign' = mark, symbol, or signal</a:t>
             </a:r>
             <a:endParaRPr lang="en-US" sz="800" dirty="0"/>
           </a:p>
@@ -38012,7 +39260,7 @@
                 <a:ea typeface="Calibri" pitchFamily="34" charset="-122"/>
                 <a:cs typeface="Calibri" pitchFamily="34" charset="-120"/>
               </a:rPr>
-              <a:t>1.  The root 'sign' comes from the Latin word 'signum', meaning mark or symbol.</a:t>
+              <a:t>1.  The root 'sign' comes from a Latin word meaning mark or symbol.</a:t>
             </a:r>
             <a:endParaRPr lang="en-US" sz="1300" dirty="0"/>
           </a:p>
@@ -38290,7 +39538,7 @@
                 <a:ea typeface="Calibri" pitchFamily="34" charset="-122"/>
                 <a:cs typeface="Calibri" pitchFamily="34" charset="-120"/>
               </a:rPr>
-              <a:t>3.  A signature is connected to the root 'sign' because it is a personal mark or symbol.</a:t>
+              <a:t>3.  You can add the prefix 're' to 'sign' to make the word 'resign'.</a:t>
             </a:r>
             <a:endParaRPr lang="en-US" sz="1300" dirty="0"/>
           </a:p>
@@ -38429,7 +39677,7 @@
                 <a:ea typeface="Calibri" pitchFamily="34" charset="-122"/>
                 <a:cs typeface="Calibri" pitchFamily="34" charset="-120"/>
               </a:rPr>
-              <a:t>4.  The prefix 're-' in 'resign' means to do something again or back.</a:t>
+              <a:t>4.  A 'signature' is connected to the idea of making a personal mark.</a:t>
             </a:r>
             <a:endParaRPr lang="en-US" sz="1300" dirty="0"/>
           </a:p>
@@ -38568,7 +39816,7 @@
                 <a:ea typeface="Calibri" pitchFamily="34" charset="-122"/>
                 <a:cs typeface="Calibri" pitchFamily="34" charset="-120"/>
               </a:rPr>
-              <a:t>5.  The root 'sign' comes from a Greek word meaning to write.</a:t>
+              <a:t>5.  The root 'sign' originally came from a Greek word meaning to write.</a:t>
             </a:r>
             <a:endParaRPr lang="en-US" sz="1300" dirty="0"/>
           </a:p>
@@ -38926,7 +40174,7 @@
                 <a:ea typeface="Calibri" pitchFamily="34" charset="-122"/>
                 <a:cs typeface="Calibri" pitchFamily="34" charset="-120"/>
               </a:rPr>
-              <a:t>Word Labs  •  wordlabs.app  •  Root: 'sign' = mark, symbol, indicate</a:t>
+              <a:t>Word Labs  •  wordlabs.app  •  Root: 'sign' = mark, symbol, or signal</a:t>
             </a:r>
             <a:endParaRPr lang="en-US" sz="800" dirty="0"/>
           </a:p>
@@ -39063,7 +40311,7 @@
                 <a:ea typeface="Trebuchet MS" pitchFamily="34" charset="-122"/>
                 <a:cs typeface="Trebuchet MS" pitchFamily="34" charset="-120"/>
               </a:rPr>
-              <a:t>mark, symbol, indicate</a:t>
+              <a:t>mark, symbol, or signal</a:t>
             </a:r>
             <a:endParaRPr lang="en-US" sz="2000" dirty="0"/>
           </a:p>
@@ -39339,7 +40587,7 @@
                 <a:ea typeface="Trebuchet MS" pitchFamily="34" charset="-122"/>
                 <a:cs typeface="Trebuchet MS" pitchFamily="34" charset="-120"/>
               </a:rPr>
-              <a:t>assignment</a:t>
+              <a:t>design</a:t>
             </a:r>
             <a:endParaRPr lang="en-US" sz="1300" dirty="0"/>
           </a:p>
@@ -39405,7 +40653,7 @@
                 <a:ea typeface="Trebuchet MS" pitchFamily="34" charset="-122"/>
                 <a:cs typeface="Trebuchet MS" pitchFamily="34" charset="-120"/>
               </a:rPr>
-              <a:t>design</a:t>
+              <a:t>assign</a:t>
             </a:r>
             <a:endParaRPr lang="en-US" sz="1300" dirty="0"/>
           </a:p>
@@ -39537,7 +40785,7 @@
                 <a:ea typeface="Trebuchet MS" pitchFamily="34" charset="-122"/>
                 <a:cs typeface="Trebuchet MS" pitchFamily="34" charset="-120"/>
               </a:rPr>
-              <a:t>consign</a:t>
+              <a:t>significant</a:t>
             </a:r>
             <a:endParaRPr lang="en-US" sz="1300" dirty="0"/>
           </a:p>
@@ -39895,7 +41143,7 @@
                 <a:ea typeface="Calibri" pitchFamily="34" charset="-122"/>
                 <a:cs typeface="Calibri" pitchFamily="34" charset="-120"/>
               </a:rPr>
-              <a:t>Word Labs  •  wordlabs.app  •  Root: 'sign' = mark, symbol, indicate</a:t>
+              <a:t>Word Labs  •  wordlabs.app  •  Root: 'sign' = mark, symbol, or signal</a:t>
             </a:r>
             <a:endParaRPr lang="en-US" sz="800" dirty="0"/>
           </a:p>
@@ -40196,7 +41444,7 @@
                 <a:ea typeface="Trebuchet MS" pitchFamily="34" charset="-122"/>
                 <a:cs typeface="Trebuchet MS" pitchFamily="34" charset="-120"/>
               </a:rPr>
-              <a:t>as-</a:t>
+              <a:t>re-</a:t>
             </a:r>
             <a:endParaRPr lang="en-US" sz="1300" dirty="0"/>
           </a:p>
@@ -40324,7 +41572,7 @@
                 <a:ea typeface="Trebuchet MS" pitchFamily="34" charset="-122"/>
                 <a:cs typeface="Trebuchet MS" pitchFamily="34" charset="-120"/>
               </a:rPr>
-              <a:t>-al</a:t>
+              <a:t>-ed</a:t>
             </a:r>
             <a:endParaRPr lang="en-US" sz="1300" dirty="0"/>
           </a:p>
@@ -40388,7 +41636,7 @@
                 <a:ea typeface="Trebuchet MS" pitchFamily="34" charset="-122"/>
                 <a:cs typeface="Trebuchet MS" pitchFamily="34" charset="-120"/>
               </a:rPr>
-              <a:t>con-</a:t>
+              <a:t>de-</a:t>
             </a:r>
             <a:endParaRPr lang="en-US" sz="1300" dirty="0"/>
           </a:p>
@@ -40477,7 +41725,7 @@
                 <a:ea typeface="Trebuchet MS" pitchFamily="34" charset="-122"/>
                 <a:cs typeface="Trebuchet MS" pitchFamily="34" charset="-120"/>
               </a:rPr>
-              <a:t>-ed</a:t>
+              <a:t>-ing</a:t>
             </a:r>
             <a:endParaRPr lang="en-US" sz="1300" dirty="0"/>
           </a:p>
@@ -40541,7 +41789,7 @@
                 <a:ea typeface="Trebuchet MS" pitchFamily="34" charset="-122"/>
                 <a:cs typeface="Trebuchet MS" pitchFamily="34" charset="-120"/>
               </a:rPr>
-              <a:t>de-</a:t>
+              <a:t>as-</a:t>
             </a:r>
             <a:endParaRPr lang="en-US" sz="1300" dirty="0"/>
           </a:p>
@@ -40630,7 +41878,7 @@
                 <a:ea typeface="Trebuchet MS" pitchFamily="34" charset="-122"/>
                 <a:cs typeface="Trebuchet MS" pitchFamily="34" charset="-120"/>
               </a:rPr>
-              <a:t>-er</a:t>
+              <a:t>-ment</a:t>
             </a:r>
             <a:endParaRPr lang="en-US" sz="1300" dirty="0"/>
           </a:p>
@@ -40694,7 +41942,7 @@
                 <a:ea typeface="Trebuchet MS" pitchFamily="34" charset="-122"/>
                 <a:cs typeface="Trebuchet MS" pitchFamily="34" charset="-120"/>
               </a:rPr>
-              <a:t>re-</a:t>
+              <a:t>con-</a:t>
             </a:r>
             <a:endParaRPr lang="en-US" sz="1300" dirty="0"/>
           </a:p>
@@ -40783,7 +42031,7 @@
                 <a:ea typeface="Trebuchet MS" pitchFamily="34" charset="-122"/>
                 <a:cs typeface="Trebuchet MS" pitchFamily="34" charset="-120"/>
               </a:rPr>
-              <a:t>-ment</a:t>
+              <a:t>-al</a:t>
             </a:r>
             <a:endParaRPr lang="en-US" sz="1300" dirty="0"/>
           </a:p>
@@ -41048,7 +42296,7 @@
                 <a:ea typeface="Trebuchet MS" pitchFamily="34" charset="-122"/>
                 <a:cs typeface="Trebuchet MS" pitchFamily="34" charset="-120"/>
               </a:rPr>
-              <a:t>as-</a:t>
+              <a:t>re-</a:t>
             </a:r>
             <a:endParaRPr lang="en-US" sz="1300" dirty="0"/>
           </a:p>
@@ -41272,7 +42520,7 @@
                 <a:ea typeface="Trebuchet MS" pitchFamily="34" charset="-122"/>
                 <a:cs typeface="Trebuchet MS" pitchFamily="34" charset="-120"/>
               </a:rPr>
-              <a:t>-al</a:t>
+              <a:t>-ed</a:t>
             </a:r>
             <a:endParaRPr lang="en-US" sz="1300" dirty="0"/>
           </a:p>
@@ -41669,7 +42917,7 @@
                 <a:ea typeface="Calibri" pitchFamily="34" charset="-122"/>
                 <a:cs typeface="Calibri" pitchFamily="34" charset="-120"/>
               </a:rPr>
-              <a:t>Word Labs  •  wordlabs.app  •  Root: 'sign' = mark, symbol, indicate</a:t>
+              <a:t>Word Labs  •  wordlabs.app  •  Root: 'sign' = mark, symbol, or signal</a:t>
             </a:r>
             <a:endParaRPr lang="en-US" sz="800" dirty="0"/>
           </a:p>
@@ -41847,7 +43095,7 @@
                 <a:ea typeface="Calibri" pitchFamily="34" charset="-122"/>
                 <a:cs typeface="Calibri" pitchFamily="34" charset="-120"/>
               </a:rPr>
-              <a:t>To officially choose someone or something for a particular purpose.</a:t>
+              <a:t>To choose or mark something for a special purpose.</a:t>
             </a:r>
             <a:endParaRPr lang="en-US" sz="1200" dirty="0"/>
           </a:p>
@@ -41986,7 +43234,7 @@
                 <a:ea typeface="Calibri" pitchFamily="34" charset="-122"/>
                 <a:cs typeface="Calibri" pitchFamily="34" charset="-120"/>
               </a:rPr>
-              <a:t>To give up a job or position by telling others you are leaving.</a:t>
+              <a:t>To officially quit or leave a job or position.</a:t>
             </a:r>
             <a:endParaRPr lang="en-US" sz="1200" dirty="0"/>
           </a:p>
@@ -42059,7 +43307,7 @@
                 <a:ea typeface="Trebuchet MS" pitchFamily="34" charset="-122"/>
                 <a:cs typeface="Trebuchet MS" pitchFamily="34" charset="-120"/>
               </a:rPr>
-              <a:t>assignment</a:t>
+              <a:t>design</a:t>
             </a:r>
             <a:endParaRPr lang="en-US" sz="1200" dirty="0"/>
           </a:p>
@@ -42125,7 +43373,7 @@
                 <a:ea typeface="Calibri" pitchFamily="34" charset="-122"/>
                 <a:cs typeface="Calibri" pitchFamily="34" charset="-120"/>
               </a:rPr>
-              <a:t>A plan or drawing that shows how something will look or be made.</a:t>
+              <a:t>To give someone a particular job or task to do.</a:t>
             </a:r>
             <a:endParaRPr lang="en-US" sz="1200" dirty="0"/>
           </a:p>
@@ -42198,7 +43446,7 @@
                 <a:ea typeface="Trebuchet MS" pitchFamily="34" charset="-122"/>
                 <a:cs typeface="Trebuchet MS" pitchFamily="34" charset="-120"/>
               </a:rPr>
-              <a:t>design</a:t>
+              <a:t>assign</a:t>
             </a:r>
             <a:endParaRPr lang="en-US" sz="1200" dirty="0"/>
           </a:p>
@@ -42264,7 +43512,7 @@
                 <a:ea typeface="Calibri" pitchFamily="34" charset="-122"/>
                 <a:cs typeface="Calibri" pitchFamily="34" charset="-120"/>
               </a:rPr>
-              <a:t>To send or hand something over to someone else for them to keep or sell.</a:t>
+              <a:t>Something that is important or has great meaning.</a:t>
             </a:r>
             <a:endParaRPr lang="en-US" sz="1200" dirty="0"/>
           </a:p>
@@ -42403,7 +43651,7 @@
                 <a:ea typeface="Calibri" pitchFamily="34" charset="-122"/>
                 <a:cs typeface="Calibri" pitchFamily="34" charset="-120"/>
               </a:rPr>
-              <a:t>A task or piece of work that a teacher gives you to complete.</a:t>
+              <a:t>A plan or drawing that shows how something will be made or look.</a:t>
             </a:r>
             <a:endParaRPr lang="en-US" sz="1200" dirty="0"/>
           </a:p>
@@ -42476,7 +43724,7 @@
                 <a:ea typeface="Trebuchet MS" pitchFamily="34" charset="-122"/>
                 <a:cs typeface="Trebuchet MS" pitchFamily="34" charset="-120"/>
               </a:rPr>
-              <a:t>consign</a:t>
+              <a:t>significant</a:t>
             </a:r>
             <a:endParaRPr lang="en-US" sz="1200" dirty="0"/>
           </a:p>
@@ -42542,7 +43790,7 @@
                 <a:ea typeface="Calibri" pitchFamily="34" charset="-122"/>
                 <a:cs typeface="Calibri" pitchFamily="34" charset="-120"/>
               </a:rPr>
-              <a:t>A sign or action used to send a message, like a traffic light changing colour.</a:t>
+              <a:t>A sign or movement that sends a message to someone.</a:t>
             </a:r>
             <a:endParaRPr lang="en-US" sz="1200" dirty="0"/>
           </a:p>
@@ -42973,7 +44221,7 @@
                 <a:ea typeface="Calibri" pitchFamily="34" charset="-122"/>
                 <a:cs typeface="Calibri" pitchFamily="34" charset="-120"/>
               </a:rPr>
-              <a:t>Word Labs  •  wordlabs.app  •  Root: 'sign' = mark, symbol, indicate</a:t>
+              <a:t>Word Labs  •  wordlabs.app  •  Root: 'sign' = mark, symbol, or signal</a:t>
             </a:r>
             <a:endParaRPr lang="en-US" sz="800" dirty="0"/>
           </a:p>
@@ -43176,7 +44424,7 @@
                 <a:ea typeface="Calibri" pitchFamily="34" charset="-122"/>
                 <a:cs typeface="Calibri" pitchFamily="34" charset="-120"/>
               </a:rPr>
-              <a:t>The teacher handed out the assignment and asked students to complete it by Friday.</a:t>
+              <a:t>The teacher will assign each student a different topic to research for the project.</a:t>
             </a:r>
             <a:endParaRPr lang="en-US" sz="1500" dirty="0"/>
           </a:p>
@@ -43340,7 +44588,7 @@
                 <a:ea typeface="Calibri" pitchFamily="34" charset="-122"/>
                 <a:cs typeface="Calibri" pitchFamily="34" charset="-120"/>
               </a:rPr>
-              <a:t>The artist spent hours working on the design for the school mural.</a:t>
+              <a:t>The road sign showed that we were only five kilometres from the city.</a:t>
             </a:r>
             <a:endParaRPr lang="en-US" sz="1500" dirty="0"/>
           </a:p>
@@ -43504,7 +44752,7 @@
                 <a:ea typeface="Calibri" pitchFamily="34" charset="-122"/>
                 <a:cs typeface="Calibri" pitchFamily="34" charset="-120"/>
               </a:rPr>
-              <a:t>A flashing signal warned drivers that the road ahead was closed.</a:t>
+              <a:t>Her signature on the painting showed that she was proud of her artwork.</a:t>
             </a:r>
             <a:endParaRPr lang="en-US" sz="1500" dirty="0"/>
           </a:p>

--- a/output/wordlabs-sign-3day.pptx
+++ b/output/wordlabs-sign-3day.pptx
@@ -10965,11 +10965,11 @@
         <p:spPr>
           <a:xfrm>
             <a:off x="1874520" y="4096512"/>
-            <a:ext cx="6903720" cy="804672"/>
+            <a:ext cx="6903720" cy="658368"/>
           </a:xfrm>
           <a:prstGeom prst="rect">
             <a:avLst>
-              <a:gd name="adj" fmla="val 6818"/>
+              <a:gd name="adj" fmla="val 8333"/>
             </a:avLst>
           </a:prstGeom>
           <a:solidFill>
@@ -10992,11 +10992,11 @@
         <p:spPr>
           <a:xfrm>
             <a:off x="2254649" y="4169664"/>
-            <a:ext cx="685800" cy="384048"/>
+            <a:ext cx="685800" cy="475488"/>
           </a:xfrm>
           <a:prstGeom prst="rect">
             <a:avLst>
-              <a:gd name="adj" fmla="val 9524"/>
+              <a:gd name="adj" fmla="val 7692"/>
             </a:avLst>
           </a:prstGeom>
           <a:solidFill>
@@ -11019,7 +11019,7 @@
         <p:spPr>
           <a:xfrm>
             <a:off x="2254649" y="4169664"/>
-            <a:ext cx="685800" cy="384048"/>
+            <a:ext cx="685800" cy="475488"/>
           </a:xfrm>
           <a:prstGeom prst="rect">
             <a:avLst/>
@@ -11058,11 +11058,11 @@
         <p:spPr>
           <a:xfrm>
             <a:off x="3293146" y="4169664"/>
-            <a:ext cx="685800" cy="384048"/>
+            <a:ext cx="685800" cy="475488"/>
           </a:xfrm>
           <a:prstGeom prst="rect">
             <a:avLst>
-              <a:gd name="adj" fmla="val 9524"/>
+              <a:gd name="adj" fmla="val 7692"/>
             </a:avLst>
           </a:prstGeom>
           <a:solidFill>
@@ -11085,7 +11085,7 @@
         <p:spPr>
           <a:xfrm>
             <a:off x="3293146" y="4169664"/>
-            <a:ext cx="685800" cy="384048"/>
+            <a:ext cx="685800" cy="475488"/>
           </a:xfrm>
           <a:prstGeom prst="rect">
             <a:avLst/>
@@ -11124,11 +11124,11 @@
         <p:spPr>
           <a:xfrm>
             <a:off x="4331643" y="4169664"/>
-            <a:ext cx="685800" cy="384048"/>
+            <a:ext cx="685800" cy="475488"/>
           </a:xfrm>
           <a:prstGeom prst="rect">
             <a:avLst>
-              <a:gd name="adj" fmla="val 9524"/>
+              <a:gd name="adj" fmla="val 7692"/>
             </a:avLst>
           </a:prstGeom>
           <a:solidFill>
@@ -11151,7 +11151,7 @@
         <p:spPr>
           <a:xfrm>
             <a:off x="4331643" y="4169664"/>
-            <a:ext cx="685800" cy="384048"/>
+            <a:ext cx="685800" cy="475488"/>
           </a:xfrm>
           <a:prstGeom prst="rect">
             <a:avLst/>
@@ -11183,57 +11183,18 @@
       </p:sp>
       <p:sp>
         <p:nvSpPr>
-          <p:cNvPr id="45" name="Text 43"/>
-          <p:cNvSpPr/>
-          <p:nvPr/>
-        </p:nvSpPr>
-        <p:spPr>
-          <a:xfrm>
-            <a:off x="4331643" y="4572000"/>
-            <a:ext cx="685800" cy="219456"/>
-          </a:xfrm>
-          <a:prstGeom prst="rect">
-            <a:avLst/>
-          </a:prstGeom>
-          <a:noFill/>
-          <a:ln/>
-        </p:spPr>
-        <p:txBody>
-          <a:bodyPr wrap="square" lIns="0" tIns="0" rIns="0" bIns="0" rtlCol="0" anchor="t"/>
-          <a:lstStyle/>
-          <a:p>
-            <a:pPr algn="ctr" indent="0" marL="0">
-              <a:buNone/>
-            </a:pPr>
-            <a:r>
-              <a:rPr lang="en-US" sz="750" i="1" dirty="0">
-                <a:solidFill>
-                  <a:srgbClr val="94A3B8"/>
-                </a:solidFill>
-                <a:latin typeface="Calibri" pitchFamily="34" charset="0"/>
-                <a:ea typeface="Calibri" pitchFamily="34" charset="-122"/>
-                <a:cs typeface="Calibri" pitchFamily="34" charset="-120"/>
-              </a:rPr>
-              <a:t>/z/</a:t>
-            </a:r>
-            <a:endParaRPr lang="en-US" sz="750" dirty="0"/>
-          </a:p>
-        </p:txBody>
-      </p:sp>
-      <p:sp>
-        <p:nvSpPr>
-          <p:cNvPr id="46" name="Shape 44"/>
+          <p:cNvPr id="45" name="Shape 43"/>
           <p:cNvSpPr/>
           <p:nvPr/>
         </p:nvSpPr>
         <p:spPr>
           <a:xfrm>
             <a:off x="5370141" y="4169664"/>
-            <a:ext cx="685800" cy="384048"/>
+            <a:ext cx="685800" cy="475488"/>
           </a:xfrm>
           <a:prstGeom prst="rect">
             <a:avLst>
-              <a:gd name="adj" fmla="val 9524"/>
+              <a:gd name="adj" fmla="val 7692"/>
             </a:avLst>
           </a:prstGeom>
           <a:solidFill>
@@ -11249,14 +11210,14 @@
       </p:sp>
       <p:sp>
         <p:nvSpPr>
-          <p:cNvPr id="47" name="Text 45"/>
+          <p:cNvPr id="46" name="Text 44"/>
           <p:cNvSpPr/>
           <p:nvPr/>
         </p:nvSpPr>
         <p:spPr>
           <a:xfrm>
             <a:off x="5370141" y="4169664"/>
-            <a:ext cx="685800" cy="384048"/>
+            <a:ext cx="685800" cy="475488"/>
           </a:xfrm>
           <a:prstGeom prst="rect">
             <a:avLst/>
@@ -11280,7 +11241,7 @@
                 <a:ea typeface="Trebuchet MS" pitchFamily="34" charset="-122"/>
                 <a:cs typeface="Trebuchet MS" pitchFamily="34" charset="-120"/>
               </a:rPr>
-              <a:t>igh</a:t>
+              <a:t>i</a:t>
             </a:r>
             <a:endParaRPr lang="en-US" sz="900" dirty="0"/>
           </a:p>
@@ -11288,80 +11249,41 @@
       </p:sp>
       <p:sp>
         <p:nvSpPr>
+          <p:cNvPr id="47" name="Shape 45"/>
+          <p:cNvSpPr/>
+          <p:nvPr/>
+        </p:nvSpPr>
+        <p:spPr>
+          <a:xfrm>
+            <a:off x="6408638" y="4169664"/>
+            <a:ext cx="685800" cy="475488"/>
+          </a:xfrm>
+          <a:prstGeom prst="rect">
+            <a:avLst>
+              <a:gd name="adj" fmla="val 7692"/>
+            </a:avLst>
+          </a:prstGeom>
+          <a:solidFill>
+            <a:srgbClr val="FFFFFF"/>
+          </a:solidFill>
+          <a:ln w="12700">
+            <a:solidFill>
+              <a:srgbClr val="DB2777"/>
+            </a:solidFill>
+            <a:prstDash val="solid"/>
+          </a:ln>
+        </p:spPr>
+      </p:sp>
+      <p:sp>
+        <p:nvSpPr>
           <p:cNvPr id="48" name="Text 46"/>
           <p:cNvSpPr/>
           <p:nvPr/>
         </p:nvSpPr>
         <p:spPr>
           <a:xfrm>
-            <a:off x="5370141" y="4572000"/>
-            <a:ext cx="685800" cy="219456"/>
-          </a:xfrm>
-          <a:prstGeom prst="rect">
-            <a:avLst/>
-          </a:prstGeom>
-          <a:noFill/>
-          <a:ln/>
-        </p:spPr>
-        <p:txBody>
-          <a:bodyPr wrap="square" lIns="0" tIns="0" rIns="0" bIns="0" rtlCol="0" anchor="t"/>
-          <a:lstStyle/>
-          <a:p>
-            <a:pPr algn="ctr" indent="0" marL="0">
-              <a:buNone/>
-            </a:pPr>
-            <a:r>
-              <a:rPr lang="en-US" sz="750" i="1" dirty="0">
-                <a:solidFill>
-                  <a:srgbClr val="94A3B8"/>
-                </a:solidFill>
-                <a:latin typeface="Calibri" pitchFamily="34" charset="0"/>
-                <a:ea typeface="Calibri" pitchFamily="34" charset="-122"/>
-                <a:cs typeface="Calibri" pitchFamily="34" charset="-120"/>
-              </a:rPr>
-              <a:t>/ie/</a:t>
-            </a:r>
-            <a:endParaRPr lang="en-US" sz="750" dirty="0"/>
-          </a:p>
-        </p:txBody>
-      </p:sp>
-      <p:sp>
-        <p:nvSpPr>
-          <p:cNvPr id="49" name="Shape 47"/>
-          <p:cNvSpPr/>
-          <p:nvPr/>
-        </p:nvSpPr>
-        <p:spPr>
-          <a:xfrm>
             <a:off x="6408638" y="4169664"/>
-            <a:ext cx="685800" cy="384048"/>
-          </a:xfrm>
-          <a:prstGeom prst="rect">
-            <a:avLst>
-              <a:gd name="adj" fmla="val 9524"/>
-            </a:avLst>
-          </a:prstGeom>
-          <a:solidFill>
-            <a:srgbClr val="FFFFFF"/>
-          </a:solidFill>
-          <a:ln w="12700">
-            <a:solidFill>
-              <a:srgbClr val="DB2777"/>
-            </a:solidFill>
-            <a:prstDash val="solid"/>
-          </a:ln>
-        </p:spPr>
-      </p:sp>
-      <p:sp>
-        <p:nvSpPr>
-          <p:cNvPr id="50" name="Text 48"/>
-          <p:cNvSpPr/>
-          <p:nvPr/>
-        </p:nvSpPr>
-        <p:spPr>
-          <a:xfrm>
-            <a:off x="6408638" y="4169664"/>
-            <a:ext cx="685800" cy="384048"/>
+            <a:ext cx="685800" cy="475488"/>
           </a:xfrm>
           <a:prstGeom prst="rect">
             <a:avLst/>
@@ -11385,7 +11307,7 @@
                 <a:ea typeface="Trebuchet MS" pitchFamily="34" charset="-122"/>
                 <a:cs typeface="Trebuchet MS" pitchFamily="34" charset="-120"/>
               </a:rPr>
-              <a:t>n</a:t>
+              <a:t>gn</a:t>
             </a:r>
             <a:endParaRPr lang="en-US" sz="900" dirty="0"/>
           </a:p>
@@ -11393,18 +11315,18 @@
       </p:sp>
       <p:sp>
         <p:nvSpPr>
-          <p:cNvPr id="51" name="Shape 49"/>
+          <p:cNvPr id="49" name="Shape 47"/>
           <p:cNvSpPr/>
           <p:nvPr/>
         </p:nvSpPr>
         <p:spPr>
           <a:xfrm>
             <a:off x="7447135" y="4169664"/>
-            <a:ext cx="685800" cy="384048"/>
+            <a:ext cx="685800" cy="475488"/>
           </a:xfrm>
           <a:prstGeom prst="rect">
             <a:avLst>
-              <a:gd name="adj" fmla="val 9524"/>
+              <a:gd name="adj" fmla="val 7692"/>
             </a:avLst>
           </a:prstGeom>
           <a:solidFill>
@@ -11420,14 +11342,14 @@
       </p:sp>
       <p:sp>
         <p:nvSpPr>
-          <p:cNvPr id="52" name="Text 50"/>
+          <p:cNvPr id="50" name="Text 48"/>
           <p:cNvSpPr/>
           <p:nvPr/>
         </p:nvSpPr>
         <p:spPr>
           <a:xfrm>
             <a:off x="7447135" y="4169664"/>
-            <a:ext cx="685800" cy="384048"/>
+            <a:ext cx="685800" cy="475488"/>
           </a:xfrm>
           <a:prstGeom prst="rect">
             <a:avLst/>
@@ -23378,11 +23300,11 @@
         <p:spPr>
           <a:xfrm>
             <a:off x="1874520" y="4096512"/>
-            <a:ext cx="6903720" cy="804672"/>
+            <a:ext cx="6903720" cy="658368"/>
           </a:xfrm>
           <a:prstGeom prst="rect">
             <a:avLst>
-              <a:gd name="adj" fmla="val 6818"/>
+              <a:gd name="adj" fmla="val 8333"/>
             </a:avLst>
           </a:prstGeom>
           <a:solidFill>
@@ -23404,12 +23326,12 @@
         </p:nvSpPr>
         <p:spPr>
           <a:xfrm>
-            <a:off x="2254649" y="4169664"/>
-            <a:ext cx="685800" cy="384048"/>
+            <a:off x="2124837" y="4169664"/>
+            <a:ext cx="685800" cy="475488"/>
           </a:xfrm>
           <a:prstGeom prst="rect">
             <a:avLst>
-              <a:gd name="adj" fmla="val 9524"/>
+              <a:gd name="adj" fmla="val 7692"/>
             </a:avLst>
           </a:prstGeom>
           <a:solidFill>
@@ -23431,8 +23353,8 @@
         </p:nvSpPr>
         <p:spPr>
           <a:xfrm>
-            <a:off x="2254649" y="4169664"/>
-            <a:ext cx="685800" cy="384048"/>
+            <a:off x="2124837" y="4169664"/>
+            <a:ext cx="685800" cy="475488"/>
           </a:xfrm>
           <a:prstGeom prst="rect">
             <a:avLst/>
@@ -23470,12 +23392,12 @@
         </p:nvSpPr>
         <p:spPr>
           <a:xfrm>
-            <a:off x="3293146" y="4169664"/>
-            <a:ext cx="685800" cy="384048"/>
+            <a:off x="3033522" y="4169664"/>
+            <a:ext cx="685800" cy="475488"/>
           </a:xfrm>
           <a:prstGeom prst="rect">
             <a:avLst>
-              <a:gd name="adj" fmla="val 9524"/>
+              <a:gd name="adj" fmla="val 7692"/>
             </a:avLst>
           </a:prstGeom>
           <a:solidFill>
@@ -23497,8 +23419,8 @@
         </p:nvSpPr>
         <p:spPr>
           <a:xfrm>
-            <a:off x="3293146" y="4169664"/>
-            <a:ext cx="685800" cy="384048"/>
+            <a:off x="3033522" y="4169664"/>
+            <a:ext cx="685800" cy="475488"/>
           </a:xfrm>
           <a:prstGeom prst="rect">
             <a:avLst/>
@@ -23536,12 +23458,12 @@
         </p:nvSpPr>
         <p:spPr>
           <a:xfrm>
-            <a:off x="4331643" y="4169664"/>
-            <a:ext cx="685800" cy="384048"/>
+            <a:off x="3942207" y="4169664"/>
+            <a:ext cx="685800" cy="475488"/>
           </a:xfrm>
           <a:prstGeom prst="rect">
             <a:avLst>
-              <a:gd name="adj" fmla="val 9524"/>
+              <a:gd name="adj" fmla="val 7692"/>
             </a:avLst>
           </a:prstGeom>
           <a:solidFill>
@@ -23563,8 +23485,8 @@
         </p:nvSpPr>
         <p:spPr>
           <a:xfrm>
-            <a:off x="4331643" y="4169664"/>
-            <a:ext cx="685800" cy="384048"/>
+            <a:off x="3942207" y="4169664"/>
+            <a:ext cx="685800" cy="475488"/>
           </a:xfrm>
           <a:prstGeom prst="rect">
             <a:avLst/>
@@ -23596,57 +23518,18 @@
       </p:sp>
       <p:sp>
         <p:nvSpPr>
-          <p:cNvPr id="42" name="Text 40"/>
-          <p:cNvSpPr/>
-          <p:nvPr/>
-        </p:nvSpPr>
-        <p:spPr>
-          <a:xfrm>
-            <a:off x="4331643" y="4572000"/>
-            <a:ext cx="685800" cy="219456"/>
-          </a:xfrm>
-          <a:prstGeom prst="rect">
-            <a:avLst/>
-          </a:prstGeom>
-          <a:noFill/>
-          <a:ln/>
-        </p:spPr>
-        <p:txBody>
-          <a:bodyPr wrap="square" lIns="0" tIns="0" rIns="0" bIns="0" rtlCol="0" anchor="t"/>
-          <a:lstStyle/>
-          <a:p>
-            <a:pPr algn="ctr" indent="0" marL="0">
-              <a:buNone/>
-            </a:pPr>
-            <a:r>
-              <a:rPr lang="en-US" sz="750" i="1" dirty="0">
-                <a:solidFill>
-                  <a:srgbClr val="94A3B8"/>
-                </a:solidFill>
-                <a:latin typeface="Calibri" pitchFamily="34" charset="0"/>
-                <a:ea typeface="Calibri" pitchFamily="34" charset="-122"/>
-                <a:cs typeface="Calibri" pitchFamily="34" charset="-120"/>
-              </a:rPr>
-              <a:t>/z/</a:t>
-            </a:r>
-            <a:endParaRPr lang="en-US" sz="750" dirty="0"/>
-          </a:p>
-        </p:txBody>
-      </p:sp>
-      <p:sp>
-        <p:nvSpPr>
-          <p:cNvPr id="43" name="Shape 41"/>
-          <p:cNvSpPr/>
-          <p:nvPr/>
-        </p:nvSpPr>
-        <p:spPr>
-          <a:xfrm>
-            <a:off x="5370141" y="4169664"/>
-            <a:ext cx="685800" cy="384048"/>
+          <p:cNvPr id="42" name="Shape 40"/>
+          <p:cNvSpPr/>
+          <p:nvPr/>
+        </p:nvSpPr>
+        <p:spPr>
+          <a:xfrm>
+            <a:off x="4850892" y="4169664"/>
+            <a:ext cx="685800" cy="475488"/>
           </a:xfrm>
           <a:prstGeom prst="rect">
             <a:avLst>
-              <a:gd name="adj" fmla="val 9524"/>
+              <a:gd name="adj" fmla="val 7692"/>
             </a:avLst>
           </a:prstGeom>
           <a:solidFill>
@@ -23662,14 +23545,14 @@
       </p:sp>
       <p:sp>
         <p:nvSpPr>
-          <p:cNvPr id="44" name="Text 42"/>
-          <p:cNvSpPr/>
-          <p:nvPr/>
-        </p:nvSpPr>
-        <p:spPr>
-          <a:xfrm>
-            <a:off x="5370141" y="4169664"/>
-            <a:ext cx="685800" cy="384048"/>
+          <p:cNvPr id="43" name="Text 41"/>
+          <p:cNvSpPr/>
+          <p:nvPr/>
+        </p:nvSpPr>
+        <p:spPr>
+          <a:xfrm>
+            <a:off x="4850892" y="4169664"/>
+            <a:ext cx="685800" cy="475488"/>
           </a:xfrm>
           <a:prstGeom prst="rect">
             <a:avLst/>
@@ -23693,7 +23576,7 @@
                 <a:ea typeface="Trebuchet MS" pitchFamily="34" charset="-122"/>
                 <a:cs typeface="Trebuchet MS" pitchFamily="34" charset="-120"/>
               </a:rPr>
-              <a:t>igh</a:t>
+              <a:t>i</a:t>
             </a:r>
             <a:endParaRPr lang="en-US" sz="900" dirty="0"/>
           </a:p>
@@ -23701,80 +23584,41 @@
       </p:sp>
       <p:sp>
         <p:nvSpPr>
+          <p:cNvPr id="44" name="Shape 42"/>
+          <p:cNvSpPr/>
+          <p:nvPr/>
+        </p:nvSpPr>
+        <p:spPr>
+          <a:xfrm>
+            <a:off x="5759577" y="4169664"/>
+            <a:ext cx="685800" cy="475488"/>
+          </a:xfrm>
+          <a:prstGeom prst="rect">
+            <a:avLst>
+              <a:gd name="adj" fmla="val 7692"/>
+            </a:avLst>
+          </a:prstGeom>
+          <a:solidFill>
+            <a:srgbClr val="FFFFFF"/>
+          </a:solidFill>
+          <a:ln w="12700">
+            <a:solidFill>
+              <a:srgbClr val="DB2777"/>
+            </a:solidFill>
+            <a:prstDash val="solid"/>
+          </a:ln>
+        </p:spPr>
+      </p:sp>
+      <p:sp>
+        <p:nvSpPr>
           <p:cNvPr id="45" name="Text 43"/>
           <p:cNvSpPr/>
           <p:nvPr/>
         </p:nvSpPr>
         <p:spPr>
           <a:xfrm>
-            <a:off x="5370141" y="4572000"/>
-            <a:ext cx="685800" cy="219456"/>
-          </a:xfrm>
-          <a:prstGeom prst="rect">
-            <a:avLst/>
-          </a:prstGeom>
-          <a:noFill/>
-          <a:ln/>
-        </p:spPr>
-        <p:txBody>
-          <a:bodyPr wrap="square" lIns="0" tIns="0" rIns="0" bIns="0" rtlCol="0" anchor="t"/>
-          <a:lstStyle/>
-          <a:p>
-            <a:pPr algn="ctr" indent="0" marL="0">
-              <a:buNone/>
-            </a:pPr>
-            <a:r>
-              <a:rPr lang="en-US" sz="750" i="1" dirty="0">
-                <a:solidFill>
-                  <a:srgbClr val="94A3B8"/>
-                </a:solidFill>
-                <a:latin typeface="Calibri" pitchFamily="34" charset="0"/>
-                <a:ea typeface="Calibri" pitchFamily="34" charset="-122"/>
-                <a:cs typeface="Calibri" pitchFamily="34" charset="-120"/>
-              </a:rPr>
-              <a:t>/ie/</a:t>
-            </a:r>
-            <a:endParaRPr lang="en-US" sz="750" dirty="0"/>
-          </a:p>
-        </p:txBody>
-      </p:sp>
-      <p:sp>
-        <p:nvSpPr>
-          <p:cNvPr id="46" name="Shape 44"/>
-          <p:cNvSpPr/>
-          <p:nvPr/>
-        </p:nvSpPr>
-        <p:spPr>
-          <a:xfrm>
-            <a:off x="6408638" y="4169664"/>
-            <a:ext cx="685800" cy="384048"/>
-          </a:xfrm>
-          <a:prstGeom prst="rect">
-            <a:avLst>
-              <a:gd name="adj" fmla="val 9524"/>
-            </a:avLst>
-          </a:prstGeom>
-          <a:solidFill>
-            <a:srgbClr val="FFFFFF"/>
-          </a:solidFill>
-          <a:ln w="12700">
-            <a:solidFill>
-              <a:srgbClr val="DB2777"/>
-            </a:solidFill>
-            <a:prstDash val="solid"/>
-          </a:ln>
-        </p:spPr>
-      </p:sp>
-      <p:sp>
-        <p:nvSpPr>
-          <p:cNvPr id="47" name="Text 45"/>
-          <p:cNvSpPr/>
-          <p:nvPr/>
-        </p:nvSpPr>
-        <p:spPr>
-          <a:xfrm>
-            <a:off x="6408638" y="4169664"/>
-            <a:ext cx="685800" cy="384048"/>
+            <a:off x="5759577" y="4169664"/>
+            <a:ext cx="685800" cy="475488"/>
           </a:xfrm>
           <a:prstGeom prst="rect">
             <a:avLst/>
@@ -23798,7 +23642,7 @@
                 <a:ea typeface="Trebuchet MS" pitchFamily="34" charset="-122"/>
                 <a:cs typeface="Trebuchet MS" pitchFamily="34" charset="-120"/>
               </a:rPr>
-              <a:t>n</a:t>
+              <a:t>gn</a:t>
             </a:r>
             <a:endParaRPr lang="en-US" sz="900" dirty="0"/>
           </a:p>
@@ -23806,18 +23650,84 @@
       </p:sp>
       <p:sp>
         <p:nvSpPr>
+          <p:cNvPr id="46" name="Shape 44"/>
+          <p:cNvSpPr/>
+          <p:nvPr/>
+        </p:nvSpPr>
+        <p:spPr>
+          <a:xfrm>
+            <a:off x="6668262" y="4169664"/>
+            <a:ext cx="685800" cy="475488"/>
+          </a:xfrm>
+          <a:prstGeom prst="rect">
+            <a:avLst>
+              <a:gd name="adj" fmla="val 7692"/>
+            </a:avLst>
+          </a:prstGeom>
+          <a:solidFill>
+            <a:srgbClr val="FFFFFF"/>
+          </a:solidFill>
+          <a:ln w="12700">
+            <a:solidFill>
+              <a:srgbClr val="DB2777"/>
+            </a:solidFill>
+            <a:prstDash val="solid"/>
+          </a:ln>
+        </p:spPr>
+      </p:sp>
+      <p:sp>
+        <p:nvSpPr>
+          <p:cNvPr id="47" name="Text 45"/>
+          <p:cNvSpPr/>
+          <p:nvPr/>
+        </p:nvSpPr>
+        <p:spPr>
+          <a:xfrm>
+            <a:off x="6668262" y="4169664"/>
+            <a:ext cx="685800" cy="475488"/>
+          </a:xfrm>
+          <a:prstGeom prst="rect">
+            <a:avLst/>
+          </a:prstGeom>
+          <a:noFill/>
+          <a:ln/>
+        </p:spPr>
+        <p:txBody>
+          <a:bodyPr wrap="square" lIns="0" tIns="0" rIns="0" bIns="0" rtlCol="0" anchor="ctr"/>
+          <a:lstStyle/>
+          <a:p>
+            <a:pPr algn="ctr" indent="0" marL="0">
+              <a:buNone/>
+            </a:pPr>
+            <a:r>
+              <a:rPr lang="en-US" sz="900" b="1" dirty="0">
+                <a:solidFill>
+                  <a:srgbClr val="9D174D"/>
+                </a:solidFill>
+                <a:latin typeface="Trebuchet MS" pitchFamily="34" charset="0"/>
+                <a:ea typeface="Trebuchet MS" pitchFamily="34" charset="-122"/>
+                <a:cs typeface="Trebuchet MS" pitchFamily="34" charset="-120"/>
+              </a:rPr>
+              <a:t>e</a:t>
+            </a:r>
+            <a:endParaRPr lang="en-US" sz="900" dirty="0"/>
+          </a:p>
+        </p:txBody>
+      </p:sp>
+      <p:sp>
+        <p:nvSpPr>
           <p:cNvPr id="48" name="Shape 46"/>
           <p:cNvSpPr/>
           <p:nvPr/>
         </p:nvSpPr>
         <p:spPr>
           <a:xfrm>
-            <a:off x="7447135" y="4169664"/>
-            <a:ext cx="685800" cy="384048"/>
+            <a:off x="7576947" y="4169664"/>
+            <a:ext cx="685800" cy="475488"/>
           </a:xfrm>
           <a:prstGeom prst="rect">
             <a:avLst>
-              <a:gd name="adj" fmla="val 9524"/>
+              <a:gd name="adj" fmla="val 7692"/>
             </a:avLst>
           </a:prstGeom>
           <a:solidFill>
@@ -23839,8 +23749,8 @@
         </p:nvSpPr>
         <p:spPr>
           <a:xfrm>
-            <a:off x="7447135" y="4169664"/>
-            <a:ext cx="685800" cy="384048"/>
+            <a:off x="7576947" y="4169664"/>
+            <a:ext cx="685800" cy="475488"/>
           </a:xfrm>
           <a:prstGeom prst="rect">
             <a:avLst/>
@@ -29241,11 +29151,11 @@
         <p:spPr>
           <a:xfrm>
             <a:off x="1874520" y="4096512"/>
-            <a:ext cx="6903720" cy="804672"/>
+            <a:ext cx="6903720" cy="658368"/>
           </a:xfrm>
           <a:prstGeom prst="rect">
             <a:avLst>
-              <a:gd name="adj" fmla="val 6818"/>
+              <a:gd name="adj" fmla="val 8333"/>
             </a:avLst>
           </a:prstGeom>
           <a:solidFill>
@@ -29267,12 +29177,12 @@
         </p:nvSpPr>
         <p:spPr>
           <a:xfrm>
-            <a:off x="2254649" y="4169664"/>
-            <a:ext cx="685800" cy="384048"/>
+            <a:off x="2427732" y="4169664"/>
+            <a:ext cx="685800" cy="475488"/>
           </a:xfrm>
           <a:prstGeom prst="rect">
             <a:avLst>
-              <a:gd name="adj" fmla="val 9524"/>
+              <a:gd name="adj" fmla="val 7692"/>
             </a:avLst>
           </a:prstGeom>
           <a:solidFill>
@@ -29294,8 +29204,8 @@
         </p:nvSpPr>
         <p:spPr>
           <a:xfrm>
-            <a:off x="2254649" y="4169664"/>
-            <a:ext cx="685800" cy="384048"/>
+            <a:off x="2427732" y="4169664"/>
+            <a:ext cx="685800" cy="475488"/>
           </a:xfrm>
           <a:prstGeom prst="rect">
             <a:avLst/>
@@ -29333,12 +29243,12 @@
         </p:nvSpPr>
         <p:spPr>
           <a:xfrm>
-            <a:off x="3293146" y="4169664"/>
-            <a:ext cx="685800" cy="384048"/>
+            <a:off x="3639312" y="4169664"/>
+            <a:ext cx="685800" cy="475488"/>
           </a:xfrm>
           <a:prstGeom prst="rect">
             <a:avLst>
-              <a:gd name="adj" fmla="val 9524"/>
+              <a:gd name="adj" fmla="val 7692"/>
             </a:avLst>
           </a:prstGeom>
           <a:solidFill>
@@ -29360,8 +29270,8 @@
         </p:nvSpPr>
         <p:spPr>
           <a:xfrm>
-            <a:off x="3293146" y="4169664"/>
-            <a:ext cx="685800" cy="384048"/>
+            <a:off x="3639312" y="4169664"/>
+            <a:ext cx="685800" cy="475488"/>
           </a:xfrm>
           <a:prstGeom prst="rect">
             <a:avLst/>
@@ -29385,7 +29295,7 @@
                 <a:ea typeface="Trebuchet MS" pitchFamily="34" charset="-122"/>
                 <a:cs typeface="Trebuchet MS" pitchFamily="34" charset="-120"/>
               </a:rPr>
-              <a:t>e</a:t>
+              <a:t>ea</a:t>
             </a:r>
             <a:endParaRPr lang="en-US" sz="900" dirty="0"/>
           </a:p>
@@ -29399,12 +29309,12 @@
         </p:nvSpPr>
         <p:spPr>
           <a:xfrm>
-            <a:off x="4331643" y="4169664"/>
-            <a:ext cx="685800" cy="384048"/>
+            <a:off x="4850892" y="4169664"/>
+            <a:ext cx="685800" cy="475488"/>
           </a:xfrm>
           <a:prstGeom prst="rect">
             <a:avLst>
-              <a:gd name="adj" fmla="val 9524"/>
+              <a:gd name="adj" fmla="val 7692"/>
             </a:avLst>
           </a:prstGeom>
           <a:solidFill>
@@ -29426,8 +29336,8 @@
         </p:nvSpPr>
         <p:spPr>
           <a:xfrm>
-            <a:off x="4331643" y="4169664"/>
-            <a:ext cx="685800" cy="384048"/>
+            <a:off x="4850892" y="4169664"/>
+            <a:ext cx="685800" cy="475488"/>
           </a:xfrm>
           <a:prstGeom prst="rect">
             <a:avLst/>
@@ -29451,7 +29361,7 @@
                 <a:ea typeface="Trebuchet MS" pitchFamily="34" charset="-122"/>
                 <a:cs typeface="Trebuchet MS" pitchFamily="34" charset="-120"/>
               </a:rPr>
-              <a:t>a</a:t>
+              <a:t>ss</a:t>
             </a:r>
             <a:endParaRPr lang="en-US" sz="900" dirty="0"/>
           </a:p>
@@ -29465,12 +29375,12 @@
         </p:nvSpPr>
         <p:spPr>
           <a:xfrm>
-            <a:off x="5370141" y="4169664"/>
-            <a:ext cx="685800" cy="384048"/>
+            <a:off x="6062472" y="4169664"/>
+            <a:ext cx="685800" cy="475488"/>
           </a:xfrm>
           <a:prstGeom prst="rect">
             <a:avLst>
-              <a:gd name="adj" fmla="val 9524"/>
+              <a:gd name="adj" fmla="val 7692"/>
             </a:avLst>
           </a:prstGeom>
           <a:solidFill>
@@ -29492,8 +29402,8 @@
         </p:nvSpPr>
         <p:spPr>
           <a:xfrm>
-            <a:off x="5370141" y="4169664"/>
-            <a:ext cx="685800" cy="384048"/>
+            <a:off x="6062472" y="4169664"/>
+            <a:ext cx="685800" cy="475488"/>
           </a:xfrm>
           <a:prstGeom prst="rect">
             <a:avLst/>
@@ -29517,7 +29427,7 @@
                 <a:ea typeface="Trebuchet MS" pitchFamily="34" charset="-122"/>
                 <a:cs typeface="Trebuchet MS" pitchFamily="34" charset="-120"/>
               </a:rPr>
-              <a:t>s</a:t>
+              <a:t>i</a:t>
             </a:r>
             <a:endParaRPr lang="en-US" sz="900" dirty="0"/>
           </a:p>
@@ -29525,57 +29435,18 @@
       </p:sp>
       <p:sp>
         <p:nvSpPr>
-          <p:cNvPr id="48" name="Text 46"/>
-          <p:cNvSpPr/>
-          <p:nvPr/>
-        </p:nvSpPr>
-        <p:spPr>
-          <a:xfrm>
-            <a:off x="5370141" y="4572000"/>
-            <a:ext cx="685800" cy="219456"/>
-          </a:xfrm>
-          <a:prstGeom prst="rect">
-            <a:avLst/>
-          </a:prstGeom>
-          <a:noFill/>
-          <a:ln/>
-        </p:spPr>
-        <p:txBody>
-          <a:bodyPr wrap="square" lIns="0" tIns="0" rIns="0" bIns="0" rtlCol="0" anchor="t"/>
-          <a:lstStyle/>
-          <a:p>
-            <a:pPr algn="ctr" indent="0" marL="0">
-              <a:buNone/>
-            </a:pPr>
-            <a:r>
-              <a:rPr lang="en-US" sz="750" i="1" dirty="0">
-                <a:solidFill>
-                  <a:srgbClr val="94A3B8"/>
-                </a:solidFill>
-                <a:latin typeface="Calibri" pitchFamily="34" charset="0"/>
-                <a:ea typeface="Calibri" pitchFamily="34" charset="-122"/>
-                <a:cs typeface="Calibri" pitchFamily="34" charset="-120"/>
-              </a:rPr>
-              <a:t>/z/</a:t>
-            </a:r>
-            <a:endParaRPr lang="en-US" sz="750" dirty="0"/>
-          </a:p>
-        </p:txBody>
-      </p:sp>
-      <p:sp>
-        <p:nvSpPr>
-          <p:cNvPr id="49" name="Shape 47"/>
-          <p:cNvSpPr/>
-          <p:nvPr/>
-        </p:nvSpPr>
-        <p:spPr>
-          <a:xfrm>
-            <a:off x="6408638" y="4169664"/>
-            <a:ext cx="685800" cy="384048"/>
+          <p:cNvPr id="48" name="Shape 46"/>
+          <p:cNvSpPr/>
+          <p:nvPr/>
+        </p:nvSpPr>
+        <p:spPr>
+          <a:xfrm>
+            <a:off x="7274052" y="4169664"/>
+            <a:ext cx="685800" cy="475488"/>
           </a:xfrm>
           <a:prstGeom prst="rect">
             <a:avLst>
-              <a:gd name="adj" fmla="val 9524"/>
+              <a:gd name="adj" fmla="val 7692"/>
             </a:avLst>
           </a:prstGeom>
           <a:solidFill>
@@ -29591,14 +29462,14 @@
       </p:sp>
       <p:sp>
         <p:nvSpPr>
-          <p:cNvPr id="50" name="Text 48"/>
-          <p:cNvSpPr/>
-          <p:nvPr/>
-        </p:nvSpPr>
-        <p:spPr>
-          <a:xfrm>
-            <a:off x="6408638" y="4169664"/>
-            <a:ext cx="685800" cy="384048"/>
+          <p:cNvPr id="49" name="Text 47"/>
+          <p:cNvSpPr/>
+          <p:nvPr/>
+        </p:nvSpPr>
+        <p:spPr>
+          <a:xfrm>
+            <a:off x="7274052" y="4169664"/>
+            <a:ext cx="685800" cy="475488"/>
           </a:xfrm>
           <a:prstGeom prst="rect">
             <a:avLst/>
@@ -29622,112 +29493,7 @@
                 <a:ea typeface="Trebuchet MS" pitchFamily="34" charset="-122"/>
                 <a:cs typeface="Trebuchet MS" pitchFamily="34" charset="-120"/>
               </a:rPr>
-              <a:t>igh</a:t>
-            </a:r>
-            <a:endParaRPr lang="en-US" sz="900" dirty="0"/>
-          </a:p>
-        </p:txBody>
-      </p:sp>
-      <p:sp>
-        <p:nvSpPr>
-          <p:cNvPr id="51" name="Text 49"/>
-          <p:cNvSpPr/>
-          <p:nvPr/>
-        </p:nvSpPr>
-        <p:spPr>
-          <a:xfrm>
-            <a:off x="6408638" y="4572000"/>
-            <a:ext cx="685800" cy="219456"/>
-          </a:xfrm>
-          <a:prstGeom prst="rect">
-            <a:avLst/>
-          </a:prstGeom>
-          <a:noFill/>
-          <a:ln/>
-        </p:spPr>
-        <p:txBody>
-          <a:bodyPr wrap="square" lIns="0" tIns="0" rIns="0" bIns="0" rtlCol="0" anchor="t"/>
-          <a:lstStyle/>
-          <a:p>
-            <a:pPr algn="ctr" indent="0" marL="0">
-              <a:buNone/>
-            </a:pPr>
-            <a:r>
-              <a:rPr lang="en-US" sz="750" i="1" dirty="0">
-                <a:solidFill>
-                  <a:srgbClr val="94A3B8"/>
-                </a:solidFill>
-                <a:latin typeface="Calibri" pitchFamily="34" charset="0"/>
-                <a:ea typeface="Calibri" pitchFamily="34" charset="-122"/>
-                <a:cs typeface="Calibri" pitchFamily="34" charset="-120"/>
-              </a:rPr>
-              <a:t>/ie/</a:t>
-            </a:r>
-            <a:endParaRPr lang="en-US" sz="750" dirty="0"/>
-          </a:p>
-        </p:txBody>
-      </p:sp>
-      <p:sp>
-        <p:nvSpPr>
-          <p:cNvPr id="52" name="Shape 50"/>
-          <p:cNvSpPr/>
-          <p:nvPr/>
-        </p:nvSpPr>
-        <p:spPr>
-          <a:xfrm>
-            <a:off x="7447135" y="4169664"/>
-            <a:ext cx="685800" cy="384048"/>
-          </a:xfrm>
-          <a:prstGeom prst="rect">
-            <a:avLst>
-              <a:gd name="adj" fmla="val 9524"/>
-            </a:avLst>
-          </a:prstGeom>
-          <a:solidFill>
-            <a:srgbClr val="FFFFFF"/>
-          </a:solidFill>
-          <a:ln w="12700">
-            <a:solidFill>
-              <a:srgbClr val="DB2777"/>
-            </a:solidFill>
-            <a:prstDash val="solid"/>
-          </a:ln>
-        </p:spPr>
-      </p:sp>
-      <p:sp>
-        <p:nvSpPr>
-          <p:cNvPr id="53" name="Text 51"/>
-          <p:cNvSpPr/>
-          <p:nvPr/>
-        </p:nvSpPr>
-        <p:spPr>
-          <a:xfrm>
-            <a:off x="7447135" y="4169664"/>
-            <a:ext cx="685800" cy="384048"/>
-          </a:xfrm>
-          <a:prstGeom prst="rect">
-            <a:avLst/>
-          </a:prstGeom>
-          <a:noFill/>
-          <a:ln/>
-        </p:spPr>
-        <p:txBody>
-          <a:bodyPr wrap="square" lIns="0" tIns="0" rIns="0" bIns="0" rtlCol="0" anchor="ctr"/>
-          <a:lstStyle/>
-          <a:p>
-            <a:pPr algn="ctr" indent="0" marL="0">
-              <a:buNone/>
-            </a:pPr>
-            <a:r>
-              <a:rPr lang="en-US" sz="900" b="1" dirty="0">
-                <a:solidFill>
-                  <a:srgbClr val="9D174D"/>
-                </a:solidFill>
-                <a:latin typeface="Trebuchet MS" pitchFamily="34" charset="0"/>
-                <a:ea typeface="Trebuchet MS" pitchFamily="34" charset="-122"/>
-                <a:cs typeface="Trebuchet MS" pitchFamily="34" charset="-120"/>
-              </a:rPr>
-              <a:t>n</a:t>
+              <a:t>gn</a:t>
             </a:r>
             <a:endParaRPr lang="en-US" sz="900" dirty="0"/>
           </a:p>
@@ -34385,11 +34151,11 @@
         <p:spPr>
           <a:xfrm>
             <a:off x="1874520" y="4096512"/>
-            <a:ext cx="6903720" cy="804672"/>
+            <a:ext cx="6903720" cy="658368"/>
           </a:xfrm>
           <a:prstGeom prst="rect">
             <a:avLst>
-              <a:gd name="adj" fmla="val 6818"/>
+              <a:gd name="adj" fmla="val 8333"/>
             </a:avLst>
           </a:prstGeom>
           <a:solidFill>
@@ -34412,11 +34178,11 @@
         <p:spPr>
           <a:xfrm>
             <a:off x="2023872" y="4169664"/>
-            <a:ext cx="685800" cy="384048"/>
+            <a:ext cx="685800" cy="475488"/>
           </a:xfrm>
           <a:prstGeom prst="rect">
             <a:avLst>
-              <a:gd name="adj" fmla="val 9524"/>
+              <a:gd name="adj" fmla="val 7692"/>
             </a:avLst>
           </a:prstGeom>
           <a:solidFill>
@@ -34439,7 +34205,7 @@
         <p:spPr>
           <a:xfrm>
             <a:off x="2023872" y="4169664"/>
-            <a:ext cx="685800" cy="384048"/>
+            <a:ext cx="685800" cy="475488"/>
           </a:xfrm>
           <a:prstGeom prst="rect">
             <a:avLst/>
@@ -34478,11 +34244,11 @@
         <p:spPr>
           <a:xfrm>
             <a:off x="2831592" y="4169664"/>
-            <a:ext cx="685800" cy="384048"/>
+            <a:ext cx="685800" cy="475488"/>
           </a:xfrm>
           <a:prstGeom prst="rect">
             <a:avLst>
-              <a:gd name="adj" fmla="val 9524"/>
+              <a:gd name="adj" fmla="val 7692"/>
             </a:avLst>
           </a:prstGeom>
           <a:solidFill>
@@ -34505,7 +34271,7 @@
         <p:spPr>
           <a:xfrm>
             <a:off x="2831592" y="4169664"/>
-            <a:ext cx="685800" cy="384048"/>
+            <a:ext cx="685800" cy="475488"/>
           </a:xfrm>
           <a:prstGeom prst="rect">
             <a:avLst/>
@@ -34529,7 +34295,7 @@
                 <a:ea typeface="Trebuchet MS" pitchFamily="34" charset="-122"/>
                 <a:cs typeface="Trebuchet MS" pitchFamily="34" charset="-120"/>
               </a:rPr>
-              <a:t>s</a:t>
+              <a:t>ss</a:t>
             </a:r>
             <a:endParaRPr lang="en-US" sz="900" dirty="0"/>
           </a:p>
@@ -34537,57 +34303,18 @@
       </p:sp>
       <p:sp>
         <p:nvSpPr>
-          <p:cNvPr id="44" name="Text 42"/>
-          <p:cNvSpPr/>
-          <p:nvPr/>
-        </p:nvSpPr>
-        <p:spPr>
-          <a:xfrm>
-            <a:off x="2831592" y="4572000"/>
-            <a:ext cx="685800" cy="219456"/>
-          </a:xfrm>
-          <a:prstGeom prst="rect">
-            <a:avLst/>
-          </a:prstGeom>
-          <a:noFill/>
-          <a:ln/>
-        </p:spPr>
-        <p:txBody>
-          <a:bodyPr wrap="square" lIns="0" tIns="0" rIns="0" bIns="0" rtlCol="0" anchor="t"/>
-          <a:lstStyle/>
-          <a:p>
-            <a:pPr algn="ctr" indent="0" marL="0">
-              <a:buNone/>
-            </a:pPr>
-            <a:r>
-              <a:rPr lang="en-US" sz="750" i="1" dirty="0">
-                <a:solidFill>
-                  <a:srgbClr val="94A3B8"/>
-                </a:solidFill>
-                <a:latin typeface="Calibri" pitchFamily="34" charset="0"/>
-                <a:ea typeface="Calibri" pitchFamily="34" charset="-122"/>
-                <a:cs typeface="Calibri" pitchFamily="34" charset="-120"/>
-              </a:rPr>
-              <a:t>/z/</a:t>
-            </a:r>
-            <a:endParaRPr lang="en-US" sz="750" dirty="0"/>
-          </a:p>
-        </p:txBody>
-      </p:sp>
-      <p:sp>
-        <p:nvSpPr>
-          <p:cNvPr id="45" name="Shape 43"/>
+          <p:cNvPr id="44" name="Shape 42"/>
           <p:cNvSpPr/>
           <p:nvPr/>
         </p:nvSpPr>
         <p:spPr>
           <a:xfrm>
             <a:off x="3639312" y="4169664"/>
-            <a:ext cx="685800" cy="384048"/>
+            <a:ext cx="685800" cy="475488"/>
           </a:xfrm>
           <a:prstGeom prst="rect">
             <a:avLst>
-              <a:gd name="adj" fmla="val 9524"/>
+              <a:gd name="adj" fmla="val 7692"/>
             </a:avLst>
           </a:prstGeom>
           <a:solidFill>
@@ -34603,14 +34330,14 @@
       </p:sp>
       <p:sp>
         <p:nvSpPr>
-          <p:cNvPr id="46" name="Text 44"/>
+          <p:cNvPr id="45" name="Text 43"/>
           <p:cNvSpPr/>
           <p:nvPr/>
         </p:nvSpPr>
         <p:spPr>
           <a:xfrm>
             <a:off x="3639312" y="4169664"/>
-            <a:ext cx="685800" cy="384048"/>
+            <a:ext cx="685800" cy="475488"/>
           </a:xfrm>
           <a:prstGeom prst="rect">
             <a:avLst/>
@@ -34634,7 +34361,7 @@
                 <a:ea typeface="Trebuchet MS" pitchFamily="34" charset="-122"/>
                 <a:cs typeface="Trebuchet MS" pitchFamily="34" charset="-120"/>
               </a:rPr>
-              <a:t>igh</a:t>
+              <a:t>i</a:t>
             </a:r>
             <a:endParaRPr lang="en-US" sz="900" dirty="0"/>
           </a:p>
@@ -34642,80 +34369,41 @@
       </p:sp>
       <p:sp>
         <p:nvSpPr>
+          <p:cNvPr id="46" name="Shape 44"/>
+          <p:cNvSpPr/>
+          <p:nvPr/>
+        </p:nvSpPr>
+        <p:spPr>
+          <a:xfrm>
+            <a:off x="4447032" y="4169664"/>
+            <a:ext cx="685800" cy="475488"/>
+          </a:xfrm>
+          <a:prstGeom prst="rect">
+            <a:avLst>
+              <a:gd name="adj" fmla="val 7692"/>
+            </a:avLst>
+          </a:prstGeom>
+          <a:solidFill>
+            <a:srgbClr val="FFFFFF"/>
+          </a:solidFill>
+          <a:ln w="12700">
+            <a:solidFill>
+              <a:srgbClr val="DB2777"/>
+            </a:solidFill>
+            <a:prstDash val="solid"/>
+          </a:ln>
+        </p:spPr>
+      </p:sp>
+      <p:sp>
+        <p:nvSpPr>
           <p:cNvPr id="47" name="Text 45"/>
           <p:cNvSpPr/>
           <p:nvPr/>
         </p:nvSpPr>
         <p:spPr>
           <a:xfrm>
-            <a:off x="3639312" y="4572000"/>
-            <a:ext cx="685800" cy="219456"/>
-          </a:xfrm>
-          <a:prstGeom prst="rect">
-            <a:avLst/>
-          </a:prstGeom>
-          <a:noFill/>
-          <a:ln/>
-        </p:spPr>
-        <p:txBody>
-          <a:bodyPr wrap="square" lIns="0" tIns="0" rIns="0" bIns="0" rtlCol="0" anchor="t"/>
-          <a:lstStyle/>
-          <a:p>
-            <a:pPr algn="ctr" indent="0" marL="0">
-              <a:buNone/>
-            </a:pPr>
-            <a:r>
-              <a:rPr lang="en-US" sz="750" i="1" dirty="0">
-                <a:solidFill>
-                  <a:srgbClr val="94A3B8"/>
-                </a:solidFill>
-                <a:latin typeface="Calibri" pitchFamily="34" charset="0"/>
-                <a:ea typeface="Calibri" pitchFamily="34" charset="-122"/>
-                <a:cs typeface="Calibri" pitchFamily="34" charset="-120"/>
-              </a:rPr>
-              <a:t>/ie/</a:t>
-            </a:r>
-            <a:endParaRPr lang="en-US" sz="750" dirty="0"/>
-          </a:p>
-        </p:txBody>
-      </p:sp>
-      <p:sp>
-        <p:nvSpPr>
-          <p:cNvPr id="48" name="Shape 46"/>
-          <p:cNvSpPr/>
-          <p:nvPr/>
-        </p:nvSpPr>
-        <p:spPr>
-          <a:xfrm>
             <a:off x="4447032" y="4169664"/>
-            <a:ext cx="685800" cy="384048"/>
-          </a:xfrm>
-          <a:prstGeom prst="rect">
-            <a:avLst>
-              <a:gd name="adj" fmla="val 9524"/>
-            </a:avLst>
-          </a:prstGeom>
-          <a:solidFill>
-            <a:srgbClr val="FFFFFF"/>
-          </a:solidFill>
-          <a:ln w="12700">
-            <a:solidFill>
-              <a:srgbClr val="DB2777"/>
-            </a:solidFill>
-            <a:prstDash val="solid"/>
-          </a:ln>
-        </p:spPr>
-      </p:sp>
-      <p:sp>
-        <p:nvSpPr>
-          <p:cNvPr id="49" name="Text 47"/>
-          <p:cNvSpPr/>
-          <p:nvPr/>
-        </p:nvSpPr>
-        <p:spPr>
-          <a:xfrm>
-            <a:off x="4447032" y="4169664"/>
-            <a:ext cx="685800" cy="384048"/>
+            <a:ext cx="685800" cy="475488"/>
           </a:xfrm>
           <a:prstGeom prst="rect">
             <a:avLst/>
@@ -34739,7 +34427,7 @@
                 <a:ea typeface="Trebuchet MS" pitchFamily="34" charset="-122"/>
                 <a:cs typeface="Trebuchet MS" pitchFamily="34" charset="-120"/>
               </a:rPr>
-              <a:t>n</a:t>
+              <a:t>gn</a:t>
             </a:r>
             <a:endParaRPr lang="en-US" sz="900" dirty="0"/>
           </a:p>
@@ -34747,18 +34435,18 @@
       </p:sp>
       <p:sp>
         <p:nvSpPr>
-          <p:cNvPr id="50" name="Shape 48"/>
+          <p:cNvPr id="48" name="Shape 46"/>
           <p:cNvSpPr/>
           <p:nvPr/>
         </p:nvSpPr>
         <p:spPr>
           <a:xfrm>
             <a:off x="5254752" y="4169664"/>
-            <a:ext cx="685800" cy="384048"/>
+            <a:ext cx="685800" cy="475488"/>
           </a:xfrm>
           <a:prstGeom prst="rect">
             <a:avLst>
-              <a:gd name="adj" fmla="val 9524"/>
+              <a:gd name="adj" fmla="val 7692"/>
             </a:avLst>
           </a:prstGeom>
           <a:solidFill>
@@ -34774,14 +34462,14 @@
       </p:sp>
       <p:sp>
         <p:nvSpPr>
-          <p:cNvPr id="51" name="Text 49"/>
+          <p:cNvPr id="49" name="Text 47"/>
           <p:cNvSpPr/>
           <p:nvPr/>
         </p:nvSpPr>
         <p:spPr>
           <a:xfrm>
             <a:off x="5254752" y="4169664"/>
-            <a:ext cx="685800" cy="384048"/>
+            <a:ext cx="685800" cy="475488"/>
           </a:xfrm>
           <a:prstGeom prst="rect">
             <a:avLst/>
@@ -34813,18 +34501,18 @@
       </p:sp>
       <p:sp>
         <p:nvSpPr>
-          <p:cNvPr id="52" name="Shape 50"/>
+          <p:cNvPr id="50" name="Shape 48"/>
           <p:cNvSpPr/>
           <p:nvPr/>
         </p:nvSpPr>
         <p:spPr>
           <a:xfrm>
             <a:off x="6062472" y="4169664"/>
-            <a:ext cx="685800" cy="384048"/>
+            <a:ext cx="685800" cy="475488"/>
           </a:xfrm>
           <a:prstGeom prst="rect">
             <a:avLst>
-              <a:gd name="adj" fmla="val 9524"/>
+              <a:gd name="adj" fmla="val 7692"/>
             </a:avLst>
           </a:prstGeom>
           <a:solidFill>
@@ -34840,14 +34528,14 @@
       </p:sp>
       <p:sp>
         <p:nvSpPr>
-          <p:cNvPr id="53" name="Text 51"/>
+          <p:cNvPr id="51" name="Text 49"/>
           <p:cNvSpPr/>
           <p:nvPr/>
         </p:nvSpPr>
         <p:spPr>
           <a:xfrm>
             <a:off x="6062472" y="4169664"/>
-            <a:ext cx="685800" cy="384048"/>
+            <a:ext cx="685800" cy="475488"/>
           </a:xfrm>
           <a:prstGeom prst="rect">
             <a:avLst/>
@@ -34879,18 +34567,18 @@
       </p:sp>
       <p:sp>
         <p:nvSpPr>
-          <p:cNvPr id="54" name="Shape 52"/>
+          <p:cNvPr id="52" name="Shape 50"/>
           <p:cNvSpPr/>
           <p:nvPr/>
         </p:nvSpPr>
         <p:spPr>
           <a:xfrm>
             <a:off x="6870192" y="4169664"/>
-            <a:ext cx="685800" cy="384048"/>
+            <a:ext cx="685800" cy="475488"/>
           </a:xfrm>
           <a:prstGeom prst="rect">
             <a:avLst>
-              <a:gd name="adj" fmla="val 9524"/>
+              <a:gd name="adj" fmla="val 7692"/>
             </a:avLst>
           </a:prstGeom>
           <a:solidFill>
@@ -34906,14 +34594,14 @@
       </p:sp>
       <p:sp>
         <p:nvSpPr>
-          <p:cNvPr id="55" name="Text 53"/>
+          <p:cNvPr id="53" name="Text 51"/>
           <p:cNvSpPr/>
           <p:nvPr/>
         </p:nvSpPr>
         <p:spPr>
           <a:xfrm>
             <a:off x="6870192" y="4169664"/>
-            <a:ext cx="685800" cy="384048"/>
+            <a:ext cx="685800" cy="475488"/>
           </a:xfrm>
           <a:prstGeom prst="rect">
             <a:avLst/>
@@ -34945,18 +34633,18 @@
       </p:sp>
       <p:sp>
         <p:nvSpPr>
-          <p:cNvPr id="56" name="Shape 54"/>
+          <p:cNvPr id="54" name="Shape 52"/>
           <p:cNvSpPr/>
           <p:nvPr/>
         </p:nvSpPr>
         <p:spPr>
           <a:xfrm>
             <a:off x="7677912" y="4169664"/>
-            <a:ext cx="685800" cy="384048"/>
+            <a:ext cx="685800" cy="475488"/>
           </a:xfrm>
           <a:prstGeom prst="rect">
             <a:avLst>
-              <a:gd name="adj" fmla="val 9524"/>
+              <a:gd name="adj" fmla="val 7692"/>
             </a:avLst>
           </a:prstGeom>
           <a:solidFill>
@@ -34972,14 +34660,14 @@
       </p:sp>
       <p:sp>
         <p:nvSpPr>
-          <p:cNvPr id="57" name="Text 55"/>
+          <p:cNvPr id="55" name="Text 53"/>
           <p:cNvSpPr/>
           <p:nvPr/>
         </p:nvSpPr>
         <p:spPr>
           <a:xfrm>
             <a:off x="7677912" y="4169664"/>
-            <a:ext cx="685800" cy="384048"/>
+            <a:ext cx="685800" cy="475488"/>
           </a:xfrm>
           <a:prstGeom prst="rect">
             <a:avLst/>
@@ -39260,7 +38948,7 @@
                 <a:ea typeface="Calibri" pitchFamily="34" charset="-122"/>
                 <a:cs typeface="Calibri" pitchFamily="34" charset="-120"/>
               </a:rPr>
-              <a:t>1.  The root 'sign' comes from a Latin word meaning mark or symbol.</a:t>
+              <a:t>1.  The word 'signal' does not contain the root 'sign'.</a:t>
             </a:r>
             <a:endParaRPr lang="en-US" sz="1300" dirty="0"/>
           </a:p>
@@ -39283,11 +38971,11 @@
             </a:avLst>
           </a:prstGeom>
           <a:solidFill>
-            <a:srgbClr val="DCFCE7"/>
-          </a:solidFill>
-          <a:ln w="12700">
-            <a:solidFill>
-              <a:srgbClr val="16A34A"/>
+            <a:srgbClr val="FEE2E2"/>
+          </a:solidFill>
+          <a:ln w="12700">
+            <a:solidFill>
+              <a:srgbClr val="DC2626"/>
             </a:solidFill>
             <a:prstDash val="solid"/>
           </a:ln>
@@ -39320,13 +39008,13 @@
             <a:r>
               <a:rPr lang="en-US" sz="1100" b="1" dirty="0">
                 <a:solidFill>
-                  <a:srgbClr val="16A34A"/>
+                  <a:srgbClr val="DC2626"/>
                 </a:solidFill>
                 <a:latin typeface="Trebuchet MS" pitchFamily="34" charset="0"/>
                 <a:ea typeface="Trebuchet MS" pitchFamily="34" charset="-122"/>
                 <a:cs typeface="Trebuchet MS" pitchFamily="34" charset="-120"/>
               </a:rPr>
-              <a:t>TRUE</a:t>
+              <a:t>FALSE</a:t>
             </a:r>
             <a:endParaRPr lang="en-US" sz="1100" dirty="0"/>
           </a:p>
@@ -39399,7 +39087,7 @@
                 <a:ea typeface="Calibri" pitchFamily="34" charset="-122"/>
                 <a:cs typeface="Calibri" pitchFamily="34" charset="-120"/>
               </a:rPr>
-              <a:t>2.  The word 'signal' does not contain the root 'sign'.</a:t>
+              <a:t>2.  You can add the prefix 're' to 'sign' to make the word 'resign'.</a:t>
             </a:r>
             <a:endParaRPr lang="en-US" sz="1300" dirty="0"/>
           </a:p>
@@ -39422,11 +39110,11 @@
             </a:avLst>
           </a:prstGeom>
           <a:solidFill>
-            <a:srgbClr val="FEE2E2"/>
-          </a:solidFill>
-          <a:ln w="12700">
-            <a:solidFill>
-              <a:srgbClr val="DC2626"/>
+            <a:srgbClr val="DCFCE7"/>
+          </a:solidFill>
+          <a:ln w="12700">
+            <a:solidFill>
+              <a:srgbClr val="16A34A"/>
             </a:solidFill>
             <a:prstDash val="solid"/>
           </a:ln>
@@ -39459,13 +39147,13 @@
             <a:r>
               <a:rPr lang="en-US" sz="1100" b="1" dirty="0">
                 <a:solidFill>
-                  <a:srgbClr val="DC2626"/>
+                  <a:srgbClr val="16A34A"/>
                 </a:solidFill>
                 <a:latin typeface="Trebuchet MS" pitchFamily="34" charset="0"/>
                 <a:ea typeface="Trebuchet MS" pitchFamily="34" charset="-122"/>
                 <a:cs typeface="Trebuchet MS" pitchFamily="34" charset="-120"/>
               </a:rPr>
-              <a:t>FALSE</a:t>
+              <a:t>TRUE</a:t>
             </a:r>
             <a:endParaRPr lang="en-US" sz="1100" dirty="0"/>
           </a:p>
@@ -39538,7 +39226,7 @@
                 <a:ea typeface="Calibri" pitchFamily="34" charset="-122"/>
                 <a:cs typeface="Calibri" pitchFamily="34" charset="-120"/>
               </a:rPr>
-              <a:t>3.  You can add the prefix 're' to 'sign' to make the word 'resign'.</a:t>
+              <a:t>3.  The root 'sign' comes from a Latin word meaning mark or symbol.</a:t>
             </a:r>
             <a:endParaRPr lang="en-US" sz="1300" dirty="0"/>
           </a:p>
@@ -39677,7 +39365,7 @@
                 <a:ea typeface="Calibri" pitchFamily="34" charset="-122"/>
                 <a:cs typeface="Calibri" pitchFamily="34" charset="-120"/>
               </a:rPr>
-              <a:t>4.  A 'signature' is connected to the idea of making a personal mark.</a:t>
+              <a:t>4.  The root 'sign' originally came from a Greek word meaning to write.</a:t>
             </a:r>
             <a:endParaRPr lang="en-US" sz="1300" dirty="0"/>
           </a:p>
@@ -39700,11 +39388,11 @@
             </a:avLst>
           </a:prstGeom>
           <a:solidFill>
-            <a:srgbClr val="DCFCE7"/>
-          </a:solidFill>
-          <a:ln w="12700">
-            <a:solidFill>
-              <a:srgbClr val="16A34A"/>
+            <a:srgbClr val="FEE2E2"/>
+          </a:solidFill>
+          <a:ln w="12700">
+            <a:solidFill>
+              <a:srgbClr val="DC2626"/>
             </a:solidFill>
             <a:prstDash val="solid"/>
           </a:ln>
@@ -39737,13 +39425,13 @@
             <a:r>
               <a:rPr lang="en-US" sz="1100" b="1" dirty="0">
                 <a:solidFill>
-                  <a:srgbClr val="16A34A"/>
+                  <a:srgbClr val="DC2626"/>
                 </a:solidFill>
                 <a:latin typeface="Trebuchet MS" pitchFamily="34" charset="0"/>
                 <a:ea typeface="Trebuchet MS" pitchFamily="34" charset="-122"/>
                 <a:cs typeface="Trebuchet MS" pitchFamily="34" charset="-120"/>
               </a:rPr>
-              <a:t>TRUE</a:t>
+              <a:t>FALSE</a:t>
             </a:r>
             <a:endParaRPr lang="en-US" sz="1100" dirty="0"/>
           </a:p>
@@ -39816,7 +39504,7 @@
                 <a:ea typeface="Calibri" pitchFamily="34" charset="-122"/>
                 <a:cs typeface="Calibri" pitchFamily="34" charset="-120"/>
               </a:rPr>
-              <a:t>5.  The root 'sign' originally came from a Greek word meaning to write.</a:t>
+              <a:t>5.  A 'signature' is connected to the idea of making a personal mark.</a:t>
             </a:r>
             <a:endParaRPr lang="en-US" sz="1300" dirty="0"/>
           </a:p>
@@ -39839,11 +39527,11 @@
             </a:avLst>
           </a:prstGeom>
           <a:solidFill>
-            <a:srgbClr val="FEE2E2"/>
-          </a:solidFill>
-          <a:ln w="12700">
-            <a:solidFill>
-              <a:srgbClr val="DC2626"/>
+            <a:srgbClr val="DCFCE7"/>
+          </a:solidFill>
+          <a:ln w="12700">
+            <a:solidFill>
+              <a:srgbClr val="16A34A"/>
             </a:solidFill>
             <a:prstDash val="solid"/>
           </a:ln>
@@ -39876,13 +39564,13 @@
             <a:r>
               <a:rPr lang="en-US" sz="1100" b="1" dirty="0">
                 <a:solidFill>
-                  <a:srgbClr val="DC2626"/>
+                  <a:srgbClr val="16A34A"/>
                 </a:solidFill>
                 <a:latin typeface="Trebuchet MS" pitchFamily="34" charset="0"/>
                 <a:ea typeface="Trebuchet MS" pitchFamily="34" charset="-122"/>
                 <a:cs typeface="Trebuchet MS" pitchFamily="34" charset="-120"/>
               </a:rPr>
-              <a:t>FALSE</a:t>
+              <a:t>TRUE</a:t>
             </a:r>
             <a:endParaRPr lang="en-US" sz="1100" dirty="0"/>
           </a:p>

--- a/output/wordlabs-sign-3day.pptx
+++ b/output/wordlabs-sign-3day.pptx
@@ -4240,7 +4240,7 @@
                 <a:ea typeface="Calibri" pitchFamily="34" charset="-122"/>
                 <a:cs typeface="Calibri" pitchFamily="34" charset="-120"/>
               </a:rPr>
-              <a:t>"mark, symbol, or signal"</a:t>
+              <a:t>"mark; signal"</a:t>
             </a:r>
             <a:endParaRPr lang="en-US" sz="2200" dirty="0"/>
           </a:p>
@@ -4279,7 +4279,7 @@
                 <a:ea typeface="Calibri" pitchFamily="34" charset="-122"/>
                 <a:cs typeface="Calibri" pitchFamily="34" charset="-120"/>
               </a:rPr>
-              <a:t>Origin: Latin: signum</a:t>
+              <a:t>Origin: Latin root</a:t>
             </a:r>
             <a:endParaRPr lang="en-US" sz="1300" dirty="0"/>
           </a:p>
@@ -5288,7 +5288,7 @@
                 <a:ea typeface="Calibri" pitchFamily="34" charset="-122"/>
                 <a:cs typeface="Calibri" pitchFamily="34" charset="-120"/>
               </a:rPr>
-              <a:t>Word Labs  •  wordlabs.app  •  Root: 'sign' = mark, symbol, or signal</a:t>
+              <a:t>Word Labs  •  wordlabs.app  •  Root: 'sign' = mark; signal</a:t>
             </a:r>
             <a:endParaRPr lang="en-US" sz="800" dirty="0"/>
           </a:p>
@@ -5928,7 +5928,7 @@
                 <a:ea typeface="Calibri" pitchFamily="34" charset="-122"/>
                 <a:cs typeface="Calibri" pitchFamily="34" charset="-120"/>
               </a:rPr>
-              <a:t>Word Labs  •  wordlabs.app  •  Root: 'sign' = mark, symbol, or signal</a:t>
+              <a:t>Word Labs  •  wordlabs.app  •  Root: 'sign' = mark; signal</a:t>
             </a:r>
             <a:endParaRPr lang="en-US" sz="800" dirty="0"/>
           </a:p>
@@ -6040,7 +6040,7 @@
                 <a:ea typeface="Calibri" pitchFamily="34" charset="-122"/>
                 <a:cs typeface="Calibri" pitchFamily="34" charset="-120"/>
               </a:rPr>
-              <a:t>The </a:t>
+              <a:t>A nod can </a:t>
             </a:r>
             <a:pPr algn="l" indent="0" marL="0">
               <a:buNone/>
@@ -6057,7 +6057,7 @@
                 <a:ea typeface="Calibri" pitchFamily="34" charset="-122"/>
                 <a:cs typeface="Calibri" pitchFamily="34" charset="-120"/>
               </a:rPr>
-              <a:t>designer</a:t>
+              <a:t>signify</a:t>
             </a:r>
             <a:pPr algn="l" indent="0" marL="0">
               <a:buNone/>
@@ -6071,7 +6071,7 @@
                 <a:ea typeface="Calibri" pitchFamily="34" charset="-122"/>
                 <a:cs typeface="Calibri" pitchFamily="34" charset="-120"/>
               </a:rPr>
-              <a:t> created a </a:t>
+              <a:t> agreement without saying a word. A red traffic light </a:t>
             </a:r>
             <a:pPr algn="l" indent="0" marL="0">
               <a:buNone/>
@@ -6088,7 +6088,7 @@
                 <a:ea typeface="Calibri" pitchFamily="34" charset="-122"/>
                 <a:cs typeface="Calibri" pitchFamily="34" charset="-120"/>
               </a:rPr>
-              <a:t>significant</a:t>
+              <a:t>signifies</a:t>
             </a:r>
             <a:pPr algn="l" indent="0" marL="0">
               <a:buNone/>
@@ -6102,7 +6102,7 @@
                 <a:ea typeface="Calibri" pitchFamily="34" charset="-122"/>
                 <a:cs typeface="Calibri" pitchFamily="34" charset="-120"/>
               </a:rPr>
-              <a:t> new logo for the school.</a:t>
+              <a:t> that drivers must stop.</a:t>
             </a:r>
             <a:endParaRPr lang="en-US" sz="1800" dirty="0"/>
           </a:p>
@@ -6257,7 +6257,7 @@
                 <a:ea typeface="Trebuchet MS" pitchFamily="34" charset="-122"/>
                 <a:cs typeface="Trebuchet MS" pitchFamily="34" charset="-120"/>
               </a:rPr>
-              <a:t>designer</a:t>
+              <a:t>signify</a:t>
             </a:r>
             <a:endParaRPr lang="en-US" sz="1400" dirty="0"/>
           </a:p>
@@ -6385,7 +6385,7 @@
                 <a:ea typeface="Trebuchet MS" pitchFamily="34" charset="-122"/>
                 <a:cs typeface="Trebuchet MS" pitchFamily="34" charset="-120"/>
               </a:rPr>
-              <a:t>significant</a:t>
+              <a:t>signifies</a:t>
             </a:r>
             <a:endParaRPr lang="en-US" sz="1400" dirty="0"/>
           </a:p>
@@ -6716,7 +6716,7 @@
                 <a:ea typeface="Calibri" pitchFamily="34" charset="-122"/>
                 <a:cs typeface="Calibri" pitchFamily="34" charset="-120"/>
               </a:rPr>
-              <a:t>Word Labs  •  wordlabs.app  •  Root: 'sign' = mark, symbol, or signal</a:t>
+              <a:t>Word Labs  •  wordlabs.app  •  Root: 'sign' = mark; signal</a:t>
             </a:r>
             <a:endParaRPr lang="en-US" sz="800" dirty="0"/>
           </a:p>
@@ -6855,7 +6855,7 @@
                 <a:ea typeface="Trebuchet MS" pitchFamily="34" charset="-122"/>
                 <a:cs typeface="Trebuchet MS" pitchFamily="34" charset="-120"/>
               </a:rPr>
-              <a:t>designer</a:t>
+              <a:t>signify</a:t>
             </a:r>
             <a:endParaRPr lang="en-US" sz="2800" dirty="0"/>
           </a:p>
@@ -7543,7 +7543,7 @@
                 <a:ea typeface="Calibri" pitchFamily="34" charset="-122"/>
                 <a:cs typeface="Calibri" pitchFamily="34" charset="-120"/>
               </a:rPr>
-              <a:t>Word Labs  •  wordlabs.app  •  Root: 'sign' = mark, symbol, or signal</a:t>
+              <a:t>Word Labs  •  wordlabs.app  •  Root: 'sign' = mark; signal</a:t>
             </a:r>
             <a:endParaRPr lang="en-US" sz="800" dirty="0"/>
           </a:p>
@@ -7682,7 +7682,7 @@
                 <a:ea typeface="Trebuchet MS" pitchFamily="34" charset="-122"/>
                 <a:cs typeface="Trebuchet MS" pitchFamily="34" charset="-120"/>
               </a:rPr>
-              <a:t>designer</a:t>
+              <a:t>signify</a:t>
             </a:r>
             <a:endParaRPr lang="en-US" sz="2800" dirty="0"/>
           </a:p>
@@ -7771,11 +7771,11 @@
             </a:avLst>
           </a:prstGeom>
           <a:solidFill>
-            <a:srgbClr val="DDD6FE"/>
+            <a:srgbClr val="CCFBF1"/>
           </a:solidFill>
           <a:ln w="19050">
             <a:solidFill>
-              <a:srgbClr val="7C3AED"/>
+              <a:srgbClr val="0D9488"/>
             </a:solidFill>
             <a:prstDash val="solid"/>
           </a:ln>
@@ -7815,13 +7815,13 @@
             <a:r>
               <a:rPr lang="en-US" sz="1300" b="1" dirty="0">
                 <a:solidFill>
-                  <a:srgbClr val="4C1D95"/>
+                  <a:srgbClr val="0F766E"/>
                 </a:solidFill>
                 <a:latin typeface="Trebuchet MS" pitchFamily="34" charset="0"/>
                 <a:ea typeface="Trebuchet MS" pitchFamily="34" charset="-122"/>
                 <a:cs typeface="Trebuchet MS" pitchFamily="34" charset="-120"/>
               </a:rPr>
-              <a:t>de</a:t>
+              <a:t>sign</a:t>
             </a:r>
             <a:endParaRPr lang="en-US" sz="1300" dirty="0"/>
           </a:p>
@@ -7860,7 +7860,7 @@
                 <a:ea typeface="Calibri" pitchFamily="34" charset="-122"/>
                 <a:cs typeface="Calibri" pitchFamily="34" charset="-120"/>
               </a:rPr>
-              <a:t>down, away, or completely</a:t>
+              <a:t>mark; signal</a:t>
             </a:r>
             <a:endParaRPr lang="en-US" sz="850" dirty="0"/>
           </a:p>
@@ -7883,11 +7883,11 @@
             </a:avLst>
           </a:prstGeom>
           <a:solidFill>
-            <a:srgbClr val="CCFBF1"/>
+            <a:srgbClr val="FCE7F3"/>
           </a:solidFill>
           <a:ln w="19050">
             <a:solidFill>
-              <a:srgbClr val="0D9488"/>
+              <a:srgbClr val="DB2777"/>
             </a:solidFill>
             <a:prstDash val="solid"/>
           </a:ln>
@@ -7927,13 +7927,13 @@
             <a:r>
               <a:rPr lang="en-US" sz="1300" b="1" dirty="0">
                 <a:solidFill>
-                  <a:srgbClr val="0F766E"/>
+                  <a:srgbClr val="9D174D"/>
                 </a:solidFill>
                 <a:latin typeface="Trebuchet MS" pitchFamily="34" charset="0"/>
                 <a:ea typeface="Trebuchet MS" pitchFamily="34" charset="-122"/>
                 <a:cs typeface="Trebuchet MS" pitchFamily="34" charset="-120"/>
               </a:rPr>
-              <a:t>sign</a:t>
+              <a:t>y</a:t>
             </a:r>
             <a:endParaRPr lang="en-US" sz="1300" dirty="0"/>
           </a:p>
@@ -7972,7 +7972,7 @@
                 <a:ea typeface="Calibri" pitchFamily="34" charset="-122"/>
                 <a:cs typeface="Calibri" pitchFamily="34" charset="-120"/>
               </a:rPr>
-              <a:t>mark or symbol</a:t>
+              <a:t>characterised by</a:t>
             </a:r>
             <a:endParaRPr lang="en-US" sz="850" dirty="0"/>
           </a:p>
@@ -8045,7 +8045,7 @@
                 <a:ea typeface="Trebuchet MS" pitchFamily="34" charset="-122"/>
                 <a:cs typeface="Trebuchet MS" pitchFamily="34" charset="-120"/>
               </a:rPr>
-              <a:t>er</a:t>
+              <a:t>fy</a:t>
             </a:r>
             <a:endParaRPr lang="en-US" sz="1300" dirty="0"/>
           </a:p>
@@ -8084,7 +8084,7 @@
                 <a:ea typeface="Calibri" pitchFamily="34" charset="-122"/>
                 <a:cs typeface="Calibri" pitchFamily="34" charset="-120"/>
               </a:rPr>
-              <a:t>a person who does something</a:t>
+              <a:t>make</a:t>
             </a:r>
             <a:endParaRPr lang="en-US" sz="850" dirty="0"/>
           </a:p>
@@ -8640,7 +8640,7 @@
                 <a:ea typeface="Calibri" pitchFamily="34" charset="-122"/>
                 <a:cs typeface="Calibri" pitchFamily="34" charset="-120"/>
               </a:rPr>
-              <a:t>Word Labs  •  wordlabs.app  •  Root: 'sign' = mark, symbol, or signal</a:t>
+              <a:t>Word Labs  •  wordlabs.app  •  Root: 'sign' = mark; signal</a:t>
             </a:r>
             <a:endParaRPr lang="en-US" sz="800" dirty="0"/>
           </a:p>
@@ -8779,7 +8779,7 @@
                 <a:ea typeface="Trebuchet MS" pitchFamily="34" charset="-122"/>
                 <a:cs typeface="Trebuchet MS" pitchFamily="34" charset="-120"/>
               </a:rPr>
-              <a:t>designer</a:t>
+              <a:t>signify</a:t>
             </a:r>
             <a:endParaRPr lang="en-US" sz="2800" dirty="0"/>
           </a:p>
@@ -8868,11 +8868,11 @@
             </a:avLst>
           </a:prstGeom>
           <a:solidFill>
-            <a:srgbClr val="DDD6FE"/>
+            <a:srgbClr val="CCFBF1"/>
           </a:solidFill>
           <a:ln w="19050">
             <a:solidFill>
-              <a:srgbClr val="7C3AED"/>
+              <a:srgbClr val="0D9488"/>
             </a:solidFill>
             <a:prstDash val="solid"/>
           </a:ln>
@@ -8912,13 +8912,13 @@
             <a:r>
               <a:rPr lang="en-US" sz="1300" b="1" dirty="0">
                 <a:solidFill>
-                  <a:srgbClr val="4C1D95"/>
+                  <a:srgbClr val="0F766E"/>
                 </a:solidFill>
                 <a:latin typeface="Trebuchet MS" pitchFamily="34" charset="0"/>
                 <a:ea typeface="Trebuchet MS" pitchFamily="34" charset="-122"/>
                 <a:cs typeface="Trebuchet MS" pitchFamily="34" charset="-120"/>
               </a:rPr>
-              <a:t>de</a:t>
+              <a:t>sign</a:t>
             </a:r>
             <a:endParaRPr lang="en-US" sz="1300" dirty="0"/>
           </a:p>
@@ -8957,7 +8957,7 @@
                 <a:ea typeface="Calibri" pitchFamily="34" charset="-122"/>
                 <a:cs typeface="Calibri" pitchFamily="34" charset="-120"/>
               </a:rPr>
-              <a:t>down, away, or completely</a:t>
+              <a:t>mark; signal</a:t>
             </a:r>
             <a:endParaRPr lang="en-US" sz="850" dirty="0"/>
           </a:p>
@@ -8980,11 +8980,11 @@
             </a:avLst>
           </a:prstGeom>
           <a:solidFill>
-            <a:srgbClr val="CCFBF1"/>
+            <a:srgbClr val="FCE7F3"/>
           </a:solidFill>
           <a:ln w="19050">
             <a:solidFill>
-              <a:srgbClr val="0D9488"/>
+              <a:srgbClr val="DB2777"/>
             </a:solidFill>
             <a:prstDash val="solid"/>
           </a:ln>
@@ -9024,13 +9024,13 @@
             <a:r>
               <a:rPr lang="en-US" sz="1300" b="1" dirty="0">
                 <a:solidFill>
-                  <a:srgbClr val="0F766E"/>
+                  <a:srgbClr val="9D174D"/>
                 </a:solidFill>
                 <a:latin typeface="Trebuchet MS" pitchFamily="34" charset="0"/>
                 <a:ea typeface="Trebuchet MS" pitchFamily="34" charset="-122"/>
                 <a:cs typeface="Trebuchet MS" pitchFamily="34" charset="-120"/>
               </a:rPr>
-              <a:t>sign</a:t>
+              <a:t>y</a:t>
             </a:r>
             <a:endParaRPr lang="en-US" sz="1300" dirty="0"/>
           </a:p>
@@ -9069,7 +9069,7 @@
                 <a:ea typeface="Calibri" pitchFamily="34" charset="-122"/>
                 <a:cs typeface="Calibri" pitchFamily="34" charset="-120"/>
               </a:rPr>
-              <a:t>mark or symbol</a:t>
+              <a:t>characterised by</a:t>
             </a:r>
             <a:endParaRPr lang="en-US" sz="850" dirty="0"/>
           </a:p>
@@ -9142,7 +9142,7 @@
                 <a:ea typeface="Trebuchet MS" pitchFamily="34" charset="-122"/>
                 <a:cs typeface="Trebuchet MS" pitchFamily="34" charset="-120"/>
               </a:rPr>
-              <a:t>er</a:t>
+              <a:t>fy</a:t>
             </a:r>
             <a:endParaRPr lang="en-US" sz="1300" dirty="0"/>
           </a:p>
@@ -9181,7 +9181,7 @@
                 <a:ea typeface="Calibri" pitchFamily="34" charset="-122"/>
                 <a:cs typeface="Calibri" pitchFamily="34" charset="-120"/>
               </a:rPr>
-              <a:t>a person who does something</a:t>
+              <a:t>make</a:t>
             </a:r>
             <a:endParaRPr lang="en-US" sz="850" dirty="0"/>
           </a:p>
@@ -9340,7 +9340,7 @@
                 <a:ea typeface="Trebuchet MS" pitchFamily="34" charset="-122"/>
                 <a:cs typeface="Trebuchet MS" pitchFamily="34" charset="-120"/>
               </a:rPr>
-              <a:t>de</a:t>
+              <a:t>sig</a:t>
             </a:r>
             <a:endParaRPr lang="en-US" sz="1400" dirty="0"/>
           </a:p>
@@ -9445,7 +9445,7 @@
                 <a:ea typeface="Trebuchet MS" pitchFamily="34" charset="-122"/>
                 <a:cs typeface="Trebuchet MS" pitchFamily="34" charset="-120"/>
               </a:rPr>
-              <a:t>sign</a:t>
+              <a:t>ni</a:t>
             </a:r>
             <a:endParaRPr lang="en-US" sz="1400" dirty="0"/>
           </a:p>
@@ -9550,7 +9550,7 @@
                 <a:ea typeface="Trebuchet MS" pitchFamily="34" charset="-122"/>
                 <a:cs typeface="Trebuchet MS" pitchFamily="34" charset="-120"/>
               </a:rPr>
-              <a:t>er</a:t>
+              <a:t>fy</a:t>
             </a:r>
             <a:endParaRPr lang="en-US" sz="1400" dirty="0"/>
           </a:p>
@@ -9974,7 +9974,7 @@
                 <a:ea typeface="Calibri" pitchFamily="34" charset="-122"/>
                 <a:cs typeface="Calibri" pitchFamily="34" charset="-120"/>
               </a:rPr>
-              <a:t>Word Labs  •  wordlabs.app  •  Root: 'sign' = mark, symbol, or signal</a:t>
+              <a:t>Word Labs  •  wordlabs.app  •  Root: 'sign' = mark; signal</a:t>
             </a:r>
             <a:endParaRPr lang="en-US" sz="800" dirty="0"/>
           </a:p>
@@ -10113,7 +10113,7 @@
                 <a:ea typeface="Trebuchet MS" pitchFamily="34" charset="-122"/>
                 <a:cs typeface="Trebuchet MS" pitchFamily="34" charset="-120"/>
               </a:rPr>
-              <a:t>designer</a:t>
+              <a:t>signify</a:t>
             </a:r>
             <a:endParaRPr lang="en-US" sz="2800" dirty="0"/>
           </a:p>
@@ -10202,11 +10202,11 @@
             </a:avLst>
           </a:prstGeom>
           <a:solidFill>
-            <a:srgbClr val="DDD6FE"/>
+            <a:srgbClr val="CCFBF1"/>
           </a:solidFill>
           <a:ln w="19050">
             <a:solidFill>
-              <a:srgbClr val="7C3AED"/>
+              <a:srgbClr val="0D9488"/>
             </a:solidFill>
             <a:prstDash val="solid"/>
           </a:ln>
@@ -10246,13 +10246,13 @@
             <a:r>
               <a:rPr lang="en-US" sz="1300" b="1" dirty="0">
                 <a:solidFill>
-                  <a:srgbClr val="4C1D95"/>
+                  <a:srgbClr val="0F766E"/>
                 </a:solidFill>
                 <a:latin typeface="Trebuchet MS" pitchFamily="34" charset="0"/>
                 <a:ea typeface="Trebuchet MS" pitchFamily="34" charset="-122"/>
                 <a:cs typeface="Trebuchet MS" pitchFamily="34" charset="-120"/>
               </a:rPr>
-              <a:t>de</a:t>
+              <a:t>sign</a:t>
             </a:r>
             <a:endParaRPr lang="en-US" sz="1300" dirty="0"/>
           </a:p>
@@ -10291,7 +10291,7 @@
                 <a:ea typeface="Calibri" pitchFamily="34" charset="-122"/>
                 <a:cs typeface="Calibri" pitchFamily="34" charset="-120"/>
               </a:rPr>
-              <a:t>down, away, or completely</a:t>
+              <a:t>mark; signal</a:t>
             </a:r>
             <a:endParaRPr lang="en-US" sz="850" dirty="0"/>
           </a:p>
@@ -10314,11 +10314,11 @@
             </a:avLst>
           </a:prstGeom>
           <a:solidFill>
-            <a:srgbClr val="CCFBF1"/>
+            <a:srgbClr val="FCE7F3"/>
           </a:solidFill>
           <a:ln w="19050">
             <a:solidFill>
-              <a:srgbClr val="0D9488"/>
+              <a:srgbClr val="DB2777"/>
             </a:solidFill>
             <a:prstDash val="solid"/>
           </a:ln>
@@ -10358,13 +10358,13 @@
             <a:r>
               <a:rPr lang="en-US" sz="1300" b="1" dirty="0">
                 <a:solidFill>
-                  <a:srgbClr val="0F766E"/>
+                  <a:srgbClr val="9D174D"/>
                 </a:solidFill>
                 <a:latin typeface="Trebuchet MS" pitchFamily="34" charset="0"/>
                 <a:ea typeface="Trebuchet MS" pitchFamily="34" charset="-122"/>
                 <a:cs typeface="Trebuchet MS" pitchFamily="34" charset="-120"/>
               </a:rPr>
-              <a:t>sign</a:t>
+              <a:t>y</a:t>
             </a:r>
             <a:endParaRPr lang="en-US" sz="1300" dirty="0"/>
           </a:p>
@@ -10403,7 +10403,7 @@
                 <a:ea typeface="Calibri" pitchFamily="34" charset="-122"/>
                 <a:cs typeface="Calibri" pitchFamily="34" charset="-120"/>
               </a:rPr>
-              <a:t>mark or symbol</a:t>
+              <a:t>characterised by</a:t>
             </a:r>
             <a:endParaRPr lang="en-US" sz="850" dirty="0"/>
           </a:p>
@@ -10476,7 +10476,7 @@
                 <a:ea typeface="Trebuchet MS" pitchFamily="34" charset="-122"/>
                 <a:cs typeface="Trebuchet MS" pitchFamily="34" charset="-120"/>
               </a:rPr>
-              <a:t>er</a:t>
+              <a:t>fy</a:t>
             </a:r>
             <a:endParaRPr lang="en-US" sz="1300" dirty="0"/>
           </a:p>
@@ -10515,7 +10515,7 @@
                 <a:ea typeface="Calibri" pitchFamily="34" charset="-122"/>
                 <a:cs typeface="Calibri" pitchFamily="34" charset="-120"/>
               </a:rPr>
-              <a:t>a person who does something</a:t>
+              <a:t>make</a:t>
             </a:r>
             <a:endParaRPr lang="en-US" sz="850" dirty="0"/>
           </a:p>
@@ -10674,7 +10674,7 @@
                 <a:ea typeface="Trebuchet MS" pitchFamily="34" charset="-122"/>
                 <a:cs typeface="Trebuchet MS" pitchFamily="34" charset="-120"/>
               </a:rPr>
-              <a:t>de</a:t>
+              <a:t>sig</a:t>
             </a:r>
             <a:endParaRPr lang="en-US" sz="1400" dirty="0"/>
           </a:p>
@@ -10779,7 +10779,7 @@
                 <a:ea typeface="Trebuchet MS" pitchFamily="34" charset="-122"/>
                 <a:cs typeface="Trebuchet MS" pitchFamily="34" charset="-120"/>
               </a:rPr>
-              <a:t>sign</a:t>
+              <a:t>ni</a:t>
             </a:r>
             <a:endParaRPr lang="en-US" sz="1400" dirty="0"/>
           </a:p>
@@ -10884,7 +10884,7 @@
                 <a:ea typeface="Trebuchet MS" pitchFamily="34" charset="-122"/>
                 <a:cs typeface="Trebuchet MS" pitchFamily="34" charset="-120"/>
               </a:rPr>
-              <a:t>er</a:t>
+              <a:t>fy</a:t>
             </a:r>
             <a:endParaRPr lang="en-US" sz="1400" dirty="0"/>
           </a:p>
@@ -10991,7 +10991,7 @@
         </p:nvSpPr>
         <p:spPr>
           <a:xfrm>
-            <a:off x="2254649" y="4169664"/>
+            <a:off x="2124837" y="4169664"/>
             <a:ext cx="685800" cy="475488"/>
           </a:xfrm>
           <a:prstGeom prst="rect">
@@ -11018,7 +11018,7 @@
         </p:nvSpPr>
         <p:spPr>
           <a:xfrm>
-            <a:off x="2254649" y="4169664"/>
+            <a:off x="2124837" y="4169664"/>
             <a:ext cx="685800" cy="475488"/>
           </a:xfrm>
           <a:prstGeom prst="rect">
@@ -11043,7 +11043,7 @@
                 <a:ea typeface="Trebuchet MS" pitchFamily="34" charset="-122"/>
                 <a:cs typeface="Trebuchet MS" pitchFamily="34" charset="-120"/>
               </a:rPr>
-              <a:t>d</a:t>
+              <a:t>s</a:t>
             </a:r>
             <a:endParaRPr lang="en-US" sz="900" dirty="0"/>
           </a:p>
@@ -11057,7 +11057,7 @@
         </p:nvSpPr>
         <p:spPr>
           <a:xfrm>
-            <a:off x="3293146" y="4169664"/>
+            <a:off x="3033522" y="4169664"/>
             <a:ext cx="685800" cy="475488"/>
           </a:xfrm>
           <a:prstGeom prst="rect">
@@ -11084,7 +11084,7 @@
         </p:nvSpPr>
         <p:spPr>
           <a:xfrm>
-            <a:off x="3293146" y="4169664"/>
+            <a:off x="3033522" y="4169664"/>
             <a:ext cx="685800" cy="475488"/>
           </a:xfrm>
           <a:prstGeom prst="rect">
@@ -11109,7 +11109,7 @@
                 <a:ea typeface="Trebuchet MS" pitchFamily="34" charset="-122"/>
                 <a:cs typeface="Trebuchet MS" pitchFamily="34" charset="-120"/>
               </a:rPr>
-              <a:t>e</a:t>
+              <a:t>i</a:t>
             </a:r>
             <a:endParaRPr lang="en-US" sz="900" dirty="0"/>
           </a:p>
@@ -11123,7 +11123,7 @@
         </p:nvSpPr>
         <p:spPr>
           <a:xfrm>
-            <a:off x="4331643" y="4169664"/>
+            <a:off x="3942207" y="4169664"/>
             <a:ext cx="685800" cy="475488"/>
           </a:xfrm>
           <a:prstGeom prst="rect">
@@ -11150,7 +11150,7 @@
         </p:nvSpPr>
         <p:spPr>
           <a:xfrm>
-            <a:off x="4331643" y="4169664"/>
+            <a:off x="3942207" y="4169664"/>
             <a:ext cx="685800" cy="475488"/>
           </a:xfrm>
           <a:prstGeom prst="rect">
@@ -11175,7 +11175,7 @@
                 <a:ea typeface="Trebuchet MS" pitchFamily="34" charset="-122"/>
                 <a:cs typeface="Trebuchet MS" pitchFamily="34" charset="-120"/>
               </a:rPr>
-              <a:t>s</a:t>
+              <a:t>g</a:t>
             </a:r>
             <a:endParaRPr lang="en-US" sz="900" dirty="0"/>
           </a:p>
@@ -11189,7 +11189,7 @@
         </p:nvSpPr>
         <p:spPr>
           <a:xfrm>
-            <a:off x="5370141" y="4169664"/>
+            <a:off x="4850892" y="4169664"/>
             <a:ext cx="685800" cy="475488"/>
           </a:xfrm>
           <a:prstGeom prst="rect">
@@ -11216,7 +11216,7 @@
         </p:nvSpPr>
         <p:spPr>
           <a:xfrm>
-            <a:off x="5370141" y="4169664"/>
+            <a:off x="4850892" y="4169664"/>
             <a:ext cx="685800" cy="475488"/>
           </a:xfrm>
           <a:prstGeom prst="rect">
@@ -11241,7 +11241,7 @@
                 <a:ea typeface="Trebuchet MS" pitchFamily="34" charset="-122"/>
                 <a:cs typeface="Trebuchet MS" pitchFamily="34" charset="-120"/>
               </a:rPr>
-              <a:t>i</a:t>
+              <a:t>n</a:t>
             </a:r>
             <a:endParaRPr lang="en-US" sz="900" dirty="0"/>
           </a:p>
@@ -11255,7 +11255,7 @@
         </p:nvSpPr>
         <p:spPr>
           <a:xfrm>
-            <a:off x="6408638" y="4169664"/>
+            <a:off x="5759577" y="4169664"/>
             <a:ext cx="685800" cy="475488"/>
           </a:xfrm>
           <a:prstGeom prst="rect">
@@ -11282,7 +11282,7 @@
         </p:nvSpPr>
         <p:spPr>
           <a:xfrm>
-            <a:off x="6408638" y="4169664"/>
+            <a:off x="5759577" y="4169664"/>
             <a:ext cx="685800" cy="475488"/>
           </a:xfrm>
           <a:prstGeom prst="rect">
@@ -11307,7 +11307,7 @@
                 <a:ea typeface="Trebuchet MS" pitchFamily="34" charset="-122"/>
                 <a:cs typeface="Trebuchet MS" pitchFamily="34" charset="-120"/>
               </a:rPr>
-              <a:t>gn</a:t>
+              <a:t>i</a:t>
             </a:r>
             <a:endParaRPr lang="en-US" sz="900" dirty="0"/>
           </a:p>
@@ -11321,7 +11321,7 @@
         </p:nvSpPr>
         <p:spPr>
           <a:xfrm>
-            <a:off x="7447135" y="4169664"/>
+            <a:off x="6668262" y="4169664"/>
             <a:ext cx="685800" cy="475488"/>
           </a:xfrm>
           <a:prstGeom prst="rect">
@@ -11348,7 +11348,7 @@
         </p:nvSpPr>
         <p:spPr>
           <a:xfrm>
-            <a:off x="7447135" y="4169664"/>
+            <a:off x="6668262" y="4169664"/>
             <a:ext cx="685800" cy="475488"/>
           </a:xfrm>
           <a:prstGeom prst="rect">
@@ -11373,7 +11373,73 @@
                 <a:ea typeface="Trebuchet MS" pitchFamily="34" charset="-122"/>
                 <a:cs typeface="Trebuchet MS" pitchFamily="34" charset="-120"/>
               </a:rPr>
-              <a:t>er</a:t>
+              <a:t>f</a:t>
+            </a:r>
+            <a:endParaRPr lang="en-US" sz="900" dirty="0"/>
+          </a:p>
+        </p:txBody>
+      </p:sp>
+      <p:sp>
+        <p:nvSpPr>
+          <p:cNvPr id="51" name="Shape 49"/>
+          <p:cNvSpPr/>
+          <p:nvPr/>
+        </p:nvSpPr>
+        <p:spPr>
+          <a:xfrm>
+            <a:off x="7576947" y="4169664"/>
+            <a:ext cx="685800" cy="475488"/>
+          </a:xfrm>
+          <a:prstGeom prst="rect">
+            <a:avLst>
+              <a:gd name="adj" fmla="val 7692"/>
+            </a:avLst>
+          </a:prstGeom>
+          <a:solidFill>
+            <a:srgbClr val="FFFFFF"/>
+          </a:solidFill>
+          <a:ln w="12700">
+            <a:solidFill>
+              <a:srgbClr val="DB2777"/>
+            </a:solidFill>
+            <a:prstDash val="solid"/>
+          </a:ln>
+        </p:spPr>
+      </p:sp>
+      <p:sp>
+        <p:nvSpPr>
+          <p:cNvPr id="52" name="Text 50"/>
+          <p:cNvSpPr/>
+          <p:nvPr/>
+        </p:nvSpPr>
+        <p:spPr>
+          <a:xfrm>
+            <a:off x="7576947" y="4169664"/>
+            <a:ext cx="685800" cy="475488"/>
+          </a:xfrm>
+          <a:prstGeom prst="rect">
+            <a:avLst/>
+          </a:prstGeom>
+          <a:noFill/>
+          <a:ln/>
+        </p:spPr>
+        <p:txBody>
+          <a:bodyPr wrap="square" lIns="0" tIns="0" rIns="0" bIns="0" rtlCol="0" anchor="ctr"/>
+          <a:lstStyle/>
+          <a:p>
+            <a:pPr algn="ctr" indent="0" marL="0">
+              <a:buNone/>
+            </a:pPr>
+            <a:r>
+              <a:rPr lang="en-US" sz="900" b="1" dirty="0">
+                <a:solidFill>
+                  <a:srgbClr val="9D174D"/>
+                </a:solidFill>
+                <a:latin typeface="Trebuchet MS" pitchFamily="34" charset="0"/>
+                <a:ea typeface="Trebuchet MS" pitchFamily="34" charset="-122"/>
+                <a:cs typeface="Trebuchet MS" pitchFamily="34" charset="-120"/>
+              </a:rPr>
+              <a:t>y</a:t>
             </a:r>
             <a:endParaRPr lang="en-US" sz="900" dirty="0"/>
           </a:p>
@@ -11665,7 +11731,7 @@
                 <a:ea typeface="Calibri" pitchFamily="34" charset="-122"/>
                 <a:cs typeface="Calibri" pitchFamily="34" charset="-120"/>
               </a:rPr>
-              <a:t>Word Labs  •  wordlabs.app  •  Root: 'sign' = mark, symbol, or signal</a:t>
+              <a:t>Word Labs  •  wordlabs.app  •  Root: 'sign' = mark; signal</a:t>
             </a:r>
             <a:endParaRPr lang="en-US" sz="800" dirty="0"/>
           </a:p>
@@ -11804,7 +11870,7 @@
                 <a:ea typeface="Trebuchet MS" pitchFamily="34" charset="-122"/>
                 <a:cs typeface="Trebuchet MS" pitchFamily="34" charset="-120"/>
               </a:rPr>
-              <a:t>significant</a:t>
+              <a:t>signifies</a:t>
             </a:r>
             <a:endParaRPr lang="en-US" sz="2800" dirty="0"/>
           </a:p>
@@ -12492,7 +12558,7 @@
                 <a:ea typeface="Calibri" pitchFamily="34" charset="-122"/>
                 <a:cs typeface="Calibri" pitchFamily="34" charset="-120"/>
               </a:rPr>
-              <a:t>Word Labs  •  wordlabs.app  •  Root: 'sign' = mark, symbol, or signal</a:t>
+              <a:t>Word Labs  •  wordlabs.app  •  Root: 'sign' = mark; signal</a:t>
             </a:r>
             <a:endParaRPr lang="en-US" sz="800" dirty="0"/>
           </a:p>
@@ -12631,7 +12697,7 @@
                 <a:ea typeface="Trebuchet MS" pitchFamily="34" charset="-122"/>
                 <a:cs typeface="Trebuchet MS" pitchFamily="34" charset="-120"/>
               </a:rPr>
-              <a:t>significant</a:t>
+              <a:t>signifies</a:t>
             </a:r>
             <a:endParaRPr lang="en-US" sz="2800" dirty="0"/>
           </a:p>
@@ -12809,7 +12875,7 @@
                 <a:ea typeface="Calibri" pitchFamily="34" charset="-122"/>
                 <a:cs typeface="Calibri" pitchFamily="34" charset="-120"/>
               </a:rPr>
-              <a:t>mark or symbol</a:t>
+              <a:t>mark; signal</a:t>
             </a:r>
             <a:endParaRPr lang="en-US" sz="850" dirty="0"/>
           </a:p>
@@ -12882,7 +12948,7 @@
                 <a:ea typeface="Trebuchet MS" pitchFamily="34" charset="-122"/>
                 <a:cs typeface="Trebuchet MS" pitchFamily="34" charset="-120"/>
               </a:rPr>
-              <a:t>ific</a:t>
+              <a:t>ify</a:t>
             </a:r>
             <a:endParaRPr lang="en-US" sz="1300" dirty="0"/>
           </a:p>
@@ -12921,7 +12987,7 @@
                 <a:ea typeface="Calibri" pitchFamily="34" charset="-122"/>
                 <a:cs typeface="Calibri" pitchFamily="34" charset="-120"/>
               </a:rPr>
-              <a:t>making or causing</a:t>
+              <a:t>make</a:t>
             </a:r>
             <a:endParaRPr lang="en-US" sz="850" dirty="0"/>
           </a:p>
@@ -12994,7 +13060,7 @@
                 <a:ea typeface="Trebuchet MS" pitchFamily="34" charset="-122"/>
                 <a:cs typeface="Trebuchet MS" pitchFamily="34" charset="-120"/>
               </a:rPr>
-              <a:t>ant</a:t>
+              <a:t>es</a:t>
             </a:r>
             <a:endParaRPr lang="en-US" sz="1300" dirty="0"/>
           </a:p>
@@ -13033,7 +13099,7 @@
                 <a:ea typeface="Calibri" pitchFamily="34" charset="-122"/>
                 <a:cs typeface="Calibri" pitchFamily="34" charset="-120"/>
               </a:rPr>
-              <a:t>being or having a quality</a:t>
+              <a:t>plural or present tense</a:t>
             </a:r>
             <a:endParaRPr lang="en-US" sz="850" dirty="0"/>
           </a:p>
@@ -13589,7 +13655,7 @@
                 <a:ea typeface="Calibri" pitchFamily="34" charset="-122"/>
                 <a:cs typeface="Calibri" pitchFamily="34" charset="-120"/>
               </a:rPr>
-              <a:t>Word Labs  •  wordlabs.app  •  Root: 'sign' = mark, symbol, or signal</a:t>
+              <a:t>Word Labs  •  wordlabs.app  •  Root: 'sign' = mark; signal</a:t>
             </a:r>
             <a:endParaRPr lang="en-US" sz="800" dirty="0"/>
           </a:p>
@@ -13728,7 +13794,7 @@
                 <a:ea typeface="Trebuchet MS" pitchFamily="34" charset="-122"/>
                 <a:cs typeface="Trebuchet MS" pitchFamily="34" charset="-120"/>
               </a:rPr>
-              <a:t>significant</a:t>
+              <a:t>signifies</a:t>
             </a:r>
             <a:endParaRPr lang="en-US" sz="2800" dirty="0"/>
           </a:p>
@@ -13906,7 +13972,7 @@
                 <a:ea typeface="Calibri" pitchFamily="34" charset="-122"/>
                 <a:cs typeface="Calibri" pitchFamily="34" charset="-120"/>
               </a:rPr>
-              <a:t>mark or symbol</a:t>
+              <a:t>mark; signal</a:t>
             </a:r>
             <a:endParaRPr lang="en-US" sz="850" dirty="0"/>
           </a:p>
@@ -13979,7 +14045,7 @@
                 <a:ea typeface="Trebuchet MS" pitchFamily="34" charset="-122"/>
                 <a:cs typeface="Trebuchet MS" pitchFamily="34" charset="-120"/>
               </a:rPr>
-              <a:t>ific</a:t>
+              <a:t>ify</a:t>
             </a:r>
             <a:endParaRPr lang="en-US" sz="1300" dirty="0"/>
           </a:p>
@@ -14018,7 +14084,7 @@
                 <a:ea typeface="Calibri" pitchFamily="34" charset="-122"/>
                 <a:cs typeface="Calibri" pitchFamily="34" charset="-120"/>
               </a:rPr>
-              <a:t>making or causing</a:t>
+              <a:t>make</a:t>
             </a:r>
             <a:endParaRPr lang="en-US" sz="850" dirty="0"/>
           </a:p>
@@ -14091,7 +14157,7 @@
                 <a:ea typeface="Trebuchet MS" pitchFamily="34" charset="-122"/>
                 <a:cs typeface="Trebuchet MS" pitchFamily="34" charset="-120"/>
               </a:rPr>
-              <a:t>ant</a:t>
+              <a:t>es</a:t>
             </a:r>
             <a:endParaRPr lang="en-US" sz="1300" dirty="0"/>
           </a:p>
@@ -14130,7 +14196,7 @@
                 <a:ea typeface="Calibri" pitchFamily="34" charset="-122"/>
                 <a:cs typeface="Calibri" pitchFamily="34" charset="-120"/>
               </a:rPr>
-              <a:t>being or having a quality</a:t>
+              <a:t>plural or present tense</a:t>
             </a:r>
             <a:endParaRPr lang="en-US" sz="850" dirty="0"/>
           </a:p>
@@ -14237,8 +14303,8 @@
         </p:nvSpPr>
         <p:spPr>
           <a:xfrm>
-            <a:off x="1975104" y="3364992"/>
-            <a:ext cx="1554480" cy="475488"/>
+            <a:off x="2313432" y="3364992"/>
+            <a:ext cx="1645920" cy="475488"/>
           </a:xfrm>
           <a:prstGeom prst="rect">
             <a:avLst>
@@ -14264,8 +14330,8 @@
         </p:nvSpPr>
         <p:spPr>
           <a:xfrm>
-            <a:off x="1975104" y="3364992"/>
-            <a:ext cx="1554480" cy="475488"/>
+            <a:off x="2313432" y="3364992"/>
+            <a:ext cx="1645920" cy="475488"/>
           </a:xfrm>
           <a:prstGeom prst="rect">
             <a:avLst/>
@@ -14303,8 +14369,8 @@
         </p:nvSpPr>
         <p:spPr>
           <a:xfrm>
-            <a:off x="3529584" y="3364992"/>
-            <a:ext cx="73152" cy="475488"/>
+            <a:off x="3959352" y="3364992"/>
+            <a:ext cx="411480" cy="475488"/>
           </a:xfrm>
           <a:prstGeom prst="rect">
             <a:avLst/>
@@ -14342,8 +14408,8 @@
         </p:nvSpPr>
         <p:spPr>
           <a:xfrm>
-            <a:off x="3602736" y="3364992"/>
-            <a:ext cx="1554480" cy="475488"/>
+            <a:off x="4370832" y="3364992"/>
+            <a:ext cx="1645920" cy="475488"/>
           </a:xfrm>
           <a:prstGeom prst="rect">
             <a:avLst>
@@ -14369,8 +14435,8 @@
         </p:nvSpPr>
         <p:spPr>
           <a:xfrm>
-            <a:off x="3602736" y="3364992"/>
-            <a:ext cx="1554480" cy="475488"/>
+            <a:off x="4370832" y="3364992"/>
+            <a:ext cx="1645920" cy="475488"/>
           </a:xfrm>
           <a:prstGeom prst="rect">
             <a:avLst/>
@@ -14394,7 +14460,7 @@
                 <a:ea typeface="Trebuchet MS" pitchFamily="34" charset="-122"/>
                 <a:cs typeface="Trebuchet MS" pitchFamily="34" charset="-120"/>
               </a:rPr>
-              <a:t>nif</a:t>
+              <a:t>ni</a:t>
             </a:r>
             <a:endParaRPr lang="en-US" sz="1400" dirty="0"/>
           </a:p>
@@ -14408,8 +14474,8 @@
         </p:nvSpPr>
         <p:spPr>
           <a:xfrm>
-            <a:off x="5157216" y="3364992"/>
-            <a:ext cx="73152" cy="475488"/>
+            <a:off x="6016752" y="3364992"/>
+            <a:ext cx="411480" cy="475488"/>
           </a:xfrm>
           <a:prstGeom prst="rect">
             <a:avLst/>
@@ -14447,8 +14513,8 @@
         </p:nvSpPr>
         <p:spPr>
           <a:xfrm>
-            <a:off x="5230368" y="3364992"/>
-            <a:ext cx="1554480" cy="475488"/>
+            <a:off x="6428232" y="3364992"/>
+            <a:ext cx="1645920" cy="475488"/>
           </a:xfrm>
           <a:prstGeom prst="rect">
             <a:avLst>
@@ -14474,8 +14540,8 @@
         </p:nvSpPr>
         <p:spPr>
           <a:xfrm>
-            <a:off x="5230368" y="3364992"/>
-            <a:ext cx="1554480" cy="475488"/>
+            <a:off x="6428232" y="3364992"/>
+            <a:ext cx="1645920" cy="475488"/>
           </a:xfrm>
           <a:prstGeom prst="rect">
             <a:avLst/>
@@ -14499,7 +14565,7 @@
                 <a:ea typeface="Trebuchet MS" pitchFamily="34" charset="-122"/>
                 <a:cs typeface="Trebuchet MS" pitchFamily="34" charset="-120"/>
               </a:rPr>
-              <a:t>i</a:t>
+              <a:t>fies</a:t>
             </a:r>
             <a:endParaRPr lang="en-US" sz="1400" dirty="0"/>
           </a:p>
@@ -14507,119 +14573,80 @@
       </p:sp>
       <p:sp>
         <p:nvSpPr>
-          <p:cNvPr id="36" name="Text 34"/>
-          <p:cNvSpPr/>
-          <p:nvPr/>
-        </p:nvSpPr>
-        <p:spPr>
-          <a:xfrm>
-            <a:off x="6784848" y="3364992"/>
-            <a:ext cx="73152" cy="475488"/>
-          </a:xfrm>
-          <a:prstGeom prst="rect">
-            <a:avLst/>
-          </a:prstGeom>
-          <a:noFill/>
-          <a:ln/>
-        </p:spPr>
-        <p:txBody>
-          <a:bodyPr wrap="square" lIns="0" tIns="0" rIns="0" bIns="0" rtlCol="0" anchor="ctr"/>
-          <a:lstStyle/>
-          <a:p>
-            <a:pPr algn="ctr" indent="0" marL="0">
-              <a:buNone/>
-            </a:pPr>
-            <a:r>
-              <a:rPr lang="en-US" sz="1600" b="1" dirty="0">
-                <a:solidFill>
-                  <a:srgbClr val="0D9488"/>
+          <p:cNvPr id="36" name="Shape 34"/>
+          <p:cNvSpPr/>
+          <p:nvPr/>
+        </p:nvSpPr>
+        <p:spPr>
+          <a:xfrm>
+            <a:off x="365760" y="4096512"/>
+            <a:ext cx="1371600" cy="804672"/>
+          </a:xfrm>
+          <a:prstGeom prst="rect">
+            <a:avLst>
+              <a:gd name="adj" fmla="val 6818"/>
+            </a:avLst>
+          </a:prstGeom>
+          <a:solidFill>
+            <a:srgbClr val="E2E8F0"/>
+          </a:solidFill>
+          <a:ln w="12700">
+            <a:solidFill>
+              <a:srgbClr val="E2E8F0"/>
+            </a:solidFill>
+            <a:prstDash val="solid"/>
+          </a:ln>
+        </p:spPr>
+      </p:sp>
+      <p:sp>
+        <p:nvSpPr>
+          <p:cNvPr id="37" name="Text 35"/>
+          <p:cNvSpPr/>
+          <p:nvPr/>
+        </p:nvSpPr>
+        <p:spPr>
+          <a:xfrm>
+            <a:off x="365760" y="4096512"/>
+            <a:ext cx="1371600" cy="804672"/>
+          </a:xfrm>
+          <a:prstGeom prst="rect">
+            <a:avLst/>
+          </a:prstGeom>
+          <a:noFill/>
+          <a:ln/>
+        </p:spPr>
+        <p:txBody>
+          <a:bodyPr wrap="square" lIns="0" tIns="0" rIns="0" bIns="0" rtlCol="0" anchor="ctr"/>
+          <a:lstStyle/>
+          <a:p>
+            <a:pPr algn="ctr" indent="0" marL="0">
+              <a:buNone/>
+            </a:pPr>
+            <a:r>
+              <a:rPr lang="en-US" sz="1100" b="1" dirty="0">
+                <a:solidFill>
+                  <a:srgbClr val="475569"/>
                 </a:solidFill>
                 <a:latin typeface="Trebuchet MS" pitchFamily="34" charset="0"/>
                 <a:ea typeface="Trebuchet MS" pitchFamily="34" charset="-122"/>
                 <a:cs typeface="Trebuchet MS" pitchFamily="34" charset="-120"/>
               </a:rPr>
-              <a:t>·</a:t>
-            </a:r>
-            <a:endParaRPr lang="en-US" sz="1600" dirty="0"/>
-          </a:p>
-        </p:txBody>
-      </p:sp>
-      <p:sp>
-        <p:nvSpPr>
-          <p:cNvPr id="37" name="Shape 35"/>
-          <p:cNvSpPr/>
-          <p:nvPr/>
-        </p:nvSpPr>
-        <p:spPr>
-          <a:xfrm>
-            <a:off x="6858000" y="3364992"/>
-            <a:ext cx="1554480" cy="475488"/>
-          </a:xfrm>
-          <a:prstGeom prst="rect">
-            <a:avLst>
-              <a:gd name="adj" fmla="val 9615"/>
-            </a:avLst>
-          </a:prstGeom>
-          <a:solidFill>
-            <a:srgbClr val="FFFFFF"/>
-          </a:solidFill>
-          <a:ln w="12700">
-            <a:solidFill>
-              <a:srgbClr val="0D9488"/>
-            </a:solidFill>
-            <a:prstDash val="solid"/>
-          </a:ln>
-        </p:spPr>
-      </p:sp>
-      <p:sp>
-        <p:nvSpPr>
-          <p:cNvPr id="38" name="Text 36"/>
-          <p:cNvSpPr/>
-          <p:nvPr/>
-        </p:nvSpPr>
-        <p:spPr>
-          <a:xfrm>
-            <a:off x="6858000" y="3364992"/>
-            <a:ext cx="1554480" cy="475488"/>
-          </a:xfrm>
-          <a:prstGeom prst="rect">
-            <a:avLst/>
-          </a:prstGeom>
-          <a:noFill/>
-          <a:ln/>
-        </p:spPr>
-        <p:txBody>
-          <a:bodyPr wrap="square" lIns="0" tIns="0" rIns="0" bIns="0" rtlCol="0" anchor="ctr"/>
-          <a:lstStyle/>
-          <a:p>
-            <a:pPr algn="ctr" indent="0" marL="0">
-              <a:buNone/>
-            </a:pPr>
-            <a:r>
-              <a:rPr lang="en-US" sz="1400" b="1" dirty="0">
-                <a:solidFill>
-                  <a:srgbClr val="0D9488"/>
-                </a:solidFill>
-                <a:latin typeface="Trebuchet MS" pitchFamily="34" charset="0"/>
-                <a:ea typeface="Trebuchet MS" pitchFamily="34" charset="-122"/>
-                <a:cs typeface="Trebuchet MS" pitchFamily="34" charset="-120"/>
-              </a:rPr>
-              <a:t>cant</a:t>
-            </a:r>
-            <a:endParaRPr lang="en-US" sz="1400" dirty="0"/>
-          </a:p>
-        </p:txBody>
-      </p:sp>
-      <p:sp>
-        <p:nvSpPr>
-          <p:cNvPr id="39" name="Shape 37"/>
-          <p:cNvSpPr/>
-          <p:nvPr/>
-        </p:nvSpPr>
-        <p:spPr>
-          <a:xfrm>
-            <a:off x="365760" y="4096512"/>
-            <a:ext cx="1371600" cy="804672"/>
+              <a:t>Phonemes</a:t>
+            </a:r>
+            <a:endParaRPr lang="en-US" sz="1100" dirty="0"/>
+          </a:p>
+        </p:txBody>
+      </p:sp>
+      <p:sp>
+        <p:nvSpPr>
+          <p:cNvPr id="38" name="Shape 36"/>
+          <p:cNvSpPr/>
+          <p:nvPr/>
+        </p:nvSpPr>
+        <p:spPr>
+          <a:xfrm>
+            <a:off x="1874520" y="4096512"/>
+            <a:ext cx="6903720" cy="804672"/>
           </a:xfrm>
           <a:prstGeom prst="rect">
             <a:avLst>
@@ -14627,85 +14654,19 @@
             </a:avLst>
           </a:prstGeom>
           <a:solidFill>
-            <a:srgbClr val="E2E8F0"/>
+            <a:srgbClr val="F8FAFC"/>
           </a:solidFill>
           <a:ln w="12700">
             <a:solidFill>
               <a:srgbClr val="E2E8F0"/>
             </a:solidFill>
-            <a:prstDash val="solid"/>
-          </a:ln>
-        </p:spPr>
-      </p:sp>
-      <p:sp>
-        <p:nvSpPr>
-          <p:cNvPr id="40" name="Text 38"/>
-          <p:cNvSpPr/>
-          <p:nvPr/>
-        </p:nvSpPr>
-        <p:spPr>
-          <a:xfrm>
-            <a:off x="365760" y="4096512"/>
-            <a:ext cx="1371600" cy="804672"/>
-          </a:xfrm>
-          <a:prstGeom prst="rect">
-            <a:avLst/>
-          </a:prstGeom>
-          <a:noFill/>
-          <a:ln/>
-        </p:spPr>
-        <p:txBody>
-          <a:bodyPr wrap="square" lIns="0" tIns="0" rIns="0" bIns="0" rtlCol="0" anchor="ctr"/>
-          <a:lstStyle/>
-          <a:p>
-            <a:pPr algn="ctr" indent="0" marL="0">
-              <a:buNone/>
-            </a:pPr>
-            <a:r>
-              <a:rPr lang="en-US" sz="1100" b="1" dirty="0">
-                <a:solidFill>
-                  <a:srgbClr val="475569"/>
-                </a:solidFill>
-                <a:latin typeface="Trebuchet MS" pitchFamily="34" charset="0"/>
-                <a:ea typeface="Trebuchet MS" pitchFamily="34" charset="-122"/>
-                <a:cs typeface="Trebuchet MS" pitchFamily="34" charset="-120"/>
-              </a:rPr>
-              <a:t>Phonemes</a:t>
-            </a:r>
-            <a:endParaRPr lang="en-US" sz="1100" dirty="0"/>
-          </a:p>
-        </p:txBody>
-      </p:sp>
-      <p:sp>
-        <p:nvSpPr>
-          <p:cNvPr id="41" name="Shape 39"/>
-          <p:cNvSpPr/>
-          <p:nvPr/>
-        </p:nvSpPr>
-        <p:spPr>
-          <a:xfrm>
-            <a:off x="1874520" y="4096512"/>
-            <a:ext cx="6903720" cy="804672"/>
-          </a:xfrm>
-          <a:prstGeom prst="rect">
-            <a:avLst>
-              <a:gd name="adj" fmla="val 6818"/>
-            </a:avLst>
-          </a:prstGeom>
-          <a:solidFill>
-            <a:srgbClr val="F8FAFC"/>
-          </a:solidFill>
-          <a:ln w="12700">
-            <a:solidFill>
-              <a:srgbClr val="E2E8F0"/>
-            </a:solidFill>
             <a:prstDash val="dash"/>
           </a:ln>
         </p:spPr>
       </p:sp>
       <p:sp>
         <p:nvSpPr>
-          <p:cNvPr id="42" name="Text 40"/>
+          <p:cNvPr id="39" name="Text 37"/>
           <p:cNvSpPr/>
           <p:nvPr/>
         </p:nvSpPr>
@@ -14937,7 +14898,7 @@
                 <a:ea typeface="Calibri" pitchFamily="34" charset="-122"/>
                 <a:cs typeface="Calibri" pitchFamily="34" charset="-120"/>
               </a:rPr>
-              <a:t>Root 'sign' — mark, symbol, or signal</a:t>
+              <a:t>Root 'sign' — mark; signal</a:t>
             </a:r>
             <a:endParaRPr lang="en-US" sz="1600" dirty="0"/>
           </a:p>
@@ -15293,7 +15254,7 @@
                 <a:ea typeface="Calibri" pitchFamily="34" charset="-122"/>
                 <a:cs typeface="Calibri" pitchFamily="34" charset="-120"/>
               </a:rPr>
-              <a:t>Word Labs  •  wordlabs.app  •  Root: 'sign' = mark, symbol, or signal</a:t>
+              <a:t>Word Labs  •  wordlabs.app  •  Root: 'sign' = mark; signal</a:t>
             </a:r>
             <a:endParaRPr lang="en-US" sz="800" dirty="0"/>
           </a:p>
@@ -15432,7 +15393,7 @@
                 <a:ea typeface="Trebuchet MS" pitchFamily="34" charset="-122"/>
                 <a:cs typeface="Trebuchet MS" pitchFamily="34" charset="-120"/>
               </a:rPr>
-              <a:t>significant</a:t>
+              <a:t>signifies</a:t>
             </a:r>
             <a:endParaRPr lang="en-US" sz="2800" dirty="0"/>
           </a:p>
@@ -15610,7 +15571,7 @@
                 <a:ea typeface="Calibri" pitchFamily="34" charset="-122"/>
                 <a:cs typeface="Calibri" pitchFamily="34" charset="-120"/>
               </a:rPr>
-              <a:t>mark or symbol</a:t>
+              <a:t>mark; signal</a:t>
             </a:r>
             <a:endParaRPr lang="en-US" sz="850" dirty="0"/>
           </a:p>
@@ -15683,7 +15644,7 @@
                 <a:ea typeface="Trebuchet MS" pitchFamily="34" charset="-122"/>
                 <a:cs typeface="Trebuchet MS" pitchFamily="34" charset="-120"/>
               </a:rPr>
-              <a:t>ific</a:t>
+              <a:t>ify</a:t>
             </a:r>
             <a:endParaRPr lang="en-US" sz="1300" dirty="0"/>
           </a:p>
@@ -15722,7 +15683,7 @@
                 <a:ea typeface="Calibri" pitchFamily="34" charset="-122"/>
                 <a:cs typeface="Calibri" pitchFamily="34" charset="-120"/>
               </a:rPr>
-              <a:t>making or causing</a:t>
+              <a:t>make</a:t>
             </a:r>
             <a:endParaRPr lang="en-US" sz="850" dirty="0"/>
           </a:p>
@@ -15795,7 +15756,7 @@
                 <a:ea typeface="Trebuchet MS" pitchFamily="34" charset="-122"/>
                 <a:cs typeface="Trebuchet MS" pitchFamily="34" charset="-120"/>
               </a:rPr>
-              <a:t>ant</a:t>
+              <a:t>es</a:t>
             </a:r>
             <a:endParaRPr lang="en-US" sz="1300" dirty="0"/>
           </a:p>
@@ -15834,7 +15795,7 @@
                 <a:ea typeface="Calibri" pitchFamily="34" charset="-122"/>
                 <a:cs typeface="Calibri" pitchFamily="34" charset="-120"/>
               </a:rPr>
-              <a:t>being or having a quality</a:t>
+              <a:t>plural or present tense</a:t>
             </a:r>
             <a:endParaRPr lang="en-US" sz="850" dirty="0"/>
           </a:p>
@@ -15941,8 +15902,8 @@
         </p:nvSpPr>
         <p:spPr>
           <a:xfrm>
-            <a:off x="1975104" y="3364992"/>
-            <a:ext cx="1554480" cy="475488"/>
+            <a:off x="2313432" y="3364992"/>
+            <a:ext cx="1645920" cy="475488"/>
           </a:xfrm>
           <a:prstGeom prst="rect">
             <a:avLst>
@@ -15968,8 +15929,8 @@
         </p:nvSpPr>
         <p:spPr>
           <a:xfrm>
-            <a:off x="1975104" y="3364992"/>
-            <a:ext cx="1554480" cy="475488"/>
+            <a:off x="2313432" y="3364992"/>
+            <a:ext cx="1645920" cy="475488"/>
           </a:xfrm>
           <a:prstGeom prst="rect">
             <a:avLst/>
@@ -16007,8 +15968,8 @@
         </p:nvSpPr>
         <p:spPr>
           <a:xfrm>
-            <a:off x="3529584" y="3364992"/>
-            <a:ext cx="73152" cy="475488"/>
+            <a:off x="3959352" y="3364992"/>
+            <a:ext cx="411480" cy="475488"/>
           </a:xfrm>
           <a:prstGeom prst="rect">
             <a:avLst/>
@@ -16046,8 +16007,8 @@
         </p:nvSpPr>
         <p:spPr>
           <a:xfrm>
-            <a:off x="3602736" y="3364992"/>
-            <a:ext cx="1554480" cy="475488"/>
+            <a:off x="4370832" y="3364992"/>
+            <a:ext cx="1645920" cy="475488"/>
           </a:xfrm>
           <a:prstGeom prst="rect">
             <a:avLst>
@@ -16073,8 +16034,8 @@
         </p:nvSpPr>
         <p:spPr>
           <a:xfrm>
-            <a:off x="3602736" y="3364992"/>
-            <a:ext cx="1554480" cy="475488"/>
+            <a:off x="4370832" y="3364992"/>
+            <a:ext cx="1645920" cy="475488"/>
           </a:xfrm>
           <a:prstGeom prst="rect">
             <a:avLst/>
@@ -16098,7 +16059,7 @@
                 <a:ea typeface="Trebuchet MS" pitchFamily="34" charset="-122"/>
                 <a:cs typeface="Trebuchet MS" pitchFamily="34" charset="-120"/>
               </a:rPr>
-              <a:t>nif</a:t>
+              <a:t>ni</a:t>
             </a:r>
             <a:endParaRPr lang="en-US" sz="1400" dirty="0"/>
           </a:p>
@@ -16112,8 +16073,8 @@
         </p:nvSpPr>
         <p:spPr>
           <a:xfrm>
-            <a:off x="5157216" y="3364992"/>
-            <a:ext cx="73152" cy="475488"/>
+            <a:off x="6016752" y="3364992"/>
+            <a:ext cx="411480" cy="475488"/>
           </a:xfrm>
           <a:prstGeom prst="rect">
             <a:avLst/>
@@ -16151,8 +16112,8 @@
         </p:nvSpPr>
         <p:spPr>
           <a:xfrm>
-            <a:off x="5230368" y="3364992"/>
-            <a:ext cx="1554480" cy="475488"/>
+            <a:off x="6428232" y="3364992"/>
+            <a:ext cx="1645920" cy="475488"/>
           </a:xfrm>
           <a:prstGeom prst="rect">
             <a:avLst>
@@ -16178,8 +16139,8 @@
         </p:nvSpPr>
         <p:spPr>
           <a:xfrm>
-            <a:off x="5230368" y="3364992"/>
-            <a:ext cx="1554480" cy="475488"/>
+            <a:off x="6428232" y="3364992"/>
+            <a:ext cx="1645920" cy="475488"/>
           </a:xfrm>
           <a:prstGeom prst="rect">
             <a:avLst/>
@@ -16203,7 +16164,7 @@
                 <a:ea typeface="Trebuchet MS" pitchFamily="34" charset="-122"/>
                 <a:cs typeface="Trebuchet MS" pitchFamily="34" charset="-120"/>
               </a:rPr>
-              <a:t>i</a:t>
+              <a:t>fies</a:t>
             </a:r>
             <a:endParaRPr lang="en-US" sz="1400" dirty="0"/>
           </a:p>
@@ -16211,193 +16172,247 @@
       </p:sp>
       <p:sp>
         <p:nvSpPr>
-          <p:cNvPr id="36" name="Text 34"/>
-          <p:cNvSpPr/>
-          <p:nvPr/>
-        </p:nvSpPr>
-        <p:spPr>
-          <a:xfrm>
-            <a:off x="6784848" y="3364992"/>
-            <a:ext cx="73152" cy="475488"/>
-          </a:xfrm>
-          <a:prstGeom prst="rect">
-            <a:avLst/>
-          </a:prstGeom>
-          <a:noFill/>
-          <a:ln/>
-        </p:spPr>
-        <p:txBody>
-          <a:bodyPr wrap="square" lIns="0" tIns="0" rIns="0" bIns="0" rtlCol="0" anchor="ctr"/>
-          <a:lstStyle/>
-          <a:p>
-            <a:pPr algn="ctr" indent="0" marL="0">
-              <a:buNone/>
-            </a:pPr>
-            <a:r>
-              <a:rPr lang="en-US" sz="1600" b="1" dirty="0">
-                <a:solidFill>
-                  <a:srgbClr val="0D9488"/>
+          <p:cNvPr id="36" name="Shape 34"/>
+          <p:cNvSpPr/>
+          <p:nvPr/>
+        </p:nvSpPr>
+        <p:spPr>
+          <a:xfrm>
+            <a:off x="365760" y="4096512"/>
+            <a:ext cx="1371600" cy="804672"/>
+          </a:xfrm>
+          <a:prstGeom prst="rect">
+            <a:avLst>
+              <a:gd name="adj" fmla="val 6818"/>
+            </a:avLst>
+          </a:prstGeom>
+          <a:solidFill>
+            <a:srgbClr val="E2E8F0"/>
+          </a:solidFill>
+          <a:ln w="12700">
+            <a:solidFill>
+              <a:srgbClr val="E2E8F0"/>
+            </a:solidFill>
+            <a:prstDash val="solid"/>
+          </a:ln>
+        </p:spPr>
+      </p:sp>
+      <p:sp>
+        <p:nvSpPr>
+          <p:cNvPr id="37" name="Text 35"/>
+          <p:cNvSpPr/>
+          <p:nvPr/>
+        </p:nvSpPr>
+        <p:spPr>
+          <a:xfrm>
+            <a:off x="365760" y="4096512"/>
+            <a:ext cx="1371600" cy="804672"/>
+          </a:xfrm>
+          <a:prstGeom prst="rect">
+            <a:avLst/>
+          </a:prstGeom>
+          <a:noFill/>
+          <a:ln/>
+        </p:spPr>
+        <p:txBody>
+          <a:bodyPr wrap="square" lIns="0" tIns="0" rIns="0" bIns="0" rtlCol="0" anchor="ctr"/>
+          <a:lstStyle/>
+          <a:p>
+            <a:pPr algn="ctr" indent="0" marL="0">
+              <a:buNone/>
+            </a:pPr>
+            <a:r>
+              <a:rPr lang="en-US" sz="1100" b="1" dirty="0">
+                <a:solidFill>
+                  <a:srgbClr val="475569"/>
                 </a:solidFill>
                 <a:latin typeface="Trebuchet MS" pitchFamily="34" charset="0"/>
                 <a:ea typeface="Trebuchet MS" pitchFamily="34" charset="-122"/>
                 <a:cs typeface="Trebuchet MS" pitchFamily="34" charset="-120"/>
               </a:rPr>
-              <a:t>·</a:t>
-            </a:r>
-            <a:endParaRPr lang="en-US" sz="1600" dirty="0"/>
-          </a:p>
-        </p:txBody>
-      </p:sp>
-      <p:sp>
-        <p:nvSpPr>
-          <p:cNvPr id="37" name="Shape 35"/>
-          <p:cNvSpPr/>
-          <p:nvPr/>
-        </p:nvSpPr>
-        <p:spPr>
-          <a:xfrm>
-            <a:off x="6858000" y="3364992"/>
-            <a:ext cx="1554480" cy="475488"/>
+              <a:t>Phonemes</a:t>
+            </a:r>
+            <a:endParaRPr lang="en-US" sz="1100" dirty="0"/>
+          </a:p>
+        </p:txBody>
+      </p:sp>
+      <p:sp>
+        <p:nvSpPr>
+          <p:cNvPr id="38" name="Shape 36"/>
+          <p:cNvSpPr/>
+          <p:nvPr/>
+        </p:nvSpPr>
+        <p:spPr>
+          <a:xfrm>
+            <a:off x="1874520" y="4096512"/>
+            <a:ext cx="6903720" cy="658368"/>
           </a:xfrm>
           <a:prstGeom prst="rect">
             <a:avLst>
-              <a:gd name="adj" fmla="val 9615"/>
+              <a:gd name="adj" fmla="val 8333"/>
             </a:avLst>
           </a:prstGeom>
           <a:solidFill>
+            <a:srgbClr val="FCE7F3"/>
+          </a:solidFill>
+          <a:ln w="12700">
+            <a:solidFill>
+              <a:srgbClr val="DB2777"/>
+            </a:solidFill>
+            <a:prstDash val="solid"/>
+          </a:ln>
+        </p:spPr>
+      </p:sp>
+      <p:sp>
+        <p:nvSpPr>
+          <p:cNvPr id="39" name="Shape 37"/>
+          <p:cNvSpPr/>
+          <p:nvPr/>
+        </p:nvSpPr>
+        <p:spPr>
+          <a:xfrm>
+            <a:off x="2023872" y="4169664"/>
+            <a:ext cx="685800" cy="475488"/>
+          </a:xfrm>
+          <a:prstGeom prst="rect">
+            <a:avLst>
+              <a:gd name="adj" fmla="val 7692"/>
+            </a:avLst>
+          </a:prstGeom>
+          <a:solidFill>
             <a:srgbClr val="FFFFFF"/>
           </a:solidFill>
           <a:ln w="12700">
             <a:solidFill>
-              <a:srgbClr val="0D9488"/>
-            </a:solidFill>
-            <a:prstDash val="solid"/>
-          </a:ln>
-        </p:spPr>
-      </p:sp>
-      <p:sp>
-        <p:nvSpPr>
-          <p:cNvPr id="38" name="Text 36"/>
-          <p:cNvSpPr/>
-          <p:nvPr/>
-        </p:nvSpPr>
-        <p:spPr>
-          <a:xfrm>
-            <a:off x="6858000" y="3364992"/>
-            <a:ext cx="1554480" cy="475488"/>
-          </a:xfrm>
-          <a:prstGeom prst="rect">
-            <a:avLst/>
-          </a:prstGeom>
-          <a:noFill/>
-          <a:ln/>
-        </p:spPr>
-        <p:txBody>
-          <a:bodyPr wrap="square" lIns="0" tIns="0" rIns="0" bIns="0" rtlCol="0" anchor="ctr"/>
-          <a:lstStyle/>
-          <a:p>
-            <a:pPr algn="ctr" indent="0" marL="0">
-              <a:buNone/>
-            </a:pPr>
-            <a:r>
-              <a:rPr lang="en-US" sz="1400" b="1" dirty="0">
-                <a:solidFill>
-                  <a:srgbClr val="0D9488"/>
+              <a:srgbClr val="DB2777"/>
+            </a:solidFill>
+            <a:prstDash val="solid"/>
+          </a:ln>
+        </p:spPr>
+      </p:sp>
+      <p:sp>
+        <p:nvSpPr>
+          <p:cNvPr id="40" name="Text 38"/>
+          <p:cNvSpPr/>
+          <p:nvPr/>
+        </p:nvSpPr>
+        <p:spPr>
+          <a:xfrm>
+            <a:off x="2023872" y="4169664"/>
+            <a:ext cx="685800" cy="475488"/>
+          </a:xfrm>
+          <a:prstGeom prst="rect">
+            <a:avLst/>
+          </a:prstGeom>
+          <a:noFill/>
+          <a:ln/>
+        </p:spPr>
+        <p:txBody>
+          <a:bodyPr wrap="square" lIns="0" tIns="0" rIns="0" bIns="0" rtlCol="0" anchor="ctr"/>
+          <a:lstStyle/>
+          <a:p>
+            <a:pPr algn="ctr" indent="0" marL="0">
+              <a:buNone/>
+            </a:pPr>
+            <a:r>
+              <a:rPr lang="en-US" sz="900" b="1" dirty="0">
+                <a:solidFill>
+                  <a:srgbClr val="9D174D"/>
                 </a:solidFill>
                 <a:latin typeface="Trebuchet MS" pitchFamily="34" charset="0"/>
                 <a:ea typeface="Trebuchet MS" pitchFamily="34" charset="-122"/>
                 <a:cs typeface="Trebuchet MS" pitchFamily="34" charset="-120"/>
               </a:rPr>
-              <a:t>cant</a:t>
-            </a:r>
-            <a:endParaRPr lang="en-US" sz="1400" dirty="0"/>
-          </a:p>
-        </p:txBody>
-      </p:sp>
-      <p:sp>
-        <p:nvSpPr>
-          <p:cNvPr id="39" name="Shape 37"/>
-          <p:cNvSpPr/>
-          <p:nvPr/>
-        </p:nvSpPr>
-        <p:spPr>
-          <a:xfrm>
-            <a:off x="365760" y="4096512"/>
-            <a:ext cx="1371600" cy="804672"/>
+              <a:t>s</a:t>
+            </a:r>
+            <a:endParaRPr lang="en-US" sz="900" dirty="0"/>
+          </a:p>
+        </p:txBody>
+      </p:sp>
+      <p:sp>
+        <p:nvSpPr>
+          <p:cNvPr id="41" name="Shape 39"/>
+          <p:cNvSpPr/>
+          <p:nvPr/>
+        </p:nvSpPr>
+        <p:spPr>
+          <a:xfrm>
+            <a:off x="2831592" y="4169664"/>
+            <a:ext cx="685800" cy="475488"/>
           </a:xfrm>
           <a:prstGeom prst="rect">
             <a:avLst>
-              <a:gd name="adj" fmla="val 6818"/>
+              <a:gd name="adj" fmla="val 7692"/>
             </a:avLst>
           </a:prstGeom>
           <a:solidFill>
-            <a:srgbClr val="E2E8F0"/>
-          </a:solidFill>
-          <a:ln w="12700">
-            <a:solidFill>
-              <a:srgbClr val="E2E8F0"/>
-            </a:solidFill>
-            <a:prstDash val="solid"/>
-          </a:ln>
-        </p:spPr>
-      </p:sp>
-      <p:sp>
-        <p:nvSpPr>
-          <p:cNvPr id="40" name="Text 38"/>
-          <p:cNvSpPr/>
-          <p:nvPr/>
-        </p:nvSpPr>
-        <p:spPr>
-          <a:xfrm>
-            <a:off x="365760" y="4096512"/>
-            <a:ext cx="1371600" cy="804672"/>
-          </a:xfrm>
-          <a:prstGeom prst="rect">
-            <a:avLst/>
-          </a:prstGeom>
-          <a:noFill/>
-          <a:ln/>
-        </p:spPr>
-        <p:txBody>
-          <a:bodyPr wrap="square" lIns="0" tIns="0" rIns="0" bIns="0" rtlCol="0" anchor="ctr"/>
-          <a:lstStyle/>
-          <a:p>
-            <a:pPr algn="ctr" indent="0" marL="0">
-              <a:buNone/>
-            </a:pPr>
-            <a:r>
-              <a:rPr lang="en-US" sz="1100" b="1" dirty="0">
-                <a:solidFill>
-                  <a:srgbClr val="475569"/>
+            <a:srgbClr val="FFFFFF"/>
+          </a:solidFill>
+          <a:ln w="12700">
+            <a:solidFill>
+              <a:srgbClr val="DB2777"/>
+            </a:solidFill>
+            <a:prstDash val="solid"/>
+          </a:ln>
+        </p:spPr>
+      </p:sp>
+      <p:sp>
+        <p:nvSpPr>
+          <p:cNvPr id="42" name="Text 40"/>
+          <p:cNvSpPr/>
+          <p:nvPr/>
+        </p:nvSpPr>
+        <p:spPr>
+          <a:xfrm>
+            <a:off x="2831592" y="4169664"/>
+            <a:ext cx="685800" cy="475488"/>
+          </a:xfrm>
+          <a:prstGeom prst="rect">
+            <a:avLst/>
+          </a:prstGeom>
+          <a:noFill/>
+          <a:ln/>
+        </p:spPr>
+        <p:txBody>
+          <a:bodyPr wrap="square" lIns="0" tIns="0" rIns="0" bIns="0" rtlCol="0" anchor="ctr"/>
+          <a:lstStyle/>
+          <a:p>
+            <a:pPr algn="ctr" indent="0" marL="0">
+              <a:buNone/>
+            </a:pPr>
+            <a:r>
+              <a:rPr lang="en-US" sz="900" b="1" dirty="0">
+                <a:solidFill>
+                  <a:srgbClr val="9D174D"/>
                 </a:solidFill>
                 <a:latin typeface="Trebuchet MS" pitchFamily="34" charset="0"/>
                 <a:ea typeface="Trebuchet MS" pitchFamily="34" charset="-122"/>
                 <a:cs typeface="Trebuchet MS" pitchFamily="34" charset="-120"/>
               </a:rPr>
-              <a:t>Phonemes</a:t>
-            </a:r>
-            <a:endParaRPr lang="en-US" sz="1100" dirty="0"/>
-          </a:p>
-        </p:txBody>
-      </p:sp>
-      <p:sp>
-        <p:nvSpPr>
-          <p:cNvPr id="41" name="Shape 39"/>
-          <p:cNvSpPr/>
-          <p:nvPr/>
-        </p:nvSpPr>
-        <p:spPr>
-          <a:xfrm>
-            <a:off x="1874520" y="4096512"/>
-            <a:ext cx="6903720" cy="804672"/>
+              <a:t>i</a:t>
+            </a:r>
+            <a:endParaRPr lang="en-US" sz="900" dirty="0"/>
+          </a:p>
+        </p:txBody>
+      </p:sp>
+      <p:sp>
+        <p:nvSpPr>
+          <p:cNvPr id="43" name="Shape 41"/>
+          <p:cNvSpPr/>
+          <p:nvPr/>
+        </p:nvSpPr>
+        <p:spPr>
+          <a:xfrm>
+            <a:off x="3639312" y="4169664"/>
+            <a:ext cx="685800" cy="475488"/>
           </a:xfrm>
           <a:prstGeom prst="rect">
             <a:avLst>
-              <a:gd name="adj" fmla="val 6818"/>
+              <a:gd name="adj" fmla="val 7692"/>
             </a:avLst>
           </a:prstGeom>
           <a:solidFill>
-            <a:srgbClr val="FCE7F3"/>
+            <a:srgbClr val="FFFFFF"/>
           </a:solidFill>
           <a:ln w="12700">
             <a:solidFill>
@@ -16409,41 +16424,14 @@
       </p:sp>
       <p:sp>
         <p:nvSpPr>
-          <p:cNvPr id="42" name="Shape 40"/>
-          <p:cNvSpPr/>
-          <p:nvPr/>
-        </p:nvSpPr>
-        <p:spPr>
-          <a:xfrm>
-            <a:off x="1951828" y="4169664"/>
-            <a:ext cx="603504" cy="384048"/>
-          </a:xfrm>
-          <a:prstGeom prst="rect">
-            <a:avLst>
-              <a:gd name="adj" fmla="val 9524"/>
-            </a:avLst>
-          </a:prstGeom>
-          <a:solidFill>
-            <a:srgbClr val="FFFFFF"/>
-          </a:solidFill>
-          <a:ln w="12700">
-            <a:solidFill>
-              <a:srgbClr val="DB2777"/>
-            </a:solidFill>
-            <a:prstDash val="solid"/>
-          </a:ln>
-        </p:spPr>
-      </p:sp>
-      <p:sp>
-        <p:nvSpPr>
-          <p:cNvPr id="43" name="Text 41"/>
-          <p:cNvSpPr/>
-          <p:nvPr/>
-        </p:nvSpPr>
-        <p:spPr>
-          <a:xfrm>
-            <a:off x="1951828" y="4169664"/>
-            <a:ext cx="603504" cy="384048"/>
+          <p:cNvPr id="44" name="Text 42"/>
+          <p:cNvSpPr/>
+          <p:nvPr/>
+        </p:nvSpPr>
+        <p:spPr>
+          <a:xfrm>
+            <a:off x="3639312" y="4169664"/>
+            <a:ext cx="685800" cy="475488"/>
           </a:xfrm>
           <a:prstGeom prst="rect">
             <a:avLst/>
@@ -16467,7 +16455,7 @@
                 <a:ea typeface="Trebuchet MS" pitchFamily="34" charset="-122"/>
                 <a:cs typeface="Trebuchet MS" pitchFamily="34" charset="-120"/>
               </a:rPr>
-              <a:t>s</a:t>
+              <a:t>g</a:t>
             </a:r>
             <a:endParaRPr lang="en-US" sz="900" dirty="0"/>
           </a:p>
@@ -16475,18 +16463,18 @@
       </p:sp>
       <p:sp>
         <p:nvSpPr>
-          <p:cNvPr id="44" name="Shape 42"/>
-          <p:cNvSpPr/>
-          <p:nvPr/>
-        </p:nvSpPr>
-        <p:spPr>
-          <a:xfrm>
-            <a:off x="2605209" y="4169664"/>
-            <a:ext cx="603504" cy="384048"/>
+          <p:cNvPr id="45" name="Shape 43"/>
+          <p:cNvSpPr/>
+          <p:nvPr/>
+        </p:nvSpPr>
+        <p:spPr>
+          <a:xfrm>
+            <a:off x="4447032" y="4169664"/>
+            <a:ext cx="685800" cy="475488"/>
           </a:xfrm>
           <a:prstGeom prst="rect">
             <a:avLst>
-              <a:gd name="adj" fmla="val 9524"/>
+              <a:gd name="adj" fmla="val 7692"/>
             </a:avLst>
           </a:prstGeom>
           <a:solidFill>
@@ -16502,14 +16490,14 @@
       </p:sp>
       <p:sp>
         <p:nvSpPr>
-          <p:cNvPr id="45" name="Text 43"/>
-          <p:cNvSpPr/>
-          <p:nvPr/>
-        </p:nvSpPr>
-        <p:spPr>
-          <a:xfrm>
-            <a:off x="2605209" y="4169664"/>
-            <a:ext cx="603504" cy="384048"/>
+          <p:cNvPr id="46" name="Text 44"/>
+          <p:cNvSpPr/>
+          <p:nvPr/>
+        </p:nvSpPr>
+        <p:spPr>
+          <a:xfrm>
+            <a:off x="4447032" y="4169664"/>
+            <a:ext cx="685800" cy="475488"/>
           </a:xfrm>
           <a:prstGeom prst="rect">
             <a:avLst/>
@@ -16533,7 +16521,7 @@
                 <a:ea typeface="Trebuchet MS" pitchFamily="34" charset="-122"/>
                 <a:cs typeface="Trebuchet MS" pitchFamily="34" charset="-120"/>
               </a:rPr>
-              <a:t>ig</a:t>
+              <a:t>n</a:t>
             </a:r>
             <a:endParaRPr lang="en-US" sz="900" dirty="0"/>
           </a:p>
@@ -16541,18 +16529,18 @@
       </p:sp>
       <p:sp>
         <p:nvSpPr>
-          <p:cNvPr id="46" name="Shape 44"/>
-          <p:cNvSpPr/>
-          <p:nvPr/>
-        </p:nvSpPr>
-        <p:spPr>
-          <a:xfrm>
-            <a:off x="3258589" y="4169664"/>
-            <a:ext cx="603504" cy="384048"/>
+          <p:cNvPr id="47" name="Shape 45"/>
+          <p:cNvSpPr/>
+          <p:nvPr/>
+        </p:nvSpPr>
+        <p:spPr>
+          <a:xfrm>
+            <a:off x="5254752" y="4169664"/>
+            <a:ext cx="685800" cy="475488"/>
           </a:xfrm>
           <a:prstGeom prst="rect">
             <a:avLst>
-              <a:gd name="adj" fmla="val 9524"/>
+              <a:gd name="adj" fmla="val 7692"/>
             </a:avLst>
           </a:prstGeom>
           <a:solidFill>
@@ -16568,14 +16556,14 @@
       </p:sp>
       <p:sp>
         <p:nvSpPr>
-          <p:cNvPr id="47" name="Text 45"/>
-          <p:cNvSpPr/>
-          <p:nvPr/>
-        </p:nvSpPr>
-        <p:spPr>
-          <a:xfrm>
-            <a:off x="3258589" y="4169664"/>
-            <a:ext cx="603504" cy="384048"/>
+          <p:cNvPr id="48" name="Text 46"/>
+          <p:cNvSpPr/>
+          <p:nvPr/>
+        </p:nvSpPr>
+        <p:spPr>
+          <a:xfrm>
+            <a:off x="5254752" y="4169664"/>
+            <a:ext cx="685800" cy="475488"/>
           </a:xfrm>
           <a:prstGeom prst="rect">
             <a:avLst/>
@@ -16599,7 +16587,7 @@
                 <a:ea typeface="Trebuchet MS" pitchFamily="34" charset="-122"/>
                 <a:cs typeface="Trebuchet MS" pitchFamily="34" charset="-120"/>
               </a:rPr>
-              <a:t>n</a:t>
+              <a:t>i</a:t>
             </a:r>
             <a:endParaRPr lang="en-US" sz="900" dirty="0"/>
           </a:p>
@@ -16607,18 +16595,18 @@
       </p:sp>
       <p:sp>
         <p:nvSpPr>
-          <p:cNvPr id="48" name="Shape 46"/>
-          <p:cNvSpPr/>
-          <p:nvPr/>
-        </p:nvSpPr>
-        <p:spPr>
-          <a:xfrm>
-            <a:off x="3911969" y="4169664"/>
-            <a:ext cx="603504" cy="384048"/>
+          <p:cNvPr id="49" name="Shape 47"/>
+          <p:cNvSpPr/>
+          <p:nvPr/>
+        </p:nvSpPr>
+        <p:spPr>
+          <a:xfrm>
+            <a:off x="6062472" y="4169664"/>
+            <a:ext cx="685800" cy="475488"/>
           </a:xfrm>
           <a:prstGeom prst="rect">
             <a:avLst>
-              <a:gd name="adj" fmla="val 9524"/>
+              <a:gd name="adj" fmla="val 7692"/>
             </a:avLst>
           </a:prstGeom>
           <a:solidFill>
@@ -16634,14 +16622,14 @@
       </p:sp>
       <p:sp>
         <p:nvSpPr>
-          <p:cNvPr id="49" name="Text 47"/>
-          <p:cNvSpPr/>
-          <p:nvPr/>
-        </p:nvSpPr>
-        <p:spPr>
-          <a:xfrm>
-            <a:off x="3911969" y="4169664"/>
-            <a:ext cx="603504" cy="384048"/>
+          <p:cNvPr id="50" name="Text 48"/>
+          <p:cNvSpPr/>
+          <p:nvPr/>
+        </p:nvSpPr>
+        <p:spPr>
+          <a:xfrm>
+            <a:off x="6062472" y="4169664"/>
+            <a:ext cx="685800" cy="475488"/>
           </a:xfrm>
           <a:prstGeom prst="rect">
             <a:avLst/>
@@ -16665,7 +16653,7 @@
                 <a:ea typeface="Trebuchet MS" pitchFamily="34" charset="-122"/>
                 <a:cs typeface="Trebuchet MS" pitchFamily="34" charset="-120"/>
               </a:rPr>
-              <a:t>i</a:t>
+              <a:t>f</a:t>
             </a:r>
             <a:endParaRPr lang="en-US" sz="900" dirty="0"/>
           </a:p>
@@ -16673,18 +16661,18 @@
       </p:sp>
       <p:sp>
         <p:nvSpPr>
-          <p:cNvPr id="50" name="Shape 48"/>
-          <p:cNvSpPr/>
-          <p:nvPr/>
-        </p:nvSpPr>
-        <p:spPr>
-          <a:xfrm>
-            <a:off x="4565350" y="4169664"/>
-            <a:ext cx="603504" cy="384048"/>
+          <p:cNvPr id="51" name="Shape 49"/>
+          <p:cNvSpPr/>
+          <p:nvPr/>
+        </p:nvSpPr>
+        <p:spPr>
+          <a:xfrm>
+            <a:off x="6870192" y="4169664"/>
+            <a:ext cx="685800" cy="475488"/>
           </a:xfrm>
           <a:prstGeom prst="rect">
             <a:avLst>
-              <a:gd name="adj" fmla="val 9524"/>
+              <a:gd name="adj" fmla="val 7692"/>
             </a:avLst>
           </a:prstGeom>
           <a:solidFill>
@@ -16700,14 +16688,14 @@
       </p:sp>
       <p:sp>
         <p:nvSpPr>
-          <p:cNvPr id="51" name="Text 49"/>
-          <p:cNvSpPr/>
-          <p:nvPr/>
-        </p:nvSpPr>
-        <p:spPr>
-          <a:xfrm>
-            <a:off x="4565350" y="4169664"/>
-            <a:ext cx="603504" cy="384048"/>
+          <p:cNvPr id="52" name="Text 50"/>
+          <p:cNvSpPr/>
+          <p:nvPr/>
+        </p:nvSpPr>
+        <p:spPr>
+          <a:xfrm>
+            <a:off x="6870192" y="4169664"/>
+            <a:ext cx="685800" cy="475488"/>
           </a:xfrm>
           <a:prstGeom prst="rect">
             <a:avLst/>
@@ -16731,7 +16719,7 @@
                 <a:ea typeface="Trebuchet MS" pitchFamily="34" charset="-122"/>
                 <a:cs typeface="Trebuchet MS" pitchFamily="34" charset="-120"/>
               </a:rPr>
-              <a:t>f</a:t>
+              <a:t>ie</a:t>
             </a:r>
             <a:endParaRPr lang="en-US" sz="900" dirty="0"/>
           </a:p>
@@ -16739,18 +16727,18 @@
       </p:sp>
       <p:sp>
         <p:nvSpPr>
-          <p:cNvPr id="52" name="Shape 50"/>
-          <p:cNvSpPr/>
-          <p:nvPr/>
-        </p:nvSpPr>
-        <p:spPr>
-          <a:xfrm>
-            <a:off x="5218730" y="4169664"/>
-            <a:ext cx="603504" cy="384048"/>
+          <p:cNvPr id="53" name="Shape 51"/>
+          <p:cNvSpPr/>
+          <p:nvPr/>
+        </p:nvSpPr>
+        <p:spPr>
+          <a:xfrm>
+            <a:off x="7677912" y="4169664"/>
+            <a:ext cx="685800" cy="475488"/>
           </a:xfrm>
           <a:prstGeom prst="rect">
             <a:avLst>
-              <a:gd name="adj" fmla="val 9524"/>
+              <a:gd name="adj" fmla="val 7692"/>
             </a:avLst>
           </a:prstGeom>
           <a:solidFill>
@@ -16766,14 +16754,14 @@
       </p:sp>
       <p:sp>
         <p:nvSpPr>
-          <p:cNvPr id="53" name="Text 51"/>
-          <p:cNvSpPr/>
-          <p:nvPr/>
-        </p:nvSpPr>
-        <p:spPr>
-          <a:xfrm>
-            <a:off x="5218730" y="4169664"/>
-            <a:ext cx="603504" cy="384048"/>
+          <p:cNvPr id="54" name="Text 52"/>
+          <p:cNvSpPr/>
+          <p:nvPr/>
+        </p:nvSpPr>
+        <p:spPr>
+          <a:xfrm>
+            <a:off x="7677912" y="4169664"/>
+            <a:ext cx="685800" cy="475488"/>
           </a:xfrm>
           <a:prstGeom prst="rect">
             <a:avLst/>
@@ -16797,310 +16785,7 @@
                 <a:ea typeface="Trebuchet MS" pitchFamily="34" charset="-122"/>
                 <a:cs typeface="Trebuchet MS" pitchFamily="34" charset="-120"/>
               </a:rPr>
-              <a:t>i</a:t>
-            </a:r>
-            <a:endParaRPr lang="en-US" sz="900" dirty="0"/>
-          </a:p>
-        </p:txBody>
-      </p:sp>
-      <p:sp>
-        <p:nvSpPr>
-          <p:cNvPr id="54" name="Shape 52"/>
-          <p:cNvSpPr/>
-          <p:nvPr/>
-        </p:nvSpPr>
-        <p:spPr>
-          <a:xfrm>
-            <a:off x="5872111" y="4169664"/>
-            <a:ext cx="603504" cy="384048"/>
-          </a:xfrm>
-          <a:prstGeom prst="rect">
-            <a:avLst>
-              <a:gd name="adj" fmla="val 9524"/>
-            </a:avLst>
-          </a:prstGeom>
-          <a:solidFill>
-            <a:srgbClr val="FFFFFF"/>
-          </a:solidFill>
-          <a:ln w="12700">
-            <a:solidFill>
-              <a:srgbClr val="DB2777"/>
-            </a:solidFill>
-            <a:prstDash val="solid"/>
-          </a:ln>
-        </p:spPr>
-      </p:sp>
-      <p:sp>
-        <p:nvSpPr>
-          <p:cNvPr id="55" name="Text 53"/>
-          <p:cNvSpPr/>
-          <p:nvPr/>
-        </p:nvSpPr>
-        <p:spPr>
-          <a:xfrm>
-            <a:off x="5872111" y="4169664"/>
-            <a:ext cx="603504" cy="384048"/>
-          </a:xfrm>
-          <a:prstGeom prst="rect">
-            <a:avLst/>
-          </a:prstGeom>
-          <a:noFill/>
-          <a:ln/>
-        </p:spPr>
-        <p:txBody>
-          <a:bodyPr wrap="square" lIns="0" tIns="0" rIns="0" bIns="0" rtlCol="0" anchor="ctr"/>
-          <a:lstStyle/>
-          <a:p>
-            <a:pPr algn="ctr" indent="0" marL="0">
-              <a:buNone/>
-            </a:pPr>
-            <a:r>
-              <a:rPr lang="en-US" sz="900" b="1" dirty="0">
-                <a:solidFill>
-                  <a:srgbClr val="9D174D"/>
-                </a:solidFill>
-                <a:latin typeface="Trebuchet MS" pitchFamily="34" charset="0"/>
-                <a:ea typeface="Trebuchet MS" pitchFamily="34" charset="-122"/>
-                <a:cs typeface="Trebuchet MS" pitchFamily="34" charset="-120"/>
-              </a:rPr>
-              <a:t>c</a:t>
-            </a:r>
-            <a:endParaRPr lang="en-US" sz="900" dirty="0"/>
-          </a:p>
-        </p:txBody>
-      </p:sp>
-      <p:sp>
-        <p:nvSpPr>
-          <p:cNvPr id="56" name="Text 54"/>
-          <p:cNvSpPr/>
-          <p:nvPr/>
-        </p:nvSpPr>
-        <p:spPr>
-          <a:xfrm>
-            <a:off x="5872111" y="4572000"/>
-            <a:ext cx="603504" cy="219456"/>
-          </a:xfrm>
-          <a:prstGeom prst="rect">
-            <a:avLst/>
-          </a:prstGeom>
-          <a:noFill/>
-          <a:ln/>
-        </p:spPr>
-        <p:txBody>
-          <a:bodyPr wrap="square" lIns="0" tIns="0" rIns="0" bIns="0" rtlCol="0" anchor="t"/>
-          <a:lstStyle/>
-          <a:p>
-            <a:pPr algn="ctr" indent="0" marL="0">
-              <a:buNone/>
-            </a:pPr>
-            <a:r>
-              <a:rPr lang="en-US" sz="750" i="1" dirty="0">
-                <a:solidFill>
-                  <a:srgbClr val="94A3B8"/>
-                </a:solidFill>
-                <a:latin typeface="Calibri" pitchFamily="34" charset="0"/>
-                <a:ea typeface="Calibri" pitchFamily="34" charset="-122"/>
-                <a:cs typeface="Calibri" pitchFamily="34" charset="-120"/>
-              </a:rPr>
-              <a:t>/k/</a:t>
-            </a:r>
-            <a:endParaRPr lang="en-US" sz="750" dirty="0"/>
-          </a:p>
-        </p:txBody>
-      </p:sp>
-      <p:sp>
-        <p:nvSpPr>
-          <p:cNvPr id="57" name="Shape 55"/>
-          <p:cNvSpPr/>
-          <p:nvPr/>
-        </p:nvSpPr>
-        <p:spPr>
-          <a:xfrm>
-            <a:off x="6525491" y="4169664"/>
-            <a:ext cx="603504" cy="384048"/>
-          </a:xfrm>
-          <a:prstGeom prst="rect">
-            <a:avLst>
-              <a:gd name="adj" fmla="val 9524"/>
-            </a:avLst>
-          </a:prstGeom>
-          <a:solidFill>
-            <a:srgbClr val="FFFFFF"/>
-          </a:solidFill>
-          <a:ln w="12700">
-            <a:solidFill>
-              <a:srgbClr val="DB2777"/>
-            </a:solidFill>
-            <a:prstDash val="solid"/>
-          </a:ln>
-        </p:spPr>
-      </p:sp>
-      <p:sp>
-        <p:nvSpPr>
-          <p:cNvPr id="58" name="Text 56"/>
-          <p:cNvSpPr/>
-          <p:nvPr/>
-        </p:nvSpPr>
-        <p:spPr>
-          <a:xfrm>
-            <a:off x="6525491" y="4169664"/>
-            <a:ext cx="603504" cy="384048"/>
-          </a:xfrm>
-          <a:prstGeom prst="rect">
-            <a:avLst/>
-          </a:prstGeom>
-          <a:noFill/>
-          <a:ln/>
-        </p:spPr>
-        <p:txBody>
-          <a:bodyPr wrap="square" lIns="0" tIns="0" rIns="0" bIns="0" rtlCol="0" anchor="ctr"/>
-          <a:lstStyle/>
-          <a:p>
-            <a:pPr algn="ctr" indent="0" marL="0">
-              <a:buNone/>
-            </a:pPr>
-            <a:r>
-              <a:rPr lang="en-US" sz="900" b="1" dirty="0">
-                <a:solidFill>
-                  <a:srgbClr val="9D174D"/>
-                </a:solidFill>
-                <a:latin typeface="Trebuchet MS" pitchFamily="34" charset="0"/>
-                <a:ea typeface="Trebuchet MS" pitchFamily="34" charset="-122"/>
-                <a:cs typeface="Trebuchet MS" pitchFamily="34" charset="-120"/>
-              </a:rPr>
-              <a:t>a</a:t>
-            </a:r>
-            <a:endParaRPr lang="en-US" sz="900" dirty="0"/>
-          </a:p>
-        </p:txBody>
-      </p:sp>
-      <p:sp>
-        <p:nvSpPr>
-          <p:cNvPr id="59" name="Shape 57"/>
-          <p:cNvSpPr/>
-          <p:nvPr/>
-        </p:nvSpPr>
-        <p:spPr>
-          <a:xfrm>
-            <a:off x="7178871" y="4169664"/>
-            <a:ext cx="603504" cy="384048"/>
-          </a:xfrm>
-          <a:prstGeom prst="rect">
-            <a:avLst>
-              <a:gd name="adj" fmla="val 9524"/>
-            </a:avLst>
-          </a:prstGeom>
-          <a:solidFill>
-            <a:srgbClr val="FFFFFF"/>
-          </a:solidFill>
-          <a:ln w="12700">
-            <a:solidFill>
-              <a:srgbClr val="DB2777"/>
-            </a:solidFill>
-            <a:prstDash val="solid"/>
-          </a:ln>
-        </p:spPr>
-      </p:sp>
-      <p:sp>
-        <p:nvSpPr>
-          <p:cNvPr id="60" name="Text 58"/>
-          <p:cNvSpPr/>
-          <p:nvPr/>
-        </p:nvSpPr>
-        <p:spPr>
-          <a:xfrm>
-            <a:off x="7178871" y="4169664"/>
-            <a:ext cx="603504" cy="384048"/>
-          </a:xfrm>
-          <a:prstGeom prst="rect">
-            <a:avLst/>
-          </a:prstGeom>
-          <a:noFill/>
-          <a:ln/>
-        </p:spPr>
-        <p:txBody>
-          <a:bodyPr wrap="square" lIns="0" tIns="0" rIns="0" bIns="0" rtlCol="0" anchor="ctr"/>
-          <a:lstStyle/>
-          <a:p>
-            <a:pPr algn="ctr" indent="0" marL="0">
-              <a:buNone/>
-            </a:pPr>
-            <a:r>
-              <a:rPr lang="en-US" sz="900" b="1" dirty="0">
-                <a:solidFill>
-                  <a:srgbClr val="9D174D"/>
-                </a:solidFill>
-                <a:latin typeface="Trebuchet MS" pitchFamily="34" charset="0"/>
-                <a:ea typeface="Trebuchet MS" pitchFamily="34" charset="-122"/>
-                <a:cs typeface="Trebuchet MS" pitchFamily="34" charset="-120"/>
-              </a:rPr>
-              <a:t>n</a:t>
-            </a:r>
-            <a:endParaRPr lang="en-US" sz="900" dirty="0"/>
-          </a:p>
-        </p:txBody>
-      </p:sp>
-      <p:sp>
-        <p:nvSpPr>
-          <p:cNvPr id="61" name="Shape 59"/>
-          <p:cNvSpPr/>
-          <p:nvPr/>
-        </p:nvSpPr>
-        <p:spPr>
-          <a:xfrm>
-            <a:off x="7832252" y="4169664"/>
-            <a:ext cx="603504" cy="384048"/>
-          </a:xfrm>
-          <a:prstGeom prst="rect">
-            <a:avLst>
-              <a:gd name="adj" fmla="val 9524"/>
-            </a:avLst>
-          </a:prstGeom>
-          <a:solidFill>
-            <a:srgbClr val="FFFFFF"/>
-          </a:solidFill>
-          <a:ln w="12700">
-            <a:solidFill>
-              <a:srgbClr val="DB2777"/>
-            </a:solidFill>
-            <a:prstDash val="solid"/>
-          </a:ln>
-        </p:spPr>
-      </p:sp>
-      <p:sp>
-        <p:nvSpPr>
-          <p:cNvPr id="62" name="Text 60"/>
-          <p:cNvSpPr/>
-          <p:nvPr/>
-        </p:nvSpPr>
-        <p:spPr>
-          <a:xfrm>
-            <a:off x="7832252" y="4169664"/>
-            <a:ext cx="603504" cy="384048"/>
-          </a:xfrm>
-          <a:prstGeom prst="rect">
-            <a:avLst/>
-          </a:prstGeom>
-          <a:noFill/>
-          <a:ln/>
-        </p:spPr>
-        <p:txBody>
-          <a:bodyPr wrap="square" lIns="0" tIns="0" rIns="0" bIns="0" rtlCol="0" anchor="ctr"/>
-          <a:lstStyle/>
-          <a:p>
-            <a:pPr algn="ctr" indent="0" marL="0">
-              <a:buNone/>
-            </a:pPr>
-            <a:r>
-              <a:rPr lang="en-US" sz="900" b="1" dirty="0">
-                <a:solidFill>
-                  <a:srgbClr val="9D174D"/>
-                </a:solidFill>
-                <a:latin typeface="Trebuchet MS" pitchFamily="34" charset="0"/>
-                <a:ea typeface="Trebuchet MS" pitchFamily="34" charset="-122"/>
-                <a:cs typeface="Trebuchet MS" pitchFamily="34" charset="-120"/>
-              </a:rPr>
-              <a:t>t</a:t>
+              <a:t>s</a:t>
             </a:r>
             <a:endParaRPr lang="en-US" sz="900" dirty="0"/>
           </a:p>
@@ -17674,7 +17359,7 @@
                 <a:ea typeface="Calibri" pitchFamily="34" charset="-122"/>
                 <a:cs typeface="Calibri" pitchFamily="34" charset="-120"/>
               </a:rPr>
-              <a:t>Word Labs  •  wordlabs.app  •  Root: 'sign' = mark, symbol, or signal</a:t>
+              <a:t>Word Labs  •  wordlabs.app  •  Root: 'sign' = mark; signal</a:t>
             </a:r>
             <a:endParaRPr lang="en-US" sz="800" dirty="0"/>
           </a:p>
@@ -18314,7 +17999,7 @@
                 <a:ea typeface="Calibri" pitchFamily="34" charset="-122"/>
                 <a:cs typeface="Calibri" pitchFamily="34" charset="-120"/>
               </a:rPr>
-              <a:t>Word Labs  •  wordlabs.app  •  Root: 'sign' = mark, symbol, or signal</a:t>
+              <a:t>Word Labs  •  wordlabs.app  •  Root: 'sign' = mark; signal</a:t>
             </a:r>
             <a:endParaRPr lang="en-US" sz="800" dirty="0"/>
           </a:p>
@@ -18426,7 +18111,7 @@
                 <a:ea typeface="Calibri" pitchFamily="34" charset="-122"/>
                 <a:cs typeface="Calibri" pitchFamily="34" charset="-120"/>
               </a:rPr>
-              <a:t>After she </a:t>
+              <a:t>The teacher nodded, </a:t>
             </a:r>
             <a:pPr algn="l" indent="0" marL="0">
               <a:buNone/>
@@ -18443,7 +18128,7 @@
                 <a:ea typeface="Calibri" pitchFamily="34" charset="-122"/>
                 <a:cs typeface="Calibri" pitchFamily="34" charset="-120"/>
               </a:rPr>
-              <a:t>resigned</a:t>
+              <a:t>signifying</a:t>
             </a:r>
             <a:pPr algn="l" indent="0" marL="0">
               <a:buNone/>
@@ -18457,7 +18142,7 @@
                 <a:ea typeface="Calibri" pitchFamily="34" charset="-122"/>
                 <a:cs typeface="Calibri" pitchFamily="34" charset="-120"/>
               </a:rPr>
-              <a:t>, the council had to </a:t>
+              <a:t> that the answer was correct. Winning the competition was a </a:t>
             </a:r>
             <a:pPr algn="l" indent="0" marL="0">
               <a:buNone/>
@@ -18474,7 +18159,7 @@
                 <a:ea typeface="Calibri" pitchFamily="34" charset="-122"/>
                 <a:cs typeface="Calibri" pitchFamily="34" charset="-120"/>
               </a:rPr>
-              <a:t>reassign</a:t>
+              <a:t>significant</a:t>
             </a:r>
             <a:pPr algn="l" indent="0" marL="0">
               <a:buNone/>
@@ -18488,7 +18173,7 @@
                 <a:ea typeface="Calibri" pitchFamily="34" charset="-122"/>
                 <a:cs typeface="Calibri" pitchFamily="34" charset="-120"/>
               </a:rPr>
-              <a:t> the project and create a new </a:t>
+              <a:t> moment for the whole team. The </a:t>
             </a:r>
             <a:pPr algn="l" indent="0" marL="0">
               <a:buNone/>
@@ -18505,7 +18190,7 @@
                 <a:ea typeface="Calibri" pitchFamily="34" charset="-122"/>
                 <a:cs typeface="Calibri" pitchFamily="34" charset="-120"/>
               </a:rPr>
-              <a:t>assignment</a:t>
+              <a:t>significance</a:t>
             </a:r>
             <a:pPr algn="l" indent="0" marL="0">
               <a:buNone/>
@@ -18519,7 +18204,7 @@
                 <a:ea typeface="Calibri" pitchFamily="34" charset="-122"/>
                 <a:cs typeface="Calibri" pitchFamily="34" charset="-120"/>
               </a:rPr>
-              <a:t> for the team.</a:t>
+              <a:t> of the discovery was explained by the scientist.</a:t>
             </a:r>
             <a:endParaRPr lang="en-US" sz="1800" dirty="0"/>
           </a:p>
@@ -18674,7 +18359,7 @@
                 <a:ea typeface="Trebuchet MS" pitchFamily="34" charset="-122"/>
                 <a:cs typeface="Trebuchet MS" pitchFamily="34" charset="-120"/>
               </a:rPr>
-              <a:t>resigned</a:t>
+              <a:t>signifying</a:t>
             </a:r>
             <a:endParaRPr lang="en-US" sz="1400" dirty="0"/>
           </a:p>
@@ -18802,7 +18487,7 @@
                 <a:ea typeface="Trebuchet MS" pitchFamily="34" charset="-122"/>
                 <a:cs typeface="Trebuchet MS" pitchFamily="34" charset="-120"/>
               </a:rPr>
-              <a:t>reassign</a:t>
+              <a:t>significant</a:t>
             </a:r>
             <a:endParaRPr lang="en-US" sz="1400" dirty="0"/>
           </a:p>
@@ -18930,7 +18615,7 @@
                 <a:ea typeface="Trebuchet MS" pitchFamily="34" charset="-122"/>
                 <a:cs typeface="Trebuchet MS" pitchFamily="34" charset="-120"/>
               </a:rPr>
-              <a:t>assignment</a:t>
+              <a:t>significance</a:t>
             </a:r>
             <a:endParaRPr lang="en-US" sz="1400" dirty="0"/>
           </a:p>
@@ -19261,7 +18946,7 @@
                 <a:ea typeface="Calibri" pitchFamily="34" charset="-122"/>
                 <a:cs typeface="Calibri" pitchFamily="34" charset="-120"/>
               </a:rPr>
-              <a:t>Word Labs  •  wordlabs.app  •  Root: 'sign' = mark, symbol, or signal</a:t>
+              <a:t>Word Labs  •  wordlabs.app  •  Root: 'sign' = mark; signal</a:t>
             </a:r>
             <a:endParaRPr lang="en-US" sz="800" dirty="0"/>
           </a:p>
@@ -19400,7 +19085,7 @@
                 <a:ea typeface="Trebuchet MS" pitchFamily="34" charset="-122"/>
                 <a:cs typeface="Trebuchet MS" pitchFamily="34" charset="-120"/>
               </a:rPr>
-              <a:t>resigned</a:t>
+              <a:t>signifying</a:t>
             </a:r>
             <a:endParaRPr lang="en-US" sz="2800" dirty="0"/>
           </a:p>
@@ -20088,7 +19773,7 @@
                 <a:ea typeface="Calibri" pitchFamily="34" charset="-122"/>
                 <a:cs typeface="Calibri" pitchFamily="34" charset="-120"/>
               </a:rPr>
-              <a:t>Word Labs  •  wordlabs.app  •  Root: 'sign' = mark, symbol, or signal</a:t>
+              <a:t>Word Labs  •  wordlabs.app  •  Root: 'sign' = mark; signal</a:t>
             </a:r>
             <a:endParaRPr lang="en-US" sz="800" dirty="0"/>
           </a:p>
@@ -20227,7 +19912,7 @@
                 <a:ea typeface="Trebuchet MS" pitchFamily="34" charset="-122"/>
                 <a:cs typeface="Trebuchet MS" pitchFamily="34" charset="-120"/>
               </a:rPr>
-              <a:t>resigned</a:t>
+              <a:t>signifying</a:t>
             </a:r>
             <a:endParaRPr lang="en-US" sz="2800" dirty="0"/>
           </a:p>
@@ -20316,11 +20001,11 @@
             </a:avLst>
           </a:prstGeom>
           <a:solidFill>
-            <a:srgbClr val="DDD6FE"/>
+            <a:srgbClr val="CCFBF1"/>
           </a:solidFill>
           <a:ln w="19050">
             <a:solidFill>
-              <a:srgbClr val="7C3AED"/>
+              <a:srgbClr val="0D9488"/>
             </a:solidFill>
             <a:prstDash val="solid"/>
           </a:ln>
@@ -20360,13 +20045,13 @@
             <a:r>
               <a:rPr lang="en-US" sz="1300" b="1" dirty="0">
                 <a:solidFill>
-                  <a:srgbClr val="4C1D95"/>
+                  <a:srgbClr val="0F766E"/>
                 </a:solidFill>
                 <a:latin typeface="Trebuchet MS" pitchFamily="34" charset="0"/>
                 <a:ea typeface="Trebuchet MS" pitchFamily="34" charset="-122"/>
                 <a:cs typeface="Trebuchet MS" pitchFamily="34" charset="-120"/>
               </a:rPr>
-              <a:t>re</a:t>
+              <a:t>sign</a:t>
             </a:r>
             <a:endParaRPr lang="en-US" sz="1300" dirty="0"/>
           </a:p>
@@ -20405,7 +20090,7 @@
                 <a:ea typeface="Calibri" pitchFamily="34" charset="-122"/>
                 <a:cs typeface="Calibri" pitchFamily="34" charset="-120"/>
               </a:rPr>
-              <a:t>again or back</a:t>
+              <a:t>mark; signal</a:t>
             </a:r>
             <a:endParaRPr lang="en-US" sz="850" dirty="0"/>
           </a:p>
@@ -20428,11 +20113,11 @@
             </a:avLst>
           </a:prstGeom>
           <a:solidFill>
-            <a:srgbClr val="CCFBF1"/>
+            <a:srgbClr val="FCE7F3"/>
           </a:solidFill>
           <a:ln w="19050">
             <a:solidFill>
-              <a:srgbClr val="0D9488"/>
+              <a:srgbClr val="DB2777"/>
             </a:solidFill>
             <a:prstDash val="solid"/>
           </a:ln>
@@ -20472,13 +20157,13 @@
             <a:r>
               <a:rPr lang="en-US" sz="1300" b="1" dirty="0">
                 <a:solidFill>
-                  <a:srgbClr val="0F766E"/>
+                  <a:srgbClr val="9D174D"/>
                 </a:solidFill>
                 <a:latin typeface="Trebuchet MS" pitchFamily="34" charset="0"/>
                 <a:ea typeface="Trebuchet MS" pitchFamily="34" charset="-122"/>
                 <a:cs typeface="Trebuchet MS" pitchFamily="34" charset="-120"/>
               </a:rPr>
-              <a:t>sign</a:t>
+              <a:t>ify</a:t>
             </a:r>
             <a:endParaRPr lang="en-US" sz="1300" dirty="0"/>
           </a:p>
@@ -20517,7 +20202,7 @@
                 <a:ea typeface="Calibri" pitchFamily="34" charset="-122"/>
                 <a:cs typeface="Calibri" pitchFamily="34" charset="-120"/>
               </a:rPr>
-              <a:t>mark or symbol</a:t>
+              <a:t>make</a:t>
             </a:r>
             <a:endParaRPr lang="en-US" sz="850" dirty="0"/>
           </a:p>
@@ -20590,7 +20275,7 @@
                 <a:ea typeface="Trebuchet MS" pitchFamily="34" charset="-122"/>
                 <a:cs typeface="Trebuchet MS" pitchFamily="34" charset="-120"/>
               </a:rPr>
-              <a:t>ed</a:t>
+              <a:t>ing</a:t>
             </a:r>
             <a:endParaRPr lang="en-US" sz="1300" dirty="0"/>
           </a:p>
@@ -20629,7 +20314,7 @@
                 <a:ea typeface="Calibri" pitchFamily="34" charset="-122"/>
                 <a:cs typeface="Calibri" pitchFamily="34" charset="-120"/>
               </a:rPr>
-              <a:t>past tense</a:t>
+              <a:t>happening now</a:t>
             </a:r>
             <a:endParaRPr lang="en-US" sz="850" dirty="0"/>
           </a:p>
@@ -21185,7 +20870,7 @@
                 <a:ea typeface="Calibri" pitchFamily="34" charset="-122"/>
                 <a:cs typeface="Calibri" pitchFamily="34" charset="-120"/>
               </a:rPr>
-              <a:t>Word Labs  •  wordlabs.app  •  Root: 'sign' = mark, symbol, or signal</a:t>
+              <a:t>Word Labs  •  wordlabs.app  •  Root: 'sign' = mark; signal</a:t>
             </a:r>
             <a:endParaRPr lang="en-US" sz="800" dirty="0"/>
           </a:p>
@@ -21324,7 +21009,7 @@
                 <a:ea typeface="Trebuchet MS" pitchFamily="34" charset="-122"/>
                 <a:cs typeface="Trebuchet MS" pitchFamily="34" charset="-120"/>
               </a:rPr>
-              <a:t>resigned</a:t>
+              <a:t>signifying</a:t>
             </a:r>
             <a:endParaRPr lang="en-US" sz="2800" dirty="0"/>
           </a:p>
@@ -21413,11 +21098,11 @@
             </a:avLst>
           </a:prstGeom>
           <a:solidFill>
-            <a:srgbClr val="DDD6FE"/>
+            <a:srgbClr val="CCFBF1"/>
           </a:solidFill>
           <a:ln w="19050">
             <a:solidFill>
-              <a:srgbClr val="7C3AED"/>
+              <a:srgbClr val="0D9488"/>
             </a:solidFill>
             <a:prstDash val="solid"/>
           </a:ln>
@@ -21457,13 +21142,13 @@
             <a:r>
               <a:rPr lang="en-US" sz="1300" b="1" dirty="0">
                 <a:solidFill>
-                  <a:srgbClr val="4C1D95"/>
+                  <a:srgbClr val="0F766E"/>
                 </a:solidFill>
                 <a:latin typeface="Trebuchet MS" pitchFamily="34" charset="0"/>
                 <a:ea typeface="Trebuchet MS" pitchFamily="34" charset="-122"/>
                 <a:cs typeface="Trebuchet MS" pitchFamily="34" charset="-120"/>
               </a:rPr>
-              <a:t>re</a:t>
+              <a:t>sign</a:t>
             </a:r>
             <a:endParaRPr lang="en-US" sz="1300" dirty="0"/>
           </a:p>
@@ -21502,7 +21187,7 @@
                 <a:ea typeface="Calibri" pitchFamily="34" charset="-122"/>
                 <a:cs typeface="Calibri" pitchFamily="34" charset="-120"/>
               </a:rPr>
-              <a:t>again or back</a:t>
+              <a:t>mark; signal</a:t>
             </a:r>
             <a:endParaRPr lang="en-US" sz="850" dirty="0"/>
           </a:p>
@@ -21525,11 +21210,11 @@
             </a:avLst>
           </a:prstGeom>
           <a:solidFill>
-            <a:srgbClr val="CCFBF1"/>
+            <a:srgbClr val="FCE7F3"/>
           </a:solidFill>
           <a:ln w="19050">
             <a:solidFill>
-              <a:srgbClr val="0D9488"/>
+              <a:srgbClr val="DB2777"/>
             </a:solidFill>
             <a:prstDash val="solid"/>
           </a:ln>
@@ -21569,13 +21254,13 @@
             <a:r>
               <a:rPr lang="en-US" sz="1300" b="1" dirty="0">
                 <a:solidFill>
-                  <a:srgbClr val="0F766E"/>
+                  <a:srgbClr val="9D174D"/>
                 </a:solidFill>
                 <a:latin typeface="Trebuchet MS" pitchFamily="34" charset="0"/>
                 <a:ea typeface="Trebuchet MS" pitchFamily="34" charset="-122"/>
                 <a:cs typeface="Trebuchet MS" pitchFamily="34" charset="-120"/>
               </a:rPr>
-              <a:t>sign</a:t>
+              <a:t>ify</a:t>
             </a:r>
             <a:endParaRPr lang="en-US" sz="1300" dirty="0"/>
           </a:p>
@@ -21614,7 +21299,7 @@
                 <a:ea typeface="Calibri" pitchFamily="34" charset="-122"/>
                 <a:cs typeface="Calibri" pitchFamily="34" charset="-120"/>
               </a:rPr>
-              <a:t>mark or symbol</a:t>
+              <a:t>make</a:t>
             </a:r>
             <a:endParaRPr lang="en-US" sz="850" dirty="0"/>
           </a:p>
@@ -21687,7 +21372,7 @@
                 <a:ea typeface="Trebuchet MS" pitchFamily="34" charset="-122"/>
                 <a:cs typeface="Trebuchet MS" pitchFamily="34" charset="-120"/>
               </a:rPr>
-              <a:t>ed</a:t>
+              <a:t>ing</a:t>
             </a:r>
             <a:endParaRPr lang="en-US" sz="1300" dirty="0"/>
           </a:p>
@@ -21726,7 +21411,7 @@
                 <a:ea typeface="Calibri" pitchFamily="34" charset="-122"/>
                 <a:cs typeface="Calibri" pitchFamily="34" charset="-120"/>
               </a:rPr>
-              <a:t>past tense</a:t>
+              <a:t>happening now</a:t>
             </a:r>
             <a:endParaRPr lang="en-US" sz="850" dirty="0"/>
           </a:p>
@@ -21833,8 +21518,8 @@
         </p:nvSpPr>
         <p:spPr>
           <a:xfrm>
-            <a:off x="2999232" y="3364992"/>
-            <a:ext cx="1645920" cy="475488"/>
+            <a:off x="1975104" y="3364992"/>
+            <a:ext cx="1554480" cy="475488"/>
           </a:xfrm>
           <a:prstGeom prst="rect">
             <a:avLst>
@@ -21860,8 +21545,8 @@
         </p:nvSpPr>
         <p:spPr>
           <a:xfrm>
-            <a:off x="2999232" y="3364992"/>
-            <a:ext cx="1645920" cy="475488"/>
+            <a:off x="1975104" y="3364992"/>
+            <a:ext cx="1554480" cy="475488"/>
           </a:xfrm>
           <a:prstGeom prst="rect">
             <a:avLst/>
@@ -21885,7 +21570,7 @@
                 <a:ea typeface="Trebuchet MS" pitchFamily="34" charset="-122"/>
                 <a:cs typeface="Trebuchet MS" pitchFamily="34" charset="-120"/>
               </a:rPr>
-              <a:t>re</a:t>
+              <a:t>sig</a:t>
             </a:r>
             <a:endParaRPr lang="en-US" sz="1400" dirty="0"/>
           </a:p>
@@ -21899,8 +21584,8 @@
         </p:nvSpPr>
         <p:spPr>
           <a:xfrm>
-            <a:off x="4645152" y="3364992"/>
-            <a:ext cx="1097280" cy="475488"/>
+            <a:off x="3529584" y="3364992"/>
+            <a:ext cx="73152" cy="475488"/>
           </a:xfrm>
           <a:prstGeom prst="rect">
             <a:avLst/>
@@ -21938,8 +21623,8 @@
         </p:nvSpPr>
         <p:spPr>
           <a:xfrm>
-            <a:off x="5742432" y="3364992"/>
-            <a:ext cx="1645920" cy="475488"/>
+            <a:off x="3602736" y="3364992"/>
+            <a:ext cx="1554480" cy="475488"/>
           </a:xfrm>
           <a:prstGeom prst="rect">
             <a:avLst>
@@ -21965,8 +21650,8 @@
         </p:nvSpPr>
         <p:spPr>
           <a:xfrm>
-            <a:off x="5742432" y="3364992"/>
-            <a:ext cx="1645920" cy="475488"/>
+            <a:off x="3602736" y="3364992"/>
+            <a:ext cx="1554480" cy="475488"/>
           </a:xfrm>
           <a:prstGeom prst="rect">
             <a:avLst/>
@@ -21990,7 +21675,7 @@
                 <a:ea typeface="Trebuchet MS" pitchFamily="34" charset="-122"/>
                 <a:cs typeface="Trebuchet MS" pitchFamily="34" charset="-120"/>
               </a:rPr>
-              <a:t>signed</a:t>
+              <a:t>ni</a:t>
             </a:r>
             <a:endParaRPr lang="en-US" sz="1400" dirty="0"/>
           </a:p>
@@ -21998,7 +21683,217 @@
       </p:sp>
       <p:sp>
         <p:nvSpPr>
-          <p:cNvPr id="33" name="Shape 31"/>
+          <p:cNvPr id="33" name="Text 31"/>
+          <p:cNvSpPr/>
+          <p:nvPr/>
+        </p:nvSpPr>
+        <p:spPr>
+          <a:xfrm>
+            <a:off x="5157216" y="3364992"/>
+            <a:ext cx="73152" cy="475488"/>
+          </a:xfrm>
+          <a:prstGeom prst="rect">
+            <a:avLst/>
+          </a:prstGeom>
+          <a:noFill/>
+          <a:ln/>
+        </p:spPr>
+        <p:txBody>
+          <a:bodyPr wrap="square" lIns="0" tIns="0" rIns="0" bIns="0" rtlCol="0" anchor="ctr"/>
+          <a:lstStyle/>
+          <a:p>
+            <a:pPr algn="ctr" indent="0" marL="0">
+              <a:buNone/>
+            </a:pPr>
+            <a:r>
+              <a:rPr lang="en-US" sz="1600" b="1" dirty="0">
+                <a:solidFill>
+                  <a:srgbClr val="0D9488"/>
+                </a:solidFill>
+                <a:latin typeface="Trebuchet MS" pitchFamily="34" charset="0"/>
+                <a:ea typeface="Trebuchet MS" pitchFamily="34" charset="-122"/>
+                <a:cs typeface="Trebuchet MS" pitchFamily="34" charset="-120"/>
+              </a:rPr>
+              <a:t>·</a:t>
+            </a:r>
+            <a:endParaRPr lang="en-US" sz="1600" dirty="0"/>
+          </a:p>
+        </p:txBody>
+      </p:sp>
+      <p:sp>
+        <p:nvSpPr>
+          <p:cNvPr id="34" name="Shape 32"/>
+          <p:cNvSpPr/>
+          <p:nvPr/>
+        </p:nvSpPr>
+        <p:spPr>
+          <a:xfrm>
+            <a:off x="5230368" y="3364992"/>
+            <a:ext cx="1554480" cy="475488"/>
+          </a:xfrm>
+          <a:prstGeom prst="rect">
+            <a:avLst>
+              <a:gd name="adj" fmla="val 9615"/>
+            </a:avLst>
+          </a:prstGeom>
+          <a:solidFill>
+            <a:srgbClr val="FFFFFF"/>
+          </a:solidFill>
+          <a:ln w="12700">
+            <a:solidFill>
+              <a:srgbClr val="0D9488"/>
+            </a:solidFill>
+            <a:prstDash val="solid"/>
+          </a:ln>
+        </p:spPr>
+      </p:sp>
+      <p:sp>
+        <p:nvSpPr>
+          <p:cNvPr id="35" name="Text 33"/>
+          <p:cNvSpPr/>
+          <p:nvPr/>
+        </p:nvSpPr>
+        <p:spPr>
+          <a:xfrm>
+            <a:off x="5230368" y="3364992"/>
+            <a:ext cx="1554480" cy="475488"/>
+          </a:xfrm>
+          <a:prstGeom prst="rect">
+            <a:avLst/>
+          </a:prstGeom>
+          <a:noFill/>
+          <a:ln/>
+        </p:spPr>
+        <p:txBody>
+          <a:bodyPr wrap="square" lIns="0" tIns="0" rIns="0" bIns="0" rtlCol="0" anchor="ctr"/>
+          <a:lstStyle/>
+          <a:p>
+            <a:pPr algn="ctr" indent="0" marL="0">
+              <a:buNone/>
+            </a:pPr>
+            <a:r>
+              <a:rPr lang="en-US" sz="1400" b="1" dirty="0">
+                <a:solidFill>
+                  <a:srgbClr val="0D9488"/>
+                </a:solidFill>
+                <a:latin typeface="Trebuchet MS" pitchFamily="34" charset="0"/>
+                <a:ea typeface="Trebuchet MS" pitchFamily="34" charset="-122"/>
+                <a:cs typeface="Trebuchet MS" pitchFamily="34" charset="-120"/>
+              </a:rPr>
+              <a:t>fy</a:t>
+            </a:r>
+            <a:endParaRPr lang="en-US" sz="1400" dirty="0"/>
+          </a:p>
+        </p:txBody>
+      </p:sp>
+      <p:sp>
+        <p:nvSpPr>
+          <p:cNvPr id="36" name="Text 34"/>
+          <p:cNvSpPr/>
+          <p:nvPr/>
+        </p:nvSpPr>
+        <p:spPr>
+          <a:xfrm>
+            <a:off x="6784848" y="3364992"/>
+            <a:ext cx="73152" cy="475488"/>
+          </a:xfrm>
+          <a:prstGeom prst="rect">
+            <a:avLst/>
+          </a:prstGeom>
+          <a:noFill/>
+          <a:ln/>
+        </p:spPr>
+        <p:txBody>
+          <a:bodyPr wrap="square" lIns="0" tIns="0" rIns="0" bIns="0" rtlCol="0" anchor="ctr"/>
+          <a:lstStyle/>
+          <a:p>
+            <a:pPr algn="ctr" indent="0" marL="0">
+              <a:buNone/>
+            </a:pPr>
+            <a:r>
+              <a:rPr lang="en-US" sz="1600" b="1" dirty="0">
+                <a:solidFill>
+                  <a:srgbClr val="0D9488"/>
+                </a:solidFill>
+                <a:latin typeface="Trebuchet MS" pitchFamily="34" charset="0"/>
+                <a:ea typeface="Trebuchet MS" pitchFamily="34" charset="-122"/>
+                <a:cs typeface="Trebuchet MS" pitchFamily="34" charset="-120"/>
+              </a:rPr>
+              <a:t>·</a:t>
+            </a:r>
+            <a:endParaRPr lang="en-US" sz="1600" dirty="0"/>
+          </a:p>
+        </p:txBody>
+      </p:sp>
+      <p:sp>
+        <p:nvSpPr>
+          <p:cNvPr id="37" name="Shape 35"/>
+          <p:cNvSpPr/>
+          <p:nvPr/>
+        </p:nvSpPr>
+        <p:spPr>
+          <a:xfrm>
+            <a:off x="6858000" y="3364992"/>
+            <a:ext cx="1554480" cy="475488"/>
+          </a:xfrm>
+          <a:prstGeom prst="rect">
+            <a:avLst>
+              <a:gd name="adj" fmla="val 9615"/>
+            </a:avLst>
+          </a:prstGeom>
+          <a:solidFill>
+            <a:srgbClr val="FFFFFF"/>
+          </a:solidFill>
+          <a:ln w="12700">
+            <a:solidFill>
+              <a:srgbClr val="0D9488"/>
+            </a:solidFill>
+            <a:prstDash val="solid"/>
+          </a:ln>
+        </p:spPr>
+      </p:sp>
+      <p:sp>
+        <p:nvSpPr>
+          <p:cNvPr id="38" name="Text 36"/>
+          <p:cNvSpPr/>
+          <p:nvPr/>
+        </p:nvSpPr>
+        <p:spPr>
+          <a:xfrm>
+            <a:off x="6858000" y="3364992"/>
+            <a:ext cx="1554480" cy="475488"/>
+          </a:xfrm>
+          <a:prstGeom prst="rect">
+            <a:avLst/>
+          </a:prstGeom>
+          <a:noFill/>
+          <a:ln/>
+        </p:spPr>
+        <p:txBody>
+          <a:bodyPr wrap="square" lIns="0" tIns="0" rIns="0" bIns="0" rtlCol="0" anchor="ctr"/>
+          <a:lstStyle/>
+          <a:p>
+            <a:pPr algn="ctr" indent="0" marL="0">
+              <a:buNone/>
+            </a:pPr>
+            <a:r>
+              <a:rPr lang="en-US" sz="1400" b="1" dirty="0">
+                <a:solidFill>
+                  <a:srgbClr val="0D9488"/>
+                </a:solidFill>
+                <a:latin typeface="Trebuchet MS" pitchFamily="34" charset="0"/>
+                <a:ea typeface="Trebuchet MS" pitchFamily="34" charset="-122"/>
+                <a:cs typeface="Trebuchet MS" pitchFamily="34" charset="-120"/>
+              </a:rPr>
+              <a:t>ing</a:t>
+            </a:r>
+            <a:endParaRPr lang="en-US" sz="1400" dirty="0"/>
+          </a:p>
+        </p:txBody>
+      </p:sp>
+      <p:sp>
+        <p:nvSpPr>
+          <p:cNvPr id="39" name="Shape 37"/>
           <p:cNvSpPr/>
           <p:nvPr/>
         </p:nvSpPr>
@@ -22025,7 +21920,7 @@
       </p:sp>
       <p:sp>
         <p:nvSpPr>
-          <p:cNvPr id="34" name="Text 32"/>
+          <p:cNvPr id="40" name="Text 38"/>
           <p:cNvSpPr/>
           <p:nvPr/>
         </p:nvSpPr>
@@ -22064,7 +21959,7 @@
       </p:sp>
       <p:sp>
         <p:nvSpPr>
-          <p:cNvPr id="35" name="Shape 33"/>
+          <p:cNvPr id="41" name="Shape 39"/>
           <p:cNvSpPr/>
           <p:nvPr/>
         </p:nvSpPr>
@@ -22091,7 +21986,7 @@
       </p:sp>
       <p:sp>
         <p:nvSpPr>
-          <p:cNvPr id="36" name="Text 34"/>
+          <p:cNvPr id="42" name="Text 40"/>
           <p:cNvSpPr/>
           <p:nvPr/>
         </p:nvSpPr>
@@ -22414,7 +22309,7 @@
                 <a:ea typeface="Calibri" pitchFamily="34" charset="-122"/>
                 <a:cs typeface="Calibri" pitchFamily="34" charset="-120"/>
               </a:rPr>
-              <a:t>Word Labs  •  wordlabs.app  •  Root: 'sign' = mark, symbol, or signal</a:t>
+              <a:t>Word Labs  •  wordlabs.app  •  Root: 'sign' = mark; signal</a:t>
             </a:r>
             <a:endParaRPr lang="en-US" sz="800" dirty="0"/>
           </a:p>
@@ -22553,7 +22448,7 @@
                 <a:ea typeface="Trebuchet MS" pitchFamily="34" charset="-122"/>
                 <a:cs typeface="Trebuchet MS" pitchFamily="34" charset="-120"/>
               </a:rPr>
-              <a:t>resigned</a:t>
+              <a:t>signifying</a:t>
             </a:r>
             <a:endParaRPr lang="en-US" sz="2800" dirty="0"/>
           </a:p>
@@ -22642,11 +22537,11 @@
             </a:avLst>
           </a:prstGeom>
           <a:solidFill>
-            <a:srgbClr val="DDD6FE"/>
+            <a:srgbClr val="CCFBF1"/>
           </a:solidFill>
           <a:ln w="19050">
             <a:solidFill>
-              <a:srgbClr val="7C3AED"/>
+              <a:srgbClr val="0D9488"/>
             </a:solidFill>
             <a:prstDash val="solid"/>
           </a:ln>
@@ -22686,13 +22581,13 @@
             <a:r>
               <a:rPr lang="en-US" sz="1300" b="1" dirty="0">
                 <a:solidFill>
-                  <a:srgbClr val="4C1D95"/>
+                  <a:srgbClr val="0F766E"/>
                 </a:solidFill>
                 <a:latin typeface="Trebuchet MS" pitchFamily="34" charset="0"/>
                 <a:ea typeface="Trebuchet MS" pitchFamily="34" charset="-122"/>
                 <a:cs typeface="Trebuchet MS" pitchFamily="34" charset="-120"/>
               </a:rPr>
-              <a:t>re</a:t>
+              <a:t>sign</a:t>
             </a:r>
             <a:endParaRPr lang="en-US" sz="1300" dirty="0"/>
           </a:p>
@@ -22731,7 +22626,7 @@
                 <a:ea typeface="Calibri" pitchFamily="34" charset="-122"/>
                 <a:cs typeface="Calibri" pitchFamily="34" charset="-120"/>
               </a:rPr>
-              <a:t>again or back</a:t>
+              <a:t>mark; signal</a:t>
             </a:r>
             <a:endParaRPr lang="en-US" sz="850" dirty="0"/>
           </a:p>
@@ -22754,11 +22649,11 @@
             </a:avLst>
           </a:prstGeom>
           <a:solidFill>
-            <a:srgbClr val="CCFBF1"/>
+            <a:srgbClr val="FCE7F3"/>
           </a:solidFill>
           <a:ln w="19050">
             <a:solidFill>
-              <a:srgbClr val="0D9488"/>
+              <a:srgbClr val="DB2777"/>
             </a:solidFill>
             <a:prstDash val="solid"/>
           </a:ln>
@@ -22798,13 +22693,13 @@
             <a:r>
               <a:rPr lang="en-US" sz="1300" b="1" dirty="0">
                 <a:solidFill>
-                  <a:srgbClr val="0F766E"/>
+                  <a:srgbClr val="9D174D"/>
                 </a:solidFill>
                 <a:latin typeface="Trebuchet MS" pitchFamily="34" charset="0"/>
                 <a:ea typeface="Trebuchet MS" pitchFamily="34" charset="-122"/>
                 <a:cs typeface="Trebuchet MS" pitchFamily="34" charset="-120"/>
               </a:rPr>
-              <a:t>sign</a:t>
+              <a:t>ify</a:t>
             </a:r>
             <a:endParaRPr lang="en-US" sz="1300" dirty="0"/>
           </a:p>
@@ -22843,7 +22738,7 @@
                 <a:ea typeface="Calibri" pitchFamily="34" charset="-122"/>
                 <a:cs typeface="Calibri" pitchFamily="34" charset="-120"/>
               </a:rPr>
-              <a:t>mark or symbol</a:t>
+              <a:t>make</a:t>
             </a:r>
             <a:endParaRPr lang="en-US" sz="850" dirty="0"/>
           </a:p>
@@ -22916,7 +22811,7 @@
                 <a:ea typeface="Trebuchet MS" pitchFamily="34" charset="-122"/>
                 <a:cs typeface="Trebuchet MS" pitchFamily="34" charset="-120"/>
               </a:rPr>
-              <a:t>ed</a:t>
+              <a:t>ing</a:t>
             </a:r>
             <a:endParaRPr lang="en-US" sz="1300" dirty="0"/>
           </a:p>
@@ -22955,7 +22850,7 @@
                 <a:ea typeface="Calibri" pitchFamily="34" charset="-122"/>
                 <a:cs typeface="Calibri" pitchFamily="34" charset="-120"/>
               </a:rPr>
-              <a:t>past tense</a:t>
+              <a:t>happening now</a:t>
             </a:r>
             <a:endParaRPr lang="en-US" sz="850" dirty="0"/>
           </a:p>
@@ -23062,8 +22957,8 @@
         </p:nvSpPr>
         <p:spPr>
           <a:xfrm>
-            <a:off x="2999232" y="3364992"/>
-            <a:ext cx="1645920" cy="475488"/>
+            <a:off x="1975104" y="3364992"/>
+            <a:ext cx="1554480" cy="475488"/>
           </a:xfrm>
           <a:prstGeom prst="rect">
             <a:avLst>
@@ -23089,8 +22984,8 @@
         </p:nvSpPr>
         <p:spPr>
           <a:xfrm>
-            <a:off x="2999232" y="3364992"/>
-            <a:ext cx="1645920" cy="475488"/>
+            <a:off x="1975104" y="3364992"/>
+            <a:ext cx="1554480" cy="475488"/>
           </a:xfrm>
           <a:prstGeom prst="rect">
             <a:avLst/>
@@ -23114,7 +23009,7 @@
                 <a:ea typeface="Trebuchet MS" pitchFamily="34" charset="-122"/>
                 <a:cs typeface="Trebuchet MS" pitchFamily="34" charset="-120"/>
               </a:rPr>
-              <a:t>re</a:t>
+              <a:t>sig</a:t>
             </a:r>
             <a:endParaRPr lang="en-US" sz="1400" dirty="0"/>
           </a:p>
@@ -23128,8 +23023,8 @@
         </p:nvSpPr>
         <p:spPr>
           <a:xfrm>
-            <a:off x="4645152" y="3364992"/>
-            <a:ext cx="1097280" cy="475488"/>
+            <a:off x="3529584" y="3364992"/>
+            <a:ext cx="73152" cy="475488"/>
           </a:xfrm>
           <a:prstGeom prst="rect">
             <a:avLst/>
@@ -23167,8 +23062,8 @@
         </p:nvSpPr>
         <p:spPr>
           <a:xfrm>
-            <a:off x="5742432" y="3364992"/>
-            <a:ext cx="1645920" cy="475488"/>
+            <a:off x="3602736" y="3364992"/>
+            <a:ext cx="1554480" cy="475488"/>
           </a:xfrm>
           <a:prstGeom prst="rect">
             <a:avLst>
@@ -23194,8 +23089,8 @@
         </p:nvSpPr>
         <p:spPr>
           <a:xfrm>
-            <a:off x="5742432" y="3364992"/>
-            <a:ext cx="1645920" cy="475488"/>
+            <a:off x="3602736" y="3364992"/>
+            <a:ext cx="1554480" cy="475488"/>
           </a:xfrm>
           <a:prstGeom prst="rect">
             <a:avLst/>
@@ -23219,7 +23114,7 @@
                 <a:ea typeface="Trebuchet MS" pitchFamily="34" charset="-122"/>
                 <a:cs typeface="Trebuchet MS" pitchFamily="34" charset="-120"/>
               </a:rPr>
-              <a:t>signed</a:t>
+              <a:t>ni</a:t>
             </a:r>
             <a:endParaRPr lang="en-US" sz="1400" dirty="0"/>
           </a:p>
@@ -23227,7 +23122,217 @@
       </p:sp>
       <p:sp>
         <p:nvSpPr>
-          <p:cNvPr id="33" name="Shape 31"/>
+          <p:cNvPr id="33" name="Text 31"/>
+          <p:cNvSpPr/>
+          <p:nvPr/>
+        </p:nvSpPr>
+        <p:spPr>
+          <a:xfrm>
+            <a:off x="5157216" y="3364992"/>
+            <a:ext cx="73152" cy="475488"/>
+          </a:xfrm>
+          <a:prstGeom prst="rect">
+            <a:avLst/>
+          </a:prstGeom>
+          <a:noFill/>
+          <a:ln/>
+        </p:spPr>
+        <p:txBody>
+          <a:bodyPr wrap="square" lIns="0" tIns="0" rIns="0" bIns="0" rtlCol="0" anchor="ctr"/>
+          <a:lstStyle/>
+          <a:p>
+            <a:pPr algn="ctr" indent="0" marL="0">
+              <a:buNone/>
+            </a:pPr>
+            <a:r>
+              <a:rPr lang="en-US" sz="1600" b="1" dirty="0">
+                <a:solidFill>
+                  <a:srgbClr val="0D9488"/>
+                </a:solidFill>
+                <a:latin typeface="Trebuchet MS" pitchFamily="34" charset="0"/>
+                <a:ea typeface="Trebuchet MS" pitchFamily="34" charset="-122"/>
+                <a:cs typeface="Trebuchet MS" pitchFamily="34" charset="-120"/>
+              </a:rPr>
+              <a:t>·</a:t>
+            </a:r>
+            <a:endParaRPr lang="en-US" sz="1600" dirty="0"/>
+          </a:p>
+        </p:txBody>
+      </p:sp>
+      <p:sp>
+        <p:nvSpPr>
+          <p:cNvPr id="34" name="Shape 32"/>
+          <p:cNvSpPr/>
+          <p:nvPr/>
+        </p:nvSpPr>
+        <p:spPr>
+          <a:xfrm>
+            <a:off x="5230368" y="3364992"/>
+            <a:ext cx="1554480" cy="475488"/>
+          </a:xfrm>
+          <a:prstGeom prst="rect">
+            <a:avLst>
+              <a:gd name="adj" fmla="val 9615"/>
+            </a:avLst>
+          </a:prstGeom>
+          <a:solidFill>
+            <a:srgbClr val="FFFFFF"/>
+          </a:solidFill>
+          <a:ln w="12700">
+            <a:solidFill>
+              <a:srgbClr val="0D9488"/>
+            </a:solidFill>
+            <a:prstDash val="solid"/>
+          </a:ln>
+        </p:spPr>
+      </p:sp>
+      <p:sp>
+        <p:nvSpPr>
+          <p:cNvPr id="35" name="Text 33"/>
+          <p:cNvSpPr/>
+          <p:nvPr/>
+        </p:nvSpPr>
+        <p:spPr>
+          <a:xfrm>
+            <a:off x="5230368" y="3364992"/>
+            <a:ext cx="1554480" cy="475488"/>
+          </a:xfrm>
+          <a:prstGeom prst="rect">
+            <a:avLst/>
+          </a:prstGeom>
+          <a:noFill/>
+          <a:ln/>
+        </p:spPr>
+        <p:txBody>
+          <a:bodyPr wrap="square" lIns="0" tIns="0" rIns="0" bIns="0" rtlCol="0" anchor="ctr"/>
+          <a:lstStyle/>
+          <a:p>
+            <a:pPr algn="ctr" indent="0" marL="0">
+              <a:buNone/>
+            </a:pPr>
+            <a:r>
+              <a:rPr lang="en-US" sz="1400" b="1" dirty="0">
+                <a:solidFill>
+                  <a:srgbClr val="0D9488"/>
+                </a:solidFill>
+                <a:latin typeface="Trebuchet MS" pitchFamily="34" charset="0"/>
+                <a:ea typeface="Trebuchet MS" pitchFamily="34" charset="-122"/>
+                <a:cs typeface="Trebuchet MS" pitchFamily="34" charset="-120"/>
+              </a:rPr>
+              <a:t>fy</a:t>
+            </a:r>
+            <a:endParaRPr lang="en-US" sz="1400" dirty="0"/>
+          </a:p>
+        </p:txBody>
+      </p:sp>
+      <p:sp>
+        <p:nvSpPr>
+          <p:cNvPr id="36" name="Text 34"/>
+          <p:cNvSpPr/>
+          <p:nvPr/>
+        </p:nvSpPr>
+        <p:spPr>
+          <a:xfrm>
+            <a:off x="6784848" y="3364992"/>
+            <a:ext cx="73152" cy="475488"/>
+          </a:xfrm>
+          <a:prstGeom prst="rect">
+            <a:avLst/>
+          </a:prstGeom>
+          <a:noFill/>
+          <a:ln/>
+        </p:spPr>
+        <p:txBody>
+          <a:bodyPr wrap="square" lIns="0" tIns="0" rIns="0" bIns="0" rtlCol="0" anchor="ctr"/>
+          <a:lstStyle/>
+          <a:p>
+            <a:pPr algn="ctr" indent="0" marL="0">
+              <a:buNone/>
+            </a:pPr>
+            <a:r>
+              <a:rPr lang="en-US" sz="1600" b="1" dirty="0">
+                <a:solidFill>
+                  <a:srgbClr val="0D9488"/>
+                </a:solidFill>
+                <a:latin typeface="Trebuchet MS" pitchFamily="34" charset="0"/>
+                <a:ea typeface="Trebuchet MS" pitchFamily="34" charset="-122"/>
+                <a:cs typeface="Trebuchet MS" pitchFamily="34" charset="-120"/>
+              </a:rPr>
+              <a:t>·</a:t>
+            </a:r>
+            <a:endParaRPr lang="en-US" sz="1600" dirty="0"/>
+          </a:p>
+        </p:txBody>
+      </p:sp>
+      <p:sp>
+        <p:nvSpPr>
+          <p:cNvPr id="37" name="Shape 35"/>
+          <p:cNvSpPr/>
+          <p:nvPr/>
+        </p:nvSpPr>
+        <p:spPr>
+          <a:xfrm>
+            <a:off x="6858000" y="3364992"/>
+            <a:ext cx="1554480" cy="475488"/>
+          </a:xfrm>
+          <a:prstGeom prst="rect">
+            <a:avLst>
+              <a:gd name="adj" fmla="val 9615"/>
+            </a:avLst>
+          </a:prstGeom>
+          <a:solidFill>
+            <a:srgbClr val="FFFFFF"/>
+          </a:solidFill>
+          <a:ln w="12700">
+            <a:solidFill>
+              <a:srgbClr val="0D9488"/>
+            </a:solidFill>
+            <a:prstDash val="solid"/>
+          </a:ln>
+        </p:spPr>
+      </p:sp>
+      <p:sp>
+        <p:nvSpPr>
+          <p:cNvPr id="38" name="Text 36"/>
+          <p:cNvSpPr/>
+          <p:nvPr/>
+        </p:nvSpPr>
+        <p:spPr>
+          <a:xfrm>
+            <a:off x="6858000" y="3364992"/>
+            <a:ext cx="1554480" cy="475488"/>
+          </a:xfrm>
+          <a:prstGeom prst="rect">
+            <a:avLst/>
+          </a:prstGeom>
+          <a:noFill/>
+          <a:ln/>
+        </p:spPr>
+        <p:txBody>
+          <a:bodyPr wrap="square" lIns="0" tIns="0" rIns="0" bIns="0" rtlCol="0" anchor="ctr"/>
+          <a:lstStyle/>
+          <a:p>
+            <a:pPr algn="ctr" indent="0" marL="0">
+              <a:buNone/>
+            </a:pPr>
+            <a:r>
+              <a:rPr lang="en-US" sz="1400" b="1" dirty="0">
+                <a:solidFill>
+                  <a:srgbClr val="0D9488"/>
+                </a:solidFill>
+                <a:latin typeface="Trebuchet MS" pitchFamily="34" charset="0"/>
+                <a:ea typeface="Trebuchet MS" pitchFamily="34" charset="-122"/>
+                <a:cs typeface="Trebuchet MS" pitchFamily="34" charset="-120"/>
+              </a:rPr>
+              <a:t>ing</a:t>
+            </a:r>
+            <a:endParaRPr lang="en-US" sz="1400" dirty="0"/>
+          </a:p>
+        </p:txBody>
+      </p:sp>
+      <p:sp>
+        <p:nvSpPr>
+          <p:cNvPr id="39" name="Shape 37"/>
           <p:cNvSpPr/>
           <p:nvPr/>
         </p:nvSpPr>
@@ -23254,7 +23359,7 @@
       </p:sp>
       <p:sp>
         <p:nvSpPr>
-          <p:cNvPr id="34" name="Text 32"/>
+          <p:cNvPr id="40" name="Text 38"/>
           <p:cNvSpPr/>
           <p:nvPr/>
         </p:nvSpPr>
@@ -23293,7 +23398,7 @@
       </p:sp>
       <p:sp>
         <p:nvSpPr>
-          <p:cNvPr id="35" name="Shape 33"/>
+          <p:cNvPr id="41" name="Shape 39"/>
           <p:cNvSpPr/>
           <p:nvPr/>
         </p:nvSpPr>
@@ -23320,14 +23425,14 @@
       </p:sp>
       <p:sp>
         <p:nvSpPr>
-          <p:cNvPr id="36" name="Shape 34"/>
-          <p:cNvSpPr/>
-          <p:nvPr/>
-        </p:nvSpPr>
-        <p:spPr>
-          <a:xfrm>
-            <a:off x="2124837" y="4169664"/>
-            <a:ext cx="685800" cy="475488"/>
+          <p:cNvPr id="42" name="Shape 40"/>
+          <p:cNvSpPr/>
+          <p:nvPr/>
+        </p:nvSpPr>
+        <p:spPr>
+          <a:xfrm>
+            <a:off x="1951330" y="4169664"/>
+            <a:ext cx="676656" cy="475488"/>
           </a:xfrm>
           <a:prstGeom prst="rect">
             <a:avLst>
@@ -23347,14 +23452,14 @@
       </p:sp>
       <p:sp>
         <p:nvSpPr>
-          <p:cNvPr id="37" name="Text 35"/>
-          <p:cNvSpPr/>
-          <p:nvPr/>
-        </p:nvSpPr>
-        <p:spPr>
-          <a:xfrm>
-            <a:off x="2124837" y="4169664"/>
-            <a:ext cx="685800" cy="475488"/>
+          <p:cNvPr id="43" name="Text 41"/>
+          <p:cNvSpPr/>
+          <p:nvPr/>
+        </p:nvSpPr>
+        <p:spPr>
+          <a:xfrm>
+            <a:off x="1951330" y="4169664"/>
+            <a:ext cx="676656" cy="475488"/>
           </a:xfrm>
           <a:prstGeom prst="rect">
             <a:avLst/>
@@ -23378,7 +23483,7 @@
                 <a:ea typeface="Trebuchet MS" pitchFamily="34" charset="-122"/>
                 <a:cs typeface="Trebuchet MS" pitchFamily="34" charset="-120"/>
               </a:rPr>
-              <a:t>r</a:t>
+              <a:t>s</a:t>
             </a:r>
             <a:endParaRPr lang="en-US" sz="900" dirty="0"/>
           </a:p>
@@ -23386,14 +23491,14 @@
       </p:sp>
       <p:sp>
         <p:nvSpPr>
-          <p:cNvPr id="38" name="Shape 36"/>
-          <p:cNvSpPr/>
-          <p:nvPr/>
-        </p:nvSpPr>
-        <p:spPr>
-          <a:xfrm>
-            <a:off x="3033522" y="4169664"/>
-            <a:ext cx="685800" cy="475488"/>
+          <p:cNvPr id="44" name="Shape 42"/>
+          <p:cNvSpPr/>
+          <p:nvPr/>
+        </p:nvSpPr>
+        <p:spPr>
+          <a:xfrm>
+            <a:off x="2677363" y="4169664"/>
+            <a:ext cx="676656" cy="475488"/>
           </a:xfrm>
           <a:prstGeom prst="rect">
             <a:avLst>
@@ -23413,14 +23518,14 @@
       </p:sp>
       <p:sp>
         <p:nvSpPr>
-          <p:cNvPr id="39" name="Text 37"/>
-          <p:cNvSpPr/>
-          <p:nvPr/>
-        </p:nvSpPr>
-        <p:spPr>
-          <a:xfrm>
-            <a:off x="3033522" y="4169664"/>
-            <a:ext cx="685800" cy="475488"/>
+          <p:cNvPr id="45" name="Text 43"/>
+          <p:cNvSpPr/>
+          <p:nvPr/>
+        </p:nvSpPr>
+        <p:spPr>
+          <a:xfrm>
+            <a:off x="2677363" y="4169664"/>
+            <a:ext cx="676656" cy="475488"/>
           </a:xfrm>
           <a:prstGeom prst="rect">
             <a:avLst/>
@@ -23444,7 +23549,7 @@
                 <a:ea typeface="Trebuchet MS" pitchFamily="34" charset="-122"/>
                 <a:cs typeface="Trebuchet MS" pitchFamily="34" charset="-120"/>
               </a:rPr>
-              <a:t>e</a:t>
+              <a:t>i</a:t>
             </a:r>
             <a:endParaRPr lang="en-US" sz="900" dirty="0"/>
           </a:p>
@@ -23452,14 +23557,14 @@
       </p:sp>
       <p:sp>
         <p:nvSpPr>
-          <p:cNvPr id="40" name="Shape 38"/>
-          <p:cNvSpPr/>
-          <p:nvPr/>
-        </p:nvSpPr>
-        <p:spPr>
-          <a:xfrm>
-            <a:off x="3942207" y="4169664"/>
-            <a:ext cx="685800" cy="475488"/>
+          <p:cNvPr id="46" name="Shape 44"/>
+          <p:cNvSpPr/>
+          <p:nvPr/>
+        </p:nvSpPr>
+        <p:spPr>
+          <a:xfrm>
+            <a:off x="3403397" y="4169664"/>
+            <a:ext cx="676656" cy="475488"/>
           </a:xfrm>
           <a:prstGeom prst="rect">
             <a:avLst>
@@ -23479,14 +23584,14 @@
       </p:sp>
       <p:sp>
         <p:nvSpPr>
-          <p:cNvPr id="41" name="Text 39"/>
-          <p:cNvSpPr/>
-          <p:nvPr/>
-        </p:nvSpPr>
-        <p:spPr>
-          <a:xfrm>
-            <a:off x="3942207" y="4169664"/>
-            <a:ext cx="685800" cy="475488"/>
+          <p:cNvPr id="47" name="Text 45"/>
+          <p:cNvSpPr/>
+          <p:nvPr/>
+        </p:nvSpPr>
+        <p:spPr>
+          <a:xfrm>
+            <a:off x="3403397" y="4169664"/>
+            <a:ext cx="676656" cy="475488"/>
           </a:xfrm>
           <a:prstGeom prst="rect">
             <a:avLst/>
@@ -23510,7 +23615,7 @@
                 <a:ea typeface="Trebuchet MS" pitchFamily="34" charset="-122"/>
                 <a:cs typeface="Trebuchet MS" pitchFamily="34" charset="-120"/>
               </a:rPr>
-              <a:t>s</a:t>
+              <a:t>g</a:t>
             </a:r>
             <a:endParaRPr lang="en-US" sz="900" dirty="0"/>
           </a:p>
@@ -23518,14 +23623,14 @@
       </p:sp>
       <p:sp>
         <p:nvSpPr>
-          <p:cNvPr id="42" name="Shape 40"/>
-          <p:cNvSpPr/>
-          <p:nvPr/>
-        </p:nvSpPr>
-        <p:spPr>
-          <a:xfrm>
-            <a:off x="4850892" y="4169664"/>
-            <a:ext cx="685800" cy="475488"/>
+          <p:cNvPr id="48" name="Shape 46"/>
+          <p:cNvSpPr/>
+          <p:nvPr/>
+        </p:nvSpPr>
+        <p:spPr>
+          <a:xfrm>
+            <a:off x="4129430" y="4169664"/>
+            <a:ext cx="676656" cy="475488"/>
           </a:xfrm>
           <a:prstGeom prst="rect">
             <a:avLst>
@@ -23545,14 +23650,14 @@
       </p:sp>
       <p:sp>
         <p:nvSpPr>
-          <p:cNvPr id="43" name="Text 41"/>
-          <p:cNvSpPr/>
-          <p:nvPr/>
-        </p:nvSpPr>
-        <p:spPr>
-          <a:xfrm>
-            <a:off x="4850892" y="4169664"/>
-            <a:ext cx="685800" cy="475488"/>
+          <p:cNvPr id="49" name="Text 47"/>
+          <p:cNvSpPr/>
+          <p:nvPr/>
+        </p:nvSpPr>
+        <p:spPr>
+          <a:xfrm>
+            <a:off x="4129430" y="4169664"/>
+            <a:ext cx="676656" cy="475488"/>
           </a:xfrm>
           <a:prstGeom prst="rect">
             <a:avLst/>
@@ -23576,7 +23681,7 @@
                 <a:ea typeface="Trebuchet MS" pitchFamily="34" charset="-122"/>
                 <a:cs typeface="Trebuchet MS" pitchFamily="34" charset="-120"/>
               </a:rPr>
-              <a:t>i</a:t>
+              <a:t>n</a:t>
             </a:r>
             <a:endParaRPr lang="en-US" sz="900" dirty="0"/>
           </a:p>
@@ -23584,14 +23689,14 @@
       </p:sp>
       <p:sp>
         <p:nvSpPr>
-          <p:cNvPr id="44" name="Shape 42"/>
-          <p:cNvSpPr/>
-          <p:nvPr/>
-        </p:nvSpPr>
-        <p:spPr>
-          <a:xfrm>
-            <a:off x="5759577" y="4169664"/>
-            <a:ext cx="685800" cy="475488"/>
+          <p:cNvPr id="50" name="Shape 48"/>
+          <p:cNvSpPr/>
+          <p:nvPr/>
+        </p:nvSpPr>
+        <p:spPr>
+          <a:xfrm>
+            <a:off x="4855464" y="4169664"/>
+            <a:ext cx="676656" cy="475488"/>
           </a:xfrm>
           <a:prstGeom prst="rect">
             <a:avLst>
@@ -23611,14 +23716,14 @@
       </p:sp>
       <p:sp>
         <p:nvSpPr>
-          <p:cNvPr id="45" name="Text 43"/>
-          <p:cNvSpPr/>
-          <p:nvPr/>
-        </p:nvSpPr>
-        <p:spPr>
-          <a:xfrm>
-            <a:off x="5759577" y="4169664"/>
-            <a:ext cx="685800" cy="475488"/>
+          <p:cNvPr id="51" name="Text 49"/>
+          <p:cNvSpPr/>
+          <p:nvPr/>
+        </p:nvSpPr>
+        <p:spPr>
+          <a:xfrm>
+            <a:off x="4855464" y="4169664"/>
+            <a:ext cx="676656" cy="475488"/>
           </a:xfrm>
           <a:prstGeom prst="rect">
             <a:avLst/>
@@ -23642,7 +23747,7 @@
                 <a:ea typeface="Trebuchet MS" pitchFamily="34" charset="-122"/>
                 <a:cs typeface="Trebuchet MS" pitchFamily="34" charset="-120"/>
               </a:rPr>
-              <a:t>gn</a:t>
+              <a:t>i</a:t>
             </a:r>
             <a:endParaRPr lang="en-US" sz="900" dirty="0"/>
           </a:p>
@@ -23650,14 +23755,14 @@
       </p:sp>
       <p:sp>
         <p:nvSpPr>
-          <p:cNvPr id="46" name="Shape 44"/>
-          <p:cNvSpPr/>
-          <p:nvPr/>
-        </p:nvSpPr>
-        <p:spPr>
-          <a:xfrm>
-            <a:off x="6668262" y="4169664"/>
-            <a:ext cx="685800" cy="475488"/>
+          <p:cNvPr id="52" name="Shape 50"/>
+          <p:cNvSpPr/>
+          <p:nvPr/>
+        </p:nvSpPr>
+        <p:spPr>
+          <a:xfrm>
+            <a:off x="5581498" y="4169664"/>
+            <a:ext cx="676656" cy="475488"/>
           </a:xfrm>
           <a:prstGeom prst="rect">
             <a:avLst>
@@ -23677,14 +23782,14 @@
       </p:sp>
       <p:sp>
         <p:nvSpPr>
-          <p:cNvPr id="47" name="Text 45"/>
-          <p:cNvSpPr/>
-          <p:nvPr/>
-        </p:nvSpPr>
-        <p:spPr>
-          <a:xfrm>
-            <a:off x="6668262" y="4169664"/>
-            <a:ext cx="685800" cy="475488"/>
+          <p:cNvPr id="53" name="Text 51"/>
+          <p:cNvSpPr/>
+          <p:nvPr/>
+        </p:nvSpPr>
+        <p:spPr>
+          <a:xfrm>
+            <a:off x="5581498" y="4169664"/>
+            <a:ext cx="676656" cy="475488"/>
           </a:xfrm>
           <a:prstGeom prst="rect">
             <a:avLst/>
@@ -23708,7 +23813,7 @@
                 <a:ea typeface="Trebuchet MS" pitchFamily="34" charset="-122"/>
                 <a:cs typeface="Trebuchet MS" pitchFamily="34" charset="-120"/>
               </a:rPr>
-              <a:t>e</a:t>
+              <a:t>f</a:t>
             </a:r>
             <a:endParaRPr lang="en-US" sz="900" dirty="0"/>
           </a:p>
@@ -23716,14 +23821,14 @@
       </p:sp>
       <p:sp>
         <p:nvSpPr>
-          <p:cNvPr id="48" name="Shape 46"/>
-          <p:cNvSpPr/>
-          <p:nvPr/>
-        </p:nvSpPr>
-        <p:spPr>
-          <a:xfrm>
-            <a:off x="7576947" y="4169664"/>
-            <a:ext cx="685800" cy="475488"/>
+          <p:cNvPr id="54" name="Shape 52"/>
+          <p:cNvSpPr/>
+          <p:nvPr/>
+        </p:nvSpPr>
+        <p:spPr>
+          <a:xfrm>
+            <a:off x="6307531" y="4169664"/>
+            <a:ext cx="676656" cy="475488"/>
           </a:xfrm>
           <a:prstGeom prst="rect">
             <a:avLst>
@@ -23743,14 +23848,14 @@
       </p:sp>
       <p:sp>
         <p:nvSpPr>
-          <p:cNvPr id="49" name="Text 47"/>
-          <p:cNvSpPr/>
-          <p:nvPr/>
-        </p:nvSpPr>
-        <p:spPr>
-          <a:xfrm>
-            <a:off x="7576947" y="4169664"/>
-            <a:ext cx="685800" cy="475488"/>
+          <p:cNvPr id="55" name="Text 53"/>
+          <p:cNvSpPr/>
+          <p:nvPr/>
+        </p:nvSpPr>
+        <p:spPr>
+          <a:xfrm>
+            <a:off x="6307531" y="4169664"/>
+            <a:ext cx="676656" cy="475488"/>
           </a:xfrm>
           <a:prstGeom prst="rect">
             <a:avLst/>
@@ -23774,7 +23879,139 @@
                 <a:ea typeface="Trebuchet MS" pitchFamily="34" charset="-122"/>
                 <a:cs typeface="Trebuchet MS" pitchFamily="34" charset="-120"/>
               </a:rPr>
-              <a:t>d</a:t>
+              <a:t>y</a:t>
+            </a:r>
+            <a:endParaRPr lang="en-US" sz="900" dirty="0"/>
+          </a:p>
+        </p:txBody>
+      </p:sp>
+      <p:sp>
+        <p:nvSpPr>
+          <p:cNvPr id="56" name="Shape 54"/>
+          <p:cNvSpPr/>
+          <p:nvPr/>
+        </p:nvSpPr>
+        <p:spPr>
+          <a:xfrm>
+            <a:off x="7033565" y="4169664"/>
+            <a:ext cx="676656" cy="475488"/>
+          </a:xfrm>
+          <a:prstGeom prst="rect">
+            <a:avLst>
+              <a:gd name="adj" fmla="val 7692"/>
+            </a:avLst>
+          </a:prstGeom>
+          <a:solidFill>
+            <a:srgbClr val="FFFFFF"/>
+          </a:solidFill>
+          <a:ln w="12700">
+            <a:solidFill>
+              <a:srgbClr val="DB2777"/>
+            </a:solidFill>
+            <a:prstDash val="solid"/>
+          </a:ln>
+        </p:spPr>
+      </p:sp>
+      <p:sp>
+        <p:nvSpPr>
+          <p:cNvPr id="57" name="Text 55"/>
+          <p:cNvSpPr/>
+          <p:nvPr/>
+        </p:nvSpPr>
+        <p:spPr>
+          <a:xfrm>
+            <a:off x="7033565" y="4169664"/>
+            <a:ext cx="676656" cy="475488"/>
+          </a:xfrm>
+          <a:prstGeom prst="rect">
+            <a:avLst/>
+          </a:prstGeom>
+          <a:noFill/>
+          <a:ln/>
+        </p:spPr>
+        <p:txBody>
+          <a:bodyPr wrap="square" lIns="0" tIns="0" rIns="0" bIns="0" rtlCol="0" anchor="ctr"/>
+          <a:lstStyle/>
+          <a:p>
+            <a:pPr algn="ctr" indent="0" marL="0">
+              <a:buNone/>
+            </a:pPr>
+            <a:r>
+              <a:rPr lang="en-US" sz="900" b="1" dirty="0">
+                <a:solidFill>
+                  <a:srgbClr val="9D174D"/>
+                </a:solidFill>
+                <a:latin typeface="Trebuchet MS" pitchFamily="34" charset="0"/>
+                <a:ea typeface="Trebuchet MS" pitchFamily="34" charset="-122"/>
+                <a:cs typeface="Trebuchet MS" pitchFamily="34" charset="-120"/>
+              </a:rPr>
+              <a:t>i</a:t>
+            </a:r>
+            <a:endParaRPr lang="en-US" sz="900" dirty="0"/>
+          </a:p>
+        </p:txBody>
+      </p:sp>
+      <p:sp>
+        <p:nvSpPr>
+          <p:cNvPr id="58" name="Shape 56"/>
+          <p:cNvSpPr/>
+          <p:nvPr/>
+        </p:nvSpPr>
+        <p:spPr>
+          <a:xfrm>
+            <a:off x="7759598" y="4169664"/>
+            <a:ext cx="676656" cy="475488"/>
+          </a:xfrm>
+          <a:prstGeom prst="rect">
+            <a:avLst>
+              <a:gd name="adj" fmla="val 7692"/>
+            </a:avLst>
+          </a:prstGeom>
+          <a:solidFill>
+            <a:srgbClr val="FFFFFF"/>
+          </a:solidFill>
+          <a:ln w="12700">
+            <a:solidFill>
+              <a:srgbClr val="DB2777"/>
+            </a:solidFill>
+            <a:prstDash val="solid"/>
+          </a:ln>
+        </p:spPr>
+      </p:sp>
+      <p:sp>
+        <p:nvSpPr>
+          <p:cNvPr id="59" name="Text 57"/>
+          <p:cNvSpPr/>
+          <p:nvPr/>
+        </p:nvSpPr>
+        <p:spPr>
+          <a:xfrm>
+            <a:off x="7759598" y="4169664"/>
+            <a:ext cx="676656" cy="475488"/>
+          </a:xfrm>
+          <a:prstGeom prst="rect">
+            <a:avLst/>
+          </a:prstGeom>
+          <a:noFill/>
+          <a:ln/>
+        </p:spPr>
+        <p:txBody>
+          <a:bodyPr wrap="square" lIns="0" tIns="0" rIns="0" bIns="0" rtlCol="0" anchor="ctr"/>
+          <a:lstStyle/>
+          <a:p>
+            <a:pPr algn="ctr" indent="0" marL="0">
+              <a:buNone/>
+            </a:pPr>
+            <a:r>
+              <a:rPr lang="en-US" sz="900" b="1" dirty="0">
+                <a:solidFill>
+                  <a:srgbClr val="9D174D"/>
+                </a:solidFill>
+                <a:latin typeface="Trebuchet MS" pitchFamily="34" charset="0"/>
+                <a:ea typeface="Trebuchet MS" pitchFamily="34" charset="-122"/>
+                <a:cs typeface="Trebuchet MS" pitchFamily="34" charset="-120"/>
+              </a:rPr>
+              <a:t>ng</a:t>
             </a:r>
             <a:endParaRPr lang="en-US" sz="900" dirty="0"/>
           </a:p>
@@ -24066,7 +24303,7 @@
                 <a:ea typeface="Calibri" pitchFamily="34" charset="-122"/>
                 <a:cs typeface="Calibri" pitchFamily="34" charset="-120"/>
               </a:rPr>
-              <a:t>Word Labs  •  wordlabs.app  •  Root: 'sign' = mark, symbol, or signal</a:t>
+              <a:t>Word Labs  •  wordlabs.app  •  Root: 'sign' = mark; signal</a:t>
             </a:r>
             <a:endParaRPr lang="en-US" sz="800" dirty="0"/>
           </a:p>
@@ -24205,7 +24442,7 @@
                 <a:ea typeface="Trebuchet MS" pitchFamily="34" charset="-122"/>
                 <a:cs typeface="Trebuchet MS" pitchFamily="34" charset="-120"/>
               </a:rPr>
-              <a:t>reassign</a:t>
+              <a:t>significant</a:t>
             </a:r>
             <a:endParaRPr lang="en-US" sz="2800" dirty="0"/>
           </a:p>
@@ -24893,7 +25130,7 @@
                 <a:ea typeface="Calibri" pitchFamily="34" charset="-122"/>
                 <a:cs typeface="Calibri" pitchFamily="34" charset="-120"/>
               </a:rPr>
-              <a:t>Word Labs  •  wordlabs.app  •  Root: 'sign' = mark, symbol, or signal</a:t>
+              <a:t>Word Labs  •  wordlabs.app  •  Root: 'sign' = mark; signal</a:t>
             </a:r>
             <a:endParaRPr lang="en-US" sz="800" dirty="0"/>
           </a:p>
@@ -25032,7 +25269,7 @@
                 <a:ea typeface="Trebuchet MS" pitchFamily="34" charset="-122"/>
                 <a:cs typeface="Trebuchet MS" pitchFamily="34" charset="-120"/>
               </a:rPr>
-              <a:t>reassign</a:t>
+              <a:t>significant</a:t>
             </a:r>
             <a:endParaRPr lang="en-US" sz="2800" dirty="0"/>
           </a:p>
@@ -25121,11 +25358,11 @@
             </a:avLst>
           </a:prstGeom>
           <a:solidFill>
-            <a:srgbClr val="DDD6FE"/>
+            <a:srgbClr val="CCFBF1"/>
           </a:solidFill>
           <a:ln w="19050">
             <a:solidFill>
-              <a:srgbClr val="7C3AED"/>
+              <a:srgbClr val="0D9488"/>
             </a:solidFill>
             <a:prstDash val="solid"/>
           </a:ln>
@@ -25165,13 +25402,13 @@
             <a:r>
               <a:rPr lang="en-US" sz="1300" b="1" dirty="0">
                 <a:solidFill>
-                  <a:srgbClr val="4C1D95"/>
+                  <a:srgbClr val="0F766E"/>
                 </a:solidFill>
                 <a:latin typeface="Trebuchet MS" pitchFamily="34" charset="0"/>
                 <a:ea typeface="Trebuchet MS" pitchFamily="34" charset="-122"/>
                 <a:cs typeface="Trebuchet MS" pitchFamily="34" charset="-120"/>
               </a:rPr>
-              <a:t>re</a:t>
+              <a:t>sign</a:t>
             </a:r>
             <a:endParaRPr lang="en-US" sz="1300" dirty="0"/>
           </a:p>
@@ -25210,7 +25447,7 @@
                 <a:ea typeface="Calibri" pitchFamily="34" charset="-122"/>
                 <a:cs typeface="Calibri" pitchFamily="34" charset="-120"/>
               </a:rPr>
-              <a:t>again</a:t>
+              <a:t>mark; signal</a:t>
             </a:r>
             <a:endParaRPr lang="en-US" sz="850" dirty="0"/>
           </a:p>
@@ -25283,7 +25520,7 @@
                 <a:ea typeface="Trebuchet MS" pitchFamily="34" charset="-122"/>
                 <a:cs typeface="Trebuchet MS" pitchFamily="34" charset="-120"/>
               </a:rPr>
-              <a:t>as</a:t>
+              <a:t>ific</a:t>
             </a:r>
             <a:endParaRPr lang="en-US" sz="1300" dirty="0"/>
           </a:p>
@@ -25322,7 +25559,7 @@
                 <a:ea typeface="Calibri" pitchFamily="34" charset="-122"/>
                 <a:cs typeface="Calibri" pitchFamily="34" charset="-120"/>
               </a:rPr>
-              <a:t>to or towards</a:t>
+              <a:t>making; doing</a:t>
             </a:r>
             <a:endParaRPr lang="en-US" sz="850" dirty="0"/>
           </a:p>
@@ -25330,46 +25567,7 @@
       </p:sp>
       <p:sp>
         <p:nvSpPr>
-          <p:cNvPr id="22" name="Text 20"/>
-          <p:cNvSpPr/>
-          <p:nvPr/>
-        </p:nvSpPr>
-        <p:spPr>
-          <a:xfrm>
-            <a:off x="4370832" y="2752344"/>
-            <a:ext cx="1828800" cy="182880"/>
-          </a:xfrm>
-          <a:prstGeom prst="rect">
-            <a:avLst/>
-          </a:prstGeom>
-          <a:noFill/>
-          <a:ln/>
-        </p:spPr>
-        <p:txBody>
-          <a:bodyPr wrap="square" lIns="0" tIns="0" rIns="0" bIns="0" rtlCol="0" anchor="t"/>
-          <a:lstStyle/>
-          <a:p>
-            <a:pPr algn="ctr" indent="0" marL="0">
-              <a:buNone/>
-            </a:pPr>
-            <a:r>
-              <a:rPr lang="en-US" sz="700" i="1" dirty="0">
-                <a:solidFill>
-                  <a:srgbClr val="94A3B8"/>
-                </a:solidFill>
-                <a:latin typeface="Calibri" pitchFamily="34" charset="0"/>
-                <a:ea typeface="Calibri" pitchFamily="34" charset="-122"/>
-                <a:cs typeface="Calibri" pitchFamily="34" charset="-120"/>
-              </a:rPr>
-              <a:t>ad → as before 's'</a:t>
-            </a:r>
-            <a:endParaRPr lang="en-US" sz="700" dirty="0"/>
-          </a:p>
-        </p:txBody>
-      </p:sp>
-      <p:sp>
-        <p:nvSpPr>
-          <p:cNvPr id="23" name="Shape 21"/>
+          <p:cNvPr id="22" name="Shape 20"/>
           <p:cNvSpPr/>
           <p:nvPr/>
         </p:nvSpPr>
@@ -25384,11 +25582,11 @@
             </a:avLst>
           </a:prstGeom>
           <a:solidFill>
-            <a:srgbClr val="CCFBF1"/>
+            <a:srgbClr val="FCE7F3"/>
           </a:solidFill>
           <a:ln w="19050">
             <a:solidFill>
-              <a:srgbClr val="0D9488"/>
+              <a:srgbClr val="DB2777"/>
             </a:solidFill>
             <a:prstDash val="solid"/>
           </a:ln>
@@ -25403,7 +25601,7 @@
       </p:sp>
       <p:sp>
         <p:nvSpPr>
-          <p:cNvPr id="24" name="Text 22"/>
+          <p:cNvPr id="23" name="Text 21"/>
           <p:cNvSpPr/>
           <p:nvPr/>
         </p:nvSpPr>
@@ -25428,13 +25626,13 @@
             <a:r>
               <a:rPr lang="en-US" sz="1300" b="1" dirty="0">
                 <a:solidFill>
-                  <a:srgbClr val="0F766E"/>
+                  <a:srgbClr val="9D174D"/>
                 </a:solidFill>
                 <a:latin typeface="Trebuchet MS" pitchFamily="34" charset="0"/>
                 <a:ea typeface="Trebuchet MS" pitchFamily="34" charset="-122"/>
                 <a:cs typeface="Trebuchet MS" pitchFamily="34" charset="-120"/>
               </a:rPr>
-              <a:t>sign</a:t>
+              <a:t>ant</a:t>
             </a:r>
             <a:endParaRPr lang="en-US" sz="1300" dirty="0"/>
           </a:p>
@@ -25442,7 +25640,7 @@
       </p:sp>
       <p:sp>
         <p:nvSpPr>
-          <p:cNvPr id="25" name="Text 23"/>
+          <p:cNvPr id="24" name="Text 22"/>
           <p:cNvSpPr/>
           <p:nvPr/>
         </p:nvSpPr>
@@ -25473,7 +25671,7 @@
                 <a:ea typeface="Calibri" pitchFamily="34" charset="-122"/>
                 <a:cs typeface="Calibri" pitchFamily="34" charset="-120"/>
               </a:rPr>
-              <a:t>mark or symbol</a:t>
+              <a:t>person or thing that</a:t>
             </a:r>
             <a:endParaRPr lang="en-US" sz="850" dirty="0"/>
           </a:p>
@@ -25481,7 +25679,7 @@
       </p:sp>
       <p:sp>
         <p:nvSpPr>
-          <p:cNvPr id="26" name="Shape 24"/>
+          <p:cNvPr id="25" name="Shape 23"/>
           <p:cNvSpPr/>
           <p:nvPr/>
         </p:nvSpPr>
@@ -25508,7 +25706,7 @@
       </p:sp>
       <p:sp>
         <p:nvSpPr>
-          <p:cNvPr id="27" name="Text 25"/>
+          <p:cNvPr id="26" name="Text 24"/>
           <p:cNvSpPr/>
           <p:nvPr/>
         </p:nvSpPr>
@@ -25547,7 +25745,7 @@
       </p:sp>
       <p:sp>
         <p:nvSpPr>
-          <p:cNvPr id="28" name="Shape 26"/>
+          <p:cNvPr id="27" name="Shape 25"/>
           <p:cNvSpPr/>
           <p:nvPr/>
         </p:nvSpPr>
@@ -25574,7 +25772,7 @@
       </p:sp>
       <p:sp>
         <p:nvSpPr>
-          <p:cNvPr id="29" name="Text 27"/>
+          <p:cNvPr id="28" name="Text 26"/>
           <p:cNvSpPr/>
           <p:nvPr/>
         </p:nvSpPr>
@@ -25613,7 +25811,7 @@
       </p:sp>
       <p:sp>
         <p:nvSpPr>
-          <p:cNvPr id="30" name="Shape 28"/>
+          <p:cNvPr id="29" name="Shape 27"/>
           <p:cNvSpPr/>
           <p:nvPr/>
         </p:nvSpPr>
@@ -25640,7 +25838,7 @@
       </p:sp>
       <p:sp>
         <p:nvSpPr>
-          <p:cNvPr id="31" name="Text 29"/>
+          <p:cNvPr id="30" name="Text 28"/>
           <p:cNvSpPr/>
           <p:nvPr/>
         </p:nvSpPr>
@@ -25679,7 +25877,7 @@
       </p:sp>
       <p:sp>
         <p:nvSpPr>
-          <p:cNvPr id="32" name="Shape 30"/>
+          <p:cNvPr id="31" name="Shape 29"/>
           <p:cNvSpPr/>
           <p:nvPr/>
         </p:nvSpPr>
@@ -25706,7 +25904,7 @@
       </p:sp>
       <p:sp>
         <p:nvSpPr>
-          <p:cNvPr id="33" name="Text 31"/>
+          <p:cNvPr id="32" name="Text 30"/>
           <p:cNvSpPr/>
           <p:nvPr/>
         </p:nvSpPr>
@@ -26029,7 +26227,7 @@
                 <a:ea typeface="Calibri" pitchFamily="34" charset="-122"/>
                 <a:cs typeface="Calibri" pitchFamily="34" charset="-120"/>
               </a:rPr>
-              <a:t>Word Labs  •  wordlabs.app  •  Root: 'sign' = mark, symbol, or signal</a:t>
+              <a:t>Word Labs  •  wordlabs.app  •  Root: 'sign' = mark; signal</a:t>
             </a:r>
             <a:endParaRPr lang="en-US" sz="800" dirty="0"/>
           </a:p>
@@ -26102,7 +26300,7 @@
                 <a:ea typeface="Trebuchet MS" pitchFamily="34" charset="-122"/>
                 <a:cs typeface="Trebuchet MS" pitchFamily="34" charset="-120"/>
               </a:rPr>
-              <a:t>We are learning that the root 'sign' means 'mark, symbol, or signal'.</a:t>
+              <a:t>We are learning that the root 'sign' means 'mark; signal'.</a:t>
             </a:r>
             <a:endParaRPr lang="en-US" sz="2000" dirty="0"/>
           </a:p>
@@ -26748,7 +26946,7 @@
                 <a:ea typeface="Calibri" pitchFamily="34" charset="-122"/>
                 <a:cs typeface="Calibri" pitchFamily="34" charset="-120"/>
               </a:rPr>
-              <a:t>Word Labs  •  wordlabs.app  •  Root: 'sign' = mark, symbol, or signal</a:t>
+              <a:t>Word Labs  •  wordlabs.app  •  Root: 'sign' = mark; signal</a:t>
             </a:r>
             <a:endParaRPr lang="en-US" sz="800" dirty="0"/>
           </a:p>
@@ -26887,7 +27085,7 @@
                 <a:ea typeface="Trebuchet MS" pitchFamily="34" charset="-122"/>
                 <a:cs typeface="Trebuchet MS" pitchFamily="34" charset="-120"/>
               </a:rPr>
-              <a:t>reassign</a:t>
+              <a:t>significant</a:t>
             </a:r>
             <a:endParaRPr lang="en-US" sz="2800" dirty="0"/>
           </a:p>
@@ -26976,11 +27174,11 @@
             </a:avLst>
           </a:prstGeom>
           <a:solidFill>
-            <a:srgbClr val="DDD6FE"/>
+            <a:srgbClr val="CCFBF1"/>
           </a:solidFill>
           <a:ln w="19050">
             <a:solidFill>
-              <a:srgbClr val="7C3AED"/>
+              <a:srgbClr val="0D9488"/>
             </a:solidFill>
             <a:prstDash val="solid"/>
           </a:ln>
@@ -27020,13 +27218,13 @@
             <a:r>
               <a:rPr lang="en-US" sz="1300" b="1" dirty="0">
                 <a:solidFill>
-                  <a:srgbClr val="4C1D95"/>
+                  <a:srgbClr val="0F766E"/>
                 </a:solidFill>
                 <a:latin typeface="Trebuchet MS" pitchFamily="34" charset="0"/>
                 <a:ea typeface="Trebuchet MS" pitchFamily="34" charset="-122"/>
                 <a:cs typeface="Trebuchet MS" pitchFamily="34" charset="-120"/>
               </a:rPr>
-              <a:t>re</a:t>
+              <a:t>sign</a:t>
             </a:r>
             <a:endParaRPr lang="en-US" sz="1300" dirty="0"/>
           </a:p>
@@ -27065,7 +27263,7 @@
                 <a:ea typeface="Calibri" pitchFamily="34" charset="-122"/>
                 <a:cs typeface="Calibri" pitchFamily="34" charset="-120"/>
               </a:rPr>
-              <a:t>again</a:t>
+              <a:t>mark; signal</a:t>
             </a:r>
             <a:endParaRPr lang="en-US" sz="850" dirty="0"/>
           </a:p>
@@ -27138,7 +27336,7 @@
                 <a:ea typeface="Trebuchet MS" pitchFamily="34" charset="-122"/>
                 <a:cs typeface="Trebuchet MS" pitchFamily="34" charset="-120"/>
               </a:rPr>
-              <a:t>as</a:t>
+              <a:t>ific</a:t>
             </a:r>
             <a:endParaRPr lang="en-US" sz="1300" dirty="0"/>
           </a:p>
@@ -27177,7 +27375,7 @@
                 <a:ea typeface="Calibri" pitchFamily="34" charset="-122"/>
                 <a:cs typeface="Calibri" pitchFamily="34" charset="-120"/>
               </a:rPr>
-              <a:t>to or towards</a:t>
+              <a:t>making; doing</a:t>
             </a:r>
             <a:endParaRPr lang="en-US" sz="850" dirty="0"/>
           </a:p>
@@ -27185,46 +27383,7 @@
       </p:sp>
       <p:sp>
         <p:nvSpPr>
-          <p:cNvPr id="22" name="Text 20"/>
-          <p:cNvSpPr/>
-          <p:nvPr/>
-        </p:nvSpPr>
-        <p:spPr>
-          <a:xfrm>
-            <a:off x="4370832" y="2752344"/>
-            <a:ext cx="1828800" cy="182880"/>
-          </a:xfrm>
-          <a:prstGeom prst="rect">
-            <a:avLst/>
-          </a:prstGeom>
-          <a:noFill/>
-          <a:ln/>
-        </p:spPr>
-        <p:txBody>
-          <a:bodyPr wrap="square" lIns="0" tIns="0" rIns="0" bIns="0" rtlCol="0" anchor="t"/>
-          <a:lstStyle/>
-          <a:p>
-            <a:pPr algn="ctr" indent="0" marL="0">
-              <a:buNone/>
-            </a:pPr>
-            <a:r>
-              <a:rPr lang="en-US" sz="700" i="1" dirty="0">
-                <a:solidFill>
-                  <a:srgbClr val="94A3B8"/>
-                </a:solidFill>
-                <a:latin typeface="Calibri" pitchFamily="34" charset="0"/>
-                <a:ea typeface="Calibri" pitchFamily="34" charset="-122"/>
-                <a:cs typeface="Calibri" pitchFamily="34" charset="-120"/>
-              </a:rPr>
-              <a:t>ad → as before 's'</a:t>
-            </a:r>
-            <a:endParaRPr lang="en-US" sz="700" dirty="0"/>
-          </a:p>
-        </p:txBody>
-      </p:sp>
-      <p:sp>
-        <p:nvSpPr>
-          <p:cNvPr id="23" name="Shape 21"/>
+          <p:cNvPr id="22" name="Shape 20"/>
           <p:cNvSpPr/>
           <p:nvPr/>
         </p:nvSpPr>
@@ -27239,11 +27398,11 @@
             </a:avLst>
           </a:prstGeom>
           <a:solidFill>
-            <a:srgbClr val="CCFBF1"/>
+            <a:srgbClr val="FCE7F3"/>
           </a:solidFill>
           <a:ln w="19050">
             <a:solidFill>
-              <a:srgbClr val="0D9488"/>
+              <a:srgbClr val="DB2777"/>
             </a:solidFill>
             <a:prstDash val="solid"/>
           </a:ln>
@@ -27258,7 +27417,7 @@
       </p:sp>
       <p:sp>
         <p:nvSpPr>
-          <p:cNvPr id="24" name="Text 22"/>
+          <p:cNvPr id="23" name="Text 21"/>
           <p:cNvSpPr/>
           <p:nvPr/>
         </p:nvSpPr>
@@ -27283,13 +27442,13 @@
             <a:r>
               <a:rPr lang="en-US" sz="1300" b="1" dirty="0">
                 <a:solidFill>
-                  <a:srgbClr val="0F766E"/>
+                  <a:srgbClr val="9D174D"/>
                 </a:solidFill>
                 <a:latin typeface="Trebuchet MS" pitchFamily="34" charset="0"/>
                 <a:ea typeface="Trebuchet MS" pitchFamily="34" charset="-122"/>
                 <a:cs typeface="Trebuchet MS" pitchFamily="34" charset="-120"/>
               </a:rPr>
-              <a:t>sign</a:t>
+              <a:t>ant</a:t>
             </a:r>
             <a:endParaRPr lang="en-US" sz="1300" dirty="0"/>
           </a:p>
@@ -27297,7 +27456,7 @@
       </p:sp>
       <p:sp>
         <p:nvSpPr>
-          <p:cNvPr id="25" name="Text 23"/>
+          <p:cNvPr id="24" name="Text 22"/>
           <p:cNvSpPr/>
           <p:nvPr/>
         </p:nvSpPr>
@@ -27328,7 +27487,7 @@
                 <a:ea typeface="Calibri" pitchFamily="34" charset="-122"/>
                 <a:cs typeface="Calibri" pitchFamily="34" charset="-120"/>
               </a:rPr>
-              <a:t>mark or symbol</a:t>
+              <a:t>person or thing that</a:t>
             </a:r>
             <a:endParaRPr lang="en-US" sz="850" dirty="0"/>
           </a:p>
@@ -27336,7 +27495,7 @@
       </p:sp>
       <p:sp>
         <p:nvSpPr>
-          <p:cNvPr id="26" name="Shape 24"/>
+          <p:cNvPr id="25" name="Shape 23"/>
           <p:cNvSpPr/>
           <p:nvPr/>
         </p:nvSpPr>
@@ -27363,7 +27522,7 @@
       </p:sp>
       <p:sp>
         <p:nvSpPr>
-          <p:cNvPr id="27" name="Text 25"/>
+          <p:cNvPr id="26" name="Text 24"/>
           <p:cNvSpPr/>
           <p:nvPr/>
         </p:nvSpPr>
@@ -27402,7 +27561,7 @@
       </p:sp>
       <p:sp>
         <p:nvSpPr>
-          <p:cNvPr id="28" name="Shape 26"/>
+          <p:cNvPr id="27" name="Shape 25"/>
           <p:cNvSpPr/>
           <p:nvPr/>
         </p:nvSpPr>
@@ -27429,14 +27588,14 @@
       </p:sp>
       <p:sp>
         <p:nvSpPr>
-          <p:cNvPr id="29" name="Shape 27"/>
-          <p:cNvSpPr/>
-          <p:nvPr/>
-        </p:nvSpPr>
-        <p:spPr>
-          <a:xfrm>
-            <a:off x="2313432" y="3364992"/>
-            <a:ext cx="1645920" cy="475488"/>
+          <p:cNvPr id="28" name="Shape 26"/>
+          <p:cNvSpPr/>
+          <p:nvPr/>
+        </p:nvSpPr>
+        <p:spPr>
+          <a:xfrm>
+            <a:off x="1975104" y="3364992"/>
+            <a:ext cx="1554480" cy="475488"/>
           </a:xfrm>
           <a:prstGeom prst="rect">
             <a:avLst>
@@ -27456,14 +27615,14 @@
       </p:sp>
       <p:sp>
         <p:nvSpPr>
-          <p:cNvPr id="30" name="Text 28"/>
-          <p:cNvSpPr/>
-          <p:nvPr/>
-        </p:nvSpPr>
-        <p:spPr>
-          <a:xfrm>
-            <a:off x="2313432" y="3364992"/>
-            <a:ext cx="1645920" cy="475488"/>
+          <p:cNvPr id="29" name="Text 27"/>
+          <p:cNvSpPr/>
+          <p:nvPr/>
+        </p:nvSpPr>
+        <p:spPr>
+          <a:xfrm>
+            <a:off x="1975104" y="3364992"/>
+            <a:ext cx="1554480" cy="475488"/>
           </a:xfrm>
           <a:prstGeom prst="rect">
             <a:avLst/>
@@ -27487,7 +27646,7 @@
                 <a:ea typeface="Trebuchet MS" pitchFamily="34" charset="-122"/>
                 <a:cs typeface="Trebuchet MS" pitchFamily="34" charset="-120"/>
               </a:rPr>
-              <a:t>re</a:t>
+              <a:t>sig</a:t>
             </a:r>
             <a:endParaRPr lang="en-US" sz="1400" dirty="0"/>
           </a:p>
@@ -27495,14 +27654,14 @@
       </p:sp>
       <p:sp>
         <p:nvSpPr>
-          <p:cNvPr id="31" name="Text 29"/>
-          <p:cNvSpPr/>
-          <p:nvPr/>
-        </p:nvSpPr>
-        <p:spPr>
-          <a:xfrm>
-            <a:off x="3959352" y="3364992"/>
-            <a:ext cx="411480" cy="475488"/>
+          <p:cNvPr id="30" name="Text 28"/>
+          <p:cNvSpPr/>
+          <p:nvPr/>
+        </p:nvSpPr>
+        <p:spPr>
+          <a:xfrm>
+            <a:off x="3529584" y="3364992"/>
+            <a:ext cx="73152" cy="475488"/>
           </a:xfrm>
           <a:prstGeom prst="rect">
             <a:avLst/>
@@ -27534,14 +27693,14 @@
       </p:sp>
       <p:sp>
         <p:nvSpPr>
-          <p:cNvPr id="32" name="Shape 30"/>
-          <p:cNvSpPr/>
-          <p:nvPr/>
-        </p:nvSpPr>
-        <p:spPr>
-          <a:xfrm>
-            <a:off x="4370832" y="3364992"/>
-            <a:ext cx="1645920" cy="475488"/>
+          <p:cNvPr id="31" name="Shape 29"/>
+          <p:cNvSpPr/>
+          <p:nvPr/>
+        </p:nvSpPr>
+        <p:spPr>
+          <a:xfrm>
+            <a:off x="3602736" y="3364992"/>
+            <a:ext cx="1554480" cy="475488"/>
           </a:xfrm>
           <a:prstGeom prst="rect">
             <a:avLst>
@@ -27561,14 +27720,14 @@
       </p:sp>
       <p:sp>
         <p:nvSpPr>
-          <p:cNvPr id="33" name="Text 31"/>
-          <p:cNvSpPr/>
-          <p:nvPr/>
-        </p:nvSpPr>
-        <p:spPr>
-          <a:xfrm>
-            <a:off x="4370832" y="3364992"/>
-            <a:ext cx="1645920" cy="475488"/>
+          <p:cNvPr id="32" name="Text 30"/>
+          <p:cNvSpPr/>
+          <p:nvPr/>
+        </p:nvSpPr>
+        <p:spPr>
+          <a:xfrm>
+            <a:off x="3602736" y="3364992"/>
+            <a:ext cx="1554480" cy="475488"/>
           </a:xfrm>
           <a:prstGeom prst="rect">
             <a:avLst/>
@@ -27592,7 +27751,7 @@
                 <a:ea typeface="Trebuchet MS" pitchFamily="34" charset="-122"/>
                 <a:cs typeface="Trebuchet MS" pitchFamily="34" charset="-120"/>
               </a:rPr>
-              <a:t>as</a:t>
+              <a:t>nif</a:t>
             </a:r>
             <a:endParaRPr lang="en-US" sz="1400" dirty="0"/>
           </a:p>
@@ -27600,14 +27759,14 @@
       </p:sp>
       <p:sp>
         <p:nvSpPr>
-          <p:cNvPr id="34" name="Text 32"/>
-          <p:cNvSpPr/>
-          <p:nvPr/>
-        </p:nvSpPr>
-        <p:spPr>
-          <a:xfrm>
-            <a:off x="6016752" y="3364992"/>
-            <a:ext cx="411480" cy="475488"/>
+          <p:cNvPr id="33" name="Text 31"/>
+          <p:cNvSpPr/>
+          <p:nvPr/>
+        </p:nvSpPr>
+        <p:spPr>
+          <a:xfrm>
+            <a:off x="5157216" y="3364992"/>
+            <a:ext cx="73152" cy="475488"/>
           </a:xfrm>
           <a:prstGeom prst="rect">
             <a:avLst/>
@@ -27639,14 +27798,14 @@
       </p:sp>
       <p:sp>
         <p:nvSpPr>
-          <p:cNvPr id="35" name="Shape 33"/>
-          <p:cNvSpPr/>
-          <p:nvPr/>
-        </p:nvSpPr>
-        <p:spPr>
-          <a:xfrm>
-            <a:off x="6428232" y="3364992"/>
-            <a:ext cx="1645920" cy="475488"/>
+          <p:cNvPr id="34" name="Shape 32"/>
+          <p:cNvSpPr/>
+          <p:nvPr/>
+        </p:nvSpPr>
+        <p:spPr>
+          <a:xfrm>
+            <a:off x="5230368" y="3364992"/>
+            <a:ext cx="1554480" cy="475488"/>
           </a:xfrm>
           <a:prstGeom prst="rect">
             <a:avLst>
@@ -27666,14 +27825,14 @@
       </p:sp>
       <p:sp>
         <p:nvSpPr>
-          <p:cNvPr id="36" name="Text 34"/>
-          <p:cNvSpPr/>
-          <p:nvPr/>
-        </p:nvSpPr>
-        <p:spPr>
-          <a:xfrm>
-            <a:off x="6428232" y="3364992"/>
-            <a:ext cx="1645920" cy="475488"/>
+          <p:cNvPr id="35" name="Text 33"/>
+          <p:cNvSpPr/>
+          <p:nvPr/>
+        </p:nvSpPr>
+        <p:spPr>
+          <a:xfrm>
+            <a:off x="5230368" y="3364992"/>
+            <a:ext cx="1554480" cy="475488"/>
           </a:xfrm>
           <a:prstGeom prst="rect">
             <a:avLst/>
@@ -27697,7 +27856,7 @@
                 <a:ea typeface="Trebuchet MS" pitchFamily="34" charset="-122"/>
                 <a:cs typeface="Trebuchet MS" pitchFamily="34" charset="-120"/>
               </a:rPr>
-              <a:t>sign</a:t>
+              <a:t>i</a:t>
             </a:r>
             <a:endParaRPr lang="en-US" sz="1400" dirty="0"/>
           </a:p>
@@ -27705,7 +27864,112 @@
       </p:sp>
       <p:sp>
         <p:nvSpPr>
+          <p:cNvPr id="36" name="Text 34"/>
+          <p:cNvSpPr/>
+          <p:nvPr/>
+        </p:nvSpPr>
+        <p:spPr>
+          <a:xfrm>
+            <a:off x="6784848" y="3364992"/>
+            <a:ext cx="73152" cy="475488"/>
+          </a:xfrm>
+          <a:prstGeom prst="rect">
+            <a:avLst/>
+          </a:prstGeom>
+          <a:noFill/>
+          <a:ln/>
+        </p:spPr>
+        <p:txBody>
+          <a:bodyPr wrap="square" lIns="0" tIns="0" rIns="0" bIns="0" rtlCol="0" anchor="ctr"/>
+          <a:lstStyle/>
+          <a:p>
+            <a:pPr algn="ctr" indent="0" marL="0">
+              <a:buNone/>
+            </a:pPr>
+            <a:r>
+              <a:rPr lang="en-US" sz="1600" b="1" dirty="0">
+                <a:solidFill>
+                  <a:srgbClr val="0D9488"/>
+                </a:solidFill>
+                <a:latin typeface="Trebuchet MS" pitchFamily="34" charset="0"/>
+                <a:ea typeface="Trebuchet MS" pitchFamily="34" charset="-122"/>
+                <a:cs typeface="Trebuchet MS" pitchFamily="34" charset="-120"/>
+              </a:rPr>
+              <a:t>·</a:t>
+            </a:r>
+            <a:endParaRPr lang="en-US" sz="1600" dirty="0"/>
+          </a:p>
+        </p:txBody>
+      </p:sp>
+      <p:sp>
+        <p:nvSpPr>
           <p:cNvPr id="37" name="Shape 35"/>
+          <p:cNvSpPr/>
+          <p:nvPr/>
+        </p:nvSpPr>
+        <p:spPr>
+          <a:xfrm>
+            <a:off x="6858000" y="3364992"/>
+            <a:ext cx="1554480" cy="475488"/>
+          </a:xfrm>
+          <a:prstGeom prst="rect">
+            <a:avLst>
+              <a:gd name="adj" fmla="val 9615"/>
+            </a:avLst>
+          </a:prstGeom>
+          <a:solidFill>
+            <a:srgbClr val="FFFFFF"/>
+          </a:solidFill>
+          <a:ln w="12700">
+            <a:solidFill>
+              <a:srgbClr val="0D9488"/>
+            </a:solidFill>
+            <a:prstDash val="solid"/>
+          </a:ln>
+        </p:spPr>
+      </p:sp>
+      <p:sp>
+        <p:nvSpPr>
+          <p:cNvPr id="38" name="Text 36"/>
+          <p:cNvSpPr/>
+          <p:nvPr/>
+        </p:nvSpPr>
+        <p:spPr>
+          <a:xfrm>
+            <a:off x="6858000" y="3364992"/>
+            <a:ext cx="1554480" cy="475488"/>
+          </a:xfrm>
+          <a:prstGeom prst="rect">
+            <a:avLst/>
+          </a:prstGeom>
+          <a:noFill/>
+          <a:ln/>
+        </p:spPr>
+        <p:txBody>
+          <a:bodyPr wrap="square" lIns="0" tIns="0" rIns="0" bIns="0" rtlCol="0" anchor="ctr"/>
+          <a:lstStyle/>
+          <a:p>
+            <a:pPr algn="ctr" indent="0" marL="0">
+              <a:buNone/>
+            </a:pPr>
+            <a:r>
+              <a:rPr lang="en-US" sz="1400" b="1" dirty="0">
+                <a:solidFill>
+                  <a:srgbClr val="0D9488"/>
+                </a:solidFill>
+                <a:latin typeface="Trebuchet MS" pitchFamily="34" charset="0"/>
+                <a:ea typeface="Trebuchet MS" pitchFamily="34" charset="-122"/>
+                <a:cs typeface="Trebuchet MS" pitchFamily="34" charset="-120"/>
+              </a:rPr>
+              <a:t>cant</a:t>
+            </a:r>
+            <a:endParaRPr lang="en-US" sz="1400" dirty="0"/>
+          </a:p>
+        </p:txBody>
+      </p:sp>
+      <p:sp>
+        <p:nvSpPr>
+          <p:cNvPr id="39" name="Shape 37"/>
           <p:cNvSpPr/>
           <p:nvPr/>
         </p:nvSpPr>
@@ -27732,7 +27996,7 @@
       </p:sp>
       <p:sp>
         <p:nvSpPr>
-          <p:cNvPr id="38" name="Text 36"/>
+          <p:cNvPr id="40" name="Text 38"/>
           <p:cNvSpPr/>
           <p:nvPr/>
         </p:nvSpPr>
@@ -27771,7 +28035,7 @@
       </p:sp>
       <p:sp>
         <p:nvSpPr>
-          <p:cNvPr id="39" name="Shape 37"/>
+          <p:cNvPr id="41" name="Shape 39"/>
           <p:cNvSpPr/>
           <p:nvPr/>
         </p:nvSpPr>
@@ -27798,7 +28062,7 @@
       </p:sp>
       <p:sp>
         <p:nvSpPr>
-          <p:cNvPr id="40" name="Text 38"/>
+          <p:cNvPr id="42" name="Text 40"/>
           <p:cNvSpPr/>
           <p:nvPr/>
         </p:nvSpPr>
@@ -28121,7 +28385,7 @@
                 <a:ea typeface="Calibri" pitchFamily="34" charset="-122"/>
                 <a:cs typeface="Calibri" pitchFamily="34" charset="-120"/>
               </a:rPr>
-              <a:t>Word Labs  •  wordlabs.app  •  Root: 'sign' = mark, symbol, or signal</a:t>
+              <a:t>Word Labs  •  wordlabs.app  •  Root: 'sign' = mark; signal</a:t>
             </a:r>
             <a:endParaRPr lang="en-US" sz="800" dirty="0"/>
           </a:p>
@@ -28260,7 +28524,7 @@
                 <a:ea typeface="Trebuchet MS" pitchFamily="34" charset="-122"/>
                 <a:cs typeface="Trebuchet MS" pitchFamily="34" charset="-120"/>
               </a:rPr>
-              <a:t>reassign</a:t>
+              <a:t>significant</a:t>
             </a:r>
             <a:endParaRPr lang="en-US" sz="2800" dirty="0"/>
           </a:p>
@@ -28349,11 +28613,11 @@
             </a:avLst>
           </a:prstGeom>
           <a:solidFill>
-            <a:srgbClr val="DDD6FE"/>
+            <a:srgbClr val="CCFBF1"/>
           </a:solidFill>
           <a:ln w="19050">
             <a:solidFill>
-              <a:srgbClr val="7C3AED"/>
+              <a:srgbClr val="0D9488"/>
             </a:solidFill>
             <a:prstDash val="solid"/>
           </a:ln>
@@ -28393,13 +28657,13 @@
             <a:r>
               <a:rPr lang="en-US" sz="1300" b="1" dirty="0">
                 <a:solidFill>
-                  <a:srgbClr val="4C1D95"/>
+                  <a:srgbClr val="0F766E"/>
                 </a:solidFill>
                 <a:latin typeface="Trebuchet MS" pitchFamily="34" charset="0"/>
                 <a:ea typeface="Trebuchet MS" pitchFamily="34" charset="-122"/>
                 <a:cs typeface="Trebuchet MS" pitchFamily="34" charset="-120"/>
               </a:rPr>
-              <a:t>re</a:t>
+              <a:t>sign</a:t>
             </a:r>
             <a:endParaRPr lang="en-US" sz="1300" dirty="0"/>
           </a:p>
@@ -28438,7 +28702,7 @@
                 <a:ea typeface="Calibri" pitchFamily="34" charset="-122"/>
                 <a:cs typeface="Calibri" pitchFamily="34" charset="-120"/>
               </a:rPr>
-              <a:t>again</a:t>
+              <a:t>mark; signal</a:t>
             </a:r>
             <a:endParaRPr lang="en-US" sz="850" dirty="0"/>
           </a:p>
@@ -28511,7 +28775,7 @@
                 <a:ea typeface="Trebuchet MS" pitchFamily="34" charset="-122"/>
                 <a:cs typeface="Trebuchet MS" pitchFamily="34" charset="-120"/>
               </a:rPr>
-              <a:t>as</a:t>
+              <a:t>ific</a:t>
             </a:r>
             <a:endParaRPr lang="en-US" sz="1300" dirty="0"/>
           </a:p>
@@ -28550,7 +28814,7 @@
                 <a:ea typeface="Calibri" pitchFamily="34" charset="-122"/>
                 <a:cs typeface="Calibri" pitchFamily="34" charset="-120"/>
               </a:rPr>
-              <a:t>to or towards</a:t>
+              <a:t>making; doing</a:t>
             </a:r>
             <a:endParaRPr lang="en-US" sz="850" dirty="0"/>
           </a:p>
@@ -28558,46 +28822,7 @@
       </p:sp>
       <p:sp>
         <p:nvSpPr>
-          <p:cNvPr id="22" name="Text 20"/>
-          <p:cNvSpPr/>
-          <p:nvPr/>
-        </p:nvSpPr>
-        <p:spPr>
-          <a:xfrm>
-            <a:off x="4370832" y="2752344"/>
-            <a:ext cx="1828800" cy="182880"/>
-          </a:xfrm>
-          <a:prstGeom prst="rect">
-            <a:avLst/>
-          </a:prstGeom>
-          <a:noFill/>
-          <a:ln/>
-        </p:spPr>
-        <p:txBody>
-          <a:bodyPr wrap="square" lIns="0" tIns="0" rIns="0" bIns="0" rtlCol="0" anchor="t"/>
-          <a:lstStyle/>
-          <a:p>
-            <a:pPr algn="ctr" indent="0" marL="0">
-              <a:buNone/>
-            </a:pPr>
-            <a:r>
-              <a:rPr lang="en-US" sz="700" i="1" dirty="0">
-                <a:solidFill>
-                  <a:srgbClr val="94A3B8"/>
-                </a:solidFill>
-                <a:latin typeface="Calibri" pitchFamily="34" charset="0"/>
-                <a:ea typeface="Calibri" pitchFamily="34" charset="-122"/>
-                <a:cs typeface="Calibri" pitchFamily="34" charset="-120"/>
-              </a:rPr>
-              <a:t>ad → as before 's'</a:t>
-            </a:r>
-            <a:endParaRPr lang="en-US" sz="700" dirty="0"/>
-          </a:p>
-        </p:txBody>
-      </p:sp>
-      <p:sp>
-        <p:nvSpPr>
-          <p:cNvPr id="23" name="Shape 21"/>
+          <p:cNvPr id="22" name="Shape 20"/>
           <p:cNvSpPr/>
           <p:nvPr/>
         </p:nvSpPr>
@@ -28612,11 +28837,11 @@
             </a:avLst>
           </a:prstGeom>
           <a:solidFill>
-            <a:srgbClr val="CCFBF1"/>
+            <a:srgbClr val="FCE7F3"/>
           </a:solidFill>
           <a:ln w="19050">
             <a:solidFill>
-              <a:srgbClr val="0D9488"/>
+              <a:srgbClr val="DB2777"/>
             </a:solidFill>
             <a:prstDash val="solid"/>
           </a:ln>
@@ -28631,7 +28856,7 @@
       </p:sp>
       <p:sp>
         <p:nvSpPr>
-          <p:cNvPr id="24" name="Text 22"/>
+          <p:cNvPr id="23" name="Text 21"/>
           <p:cNvSpPr/>
           <p:nvPr/>
         </p:nvSpPr>
@@ -28656,13 +28881,13 @@
             <a:r>
               <a:rPr lang="en-US" sz="1300" b="1" dirty="0">
                 <a:solidFill>
-                  <a:srgbClr val="0F766E"/>
+                  <a:srgbClr val="9D174D"/>
                 </a:solidFill>
                 <a:latin typeface="Trebuchet MS" pitchFamily="34" charset="0"/>
                 <a:ea typeface="Trebuchet MS" pitchFamily="34" charset="-122"/>
                 <a:cs typeface="Trebuchet MS" pitchFamily="34" charset="-120"/>
               </a:rPr>
-              <a:t>sign</a:t>
+              <a:t>ant</a:t>
             </a:r>
             <a:endParaRPr lang="en-US" sz="1300" dirty="0"/>
           </a:p>
@@ -28670,7 +28895,7 @@
       </p:sp>
       <p:sp>
         <p:nvSpPr>
-          <p:cNvPr id="25" name="Text 23"/>
+          <p:cNvPr id="24" name="Text 22"/>
           <p:cNvSpPr/>
           <p:nvPr/>
         </p:nvSpPr>
@@ -28701,7 +28926,7 @@
                 <a:ea typeface="Calibri" pitchFamily="34" charset="-122"/>
                 <a:cs typeface="Calibri" pitchFamily="34" charset="-120"/>
               </a:rPr>
-              <a:t>mark or symbol</a:t>
+              <a:t>person or thing that</a:t>
             </a:r>
             <a:endParaRPr lang="en-US" sz="850" dirty="0"/>
           </a:p>
@@ -28709,7 +28934,7 @@
       </p:sp>
       <p:sp>
         <p:nvSpPr>
-          <p:cNvPr id="26" name="Shape 24"/>
+          <p:cNvPr id="25" name="Shape 23"/>
           <p:cNvSpPr/>
           <p:nvPr/>
         </p:nvSpPr>
@@ -28736,7 +28961,7 @@
       </p:sp>
       <p:sp>
         <p:nvSpPr>
-          <p:cNvPr id="27" name="Text 25"/>
+          <p:cNvPr id="26" name="Text 24"/>
           <p:cNvSpPr/>
           <p:nvPr/>
         </p:nvSpPr>
@@ -28775,7 +29000,7 @@
       </p:sp>
       <p:sp>
         <p:nvSpPr>
-          <p:cNvPr id="28" name="Shape 26"/>
+          <p:cNvPr id="27" name="Shape 25"/>
           <p:cNvSpPr/>
           <p:nvPr/>
         </p:nvSpPr>
@@ -28802,14 +29027,14 @@
       </p:sp>
       <p:sp>
         <p:nvSpPr>
-          <p:cNvPr id="29" name="Shape 27"/>
-          <p:cNvSpPr/>
-          <p:nvPr/>
-        </p:nvSpPr>
-        <p:spPr>
-          <a:xfrm>
-            <a:off x="2313432" y="3364992"/>
-            <a:ext cx="1645920" cy="475488"/>
+          <p:cNvPr id="28" name="Shape 26"/>
+          <p:cNvSpPr/>
+          <p:nvPr/>
+        </p:nvSpPr>
+        <p:spPr>
+          <a:xfrm>
+            <a:off x="1975104" y="3364992"/>
+            <a:ext cx="1554480" cy="475488"/>
           </a:xfrm>
           <a:prstGeom prst="rect">
             <a:avLst>
@@ -28829,14 +29054,14 @@
       </p:sp>
       <p:sp>
         <p:nvSpPr>
-          <p:cNvPr id="30" name="Text 28"/>
-          <p:cNvSpPr/>
-          <p:nvPr/>
-        </p:nvSpPr>
-        <p:spPr>
-          <a:xfrm>
-            <a:off x="2313432" y="3364992"/>
-            <a:ext cx="1645920" cy="475488"/>
+          <p:cNvPr id="29" name="Text 27"/>
+          <p:cNvSpPr/>
+          <p:nvPr/>
+        </p:nvSpPr>
+        <p:spPr>
+          <a:xfrm>
+            <a:off x="1975104" y="3364992"/>
+            <a:ext cx="1554480" cy="475488"/>
           </a:xfrm>
           <a:prstGeom prst="rect">
             <a:avLst/>
@@ -28860,7 +29085,7 @@
                 <a:ea typeface="Trebuchet MS" pitchFamily="34" charset="-122"/>
                 <a:cs typeface="Trebuchet MS" pitchFamily="34" charset="-120"/>
               </a:rPr>
-              <a:t>re</a:t>
+              <a:t>sig</a:t>
             </a:r>
             <a:endParaRPr lang="en-US" sz="1400" dirty="0"/>
           </a:p>
@@ -28868,14 +29093,14 @@
       </p:sp>
       <p:sp>
         <p:nvSpPr>
-          <p:cNvPr id="31" name="Text 29"/>
-          <p:cNvSpPr/>
-          <p:nvPr/>
-        </p:nvSpPr>
-        <p:spPr>
-          <a:xfrm>
-            <a:off x="3959352" y="3364992"/>
-            <a:ext cx="411480" cy="475488"/>
+          <p:cNvPr id="30" name="Text 28"/>
+          <p:cNvSpPr/>
+          <p:nvPr/>
+        </p:nvSpPr>
+        <p:spPr>
+          <a:xfrm>
+            <a:off x="3529584" y="3364992"/>
+            <a:ext cx="73152" cy="475488"/>
           </a:xfrm>
           <a:prstGeom prst="rect">
             <a:avLst/>
@@ -28907,14 +29132,14 @@
       </p:sp>
       <p:sp>
         <p:nvSpPr>
-          <p:cNvPr id="32" name="Shape 30"/>
-          <p:cNvSpPr/>
-          <p:nvPr/>
-        </p:nvSpPr>
-        <p:spPr>
-          <a:xfrm>
-            <a:off x="4370832" y="3364992"/>
-            <a:ext cx="1645920" cy="475488"/>
+          <p:cNvPr id="31" name="Shape 29"/>
+          <p:cNvSpPr/>
+          <p:nvPr/>
+        </p:nvSpPr>
+        <p:spPr>
+          <a:xfrm>
+            <a:off x="3602736" y="3364992"/>
+            <a:ext cx="1554480" cy="475488"/>
           </a:xfrm>
           <a:prstGeom prst="rect">
             <a:avLst>
@@ -28934,14 +29159,14 @@
       </p:sp>
       <p:sp>
         <p:nvSpPr>
-          <p:cNvPr id="33" name="Text 31"/>
-          <p:cNvSpPr/>
-          <p:nvPr/>
-        </p:nvSpPr>
-        <p:spPr>
-          <a:xfrm>
-            <a:off x="4370832" y="3364992"/>
-            <a:ext cx="1645920" cy="475488"/>
+          <p:cNvPr id="32" name="Text 30"/>
+          <p:cNvSpPr/>
+          <p:nvPr/>
+        </p:nvSpPr>
+        <p:spPr>
+          <a:xfrm>
+            <a:off x="3602736" y="3364992"/>
+            <a:ext cx="1554480" cy="475488"/>
           </a:xfrm>
           <a:prstGeom prst="rect">
             <a:avLst/>
@@ -28965,7 +29190,7 @@
                 <a:ea typeface="Trebuchet MS" pitchFamily="34" charset="-122"/>
                 <a:cs typeface="Trebuchet MS" pitchFamily="34" charset="-120"/>
               </a:rPr>
-              <a:t>as</a:t>
+              <a:t>nif</a:t>
             </a:r>
             <a:endParaRPr lang="en-US" sz="1400" dirty="0"/>
           </a:p>
@@ -28973,14 +29198,14 @@
       </p:sp>
       <p:sp>
         <p:nvSpPr>
-          <p:cNvPr id="34" name="Text 32"/>
-          <p:cNvSpPr/>
-          <p:nvPr/>
-        </p:nvSpPr>
-        <p:spPr>
-          <a:xfrm>
-            <a:off x="6016752" y="3364992"/>
-            <a:ext cx="411480" cy="475488"/>
+          <p:cNvPr id="33" name="Text 31"/>
+          <p:cNvSpPr/>
+          <p:nvPr/>
+        </p:nvSpPr>
+        <p:spPr>
+          <a:xfrm>
+            <a:off x="5157216" y="3364992"/>
+            <a:ext cx="73152" cy="475488"/>
           </a:xfrm>
           <a:prstGeom prst="rect">
             <a:avLst/>
@@ -29012,14 +29237,14 @@
       </p:sp>
       <p:sp>
         <p:nvSpPr>
-          <p:cNvPr id="35" name="Shape 33"/>
-          <p:cNvSpPr/>
-          <p:nvPr/>
-        </p:nvSpPr>
-        <p:spPr>
-          <a:xfrm>
-            <a:off x="6428232" y="3364992"/>
-            <a:ext cx="1645920" cy="475488"/>
+          <p:cNvPr id="34" name="Shape 32"/>
+          <p:cNvSpPr/>
+          <p:nvPr/>
+        </p:nvSpPr>
+        <p:spPr>
+          <a:xfrm>
+            <a:off x="5230368" y="3364992"/>
+            <a:ext cx="1554480" cy="475488"/>
           </a:xfrm>
           <a:prstGeom prst="rect">
             <a:avLst>
@@ -29039,14 +29264,14 @@
       </p:sp>
       <p:sp>
         <p:nvSpPr>
-          <p:cNvPr id="36" name="Text 34"/>
-          <p:cNvSpPr/>
-          <p:nvPr/>
-        </p:nvSpPr>
-        <p:spPr>
-          <a:xfrm>
-            <a:off x="6428232" y="3364992"/>
-            <a:ext cx="1645920" cy="475488"/>
+          <p:cNvPr id="35" name="Text 33"/>
+          <p:cNvSpPr/>
+          <p:nvPr/>
+        </p:nvSpPr>
+        <p:spPr>
+          <a:xfrm>
+            <a:off x="5230368" y="3364992"/>
+            <a:ext cx="1554480" cy="475488"/>
           </a:xfrm>
           <a:prstGeom prst="rect">
             <a:avLst/>
@@ -29070,7 +29295,7 @@
                 <a:ea typeface="Trebuchet MS" pitchFamily="34" charset="-122"/>
                 <a:cs typeface="Trebuchet MS" pitchFamily="34" charset="-120"/>
               </a:rPr>
-              <a:t>sign</a:t>
+              <a:t>i</a:t>
             </a:r>
             <a:endParaRPr lang="en-US" sz="1400" dirty="0"/>
           </a:p>
@@ -29078,7 +29303,112 @@
       </p:sp>
       <p:sp>
         <p:nvSpPr>
+          <p:cNvPr id="36" name="Text 34"/>
+          <p:cNvSpPr/>
+          <p:nvPr/>
+        </p:nvSpPr>
+        <p:spPr>
+          <a:xfrm>
+            <a:off x="6784848" y="3364992"/>
+            <a:ext cx="73152" cy="475488"/>
+          </a:xfrm>
+          <a:prstGeom prst="rect">
+            <a:avLst/>
+          </a:prstGeom>
+          <a:noFill/>
+          <a:ln/>
+        </p:spPr>
+        <p:txBody>
+          <a:bodyPr wrap="square" lIns="0" tIns="0" rIns="0" bIns="0" rtlCol="0" anchor="ctr"/>
+          <a:lstStyle/>
+          <a:p>
+            <a:pPr algn="ctr" indent="0" marL="0">
+              <a:buNone/>
+            </a:pPr>
+            <a:r>
+              <a:rPr lang="en-US" sz="1600" b="1" dirty="0">
+                <a:solidFill>
+                  <a:srgbClr val="0D9488"/>
+                </a:solidFill>
+                <a:latin typeface="Trebuchet MS" pitchFamily="34" charset="0"/>
+                <a:ea typeface="Trebuchet MS" pitchFamily="34" charset="-122"/>
+                <a:cs typeface="Trebuchet MS" pitchFamily="34" charset="-120"/>
+              </a:rPr>
+              <a:t>·</a:t>
+            </a:r>
+            <a:endParaRPr lang="en-US" sz="1600" dirty="0"/>
+          </a:p>
+        </p:txBody>
+      </p:sp>
+      <p:sp>
+        <p:nvSpPr>
           <p:cNvPr id="37" name="Shape 35"/>
+          <p:cNvSpPr/>
+          <p:nvPr/>
+        </p:nvSpPr>
+        <p:spPr>
+          <a:xfrm>
+            <a:off x="6858000" y="3364992"/>
+            <a:ext cx="1554480" cy="475488"/>
+          </a:xfrm>
+          <a:prstGeom prst="rect">
+            <a:avLst>
+              <a:gd name="adj" fmla="val 9615"/>
+            </a:avLst>
+          </a:prstGeom>
+          <a:solidFill>
+            <a:srgbClr val="FFFFFF"/>
+          </a:solidFill>
+          <a:ln w="12700">
+            <a:solidFill>
+              <a:srgbClr val="0D9488"/>
+            </a:solidFill>
+            <a:prstDash val="solid"/>
+          </a:ln>
+        </p:spPr>
+      </p:sp>
+      <p:sp>
+        <p:nvSpPr>
+          <p:cNvPr id="38" name="Text 36"/>
+          <p:cNvSpPr/>
+          <p:nvPr/>
+        </p:nvSpPr>
+        <p:spPr>
+          <a:xfrm>
+            <a:off x="6858000" y="3364992"/>
+            <a:ext cx="1554480" cy="475488"/>
+          </a:xfrm>
+          <a:prstGeom prst="rect">
+            <a:avLst/>
+          </a:prstGeom>
+          <a:noFill/>
+          <a:ln/>
+        </p:spPr>
+        <p:txBody>
+          <a:bodyPr wrap="square" lIns="0" tIns="0" rIns="0" bIns="0" rtlCol="0" anchor="ctr"/>
+          <a:lstStyle/>
+          <a:p>
+            <a:pPr algn="ctr" indent="0" marL="0">
+              <a:buNone/>
+            </a:pPr>
+            <a:r>
+              <a:rPr lang="en-US" sz="1400" b="1" dirty="0">
+                <a:solidFill>
+                  <a:srgbClr val="0D9488"/>
+                </a:solidFill>
+                <a:latin typeface="Trebuchet MS" pitchFamily="34" charset="0"/>
+                <a:ea typeface="Trebuchet MS" pitchFamily="34" charset="-122"/>
+                <a:cs typeface="Trebuchet MS" pitchFamily="34" charset="-120"/>
+              </a:rPr>
+              <a:t>cant</a:t>
+            </a:r>
+            <a:endParaRPr lang="en-US" sz="1400" dirty="0"/>
+          </a:p>
+        </p:txBody>
+      </p:sp>
+      <p:sp>
+        <p:nvSpPr>
+          <p:cNvPr id="39" name="Shape 37"/>
           <p:cNvSpPr/>
           <p:nvPr/>
         </p:nvSpPr>
@@ -29105,7 +29435,7 @@
       </p:sp>
       <p:sp>
         <p:nvSpPr>
-          <p:cNvPr id="38" name="Text 36"/>
+          <p:cNvPr id="40" name="Text 38"/>
           <p:cNvSpPr/>
           <p:nvPr/>
         </p:nvSpPr>
@@ -29144,7 +29474,7 @@
       </p:sp>
       <p:sp>
         <p:nvSpPr>
-          <p:cNvPr id="39" name="Shape 37"/>
+          <p:cNvPr id="41" name="Shape 39"/>
           <p:cNvSpPr/>
           <p:nvPr/>
         </p:nvSpPr>
@@ -29171,14 +29501,14 @@
       </p:sp>
       <p:sp>
         <p:nvSpPr>
-          <p:cNvPr id="40" name="Shape 38"/>
-          <p:cNvSpPr/>
-          <p:nvPr/>
-        </p:nvSpPr>
-        <p:spPr>
-          <a:xfrm>
-            <a:off x="2427732" y="4169664"/>
-            <a:ext cx="685800" cy="475488"/>
+          <p:cNvPr id="42" name="Shape 40"/>
+          <p:cNvSpPr/>
+          <p:nvPr/>
+        </p:nvSpPr>
+        <p:spPr>
+          <a:xfrm>
+            <a:off x="1952244" y="4169664"/>
+            <a:ext cx="543652" cy="475488"/>
           </a:xfrm>
           <a:prstGeom prst="rect">
             <a:avLst>
@@ -29198,14 +29528,14 @@
       </p:sp>
       <p:sp>
         <p:nvSpPr>
-          <p:cNvPr id="41" name="Text 39"/>
-          <p:cNvSpPr/>
-          <p:nvPr/>
-        </p:nvSpPr>
-        <p:spPr>
-          <a:xfrm>
-            <a:off x="2427732" y="4169664"/>
-            <a:ext cx="685800" cy="475488"/>
+          <p:cNvPr id="43" name="Text 41"/>
+          <p:cNvSpPr/>
+          <p:nvPr/>
+        </p:nvSpPr>
+        <p:spPr>
+          <a:xfrm>
+            <a:off x="1952244" y="4169664"/>
+            <a:ext cx="543652" cy="475488"/>
           </a:xfrm>
           <a:prstGeom prst="rect">
             <a:avLst/>
@@ -29229,7 +29559,7 @@
                 <a:ea typeface="Trebuchet MS" pitchFamily="34" charset="-122"/>
                 <a:cs typeface="Trebuchet MS" pitchFamily="34" charset="-120"/>
               </a:rPr>
-              <a:t>r</a:t>
+              <a:t>s</a:t>
             </a:r>
             <a:endParaRPr lang="en-US" sz="900" dirty="0"/>
           </a:p>
@@ -29237,14 +29567,14 @@
       </p:sp>
       <p:sp>
         <p:nvSpPr>
-          <p:cNvPr id="42" name="Shape 40"/>
-          <p:cNvSpPr/>
-          <p:nvPr/>
-        </p:nvSpPr>
-        <p:spPr>
-          <a:xfrm>
-            <a:off x="3639312" y="4169664"/>
-            <a:ext cx="685800" cy="475488"/>
+          <p:cNvPr id="44" name="Shape 42"/>
+          <p:cNvSpPr/>
+          <p:nvPr/>
+        </p:nvSpPr>
+        <p:spPr>
+          <a:xfrm>
+            <a:off x="2546188" y="4169664"/>
+            <a:ext cx="543652" cy="475488"/>
           </a:xfrm>
           <a:prstGeom prst="rect">
             <a:avLst>
@@ -29264,14 +29594,14 @@
       </p:sp>
       <p:sp>
         <p:nvSpPr>
-          <p:cNvPr id="43" name="Text 41"/>
-          <p:cNvSpPr/>
-          <p:nvPr/>
-        </p:nvSpPr>
-        <p:spPr>
-          <a:xfrm>
-            <a:off x="3639312" y="4169664"/>
-            <a:ext cx="685800" cy="475488"/>
+          <p:cNvPr id="45" name="Text 43"/>
+          <p:cNvSpPr/>
+          <p:nvPr/>
+        </p:nvSpPr>
+        <p:spPr>
+          <a:xfrm>
+            <a:off x="2546188" y="4169664"/>
+            <a:ext cx="543652" cy="475488"/>
           </a:xfrm>
           <a:prstGeom prst="rect">
             <a:avLst/>
@@ -29295,7 +29625,7 @@
                 <a:ea typeface="Trebuchet MS" pitchFamily="34" charset="-122"/>
                 <a:cs typeface="Trebuchet MS" pitchFamily="34" charset="-120"/>
               </a:rPr>
-              <a:t>ea</a:t>
+              <a:t>i</a:t>
             </a:r>
             <a:endParaRPr lang="en-US" sz="900" dirty="0"/>
           </a:p>
@@ -29303,14 +29633,14 @@
       </p:sp>
       <p:sp>
         <p:nvSpPr>
-          <p:cNvPr id="44" name="Shape 42"/>
-          <p:cNvSpPr/>
-          <p:nvPr/>
-        </p:nvSpPr>
-        <p:spPr>
-          <a:xfrm>
-            <a:off x="4850892" y="4169664"/>
-            <a:ext cx="685800" cy="475488"/>
+          <p:cNvPr id="46" name="Shape 44"/>
+          <p:cNvSpPr/>
+          <p:nvPr/>
+        </p:nvSpPr>
+        <p:spPr>
+          <a:xfrm>
+            <a:off x="3140133" y="4169664"/>
+            <a:ext cx="543652" cy="475488"/>
           </a:xfrm>
           <a:prstGeom prst="rect">
             <a:avLst>
@@ -29330,14 +29660,14 @@
       </p:sp>
       <p:sp>
         <p:nvSpPr>
-          <p:cNvPr id="45" name="Text 43"/>
-          <p:cNvSpPr/>
-          <p:nvPr/>
-        </p:nvSpPr>
-        <p:spPr>
-          <a:xfrm>
-            <a:off x="4850892" y="4169664"/>
-            <a:ext cx="685800" cy="475488"/>
+          <p:cNvPr id="47" name="Text 45"/>
+          <p:cNvSpPr/>
+          <p:nvPr/>
+        </p:nvSpPr>
+        <p:spPr>
+          <a:xfrm>
+            <a:off x="3140133" y="4169664"/>
+            <a:ext cx="543652" cy="475488"/>
           </a:xfrm>
           <a:prstGeom prst="rect">
             <a:avLst/>
@@ -29361,7 +29691,7 @@
                 <a:ea typeface="Trebuchet MS" pitchFamily="34" charset="-122"/>
                 <a:cs typeface="Trebuchet MS" pitchFamily="34" charset="-120"/>
               </a:rPr>
-              <a:t>ss</a:t>
+              <a:t>g</a:t>
             </a:r>
             <a:endParaRPr lang="en-US" sz="900" dirty="0"/>
           </a:p>
@@ -29369,14 +29699,14 @@
       </p:sp>
       <p:sp>
         <p:nvSpPr>
-          <p:cNvPr id="46" name="Shape 44"/>
-          <p:cNvSpPr/>
-          <p:nvPr/>
-        </p:nvSpPr>
-        <p:spPr>
-          <a:xfrm>
-            <a:off x="6062472" y="4169664"/>
-            <a:ext cx="685800" cy="475488"/>
+          <p:cNvPr id="48" name="Shape 46"/>
+          <p:cNvSpPr/>
+          <p:nvPr/>
+        </p:nvSpPr>
+        <p:spPr>
+          <a:xfrm>
+            <a:off x="3734077" y="4169664"/>
+            <a:ext cx="543652" cy="475488"/>
           </a:xfrm>
           <a:prstGeom prst="rect">
             <a:avLst>
@@ -29396,14 +29726,14 @@
       </p:sp>
       <p:sp>
         <p:nvSpPr>
-          <p:cNvPr id="47" name="Text 45"/>
-          <p:cNvSpPr/>
-          <p:nvPr/>
-        </p:nvSpPr>
-        <p:spPr>
-          <a:xfrm>
-            <a:off x="6062472" y="4169664"/>
-            <a:ext cx="685800" cy="475488"/>
+          <p:cNvPr id="49" name="Text 47"/>
+          <p:cNvSpPr/>
+          <p:nvPr/>
+        </p:nvSpPr>
+        <p:spPr>
+          <a:xfrm>
+            <a:off x="3734077" y="4169664"/>
+            <a:ext cx="543652" cy="475488"/>
           </a:xfrm>
           <a:prstGeom prst="rect">
             <a:avLst/>
@@ -29427,7 +29757,7 @@
                 <a:ea typeface="Trebuchet MS" pitchFamily="34" charset="-122"/>
                 <a:cs typeface="Trebuchet MS" pitchFamily="34" charset="-120"/>
               </a:rPr>
-              <a:t>i</a:t>
+              <a:t>n</a:t>
             </a:r>
             <a:endParaRPr lang="en-US" sz="900" dirty="0"/>
           </a:p>
@@ -29435,14 +29765,14 @@
       </p:sp>
       <p:sp>
         <p:nvSpPr>
-          <p:cNvPr id="48" name="Shape 46"/>
-          <p:cNvSpPr/>
-          <p:nvPr/>
-        </p:nvSpPr>
-        <p:spPr>
-          <a:xfrm>
-            <a:off x="7274052" y="4169664"/>
-            <a:ext cx="685800" cy="475488"/>
+          <p:cNvPr id="50" name="Shape 48"/>
+          <p:cNvSpPr/>
+          <p:nvPr/>
+        </p:nvSpPr>
+        <p:spPr>
+          <a:xfrm>
+            <a:off x="4328021" y="4169664"/>
+            <a:ext cx="543652" cy="475488"/>
           </a:xfrm>
           <a:prstGeom prst="rect">
             <a:avLst>
@@ -29462,14 +29792,14 @@
       </p:sp>
       <p:sp>
         <p:nvSpPr>
-          <p:cNvPr id="49" name="Text 47"/>
-          <p:cNvSpPr/>
-          <p:nvPr/>
-        </p:nvSpPr>
-        <p:spPr>
-          <a:xfrm>
-            <a:off x="7274052" y="4169664"/>
-            <a:ext cx="685800" cy="475488"/>
+          <p:cNvPr id="51" name="Text 49"/>
+          <p:cNvSpPr/>
+          <p:nvPr/>
+        </p:nvSpPr>
+        <p:spPr>
+          <a:xfrm>
+            <a:off x="4328021" y="4169664"/>
+            <a:ext cx="543652" cy="475488"/>
           </a:xfrm>
           <a:prstGeom prst="rect">
             <a:avLst/>
@@ -29493,7 +29823,403 @@
                 <a:ea typeface="Trebuchet MS" pitchFamily="34" charset="-122"/>
                 <a:cs typeface="Trebuchet MS" pitchFamily="34" charset="-120"/>
               </a:rPr>
-              <a:t>gn</a:t>
+              <a:t>i</a:t>
+            </a:r>
+            <a:endParaRPr lang="en-US" sz="900" dirty="0"/>
+          </a:p>
+        </p:txBody>
+      </p:sp>
+      <p:sp>
+        <p:nvSpPr>
+          <p:cNvPr id="52" name="Shape 50"/>
+          <p:cNvSpPr/>
+          <p:nvPr/>
+        </p:nvSpPr>
+        <p:spPr>
+          <a:xfrm>
+            <a:off x="4921966" y="4169664"/>
+            <a:ext cx="543652" cy="475488"/>
+          </a:xfrm>
+          <a:prstGeom prst="rect">
+            <a:avLst>
+              <a:gd name="adj" fmla="val 7692"/>
+            </a:avLst>
+          </a:prstGeom>
+          <a:solidFill>
+            <a:srgbClr val="FFFFFF"/>
+          </a:solidFill>
+          <a:ln w="12700">
+            <a:solidFill>
+              <a:srgbClr val="DB2777"/>
+            </a:solidFill>
+            <a:prstDash val="solid"/>
+          </a:ln>
+        </p:spPr>
+      </p:sp>
+      <p:sp>
+        <p:nvSpPr>
+          <p:cNvPr id="53" name="Text 51"/>
+          <p:cNvSpPr/>
+          <p:nvPr/>
+        </p:nvSpPr>
+        <p:spPr>
+          <a:xfrm>
+            <a:off x="4921966" y="4169664"/>
+            <a:ext cx="543652" cy="475488"/>
+          </a:xfrm>
+          <a:prstGeom prst="rect">
+            <a:avLst/>
+          </a:prstGeom>
+          <a:noFill/>
+          <a:ln/>
+        </p:spPr>
+        <p:txBody>
+          <a:bodyPr wrap="square" lIns="0" tIns="0" rIns="0" bIns="0" rtlCol="0" anchor="ctr"/>
+          <a:lstStyle/>
+          <a:p>
+            <a:pPr algn="ctr" indent="0" marL="0">
+              <a:buNone/>
+            </a:pPr>
+            <a:r>
+              <a:rPr lang="en-US" sz="900" b="1" dirty="0">
+                <a:solidFill>
+                  <a:srgbClr val="9D174D"/>
+                </a:solidFill>
+                <a:latin typeface="Trebuchet MS" pitchFamily="34" charset="0"/>
+                <a:ea typeface="Trebuchet MS" pitchFamily="34" charset="-122"/>
+                <a:cs typeface="Trebuchet MS" pitchFamily="34" charset="-120"/>
+              </a:rPr>
+              <a:t>f</a:t>
+            </a:r>
+            <a:endParaRPr lang="en-US" sz="900" dirty="0"/>
+          </a:p>
+        </p:txBody>
+      </p:sp>
+      <p:sp>
+        <p:nvSpPr>
+          <p:cNvPr id="54" name="Shape 52"/>
+          <p:cNvSpPr/>
+          <p:nvPr/>
+        </p:nvSpPr>
+        <p:spPr>
+          <a:xfrm>
+            <a:off x="5515910" y="4169664"/>
+            <a:ext cx="543652" cy="475488"/>
+          </a:xfrm>
+          <a:prstGeom prst="rect">
+            <a:avLst>
+              <a:gd name="adj" fmla="val 7692"/>
+            </a:avLst>
+          </a:prstGeom>
+          <a:solidFill>
+            <a:srgbClr val="FFFFFF"/>
+          </a:solidFill>
+          <a:ln w="12700">
+            <a:solidFill>
+              <a:srgbClr val="DB2777"/>
+            </a:solidFill>
+            <a:prstDash val="solid"/>
+          </a:ln>
+        </p:spPr>
+      </p:sp>
+      <p:sp>
+        <p:nvSpPr>
+          <p:cNvPr id="55" name="Text 53"/>
+          <p:cNvSpPr/>
+          <p:nvPr/>
+        </p:nvSpPr>
+        <p:spPr>
+          <a:xfrm>
+            <a:off x="5515910" y="4169664"/>
+            <a:ext cx="543652" cy="475488"/>
+          </a:xfrm>
+          <a:prstGeom prst="rect">
+            <a:avLst/>
+          </a:prstGeom>
+          <a:noFill/>
+          <a:ln/>
+        </p:spPr>
+        <p:txBody>
+          <a:bodyPr wrap="square" lIns="0" tIns="0" rIns="0" bIns="0" rtlCol="0" anchor="ctr"/>
+          <a:lstStyle/>
+          <a:p>
+            <a:pPr algn="ctr" indent="0" marL="0">
+              <a:buNone/>
+            </a:pPr>
+            <a:r>
+              <a:rPr lang="en-US" sz="900" b="1" dirty="0">
+                <a:solidFill>
+                  <a:srgbClr val="9D174D"/>
+                </a:solidFill>
+                <a:latin typeface="Trebuchet MS" pitchFamily="34" charset="0"/>
+                <a:ea typeface="Trebuchet MS" pitchFamily="34" charset="-122"/>
+                <a:cs typeface="Trebuchet MS" pitchFamily="34" charset="-120"/>
+              </a:rPr>
+              <a:t>i</a:t>
+            </a:r>
+            <a:endParaRPr lang="en-US" sz="900" dirty="0"/>
+          </a:p>
+        </p:txBody>
+      </p:sp>
+      <p:sp>
+        <p:nvSpPr>
+          <p:cNvPr id="56" name="Shape 54"/>
+          <p:cNvSpPr/>
+          <p:nvPr/>
+        </p:nvSpPr>
+        <p:spPr>
+          <a:xfrm>
+            <a:off x="6109855" y="4169664"/>
+            <a:ext cx="543652" cy="475488"/>
+          </a:xfrm>
+          <a:prstGeom prst="rect">
+            <a:avLst>
+              <a:gd name="adj" fmla="val 7692"/>
+            </a:avLst>
+          </a:prstGeom>
+          <a:solidFill>
+            <a:srgbClr val="FFFFFF"/>
+          </a:solidFill>
+          <a:ln w="12700">
+            <a:solidFill>
+              <a:srgbClr val="DB2777"/>
+            </a:solidFill>
+            <a:prstDash val="solid"/>
+          </a:ln>
+        </p:spPr>
+      </p:sp>
+      <p:sp>
+        <p:nvSpPr>
+          <p:cNvPr id="57" name="Text 55"/>
+          <p:cNvSpPr/>
+          <p:nvPr/>
+        </p:nvSpPr>
+        <p:spPr>
+          <a:xfrm>
+            <a:off x="6109855" y="4169664"/>
+            <a:ext cx="543652" cy="475488"/>
+          </a:xfrm>
+          <a:prstGeom prst="rect">
+            <a:avLst/>
+          </a:prstGeom>
+          <a:noFill/>
+          <a:ln/>
+        </p:spPr>
+        <p:txBody>
+          <a:bodyPr wrap="square" lIns="0" tIns="0" rIns="0" bIns="0" rtlCol="0" anchor="ctr"/>
+          <a:lstStyle/>
+          <a:p>
+            <a:pPr algn="ctr" indent="0" marL="0">
+              <a:buNone/>
+            </a:pPr>
+            <a:r>
+              <a:rPr lang="en-US" sz="900" b="1" dirty="0">
+                <a:solidFill>
+                  <a:srgbClr val="9D174D"/>
+                </a:solidFill>
+                <a:latin typeface="Trebuchet MS" pitchFamily="34" charset="0"/>
+                <a:ea typeface="Trebuchet MS" pitchFamily="34" charset="-122"/>
+                <a:cs typeface="Trebuchet MS" pitchFamily="34" charset="-120"/>
+              </a:rPr>
+              <a:t>c</a:t>
+            </a:r>
+            <a:endParaRPr lang="en-US" sz="900" dirty="0"/>
+          </a:p>
+        </p:txBody>
+      </p:sp>
+      <p:sp>
+        <p:nvSpPr>
+          <p:cNvPr id="58" name="Shape 56"/>
+          <p:cNvSpPr/>
+          <p:nvPr/>
+        </p:nvSpPr>
+        <p:spPr>
+          <a:xfrm>
+            <a:off x="6703799" y="4169664"/>
+            <a:ext cx="543652" cy="475488"/>
+          </a:xfrm>
+          <a:prstGeom prst="rect">
+            <a:avLst>
+              <a:gd name="adj" fmla="val 7692"/>
+            </a:avLst>
+          </a:prstGeom>
+          <a:solidFill>
+            <a:srgbClr val="FFFFFF"/>
+          </a:solidFill>
+          <a:ln w="12700">
+            <a:solidFill>
+              <a:srgbClr val="DB2777"/>
+            </a:solidFill>
+            <a:prstDash val="solid"/>
+          </a:ln>
+        </p:spPr>
+      </p:sp>
+      <p:sp>
+        <p:nvSpPr>
+          <p:cNvPr id="59" name="Text 57"/>
+          <p:cNvSpPr/>
+          <p:nvPr/>
+        </p:nvSpPr>
+        <p:spPr>
+          <a:xfrm>
+            <a:off x="6703799" y="4169664"/>
+            <a:ext cx="543652" cy="475488"/>
+          </a:xfrm>
+          <a:prstGeom prst="rect">
+            <a:avLst/>
+          </a:prstGeom>
+          <a:noFill/>
+          <a:ln/>
+        </p:spPr>
+        <p:txBody>
+          <a:bodyPr wrap="square" lIns="0" tIns="0" rIns="0" bIns="0" rtlCol="0" anchor="ctr"/>
+          <a:lstStyle/>
+          <a:p>
+            <a:pPr algn="ctr" indent="0" marL="0">
+              <a:buNone/>
+            </a:pPr>
+            <a:r>
+              <a:rPr lang="en-US" sz="900" b="1" dirty="0">
+                <a:solidFill>
+                  <a:srgbClr val="9D174D"/>
+                </a:solidFill>
+                <a:latin typeface="Trebuchet MS" pitchFamily="34" charset="0"/>
+                <a:ea typeface="Trebuchet MS" pitchFamily="34" charset="-122"/>
+                <a:cs typeface="Trebuchet MS" pitchFamily="34" charset="-120"/>
+              </a:rPr>
+              <a:t>a</a:t>
+            </a:r>
+            <a:endParaRPr lang="en-US" sz="900" dirty="0"/>
+          </a:p>
+        </p:txBody>
+      </p:sp>
+      <p:sp>
+        <p:nvSpPr>
+          <p:cNvPr id="60" name="Shape 58"/>
+          <p:cNvSpPr/>
+          <p:nvPr/>
+        </p:nvSpPr>
+        <p:spPr>
+          <a:xfrm>
+            <a:off x="7297743" y="4169664"/>
+            <a:ext cx="543652" cy="475488"/>
+          </a:xfrm>
+          <a:prstGeom prst="rect">
+            <a:avLst>
+              <a:gd name="adj" fmla="val 7692"/>
+            </a:avLst>
+          </a:prstGeom>
+          <a:solidFill>
+            <a:srgbClr val="FFFFFF"/>
+          </a:solidFill>
+          <a:ln w="12700">
+            <a:solidFill>
+              <a:srgbClr val="DB2777"/>
+            </a:solidFill>
+            <a:prstDash val="solid"/>
+          </a:ln>
+        </p:spPr>
+      </p:sp>
+      <p:sp>
+        <p:nvSpPr>
+          <p:cNvPr id="61" name="Text 59"/>
+          <p:cNvSpPr/>
+          <p:nvPr/>
+        </p:nvSpPr>
+        <p:spPr>
+          <a:xfrm>
+            <a:off x="7297743" y="4169664"/>
+            <a:ext cx="543652" cy="475488"/>
+          </a:xfrm>
+          <a:prstGeom prst="rect">
+            <a:avLst/>
+          </a:prstGeom>
+          <a:noFill/>
+          <a:ln/>
+        </p:spPr>
+        <p:txBody>
+          <a:bodyPr wrap="square" lIns="0" tIns="0" rIns="0" bIns="0" rtlCol="0" anchor="ctr"/>
+          <a:lstStyle/>
+          <a:p>
+            <a:pPr algn="ctr" indent="0" marL="0">
+              <a:buNone/>
+            </a:pPr>
+            <a:r>
+              <a:rPr lang="en-US" sz="900" b="1" dirty="0">
+                <a:solidFill>
+                  <a:srgbClr val="9D174D"/>
+                </a:solidFill>
+                <a:latin typeface="Trebuchet MS" pitchFamily="34" charset="0"/>
+                <a:ea typeface="Trebuchet MS" pitchFamily="34" charset="-122"/>
+                <a:cs typeface="Trebuchet MS" pitchFamily="34" charset="-120"/>
+              </a:rPr>
+              <a:t>n</a:t>
+            </a:r>
+            <a:endParaRPr lang="en-US" sz="900" dirty="0"/>
+          </a:p>
+        </p:txBody>
+      </p:sp>
+      <p:sp>
+        <p:nvSpPr>
+          <p:cNvPr id="62" name="Shape 60"/>
+          <p:cNvSpPr/>
+          <p:nvPr/>
+        </p:nvSpPr>
+        <p:spPr>
+          <a:xfrm>
+            <a:off x="7891688" y="4169664"/>
+            <a:ext cx="543652" cy="475488"/>
+          </a:xfrm>
+          <a:prstGeom prst="rect">
+            <a:avLst>
+              <a:gd name="adj" fmla="val 7692"/>
+            </a:avLst>
+          </a:prstGeom>
+          <a:solidFill>
+            <a:srgbClr val="FFFFFF"/>
+          </a:solidFill>
+          <a:ln w="12700">
+            <a:solidFill>
+              <a:srgbClr val="DB2777"/>
+            </a:solidFill>
+            <a:prstDash val="solid"/>
+          </a:ln>
+        </p:spPr>
+      </p:sp>
+      <p:sp>
+        <p:nvSpPr>
+          <p:cNvPr id="63" name="Text 61"/>
+          <p:cNvSpPr/>
+          <p:nvPr/>
+        </p:nvSpPr>
+        <p:spPr>
+          <a:xfrm>
+            <a:off x="7891688" y="4169664"/>
+            <a:ext cx="543652" cy="475488"/>
+          </a:xfrm>
+          <a:prstGeom prst="rect">
+            <a:avLst/>
+          </a:prstGeom>
+          <a:noFill/>
+          <a:ln/>
+        </p:spPr>
+        <p:txBody>
+          <a:bodyPr wrap="square" lIns="0" tIns="0" rIns="0" bIns="0" rtlCol="0" anchor="ctr"/>
+          <a:lstStyle/>
+          <a:p>
+            <a:pPr algn="ctr" indent="0" marL="0">
+              <a:buNone/>
+            </a:pPr>
+            <a:r>
+              <a:rPr lang="en-US" sz="900" b="1" dirty="0">
+                <a:solidFill>
+                  <a:srgbClr val="9D174D"/>
+                </a:solidFill>
+                <a:latin typeface="Trebuchet MS" pitchFamily="34" charset="0"/>
+                <a:ea typeface="Trebuchet MS" pitchFamily="34" charset="-122"/>
+                <a:cs typeface="Trebuchet MS" pitchFamily="34" charset="-120"/>
+              </a:rPr>
+              <a:t>t</a:t>
             </a:r>
             <a:endParaRPr lang="en-US" sz="900" dirty="0"/>
           </a:p>
@@ -29785,7 +30511,7 @@
                 <a:ea typeface="Calibri" pitchFamily="34" charset="-122"/>
                 <a:cs typeface="Calibri" pitchFamily="34" charset="-120"/>
               </a:rPr>
-              <a:t>Word Labs  •  wordlabs.app  •  Root: 'sign' = mark, symbol, or signal</a:t>
+              <a:t>Word Labs  •  wordlabs.app  •  Root: 'sign' = mark; signal</a:t>
             </a:r>
             <a:endParaRPr lang="en-US" sz="800" dirty="0"/>
           </a:p>
@@ -29924,7 +30650,7 @@
                 <a:ea typeface="Trebuchet MS" pitchFamily="34" charset="-122"/>
                 <a:cs typeface="Trebuchet MS" pitchFamily="34" charset="-120"/>
               </a:rPr>
-              <a:t>assignment</a:t>
+              <a:t>significance</a:t>
             </a:r>
             <a:endParaRPr lang="en-US" sz="2800" dirty="0"/>
           </a:p>
@@ -30612,7 +31338,7 @@
                 <a:ea typeface="Calibri" pitchFamily="34" charset="-122"/>
                 <a:cs typeface="Calibri" pitchFamily="34" charset="-120"/>
               </a:rPr>
-              <a:t>Word Labs  •  wordlabs.app  •  Root: 'sign' = mark, symbol, or signal</a:t>
+              <a:t>Word Labs  •  wordlabs.app  •  Root: 'sign' = mark; signal</a:t>
             </a:r>
             <a:endParaRPr lang="en-US" sz="800" dirty="0"/>
           </a:p>
@@ -30751,7 +31477,7 @@
                 <a:ea typeface="Trebuchet MS" pitchFamily="34" charset="-122"/>
                 <a:cs typeface="Trebuchet MS" pitchFamily="34" charset="-120"/>
               </a:rPr>
-              <a:t>assignment</a:t>
+              <a:t>significance</a:t>
             </a:r>
             <a:endParaRPr lang="en-US" sz="2800" dirty="0"/>
           </a:p>
@@ -30840,11 +31566,11 @@
             </a:avLst>
           </a:prstGeom>
           <a:solidFill>
-            <a:srgbClr val="DDD6FE"/>
+            <a:srgbClr val="CCFBF1"/>
           </a:solidFill>
           <a:ln w="19050">
             <a:solidFill>
-              <a:srgbClr val="7C3AED"/>
+              <a:srgbClr val="0D9488"/>
             </a:solidFill>
             <a:prstDash val="solid"/>
           </a:ln>
@@ -30884,13 +31610,13 @@
             <a:r>
               <a:rPr lang="en-US" sz="1300" b="1" dirty="0">
                 <a:solidFill>
-                  <a:srgbClr val="4C1D95"/>
+                  <a:srgbClr val="0F766E"/>
                 </a:solidFill>
                 <a:latin typeface="Trebuchet MS" pitchFamily="34" charset="0"/>
                 <a:ea typeface="Trebuchet MS" pitchFamily="34" charset="-122"/>
                 <a:cs typeface="Trebuchet MS" pitchFamily="34" charset="-120"/>
               </a:rPr>
-              <a:t>as</a:t>
+              <a:t>sign</a:t>
             </a:r>
             <a:endParaRPr lang="en-US" sz="1300" dirty="0"/>
           </a:p>
@@ -30929,7 +31655,7 @@
                 <a:ea typeface="Calibri" pitchFamily="34" charset="-122"/>
                 <a:cs typeface="Calibri" pitchFamily="34" charset="-120"/>
               </a:rPr>
-              <a:t>to or towards</a:t>
+              <a:t>mark; signal</a:t>
             </a:r>
             <a:endParaRPr lang="en-US" sz="850" dirty="0"/>
           </a:p>
@@ -30937,46 +31663,7 @@
       </p:sp>
       <p:sp>
         <p:nvSpPr>
-          <p:cNvPr id="19" name="Text 17"/>
-          <p:cNvSpPr/>
-          <p:nvPr/>
-        </p:nvSpPr>
-        <p:spPr>
-          <a:xfrm>
-            <a:off x="2221992" y="2752344"/>
-            <a:ext cx="1828800" cy="182880"/>
-          </a:xfrm>
-          <a:prstGeom prst="rect">
-            <a:avLst/>
-          </a:prstGeom>
-          <a:noFill/>
-          <a:ln/>
-        </p:spPr>
-        <p:txBody>
-          <a:bodyPr wrap="square" lIns="0" tIns="0" rIns="0" bIns="0" rtlCol="0" anchor="t"/>
-          <a:lstStyle/>
-          <a:p>
-            <a:pPr algn="ctr" indent="0" marL="0">
-              <a:buNone/>
-            </a:pPr>
-            <a:r>
-              <a:rPr lang="en-US" sz="700" i="1" dirty="0">
-                <a:solidFill>
-                  <a:srgbClr val="94A3B8"/>
-                </a:solidFill>
-                <a:latin typeface="Calibri" pitchFamily="34" charset="0"/>
-                <a:ea typeface="Calibri" pitchFamily="34" charset="-122"/>
-                <a:cs typeface="Calibri" pitchFamily="34" charset="-120"/>
-              </a:rPr>
-              <a:t>ad → as before 's'</a:t>
-            </a:r>
-            <a:endParaRPr lang="en-US" sz="700" dirty="0"/>
-          </a:p>
-        </p:txBody>
-      </p:sp>
-      <p:sp>
-        <p:nvSpPr>
-          <p:cNvPr id="20" name="Shape 18"/>
+          <p:cNvPr id="19" name="Shape 17"/>
           <p:cNvSpPr/>
           <p:nvPr/>
         </p:nvSpPr>
@@ -30991,11 +31678,11 @@
             </a:avLst>
           </a:prstGeom>
           <a:solidFill>
-            <a:srgbClr val="CCFBF1"/>
+            <a:srgbClr val="FCE7F3"/>
           </a:solidFill>
           <a:ln w="19050">
             <a:solidFill>
-              <a:srgbClr val="0D9488"/>
+              <a:srgbClr val="DB2777"/>
             </a:solidFill>
             <a:prstDash val="solid"/>
           </a:ln>
@@ -31010,7 +31697,7 @@
       </p:sp>
       <p:sp>
         <p:nvSpPr>
-          <p:cNvPr id="21" name="Text 19"/>
+          <p:cNvPr id="20" name="Text 18"/>
           <p:cNvSpPr/>
           <p:nvPr/>
         </p:nvSpPr>
@@ -31035,13 +31722,13 @@
             <a:r>
               <a:rPr lang="en-US" sz="1300" b="1" dirty="0">
                 <a:solidFill>
-                  <a:srgbClr val="0F766E"/>
+                  <a:srgbClr val="9D174D"/>
                 </a:solidFill>
                 <a:latin typeface="Trebuchet MS" pitchFamily="34" charset="0"/>
                 <a:ea typeface="Trebuchet MS" pitchFamily="34" charset="-122"/>
                 <a:cs typeface="Trebuchet MS" pitchFamily="34" charset="-120"/>
               </a:rPr>
-              <a:t>sign</a:t>
+              <a:t>ific</a:t>
             </a:r>
             <a:endParaRPr lang="en-US" sz="1300" dirty="0"/>
           </a:p>
@@ -31049,7 +31736,7 @@
       </p:sp>
       <p:sp>
         <p:nvSpPr>
-          <p:cNvPr id="22" name="Text 20"/>
+          <p:cNvPr id="21" name="Text 19"/>
           <p:cNvSpPr/>
           <p:nvPr/>
         </p:nvSpPr>
@@ -31080,7 +31767,7 @@
                 <a:ea typeface="Calibri" pitchFamily="34" charset="-122"/>
                 <a:cs typeface="Calibri" pitchFamily="34" charset="-120"/>
               </a:rPr>
-              <a:t>mark or symbol</a:t>
+              <a:t>making; doing</a:t>
             </a:r>
             <a:endParaRPr lang="en-US" sz="850" dirty="0"/>
           </a:p>
@@ -31088,7 +31775,7 @@
       </p:sp>
       <p:sp>
         <p:nvSpPr>
-          <p:cNvPr id="23" name="Shape 21"/>
+          <p:cNvPr id="22" name="Shape 20"/>
           <p:cNvSpPr/>
           <p:nvPr/>
         </p:nvSpPr>
@@ -31122,7 +31809,7 @@
       </p:sp>
       <p:sp>
         <p:nvSpPr>
-          <p:cNvPr id="24" name="Text 22"/>
+          <p:cNvPr id="23" name="Text 21"/>
           <p:cNvSpPr/>
           <p:nvPr/>
         </p:nvSpPr>
@@ -31153,7 +31840,7 @@
                 <a:ea typeface="Trebuchet MS" pitchFamily="34" charset="-122"/>
                 <a:cs typeface="Trebuchet MS" pitchFamily="34" charset="-120"/>
               </a:rPr>
-              <a:t>ment</a:t>
+              <a:t>ance</a:t>
             </a:r>
             <a:endParaRPr lang="en-US" sz="1300" dirty="0"/>
           </a:p>
@@ -31161,7 +31848,7 @@
       </p:sp>
       <p:sp>
         <p:nvSpPr>
-          <p:cNvPr id="25" name="Text 23"/>
+          <p:cNvPr id="24" name="Text 22"/>
           <p:cNvSpPr/>
           <p:nvPr/>
         </p:nvSpPr>
@@ -31192,7 +31879,7 @@
                 <a:ea typeface="Calibri" pitchFamily="34" charset="-122"/>
                 <a:cs typeface="Calibri" pitchFamily="34" charset="-120"/>
               </a:rPr>
-              <a:t>the result or act of something</a:t>
+              <a:t>state of</a:t>
             </a:r>
             <a:endParaRPr lang="en-US" sz="850" dirty="0"/>
           </a:p>
@@ -31200,7 +31887,7 @@
       </p:sp>
       <p:sp>
         <p:nvSpPr>
-          <p:cNvPr id="26" name="Shape 24"/>
+          <p:cNvPr id="25" name="Shape 23"/>
           <p:cNvSpPr/>
           <p:nvPr/>
         </p:nvSpPr>
@@ -31227,7 +31914,7 @@
       </p:sp>
       <p:sp>
         <p:nvSpPr>
-          <p:cNvPr id="27" name="Text 25"/>
+          <p:cNvPr id="26" name="Text 24"/>
           <p:cNvSpPr/>
           <p:nvPr/>
         </p:nvSpPr>
@@ -31266,7 +31953,7 @@
       </p:sp>
       <p:sp>
         <p:nvSpPr>
-          <p:cNvPr id="28" name="Shape 26"/>
+          <p:cNvPr id="27" name="Shape 25"/>
           <p:cNvSpPr/>
           <p:nvPr/>
         </p:nvSpPr>
@@ -31293,7 +31980,7 @@
       </p:sp>
       <p:sp>
         <p:nvSpPr>
-          <p:cNvPr id="29" name="Text 27"/>
+          <p:cNvPr id="28" name="Text 26"/>
           <p:cNvSpPr/>
           <p:nvPr/>
         </p:nvSpPr>
@@ -31332,7 +32019,7 @@
       </p:sp>
       <p:sp>
         <p:nvSpPr>
-          <p:cNvPr id="30" name="Shape 28"/>
+          <p:cNvPr id="29" name="Shape 27"/>
           <p:cNvSpPr/>
           <p:nvPr/>
         </p:nvSpPr>
@@ -31359,7 +32046,7 @@
       </p:sp>
       <p:sp>
         <p:nvSpPr>
-          <p:cNvPr id="31" name="Text 29"/>
+          <p:cNvPr id="30" name="Text 28"/>
           <p:cNvSpPr/>
           <p:nvPr/>
         </p:nvSpPr>
@@ -31398,7 +32085,7 @@
       </p:sp>
       <p:sp>
         <p:nvSpPr>
-          <p:cNvPr id="32" name="Shape 30"/>
+          <p:cNvPr id="31" name="Shape 29"/>
           <p:cNvSpPr/>
           <p:nvPr/>
         </p:nvSpPr>
@@ -31425,7 +32112,7 @@
       </p:sp>
       <p:sp>
         <p:nvSpPr>
-          <p:cNvPr id="33" name="Text 31"/>
+          <p:cNvPr id="32" name="Text 30"/>
           <p:cNvSpPr/>
           <p:nvPr/>
         </p:nvSpPr>
@@ -31748,7 +32435,7 @@
                 <a:ea typeface="Calibri" pitchFamily="34" charset="-122"/>
                 <a:cs typeface="Calibri" pitchFamily="34" charset="-120"/>
               </a:rPr>
-              <a:t>Word Labs  •  wordlabs.app  •  Root: 'sign' = mark, symbol, or signal</a:t>
+              <a:t>Word Labs  •  wordlabs.app  •  Root: 'sign' = mark; signal</a:t>
             </a:r>
             <a:endParaRPr lang="en-US" sz="800" dirty="0"/>
           </a:p>
@@ -31887,7 +32574,7 @@
                 <a:ea typeface="Trebuchet MS" pitchFamily="34" charset="-122"/>
                 <a:cs typeface="Trebuchet MS" pitchFamily="34" charset="-120"/>
               </a:rPr>
-              <a:t>assignment</a:t>
+              <a:t>significance</a:t>
             </a:r>
             <a:endParaRPr lang="en-US" sz="2800" dirty="0"/>
           </a:p>
@@ -31976,11 +32663,11 @@
             </a:avLst>
           </a:prstGeom>
           <a:solidFill>
-            <a:srgbClr val="DDD6FE"/>
+            <a:srgbClr val="CCFBF1"/>
           </a:solidFill>
           <a:ln w="19050">
             <a:solidFill>
-              <a:srgbClr val="7C3AED"/>
+              <a:srgbClr val="0D9488"/>
             </a:solidFill>
             <a:prstDash val="solid"/>
           </a:ln>
@@ -32020,13 +32707,13 @@
             <a:r>
               <a:rPr lang="en-US" sz="1300" b="1" dirty="0">
                 <a:solidFill>
-                  <a:srgbClr val="4C1D95"/>
+                  <a:srgbClr val="0F766E"/>
                 </a:solidFill>
                 <a:latin typeface="Trebuchet MS" pitchFamily="34" charset="0"/>
                 <a:ea typeface="Trebuchet MS" pitchFamily="34" charset="-122"/>
                 <a:cs typeface="Trebuchet MS" pitchFamily="34" charset="-120"/>
               </a:rPr>
-              <a:t>as</a:t>
+              <a:t>sign</a:t>
             </a:r>
             <a:endParaRPr lang="en-US" sz="1300" dirty="0"/>
           </a:p>
@@ -32065,7 +32752,7 @@
                 <a:ea typeface="Calibri" pitchFamily="34" charset="-122"/>
                 <a:cs typeface="Calibri" pitchFamily="34" charset="-120"/>
               </a:rPr>
-              <a:t>to or towards</a:t>
+              <a:t>mark; signal</a:t>
             </a:r>
             <a:endParaRPr lang="en-US" sz="850" dirty="0"/>
           </a:p>
@@ -32073,46 +32760,7 @@
       </p:sp>
       <p:sp>
         <p:nvSpPr>
-          <p:cNvPr id="19" name="Text 17"/>
-          <p:cNvSpPr/>
-          <p:nvPr/>
-        </p:nvSpPr>
-        <p:spPr>
-          <a:xfrm>
-            <a:off x="2221992" y="2752344"/>
-            <a:ext cx="1828800" cy="182880"/>
-          </a:xfrm>
-          <a:prstGeom prst="rect">
-            <a:avLst/>
-          </a:prstGeom>
-          <a:noFill/>
-          <a:ln/>
-        </p:spPr>
-        <p:txBody>
-          <a:bodyPr wrap="square" lIns="0" tIns="0" rIns="0" bIns="0" rtlCol="0" anchor="t"/>
-          <a:lstStyle/>
-          <a:p>
-            <a:pPr algn="ctr" indent="0" marL="0">
-              <a:buNone/>
-            </a:pPr>
-            <a:r>
-              <a:rPr lang="en-US" sz="700" i="1" dirty="0">
-                <a:solidFill>
-                  <a:srgbClr val="94A3B8"/>
-                </a:solidFill>
-                <a:latin typeface="Calibri" pitchFamily="34" charset="0"/>
-                <a:ea typeface="Calibri" pitchFamily="34" charset="-122"/>
-                <a:cs typeface="Calibri" pitchFamily="34" charset="-120"/>
-              </a:rPr>
-              <a:t>ad → as before 's'</a:t>
-            </a:r>
-            <a:endParaRPr lang="en-US" sz="700" dirty="0"/>
-          </a:p>
-        </p:txBody>
-      </p:sp>
-      <p:sp>
-        <p:nvSpPr>
-          <p:cNvPr id="20" name="Shape 18"/>
+          <p:cNvPr id="19" name="Shape 17"/>
           <p:cNvSpPr/>
           <p:nvPr/>
         </p:nvSpPr>
@@ -32127,11 +32775,11 @@
             </a:avLst>
           </a:prstGeom>
           <a:solidFill>
-            <a:srgbClr val="CCFBF1"/>
+            <a:srgbClr val="FCE7F3"/>
           </a:solidFill>
           <a:ln w="19050">
             <a:solidFill>
-              <a:srgbClr val="0D9488"/>
+              <a:srgbClr val="DB2777"/>
             </a:solidFill>
             <a:prstDash val="solid"/>
           </a:ln>
@@ -32146,7 +32794,7 @@
       </p:sp>
       <p:sp>
         <p:nvSpPr>
-          <p:cNvPr id="21" name="Text 19"/>
+          <p:cNvPr id="20" name="Text 18"/>
           <p:cNvSpPr/>
           <p:nvPr/>
         </p:nvSpPr>
@@ -32171,13 +32819,13 @@
             <a:r>
               <a:rPr lang="en-US" sz="1300" b="1" dirty="0">
                 <a:solidFill>
-                  <a:srgbClr val="0F766E"/>
+                  <a:srgbClr val="9D174D"/>
                 </a:solidFill>
                 <a:latin typeface="Trebuchet MS" pitchFamily="34" charset="0"/>
                 <a:ea typeface="Trebuchet MS" pitchFamily="34" charset="-122"/>
                 <a:cs typeface="Trebuchet MS" pitchFamily="34" charset="-120"/>
               </a:rPr>
-              <a:t>sign</a:t>
+              <a:t>ific</a:t>
             </a:r>
             <a:endParaRPr lang="en-US" sz="1300" dirty="0"/>
           </a:p>
@@ -32185,7 +32833,7 @@
       </p:sp>
       <p:sp>
         <p:nvSpPr>
-          <p:cNvPr id="22" name="Text 20"/>
+          <p:cNvPr id="21" name="Text 19"/>
           <p:cNvSpPr/>
           <p:nvPr/>
         </p:nvSpPr>
@@ -32216,7 +32864,7 @@
                 <a:ea typeface="Calibri" pitchFamily="34" charset="-122"/>
                 <a:cs typeface="Calibri" pitchFamily="34" charset="-120"/>
               </a:rPr>
-              <a:t>mark or symbol</a:t>
+              <a:t>making; doing</a:t>
             </a:r>
             <a:endParaRPr lang="en-US" sz="850" dirty="0"/>
           </a:p>
@@ -32224,7 +32872,7 @@
       </p:sp>
       <p:sp>
         <p:nvSpPr>
-          <p:cNvPr id="23" name="Shape 21"/>
+          <p:cNvPr id="22" name="Shape 20"/>
           <p:cNvSpPr/>
           <p:nvPr/>
         </p:nvSpPr>
@@ -32258,7 +32906,7 @@
       </p:sp>
       <p:sp>
         <p:nvSpPr>
-          <p:cNvPr id="24" name="Text 22"/>
+          <p:cNvPr id="23" name="Text 21"/>
           <p:cNvSpPr/>
           <p:nvPr/>
         </p:nvSpPr>
@@ -32289,7 +32937,7 @@
                 <a:ea typeface="Trebuchet MS" pitchFamily="34" charset="-122"/>
                 <a:cs typeface="Trebuchet MS" pitchFamily="34" charset="-120"/>
               </a:rPr>
-              <a:t>ment</a:t>
+              <a:t>ance</a:t>
             </a:r>
             <a:endParaRPr lang="en-US" sz="1300" dirty="0"/>
           </a:p>
@@ -32297,7 +32945,7 @@
       </p:sp>
       <p:sp>
         <p:nvSpPr>
-          <p:cNvPr id="25" name="Text 23"/>
+          <p:cNvPr id="24" name="Text 22"/>
           <p:cNvSpPr/>
           <p:nvPr/>
         </p:nvSpPr>
@@ -32328,7 +32976,7 @@
                 <a:ea typeface="Calibri" pitchFamily="34" charset="-122"/>
                 <a:cs typeface="Calibri" pitchFamily="34" charset="-120"/>
               </a:rPr>
-              <a:t>the result or act of something</a:t>
+              <a:t>state of</a:t>
             </a:r>
             <a:endParaRPr lang="en-US" sz="850" dirty="0"/>
           </a:p>
@@ -32336,7 +32984,7 @@
       </p:sp>
       <p:sp>
         <p:nvSpPr>
-          <p:cNvPr id="26" name="Shape 24"/>
+          <p:cNvPr id="25" name="Shape 23"/>
           <p:cNvSpPr/>
           <p:nvPr/>
         </p:nvSpPr>
@@ -32363,7 +33011,7 @@
       </p:sp>
       <p:sp>
         <p:nvSpPr>
-          <p:cNvPr id="27" name="Text 25"/>
+          <p:cNvPr id="26" name="Text 24"/>
           <p:cNvSpPr/>
           <p:nvPr/>
         </p:nvSpPr>
@@ -32402,7 +33050,7 @@
       </p:sp>
       <p:sp>
         <p:nvSpPr>
-          <p:cNvPr id="28" name="Shape 26"/>
+          <p:cNvPr id="27" name="Shape 25"/>
           <p:cNvSpPr/>
           <p:nvPr/>
         </p:nvSpPr>
@@ -32429,14 +33077,14 @@
       </p:sp>
       <p:sp>
         <p:nvSpPr>
-          <p:cNvPr id="29" name="Shape 27"/>
-          <p:cNvSpPr/>
-          <p:nvPr/>
-        </p:nvSpPr>
-        <p:spPr>
-          <a:xfrm>
-            <a:off x="2313432" y="3364992"/>
-            <a:ext cx="1645920" cy="475488"/>
+          <p:cNvPr id="28" name="Shape 26"/>
+          <p:cNvSpPr/>
+          <p:nvPr/>
+        </p:nvSpPr>
+        <p:spPr>
+          <a:xfrm>
+            <a:off x="1975104" y="3364992"/>
+            <a:ext cx="1554480" cy="475488"/>
           </a:xfrm>
           <a:prstGeom prst="rect">
             <a:avLst>
@@ -32456,14 +33104,14 @@
       </p:sp>
       <p:sp>
         <p:nvSpPr>
-          <p:cNvPr id="30" name="Text 28"/>
-          <p:cNvSpPr/>
-          <p:nvPr/>
-        </p:nvSpPr>
-        <p:spPr>
-          <a:xfrm>
-            <a:off x="2313432" y="3364992"/>
-            <a:ext cx="1645920" cy="475488"/>
+          <p:cNvPr id="29" name="Text 27"/>
+          <p:cNvSpPr/>
+          <p:nvPr/>
+        </p:nvSpPr>
+        <p:spPr>
+          <a:xfrm>
+            <a:off x="1975104" y="3364992"/>
+            <a:ext cx="1554480" cy="475488"/>
           </a:xfrm>
           <a:prstGeom prst="rect">
             <a:avLst/>
@@ -32487,7 +33135,7 @@
                 <a:ea typeface="Trebuchet MS" pitchFamily="34" charset="-122"/>
                 <a:cs typeface="Trebuchet MS" pitchFamily="34" charset="-120"/>
               </a:rPr>
-              <a:t>as</a:t>
+              <a:t>sig</a:t>
             </a:r>
             <a:endParaRPr lang="en-US" sz="1400" dirty="0"/>
           </a:p>
@@ -32495,14 +33143,14 @@
       </p:sp>
       <p:sp>
         <p:nvSpPr>
-          <p:cNvPr id="31" name="Text 29"/>
-          <p:cNvSpPr/>
-          <p:nvPr/>
-        </p:nvSpPr>
-        <p:spPr>
-          <a:xfrm>
-            <a:off x="3959352" y="3364992"/>
-            <a:ext cx="411480" cy="475488"/>
+          <p:cNvPr id="30" name="Text 28"/>
+          <p:cNvSpPr/>
+          <p:nvPr/>
+        </p:nvSpPr>
+        <p:spPr>
+          <a:xfrm>
+            <a:off x="3529584" y="3364992"/>
+            <a:ext cx="73152" cy="475488"/>
           </a:xfrm>
           <a:prstGeom prst="rect">
             <a:avLst/>
@@ -32534,14 +33182,14 @@
       </p:sp>
       <p:sp>
         <p:nvSpPr>
-          <p:cNvPr id="32" name="Shape 30"/>
-          <p:cNvSpPr/>
-          <p:nvPr/>
-        </p:nvSpPr>
-        <p:spPr>
-          <a:xfrm>
-            <a:off x="4370832" y="3364992"/>
-            <a:ext cx="1645920" cy="475488"/>
+          <p:cNvPr id="31" name="Shape 29"/>
+          <p:cNvSpPr/>
+          <p:nvPr/>
+        </p:nvSpPr>
+        <p:spPr>
+          <a:xfrm>
+            <a:off x="3602736" y="3364992"/>
+            <a:ext cx="1554480" cy="475488"/>
           </a:xfrm>
           <a:prstGeom prst="rect">
             <a:avLst>
@@ -32561,14 +33209,14 @@
       </p:sp>
       <p:sp>
         <p:nvSpPr>
-          <p:cNvPr id="33" name="Text 31"/>
-          <p:cNvSpPr/>
-          <p:nvPr/>
-        </p:nvSpPr>
-        <p:spPr>
-          <a:xfrm>
-            <a:off x="4370832" y="3364992"/>
-            <a:ext cx="1645920" cy="475488"/>
+          <p:cNvPr id="32" name="Text 30"/>
+          <p:cNvSpPr/>
+          <p:nvPr/>
+        </p:nvSpPr>
+        <p:spPr>
+          <a:xfrm>
+            <a:off x="3602736" y="3364992"/>
+            <a:ext cx="1554480" cy="475488"/>
           </a:xfrm>
           <a:prstGeom prst="rect">
             <a:avLst/>
@@ -32592,7 +33240,7 @@
                 <a:ea typeface="Trebuchet MS" pitchFamily="34" charset="-122"/>
                 <a:cs typeface="Trebuchet MS" pitchFamily="34" charset="-120"/>
               </a:rPr>
-              <a:t>sign</a:t>
+              <a:t>nif</a:t>
             </a:r>
             <a:endParaRPr lang="en-US" sz="1400" dirty="0"/>
           </a:p>
@@ -32600,14 +33248,14 @@
       </p:sp>
       <p:sp>
         <p:nvSpPr>
-          <p:cNvPr id="34" name="Text 32"/>
-          <p:cNvSpPr/>
-          <p:nvPr/>
-        </p:nvSpPr>
-        <p:spPr>
-          <a:xfrm>
-            <a:off x="6016752" y="3364992"/>
-            <a:ext cx="411480" cy="475488"/>
+          <p:cNvPr id="33" name="Text 31"/>
+          <p:cNvSpPr/>
+          <p:nvPr/>
+        </p:nvSpPr>
+        <p:spPr>
+          <a:xfrm>
+            <a:off x="5157216" y="3364992"/>
+            <a:ext cx="73152" cy="475488"/>
           </a:xfrm>
           <a:prstGeom prst="rect">
             <a:avLst/>
@@ -32639,14 +33287,14 @@
       </p:sp>
       <p:sp>
         <p:nvSpPr>
-          <p:cNvPr id="35" name="Shape 33"/>
-          <p:cNvSpPr/>
-          <p:nvPr/>
-        </p:nvSpPr>
-        <p:spPr>
-          <a:xfrm>
-            <a:off x="6428232" y="3364992"/>
-            <a:ext cx="1645920" cy="475488"/>
+          <p:cNvPr id="34" name="Shape 32"/>
+          <p:cNvSpPr/>
+          <p:nvPr/>
+        </p:nvSpPr>
+        <p:spPr>
+          <a:xfrm>
+            <a:off x="5230368" y="3364992"/>
+            <a:ext cx="1554480" cy="475488"/>
           </a:xfrm>
           <a:prstGeom prst="rect">
             <a:avLst>
@@ -32666,14 +33314,14 @@
       </p:sp>
       <p:sp>
         <p:nvSpPr>
-          <p:cNvPr id="36" name="Text 34"/>
-          <p:cNvSpPr/>
-          <p:nvPr/>
-        </p:nvSpPr>
-        <p:spPr>
-          <a:xfrm>
-            <a:off x="6428232" y="3364992"/>
-            <a:ext cx="1645920" cy="475488"/>
+          <p:cNvPr id="35" name="Text 33"/>
+          <p:cNvSpPr/>
+          <p:nvPr/>
+        </p:nvSpPr>
+        <p:spPr>
+          <a:xfrm>
+            <a:off x="5230368" y="3364992"/>
+            <a:ext cx="1554480" cy="475488"/>
           </a:xfrm>
           <a:prstGeom prst="rect">
             <a:avLst/>
@@ -32697,7 +33345,7 @@
                 <a:ea typeface="Trebuchet MS" pitchFamily="34" charset="-122"/>
                 <a:cs typeface="Trebuchet MS" pitchFamily="34" charset="-120"/>
               </a:rPr>
-              <a:t>ment</a:t>
+              <a:t>i</a:t>
             </a:r>
             <a:endParaRPr lang="en-US" sz="1400" dirty="0"/>
           </a:p>
@@ -32705,7 +33353,112 @@
       </p:sp>
       <p:sp>
         <p:nvSpPr>
+          <p:cNvPr id="36" name="Text 34"/>
+          <p:cNvSpPr/>
+          <p:nvPr/>
+        </p:nvSpPr>
+        <p:spPr>
+          <a:xfrm>
+            <a:off x="6784848" y="3364992"/>
+            <a:ext cx="73152" cy="475488"/>
+          </a:xfrm>
+          <a:prstGeom prst="rect">
+            <a:avLst/>
+          </a:prstGeom>
+          <a:noFill/>
+          <a:ln/>
+        </p:spPr>
+        <p:txBody>
+          <a:bodyPr wrap="square" lIns="0" tIns="0" rIns="0" bIns="0" rtlCol="0" anchor="ctr"/>
+          <a:lstStyle/>
+          <a:p>
+            <a:pPr algn="ctr" indent="0" marL="0">
+              <a:buNone/>
+            </a:pPr>
+            <a:r>
+              <a:rPr lang="en-US" sz="1600" b="1" dirty="0">
+                <a:solidFill>
+                  <a:srgbClr val="0D9488"/>
+                </a:solidFill>
+                <a:latin typeface="Trebuchet MS" pitchFamily="34" charset="0"/>
+                <a:ea typeface="Trebuchet MS" pitchFamily="34" charset="-122"/>
+                <a:cs typeface="Trebuchet MS" pitchFamily="34" charset="-120"/>
+              </a:rPr>
+              <a:t>·</a:t>
+            </a:r>
+            <a:endParaRPr lang="en-US" sz="1600" dirty="0"/>
+          </a:p>
+        </p:txBody>
+      </p:sp>
+      <p:sp>
+        <p:nvSpPr>
           <p:cNvPr id="37" name="Shape 35"/>
+          <p:cNvSpPr/>
+          <p:nvPr/>
+        </p:nvSpPr>
+        <p:spPr>
+          <a:xfrm>
+            <a:off x="6858000" y="3364992"/>
+            <a:ext cx="1554480" cy="475488"/>
+          </a:xfrm>
+          <a:prstGeom prst="rect">
+            <a:avLst>
+              <a:gd name="adj" fmla="val 9615"/>
+            </a:avLst>
+          </a:prstGeom>
+          <a:solidFill>
+            <a:srgbClr val="FFFFFF"/>
+          </a:solidFill>
+          <a:ln w="12700">
+            <a:solidFill>
+              <a:srgbClr val="0D9488"/>
+            </a:solidFill>
+            <a:prstDash val="solid"/>
+          </a:ln>
+        </p:spPr>
+      </p:sp>
+      <p:sp>
+        <p:nvSpPr>
+          <p:cNvPr id="38" name="Text 36"/>
+          <p:cNvSpPr/>
+          <p:nvPr/>
+        </p:nvSpPr>
+        <p:spPr>
+          <a:xfrm>
+            <a:off x="6858000" y="3364992"/>
+            <a:ext cx="1554480" cy="475488"/>
+          </a:xfrm>
+          <a:prstGeom prst="rect">
+            <a:avLst/>
+          </a:prstGeom>
+          <a:noFill/>
+          <a:ln/>
+        </p:spPr>
+        <p:txBody>
+          <a:bodyPr wrap="square" lIns="0" tIns="0" rIns="0" bIns="0" rtlCol="0" anchor="ctr"/>
+          <a:lstStyle/>
+          <a:p>
+            <a:pPr algn="ctr" indent="0" marL="0">
+              <a:buNone/>
+            </a:pPr>
+            <a:r>
+              <a:rPr lang="en-US" sz="1400" b="1" dirty="0">
+                <a:solidFill>
+                  <a:srgbClr val="0D9488"/>
+                </a:solidFill>
+                <a:latin typeface="Trebuchet MS" pitchFamily="34" charset="0"/>
+                <a:ea typeface="Trebuchet MS" pitchFamily="34" charset="-122"/>
+                <a:cs typeface="Trebuchet MS" pitchFamily="34" charset="-120"/>
+              </a:rPr>
+              <a:t>cance</a:t>
+            </a:r>
+            <a:endParaRPr lang="en-US" sz="1400" dirty="0"/>
+          </a:p>
+        </p:txBody>
+      </p:sp>
+      <p:sp>
+        <p:nvSpPr>
+          <p:cNvPr id="39" name="Shape 37"/>
           <p:cNvSpPr/>
           <p:nvPr/>
         </p:nvSpPr>
@@ -32732,7 +33485,7 @@
       </p:sp>
       <p:sp>
         <p:nvSpPr>
-          <p:cNvPr id="38" name="Text 36"/>
+          <p:cNvPr id="40" name="Text 38"/>
           <p:cNvSpPr/>
           <p:nvPr/>
         </p:nvSpPr>
@@ -32771,7 +33524,7 @@
       </p:sp>
       <p:sp>
         <p:nvSpPr>
-          <p:cNvPr id="39" name="Shape 37"/>
+          <p:cNvPr id="41" name="Shape 39"/>
           <p:cNvSpPr/>
           <p:nvPr/>
         </p:nvSpPr>
@@ -32798,7 +33551,7 @@
       </p:sp>
       <p:sp>
         <p:nvSpPr>
-          <p:cNvPr id="40" name="Text 38"/>
+          <p:cNvPr id="42" name="Text 40"/>
           <p:cNvSpPr/>
           <p:nvPr/>
         </p:nvSpPr>
@@ -33121,7 +33874,7 @@
                 <a:ea typeface="Calibri" pitchFamily="34" charset="-122"/>
                 <a:cs typeface="Calibri" pitchFamily="34" charset="-120"/>
               </a:rPr>
-              <a:t>Word Labs  •  wordlabs.app  •  Root: 'sign' = mark, symbol, or signal</a:t>
+              <a:t>Word Labs  •  wordlabs.app  •  Root: 'sign' = mark; signal</a:t>
             </a:r>
             <a:endParaRPr lang="en-US" sz="800" dirty="0"/>
           </a:p>
@@ -33260,7 +34013,7 @@
                 <a:ea typeface="Trebuchet MS" pitchFamily="34" charset="-122"/>
                 <a:cs typeface="Trebuchet MS" pitchFamily="34" charset="-120"/>
               </a:rPr>
-              <a:t>assignment</a:t>
+              <a:t>significance</a:t>
             </a:r>
             <a:endParaRPr lang="en-US" sz="2800" dirty="0"/>
           </a:p>
@@ -33349,11 +34102,11 @@
             </a:avLst>
           </a:prstGeom>
           <a:solidFill>
-            <a:srgbClr val="DDD6FE"/>
+            <a:srgbClr val="CCFBF1"/>
           </a:solidFill>
           <a:ln w="19050">
             <a:solidFill>
-              <a:srgbClr val="7C3AED"/>
+              <a:srgbClr val="0D9488"/>
             </a:solidFill>
             <a:prstDash val="solid"/>
           </a:ln>
@@ -33393,13 +34146,13 @@
             <a:r>
               <a:rPr lang="en-US" sz="1300" b="1" dirty="0">
                 <a:solidFill>
-                  <a:srgbClr val="4C1D95"/>
+                  <a:srgbClr val="0F766E"/>
                 </a:solidFill>
                 <a:latin typeface="Trebuchet MS" pitchFamily="34" charset="0"/>
                 <a:ea typeface="Trebuchet MS" pitchFamily="34" charset="-122"/>
                 <a:cs typeface="Trebuchet MS" pitchFamily="34" charset="-120"/>
               </a:rPr>
-              <a:t>as</a:t>
+              <a:t>sign</a:t>
             </a:r>
             <a:endParaRPr lang="en-US" sz="1300" dirty="0"/>
           </a:p>
@@ -33438,7 +34191,7 @@
                 <a:ea typeface="Calibri" pitchFamily="34" charset="-122"/>
                 <a:cs typeface="Calibri" pitchFamily="34" charset="-120"/>
               </a:rPr>
-              <a:t>to or towards</a:t>
+              <a:t>mark; signal</a:t>
             </a:r>
             <a:endParaRPr lang="en-US" sz="850" dirty="0"/>
           </a:p>
@@ -33446,46 +34199,7 @@
       </p:sp>
       <p:sp>
         <p:nvSpPr>
-          <p:cNvPr id="19" name="Text 17"/>
-          <p:cNvSpPr/>
-          <p:nvPr/>
-        </p:nvSpPr>
-        <p:spPr>
-          <a:xfrm>
-            <a:off x="2221992" y="2752344"/>
-            <a:ext cx="1828800" cy="182880"/>
-          </a:xfrm>
-          <a:prstGeom prst="rect">
-            <a:avLst/>
-          </a:prstGeom>
-          <a:noFill/>
-          <a:ln/>
-        </p:spPr>
-        <p:txBody>
-          <a:bodyPr wrap="square" lIns="0" tIns="0" rIns="0" bIns="0" rtlCol="0" anchor="t"/>
-          <a:lstStyle/>
-          <a:p>
-            <a:pPr algn="ctr" indent="0" marL="0">
-              <a:buNone/>
-            </a:pPr>
-            <a:r>
-              <a:rPr lang="en-US" sz="700" i="1" dirty="0">
-                <a:solidFill>
-                  <a:srgbClr val="94A3B8"/>
-                </a:solidFill>
-                <a:latin typeface="Calibri" pitchFamily="34" charset="0"/>
-                <a:ea typeface="Calibri" pitchFamily="34" charset="-122"/>
-                <a:cs typeface="Calibri" pitchFamily="34" charset="-120"/>
-              </a:rPr>
-              <a:t>ad → as before 's'</a:t>
-            </a:r>
-            <a:endParaRPr lang="en-US" sz="700" dirty="0"/>
-          </a:p>
-        </p:txBody>
-      </p:sp>
-      <p:sp>
-        <p:nvSpPr>
-          <p:cNvPr id="20" name="Shape 18"/>
+          <p:cNvPr id="19" name="Shape 17"/>
           <p:cNvSpPr/>
           <p:nvPr/>
         </p:nvSpPr>
@@ -33500,11 +34214,11 @@
             </a:avLst>
           </a:prstGeom>
           <a:solidFill>
-            <a:srgbClr val="CCFBF1"/>
+            <a:srgbClr val="FCE7F3"/>
           </a:solidFill>
           <a:ln w="19050">
             <a:solidFill>
-              <a:srgbClr val="0D9488"/>
+              <a:srgbClr val="DB2777"/>
             </a:solidFill>
             <a:prstDash val="solid"/>
           </a:ln>
@@ -33519,7 +34233,7 @@
       </p:sp>
       <p:sp>
         <p:nvSpPr>
-          <p:cNvPr id="21" name="Text 19"/>
+          <p:cNvPr id="20" name="Text 18"/>
           <p:cNvSpPr/>
           <p:nvPr/>
         </p:nvSpPr>
@@ -33544,13 +34258,13 @@
             <a:r>
               <a:rPr lang="en-US" sz="1300" b="1" dirty="0">
                 <a:solidFill>
-                  <a:srgbClr val="0F766E"/>
+                  <a:srgbClr val="9D174D"/>
                 </a:solidFill>
                 <a:latin typeface="Trebuchet MS" pitchFamily="34" charset="0"/>
                 <a:ea typeface="Trebuchet MS" pitchFamily="34" charset="-122"/>
                 <a:cs typeface="Trebuchet MS" pitchFamily="34" charset="-120"/>
               </a:rPr>
-              <a:t>sign</a:t>
+              <a:t>ific</a:t>
             </a:r>
             <a:endParaRPr lang="en-US" sz="1300" dirty="0"/>
           </a:p>
@@ -33558,7 +34272,7 @@
       </p:sp>
       <p:sp>
         <p:nvSpPr>
-          <p:cNvPr id="22" name="Text 20"/>
+          <p:cNvPr id="21" name="Text 19"/>
           <p:cNvSpPr/>
           <p:nvPr/>
         </p:nvSpPr>
@@ -33589,7 +34303,7 @@
                 <a:ea typeface="Calibri" pitchFamily="34" charset="-122"/>
                 <a:cs typeface="Calibri" pitchFamily="34" charset="-120"/>
               </a:rPr>
-              <a:t>mark or symbol</a:t>
+              <a:t>making; doing</a:t>
             </a:r>
             <a:endParaRPr lang="en-US" sz="850" dirty="0"/>
           </a:p>
@@ -33597,7 +34311,7 @@
       </p:sp>
       <p:sp>
         <p:nvSpPr>
-          <p:cNvPr id="23" name="Shape 21"/>
+          <p:cNvPr id="22" name="Shape 20"/>
           <p:cNvSpPr/>
           <p:nvPr/>
         </p:nvSpPr>
@@ -33631,7 +34345,7 @@
       </p:sp>
       <p:sp>
         <p:nvSpPr>
-          <p:cNvPr id="24" name="Text 22"/>
+          <p:cNvPr id="23" name="Text 21"/>
           <p:cNvSpPr/>
           <p:nvPr/>
         </p:nvSpPr>
@@ -33662,7 +34376,7 @@
                 <a:ea typeface="Trebuchet MS" pitchFamily="34" charset="-122"/>
                 <a:cs typeface="Trebuchet MS" pitchFamily="34" charset="-120"/>
               </a:rPr>
-              <a:t>ment</a:t>
+              <a:t>ance</a:t>
             </a:r>
             <a:endParaRPr lang="en-US" sz="1300" dirty="0"/>
           </a:p>
@@ -33670,7 +34384,7 @@
       </p:sp>
       <p:sp>
         <p:nvSpPr>
-          <p:cNvPr id="25" name="Text 23"/>
+          <p:cNvPr id="24" name="Text 22"/>
           <p:cNvSpPr/>
           <p:nvPr/>
         </p:nvSpPr>
@@ -33701,7 +34415,7 @@
                 <a:ea typeface="Calibri" pitchFamily="34" charset="-122"/>
                 <a:cs typeface="Calibri" pitchFamily="34" charset="-120"/>
               </a:rPr>
-              <a:t>the result or act of something</a:t>
+              <a:t>state of</a:t>
             </a:r>
             <a:endParaRPr lang="en-US" sz="850" dirty="0"/>
           </a:p>
@@ -33709,7 +34423,7 @@
       </p:sp>
       <p:sp>
         <p:nvSpPr>
-          <p:cNvPr id="26" name="Shape 24"/>
+          <p:cNvPr id="25" name="Shape 23"/>
           <p:cNvSpPr/>
           <p:nvPr/>
         </p:nvSpPr>
@@ -33736,7 +34450,7 @@
       </p:sp>
       <p:sp>
         <p:nvSpPr>
-          <p:cNvPr id="27" name="Text 25"/>
+          <p:cNvPr id="26" name="Text 24"/>
           <p:cNvSpPr/>
           <p:nvPr/>
         </p:nvSpPr>
@@ -33775,7 +34489,7 @@
       </p:sp>
       <p:sp>
         <p:nvSpPr>
-          <p:cNvPr id="28" name="Shape 26"/>
+          <p:cNvPr id="27" name="Shape 25"/>
           <p:cNvSpPr/>
           <p:nvPr/>
         </p:nvSpPr>
@@ -33802,14 +34516,14 @@
       </p:sp>
       <p:sp>
         <p:nvSpPr>
-          <p:cNvPr id="29" name="Shape 27"/>
-          <p:cNvSpPr/>
-          <p:nvPr/>
-        </p:nvSpPr>
-        <p:spPr>
-          <a:xfrm>
-            <a:off x="2313432" y="3364992"/>
-            <a:ext cx="1645920" cy="475488"/>
+          <p:cNvPr id="28" name="Shape 26"/>
+          <p:cNvSpPr/>
+          <p:nvPr/>
+        </p:nvSpPr>
+        <p:spPr>
+          <a:xfrm>
+            <a:off x="1975104" y="3364992"/>
+            <a:ext cx="1554480" cy="475488"/>
           </a:xfrm>
           <a:prstGeom prst="rect">
             <a:avLst>
@@ -33829,14 +34543,14 @@
       </p:sp>
       <p:sp>
         <p:nvSpPr>
-          <p:cNvPr id="30" name="Text 28"/>
-          <p:cNvSpPr/>
-          <p:nvPr/>
-        </p:nvSpPr>
-        <p:spPr>
-          <a:xfrm>
-            <a:off x="2313432" y="3364992"/>
-            <a:ext cx="1645920" cy="475488"/>
+          <p:cNvPr id="29" name="Text 27"/>
+          <p:cNvSpPr/>
+          <p:nvPr/>
+        </p:nvSpPr>
+        <p:spPr>
+          <a:xfrm>
+            <a:off x="1975104" y="3364992"/>
+            <a:ext cx="1554480" cy="475488"/>
           </a:xfrm>
           <a:prstGeom prst="rect">
             <a:avLst/>
@@ -33860,7 +34574,7 @@
                 <a:ea typeface="Trebuchet MS" pitchFamily="34" charset="-122"/>
                 <a:cs typeface="Trebuchet MS" pitchFamily="34" charset="-120"/>
               </a:rPr>
-              <a:t>as</a:t>
+              <a:t>sig</a:t>
             </a:r>
             <a:endParaRPr lang="en-US" sz="1400" dirty="0"/>
           </a:p>
@@ -33868,14 +34582,14 @@
       </p:sp>
       <p:sp>
         <p:nvSpPr>
-          <p:cNvPr id="31" name="Text 29"/>
-          <p:cNvSpPr/>
-          <p:nvPr/>
-        </p:nvSpPr>
-        <p:spPr>
-          <a:xfrm>
-            <a:off x="3959352" y="3364992"/>
-            <a:ext cx="411480" cy="475488"/>
+          <p:cNvPr id="30" name="Text 28"/>
+          <p:cNvSpPr/>
+          <p:nvPr/>
+        </p:nvSpPr>
+        <p:spPr>
+          <a:xfrm>
+            <a:off x="3529584" y="3364992"/>
+            <a:ext cx="73152" cy="475488"/>
           </a:xfrm>
           <a:prstGeom prst="rect">
             <a:avLst/>
@@ -33907,14 +34621,14 @@
       </p:sp>
       <p:sp>
         <p:nvSpPr>
-          <p:cNvPr id="32" name="Shape 30"/>
-          <p:cNvSpPr/>
-          <p:nvPr/>
-        </p:nvSpPr>
-        <p:spPr>
-          <a:xfrm>
-            <a:off x="4370832" y="3364992"/>
-            <a:ext cx="1645920" cy="475488"/>
+          <p:cNvPr id="31" name="Shape 29"/>
+          <p:cNvSpPr/>
+          <p:nvPr/>
+        </p:nvSpPr>
+        <p:spPr>
+          <a:xfrm>
+            <a:off x="3602736" y="3364992"/>
+            <a:ext cx="1554480" cy="475488"/>
           </a:xfrm>
           <a:prstGeom prst="rect">
             <a:avLst>
@@ -33934,14 +34648,14 @@
       </p:sp>
       <p:sp>
         <p:nvSpPr>
-          <p:cNvPr id="33" name="Text 31"/>
-          <p:cNvSpPr/>
-          <p:nvPr/>
-        </p:nvSpPr>
-        <p:spPr>
-          <a:xfrm>
-            <a:off x="4370832" y="3364992"/>
-            <a:ext cx="1645920" cy="475488"/>
+          <p:cNvPr id="32" name="Text 30"/>
+          <p:cNvSpPr/>
+          <p:nvPr/>
+        </p:nvSpPr>
+        <p:spPr>
+          <a:xfrm>
+            <a:off x="3602736" y="3364992"/>
+            <a:ext cx="1554480" cy="475488"/>
           </a:xfrm>
           <a:prstGeom prst="rect">
             <a:avLst/>
@@ -33965,7 +34679,7 @@
                 <a:ea typeface="Trebuchet MS" pitchFamily="34" charset="-122"/>
                 <a:cs typeface="Trebuchet MS" pitchFamily="34" charset="-120"/>
               </a:rPr>
-              <a:t>sign</a:t>
+              <a:t>nif</a:t>
             </a:r>
             <a:endParaRPr lang="en-US" sz="1400" dirty="0"/>
           </a:p>
@@ -33973,14 +34687,14 @@
       </p:sp>
       <p:sp>
         <p:nvSpPr>
-          <p:cNvPr id="34" name="Text 32"/>
-          <p:cNvSpPr/>
-          <p:nvPr/>
-        </p:nvSpPr>
-        <p:spPr>
-          <a:xfrm>
-            <a:off x="6016752" y="3364992"/>
-            <a:ext cx="411480" cy="475488"/>
+          <p:cNvPr id="33" name="Text 31"/>
+          <p:cNvSpPr/>
+          <p:nvPr/>
+        </p:nvSpPr>
+        <p:spPr>
+          <a:xfrm>
+            <a:off x="5157216" y="3364992"/>
+            <a:ext cx="73152" cy="475488"/>
           </a:xfrm>
           <a:prstGeom prst="rect">
             <a:avLst/>
@@ -34012,14 +34726,14 @@
       </p:sp>
       <p:sp>
         <p:nvSpPr>
-          <p:cNvPr id="35" name="Shape 33"/>
-          <p:cNvSpPr/>
-          <p:nvPr/>
-        </p:nvSpPr>
-        <p:spPr>
-          <a:xfrm>
-            <a:off x="6428232" y="3364992"/>
-            <a:ext cx="1645920" cy="475488"/>
+          <p:cNvPr id="34" name="Shape 32"/>
+          <p:cNvSpPr/>
+          <p:nvPr/>
+        </p:nvSpPr>
+        <p:spPr>
+          <a:xfrm>
+            <a:off x="5230368" y="3364992"/>
+            <a:ext cx="1554480" cy="475488"/>
           </a:xfrm>
           <a:prstGeom prst="rect">
             <a:avLst>
@@ -34039,14 +34753,14 @@
       </p:sp>
       <p:sp>
         <p:nvSpPr>
-          <p:cNvPr id="36" name="Text 34"/>
-          <p:cNvSpPr/>
-          <p:nvPr/>
-        </p:nvSpPr>
-        <p:spPr>
-          <a:xfrm>
-            <a:off x="6428232" y="3364992"/>
-            <a:ext cx="1645920" cy="475488"/>
+          <p:cNvPr id="35" name="Text 33"/>
+          <p:cNvSpPr/>
+          <p:nvPr/>
+        </p:nvSpPr>
+        <p:spPr>
+          <a:xfrm>
+            <a:off x="5230368" y="3364992"/>
+            <a:ext cx="1554480" cy="475488"/>
           </a:xfrm>
           <a:prstGeom prst="rect">
             <a:avLst/>
@@ -34070,7 +34784,7 @@
                 <a:ea typeface="Trebuchet MS" pitchFamily="34" charset="-122"/>
                 <a:cs typeface="Trebuchet MS" pitchFamily="34" charset="-120"/>
               </a:rPr>
-              <a:t>ment</a:t>
+              <a:t>i</a:t>
             </a:r>
             <a:endParaRPr lang="en-US" sz="1400" dirty="0"/>
           </a:p>
@@ -34078,7 +34792,112 @@
       </p:sp>
       <p:sp>
         <p:nvSpPr>
+          <p:cNvPr id="36" name="Text 34"/>
+          <p:cNvSpPr/>
+          <p:nvPr/>
+        </p:nvSpPr>
+        <p:spPr>
+          <a:xfrm>
+            <a:off x="6784848" y="3364992"/>
+            <a:ext cx="73152" cy="475488"/>
+          </a:xfrm>
+          <a:prstGeom prst="rect">
+            <a:avLst/>
+          </a:prstGeom>
+          <a:noFill/>
+          <a:ln/>
+        </p:spPr>
+        <p:txBody>
+          <a:bodyPr wrap="square" lIns="0" tIns="0" rIns="0" bIns="0" rtlCol="0" anchor="ctr"/>
+          <a:lstStyle/>
+          <a:p>
+            <a:pPr algn="ctr" indent="0" marL="0">
+              <a:buNone/>
+            </a:pPr>
+            <a:r>
+              <a:rPr lang="en-US" sz="1600" b="1" dirty="0">
+                <a:solidFill>
+                  <a:srgbClr val="0D9488"/>
+                </a:solidFill>
+                <a:latin typeface="Trebuchet MS" pitchFamily="34" charset="0"/>
+                <a:ea typeface="Trebuchet MS" pitchFamily="34" charset="-122"/>
+                <a:cs typeface="Trebuchet MS" pitchFamily="34" charset="-120"/>
+              </a:rPr>
+              <a:t>·</a:t>
+            </a:r>
+            <a:endParaRPr lang="en-US" sz="1600" dirty="0"/>
+          </a:p>
+        </p:txBody>
+      </p:sp>
+      <p:sp>
+        <p:nvSpPr>
           <p:cNvPr id="37" name="Shape 35"/>
+          <p:cNvSpPr/>
+          <p:nvPr/>
+        </p:nvSpPr>
+        <p:spPr>
+          <a:xfrm>
+            <a:off x="6858000" y="3364992"/>
+            <a:ext cx="1554480" cy="475488"/>
+          </a:xfrm>
+          <a:prstGeom prst="rect">
+            <a:avLst>
+              <a:gd name="adj" fmla="val 9615"/>
+            </a:avLst>
+          </a:prstGeom>
+          <a:solidFill>
+            <a:srgbClr val="FFFFFF"/>
+          </a:solidFill>
+          <a:ln w="12700">
+            <a:solidFill>
+              <a:srgbClr val="0D9488"/>
+            </a:solidFill>
+            <a:prstDash val="solid"/>
+          </a:ln>
+        </p:spPr>
+      </p:sp>
+      <p:sp>
+        <p:nvSpPr>
+          <p:cNvPr id="38" name="Text 36"/>
+          <p:cNvSpPr/>
+          <p:nvPr/>
+        </p:nvSpPr>
+        <p:spPr>
+          <a:xfrm>
+            <a:off x="6858000" y="3364992"/>
+            <a:ext cx="1554480" cy="475488"/>
+          </a:xfrm>
+          <a:prstGeom prst="rect">
+            <a:avLst/>
+          </a:prstGeom>
+          <a:noFill/>
+          <a:ln/>
+        </p:spPr>
+        <p:txBody>
+          <a:bodyPr wrap="square" lIns="0" tIns="0" rIns="0" bIns="0" rtlCol="0" anchor="ctr"/>
+          <a:lstStyle/>
+          <a:p>
+            <a:pPr algn="ctr" indent="0" marL="0">
+              <a:buNone/>
+            </a:pPr>
+            <a:r>
+              <a:rPr lang="en-US" sz="1400" b="1" dirty="0">
+                <a:solidFill>
+                  <a:srgbClr val="0D9488"/>
+                </a:solidFill>
+                <a:latin typeface="Trebuchet MS" pitchFamily="34" charset="0"/>
+                <a:ea typeface="Trebuchet MS" pitchFamily="34" charset="-122"/>
+                <a:cs typeface="Trebuchet MS" pitchFamily="34" charset="-120"/>
+              </a:rPr>
+              <a:t>cance</a:t>
+            </a:r>
+            <a:endParaRPr lang="en-US" sz="1400" dirty="0"/>
+          </a:p>
+        </p:txBody>
+      </p:sp>
+      <p:sp>
+        <p:nvSpPr>
+          <p:cNvPr id="39" name="Shape 37"/>
           <p:cNvSpPr/>
           <p:nvPr/>
         </p:nvSpPr>
@@ -34105,7 +34924,7 @@
       </p:sp>
       <p:sp>
         <p:nvSpPr>
-          <p:cNvPr id="38" name="Text 36"/>
+          <p:cNvPr id="40" name="Text 38"/>
           <p:cNvSpPr/>
           <p:nvPr/>
         </p:nvSpPr>
@@ -34144,7 +34963,7 @@
       </p:sp>
       <p:sp>
         <p:nvSpPr>
-          <p:cNvPr id="39" name="Shape 37"/>
+          <p:cNvPr id="41" name="Shape 39"/>
           <p:cNvSpPr/>
           <p:nvPr/>
         </p:nvSpPr>
@@ -34171,14 +34990,14 @@
       </p:sp>
       <p:sp>
         <p:nvSpPr>
-          <p:cNvPr id="40" name="Shape 38"/>
-          <p:cNvSpPr/>
-          <p:nvPr/>
-        </p:nvSpPr>
-        <p:spPr>
-          <a:xfrm>
-            <a:off x="2023872" y="4169664"/>
-            <a:ext cx="685800" cy="475488"/>
+          <p:cNvPr id="42" name="Shape 40"/>
+          <p:cNvSpPr/>
+          <p:nvPr/>
+        </p:nvSpPr>
+        <p:spPr>
+          <a:xfrm>
+            <a:off x="1952596" y="4169664"/>
+            <a:ext cx="493776" cy="475488"/>
           </a:xfrm>
           <a:prstGeom prst="rect">
             <a:avLst>
@@ -34198,14 +35017,14 @@
       </p:sp>
       <p:sp>
         <p:nvSpPr>
-          <p:cNvPr id="41" name="Text 39"/>
-          <p:cNvSpPr/>
-          <p:nvPr/>
-        </p:nvSpPr>
-        <p:spPr>
-          <a:xfrm>
-            <a:off x="2023872" y="4169664"/>
-            <a:ext cx="685800" cy="475488"/>
+          <p:cNvPr id="43" name="Text 41"/>
+          <p:cNvSpPr/>
+          <p:nvPr/>
+        </p:nvSpPr>
+        <p:spPr>
+          <a:xfrm>
+            <a:off x="1952596" y="4169664"/>
+            <a:ext cx="493776" cy="475488"/>
           </a:xfrm>
           <a:prstGeom prst="rect">
             <a:avLst/>
@@ -34229,7 +35048,7 @@
                 <a:ea typeface="Trebuchet MS" pitchFamily="34" charset="-122"/>
                 <a:cs typeface="Trebuchet MS" pitchFamily="34" charset="-120"/>
               </a:rPr>
-              <a:t>a</a:t>
+              <a:t>s</a:t>
             </a:r>
             <a:endParaRPr lang="en-US" sz="900" dirty="0"/>
           </a:p>
@@ -34237,14 +35056,14 @@
       </p:sp>
       <p:sp>
         <p:nvSpPr>
-          <p:cNvPr id="42" name="Shape 40"/>
-          <p:cNvSpPr/>
-          <p:nvPr/>
-        </p:nvSpPr>
-        <p:spPr>
-          <a:xfrm>
-            <a:off x="2831592" y="4169664"/>
-            <a:ext cx="685800" cy="475488"/>
+          <p:cNvPr id="44" name="Shape 42"/>
+          <p:cNvSpPr/>
+          <p:nvPr/>
+        </p:nvSpPr>
+        <p:spPr>
+          <a:xfrm>
+            <a:off x="2497015" y="4169664"/>
+            <a:ext cx="493776" cy="475488"/>
           </a:xfrm>
           <a:prstGeom prst="rect">
             <a:avLst>
@@ -34264,14 +35083,14 @@
       </p:sp>
       <p:sp>
         <p:nvSpPr>
-          <p:cNvPr id="43" name="Text 41"/>
-          <p:cNvSpPr/>
-          <p:nvPr/>
-        </p:nvSpPr>
-        <p:spPr>
-          <a:xfrm>
-            <a:off x="2831592" y="4169664"/>
-            <a:ext cx="685800" cy="475488"/>
+          <p:cNvPr id="45" name="Text 43"/>
+          <p:cNvSpPr/>
+          <p:nvPr/>
+        </p:nvSpPr>
+        <p:spPr>
+          <a:xfrm>
+            <a:off x="2497015" y="4169664"/>
+            <a:ext cx="493776" cy="475488"/>
           </a:xfrm>
           <a:prstGeom prst="rect">
             <a:avLst/>
@@ -34295,7 +35114,7 @@
                 <a:ea typeface="Trebuchet MS" pitchFamily="34" charset="-122"/>
                 <a:cs typeface="Trebuchet MS" pitchFamily="34" charset="-120"/>
               </a:rPr>
-              <a:t>ss</a:t>
+              <a:t>i</a:t>
             </a:r>
             <a:endParaRPr lang="en-US" sz="900" dirty="0"/>
           </a:p>
@@ -34303,14 +35122,14 @@
       </p:sp>
       <p:sp>
         <p:nvSpPr>
-          <p:cNvPr id="44" name="Shape 42"/>
-          <p:cNvSpPr/>
-          <p:nvPr/>
-        </p:nvSpPr>
-        <p:spPr>
-          <a:xfrm>
-            <a:off x="3639312" y="4169664"/>
-            <a:ext cx="685800" cy="475488"/>
+          <p:cNvPr id="46" name="Shape 44"/>
+          <p:cNvSpPr/>
+          <p:nvPr/>
+        </p:nvSpPr>
+        <p:spPr>
+          <a:xfrm>
+            <a:off x="3041435" y="4169664"/>
+            <a:ext cx="493776" cy="475488"/>
           </a:xfrm>
           <a:prstGeom prst="rect">
             <a:avLst>
@@ -34330,14 +35149,14 @@
       </p:sp>
       <p:sp>
         <p:nvSpPr>
-          <p:cNvPr id="45" name="Text 43"/>
-          <p:cNvSpPr/>
-          <p:nvPr/>
-        </p:nvSpPr>
-        <p:spPr>
-          <a:xfrm>
-            <a:off x="3639312" y="4169664"/>
-            <a:ext cx="685800" cy="475488"/>
+          <p:cNvPr id="47" name="Text 45"/>
+          <p:cNvSpPr/>
+          <p:nvPr/>
+        </p:nvSpPr>
+        <p:spPr>
+          <a:xfrm>
+            <a:off x="3041435" y="4169664"/>
+            <a:ext cx="493776" cy="475488"/>
           </a:xfrm>
           <a:prstGeom prst="rect">
             <a:avLst/>
@@ -34361,7 +35180,7 @@
                 <a:ea typeface="Trebuchet MS" pitchFamily="34" charset="-122"/>
                 <a:cs typeface="Trebuchet MS" pitchFamily="34" charset="-120"/>
               </a:rPr>
-              <a:t>i</a:t>
+              <a:t>g</a:t>
             </a:r>
             <a:endParaRPr lang="en-US" sz="900" dirty="0"/>
           </a:p>
@@ -34369,14 +35188,14 @@
       </p:sp>
       <p:sp>
         <p:nvSpPr>
-          <p:cNvPr id="46" name="Shape 44"/>
-          <p:cNvSpPr/>
-          <p:nvPr/>
-        </p:nvSpPr>
-        <p:spPr>
-          <a:xfrm>
-            <a:off x="4447032" y="4169664"/>
-            <a:ext cx="685800" cy="475488"/>
+          <p:cNvPr id="48" name="Shape 46"/>
+          <p:cNvSpPr/>
+          <p:nvPr/>
+        </p:nvSpPr>
+        <p:spPr>
+          <a:xfrm>
+            <a:off x="3585855" y="4169664"/>
+            <a:ext cx="493776" cy="475488"/>
           </a:xfrm>
           <a:prstGeom prst="rect">
             <a:avLst>
@@ -34396,14 +35215,14 @@
       </p:sp>
       <p:sp>
         <p:nvSpPr>
-          <p:cNvPr id="47" name="Text 45"/>
-          <p:cNvSpPr/>
-          <p:nvPr/>
-        </p:nvSpPr>
-        <p:spPr>
-          <a:xfrm>
-            <a:off x="4447032" y="4169664"/>
-            <a:ext cx="685800" cy="475488"/>
+          <p:cNvPr id="49" name="Text 47"/>
+          <p:cNvSpPr/>
+          <p:nvPr/>
+        </p:nvSpPr>
+        <p:spPr>
+          <a:xfrm>
+            <a:off x="3585855" y="4169664"/>
+            <a:ext cx="493776" cy="475488"/>
           </a:xfrm>
           <a:prstGeom prst="rect">
             <a:avLst/>
@@ -34427,7 +35246,7 @@
                 <a:ea typeface="Trebuchet MS" pitchFamily="34" charset="-122"/>
                 <a:cs typeface="Trebuchet MS" pitchFamily="34" charset="-120"/>
               </a:rPr>
-              <a:t>gn</a:t>
+              <a:t>n</a:t>
             </a:r>
             <a:endParaRPr lang="en-US" sz="900" dirty="0"/>
           </a:p>
@@ -34435,14 +35254,14 @@
       </p:sp>
       <p:sp>
         <p:nvSpPr>
-          <p:cNvPr id="48" name="Shape 46"/>
-          <p:cNvSpPr/>
-          <p:nvPr/>
-        </p:nvSpPr>
-        <p:spPr>
-          <a:xfrm>
-            <a:off x="5254752" y="4169664"/>
-            <a:ext cx="685800" cy="475488"/>
+          <p:cNvPr id="50" name="Shape 48"/>
+          <p:cNvSpPr/>
+          <p:nvPr/>
+        </p:nvSpPr>
+        <p:spPr>
+          <a:xfrm>
+            <a:off x="4130274" y="4169664"/>
+            <a:ext cx="493776" cy="475488"/>
           </a:xfrm>
           <a:prstGeom prst="rect">
             <a:avLst>
@@ -34462,14 +35281,14 @@
       </p:sp>
       <p:sp>
         <p:nvSpPr>
-          <p:cNvPr id="49" name="Text 47"/>
-          <p:cNvSpPr/>
-          <p:nvPr/>
-        </p:nvSpPr>
-        <p:spPr>
-          <a:xfrm>
-            <a:off x="5254752" y="4169664"/>
-            <a:ext cx="685800" cy="475488"/>
+          <p:cNvPr id="51" name="Text 49"/>
+          <p:cNvSpPr/>
+          <p:nvPr/>
+        </p:nvSpPr>
+        <p:spPr>
+          <a:xfrm>
+            <a:off x="4130274" y="4169664"/>
+            <a:ext cx="493776" cy="475488"/>
           </a:xfrm>
           <a:prstGeom prst="rect">
             <a:avLst/>
@@ -34493,7 +35312,7 @@
                 <a:ea typeface="Trebuchet MS" pitchFamily="34" charset="-122"/>
                 <a:cs typeface="Trebuchet MS" pitchFamily="34" charset="-120"/>
               </a:rPr>
-              <a:t>m</a:t>
+              <a:t>i</a:t>
             </a:r>
             <a:endParaRPr lang="en-US" sz="900" dirty="0"/>
           </a:p>
@@ -34501,14 +35320,14 @@
       </p:sp>
       <p:sp>
         <p:nvSpPr>
-          <p:cNvPr id="50" name="Shape 48"/>
-          <p:cNvSpPr/>
-          <p:nvPr/>
-        </p:nvSpPr>
-        <p:spPr>
-          <a:xfrm>
-            <a:off x="6062472" y="4169664"/>
-            <a:ext cx="685800" cy="475488"/>
+          <p:cNvPr id="52" name="Shape 50"/>
+          <p:cNvSpPr/>
+          <p:nvPr/>
+        </p:nvSpPr>
+        <p:spPr>
+          <a:xfrm>
+            <a:off x="4674694" y="4169664"/>
+            <a:ext cx="493776" cy="475488"/>
           </a:xfrm>
           <a:prstGeom prst="rect">
             <a:avLst>
@@ -34528,14 +35347,14 @@
       </p:sp>
       <p:sp>
         <p:nvSpPr>
-          <p:cNvPr id="51" name="Text 49"/>
-          <p:cNvSpPr/>
-          <p:nvPr/>
-        </p:nvSpPr>
-        <p:spPr>
-          <a:xfrm>
-            <a:off x="6062472" y="4169664"/>
-            <a:ext cx="685800" cy="475488"/>
+          <p:cNvPr id="53" name="Text 51"/>
+          <p:cNvSpPr/>
+          <p:nvPr/>
+        </p:nvSpPr>
+        <p:spPr>
+          <a:xfrm>
+            <a:off x="4674694" y="4169664"/>
+            <a:ext cx="493776" cy="475488"/>
           </a:xfrm>
           <a:prstGeom prst="rect">
             <a:avLst/>
@@ -34559,7 +35378,7 @@
                 <a:ea typeface="Trebuchet MS" pitchFamily="34" charset="-122"/>
                 <a:cs typeface="Trebuchet MS" pitchFamily="34" charset="-120"/>
               </a:rPr>
-              <a:t>e</a:t>
+              <a:t>f</a:t>
             </a:r>
             <a:endParaRPr lang="en-US" sz="900" dirty="0"/>
           </a:p>
@@ -34567,14 +35386,14 @@
       </p:sp>
       <p:sp>
         <p:nvSpPr>
-          <p:cNvPr id="52" name="Shape 50"/>
-          <p:cNvSpPr/>
-          <p:nvPr/>
-        </p:nvSpPr>
-        <p:spPr>
-          <a:xfrm>
-            <a:off x="6870192" y="4169664"/>
-            <a:ext cx="685800" cy="475488"/>
+          <p:cNvPr id="54" name="Shape 52"/>
+          <p:cNvSpPr/>
+          <p:nvPr/>
+        </p:nvSpPr>
+        <p:spPr>
+          <a:xfrm>
+            <a:off x="5219114" y="4169664"/>
+            <a:ext cx="493776" cy="475488"/>
           </a:xfrm>
           <a:prstGeom prst="rect">
             <a:avLst>
@@ -34594,14 +35413,14 @@
       </p:sp>
       <p:sp>
         <p:nvSpPr>
-          <p:cNvPr id="53" name="Text 51"/>
-          <p:cNvSpPr/>
-          <p:nvPr/>
-        </p:nvSpPr>
-        <p:spPr>
-          <a:xfrm>
-            <a:off x="6870192" y="4169664"/>
-            <a:ext cx="685800" cy="475488"/>
+          <p:cNvPr id="55" name="Text 53"/>
+          <p:cNvSpPr/>
+          <p:nvPr/>
+        </p:nvSpPr>
+        <p:spPr>
+          <a:xfrm>
+            <a:off x="5219114" y="4169664"/>
+            <a:ext cx="493776" cy="475488"/>
           </a:xfrm>
           <a:prstGeom prst="rect">
             <a:avLst/>
@@ -34625,7 +35444,7 @@
                 <a:ea typeface="Trebuchet MS" pitchFamily="34" charset="-122"/>
                 <a:cs typeface="Trebuchet MS" pitchFamily="34" charset="-120"/>
               </a:rPr>
-              <a:t>n</a:t>
+              <a:t>i</a:t>
             </a:r>
             <a:endParaRPr lang="en-US" sz="900" dirty="0"/>
           </a:p>
@@ -34633,14 +35452,14 @@
       </p:sp>
       <p:sp>
         <p:nvSpPr>
-          <p:cNvPr id="54" name="Shape 52"/>
-          <p:cNvSpPr/>
-          <p:nvPr/>
-        </p:nvSpPr>
-        <p:spPr>
-          <a:xfrm>
-            <a:off x="7677912" y="4169664"/>
-            <a:ext cx="685800" cy="475488"/>
+          <p:cNvPr id="56" name="Shape 54"/>
+          <p:cNvSpPr/>
+          <p:nvPr/>
+        </p:nvSpPr>
+        <p:spPr>
+          <a:xfrm>
+            <a:off x="5763534" y="4169664"/>
+            <a:ext cx="493776" cy="475488"/>
           </a:xfrm>
           <a:prstGeom prst="rect">
             <a:avLst>
@@ -34660,14 +35479,14 @@
       </p:sp>
       <p:sp>
         <p:nvSpPr>
-          <p:cNvPr id="55" name="Text 53"/>
-          <p:cNvSpPr/>
-          <p:nvPr/>
-        </p:nvSpPr>
-        <p:spPr>
-          <a:xfrm>
-            <a:off x="7677912" y="4169664"/>
-            <a:ext cx="685800" cy="475488"/>
+          <p:cNvPr id="57" name="Text 55"/>
+          <p:cNvSpPr/>
+          <p:nvPr/>
+        </p:nvSpPr>
+        <p:spPr>
+          <a:xfrm>
+            <a:off x="5763534" y="4169664"/>
+            <a:ext cx="493776" cy="475488"/>
           </a:xfrm>
           <a:prstGeom prst="rect">
             <a:avLst/>
@@ -34691,7 +35510,271 @@
                 <a:ea typeface="Trebuchet MS" pitchFamily="34" charset="-122"/>
                 <a:cs typeface="Trebuchet MS" pitchFamily="34" charset="-120"/>
               </a:rPr>
-              <a:t>t</a:t>
+              <a:t>c</a:t>
+            </a:r>
+            <a:endParaRPr lang="en-US" sz="900" dirty="0"/>
+          </a:p>
+        </p:txBody>
+      </p:sp>
+      <p:sp>
+        <p:nvSpPr>
+          <p:cNvPr id="58" name="Shape 56"/>
+          <p:cNvSpPr/>
+          <p:nvPr/>
+        </p:nvSpPr>
+        <p:spPr>
+          <a:xfrm>
+            <a:off x="6307953" y="4169664"/>
+            <a:ext cx="493776" cy="475488"/>
+          </a:xfrm>
+          <a:prstGeom prst="rect">
+            <a:avLst>
+              <a:gd name="adj" fmla="val 7692"/>
+            </a:avLst>
+          </a:prstGeom>
+          <a:solidFill>
+            <a:srgbClr val="FFFFFF"/>
+          </a:solidFill>
+          <a:ln w="12700">
+            <a:solidFill>
+              <a:srgbClr val="DB2777"/>
+            </a:solidFill>
+            <a:prstDash val="solid"/>
+          </a:ln>
+        </p:spPr>
+      </p:sp>
+      <p:sp>
+        <p:nvSpPr>
+          <p:cNvPr id="59" name="Text 57"/>
+          <p:cNvSpPr/>
+          <p:nvPr/>
+        </p:nvSpPr>
+        <p:spPr>
+          <a:xfrm>
+            <a:off x="6307953" y="4169664"/>
+            <a:ext cx="493776" cy="475488"/>
+          </a:xfrm>
+          <a:prstGeom prst="rect">
+            <a:avLst/>
+          </a:prstGeom>
+          <a:noFill/>
+          <a:ln/>
+        </p:spPr>
+        <p:txBody>
+          <a:bodyPr wrap="square" lIns="0" tIns="0" rIns="0" bIns="0" rtlCol="0" anchor="ctr"/>
+          <a:lstStyle/>
+          <a:p>
+            <a:pPr algn="ctr" indent="0" marL="0">
+              <a:buNone/>
+            </a:pPr>
+            <a:r>
+              <a:rPr lang="en-US" sz="900" b="1" dirty="0">
+                <a:solidFill>
+                  <a:srgbClr val="9D174D"/>
+                </a:solidFill>
+                <a:latin typeface="Trebuchet MS" pitchFamily="34" charset="0"/>
+                <a:ea typeface="Trebuchet MS" pitchFamily="34" charset="-122"/>
+                <a:cs typeface="Trebuchet MS" pitchFamily="34" charset="-120"/>
+              </a:rPr>
+              <a:t>a</a:t>
+            </a:r>
+            <a:endParaRPr lang="en-US" sz="900" dirty="0"/>
+          </a:p>
+        </p:txBody>
+      </p:sp>
+      <p:sp>
+        <p:nvSpPr>
+          <p:cNvPr id="60" name="Shape 58"/>
+          <p:cNvSpPr/>
+          <p:nvPr/>
+        </p:nvSpPr>
+        <p:spPr>
+          <a:xfrm>
+            <a:off x="6852373" y="4169664"/>
+            <a:ext cx="493776" cy="475488"/>
+          </a:xfrm>
+          <a:prstGeom prst="rect">
+            <a:avLst>
+              <a:gd name="adj" fmla="val 7692"/>
+            </a:avLst>
+          </a:prstGeom>
+          <a:solidFill>
+            <a:srgbClr val="FFFFFF"/>
+          </a:solidFill>
+          <a:ln w="12700">
+            <a:solidFill>
+              <a:srgbClr val="DB2777"/>
+            </a:solidFill>
+            <a:prstDash val="solid"/>
+          </a:ln>
+        </p:spPr>
+      </p:sp>
+      <p:sp>
+        <p:nvSpPr>
+          <p:cNvPr id="61" name="Text 59"/>
+          <p:cNvSpPr/>
+          <p:nvPr/>
+        </p:nvSpPr>
+        <p:spPr>
+          <a:xfrm>
+            <a:off x="6852373" y="4169664"/>
+            <a:ext cx="493776" cy="475488"/>
+          </a:xfrm>
+          <a:prstGeom prst="rect">
+            <a:avLst/>
+          </a:prstGeom>
+          <a:noFill/>
+          <a:ln/>
+        </p:spPr>
+        <p:txBody>
+          <a:bodyPr wrap="square" lIns="0" tIns="0" rIns="0" bIns="0" rtlCol="0" anchor="ctr"/>
+          <a:lstStyle/>
+          <a:p>
+            <a:pPr algn="ctr" indent="0" marL="0">
+              <a:buNone/>
+            </a:pPr>
+            <a:r>
+              <a:rPr lang="en-US" sz="900" b="1" dirty="0">
+                <a:solidFill>
+                  <a:srgbClr val="9D174D"/>
+                </a:solidFill>
+                <a:latin typeface="Trebuchet MS" pitchFamily="34" charset="0"/>
+                <a:ea typeface="Trebuchet MS" pitchFamily="34" charset="-122"/>
+                <a:cs typeface="Trebuchet MS" pitchFamily="34" charset="-120"/>
+              </a:rPr>
+              <a:t>n</a:t>
+            </a:r>
+            <a:endParaRPr lang="en-US" sz="900" dirty="0"/>
+          </a:p>
+        </p:txBody>
+      </p:sp>
+      <p:sp>
+        <p:nvSpPr>
+          <p:cNvPr id="62" name="Shape 60"/>
+          <p:cNvSpPr/>
+          <p:nvPr/>
+        </p:nvSpPr>
+        <p:spPr>
+          <a:xfrm>
+            <a:off x="7396793" y="4169664"/>
+            <a:ext cx="493776" cy="475488"/>
+          </a:xfrm>
+          <a:prstGeom prst="rect">
+            <a:avLst>
+              <a:gd name="adj" fmla="val 7692"/>
+            </a:avLst>
+          </a:prstGeom>
+          <a:solidFill>
+            <a:srgbClr val="FFFFFF"/>
+          </a:solidFill>
+          <a:ln w="12700">
+            <a:solidFill>
+              <a:srgbClr val="DB2777"/>
+            </a:solidFill>
+            <a:prstDash val="solid"/>
+          </a:ln>
+        </p:spPr>
+      </p:sp>
+      <p:sp>
+        <p:nvSpPr>
+          <p:cNvPr id="63" name="Text 61"/>
+          <p:cNvSpPr/>
+          <p:nvPr/>
+        </p:nvSpPr>
+        <p:spPr>
+          <a:xfrm>
+            <a:off x="7396793" y="4169664"/>
+            <a:ext cx="493776" cy="475488"/>
+          </a:xfrm>
+          <a:prstGeom prst="rect">
+            <a:avLst/>
+          </a:prstGeom>
+          <a:noFill/>
+          <a:ln/>
+        </p:spPr>
+        <p:txBody>
+          <a:bodyPr wrap="square" lIns="0" tIns="0" rIns="0" bIns="0" rtlCol="0" anchor="ctr"/>
+          <a:lstStyle/>
+          <a:p>
+            <a:pPr algn="ctr" indent="0" marL="0">
+              <a:buNone/>
+            </a:pPr>
+            <a:r>
+              <a:rPr lang="en-US" sz="900" b="1" dirty="0">
+                <a:solidFill>
+                  <a:srgbClr val="9D174D"/>
+                </a:solidFill>
+                <a:latin typeface="Trebuchet MS" pitchFamily="34" charset="0"/>
+                <a:ea typeface="Trebuchet MS" pitchFamily="34" charset="-122"/>
+                <a:cs typeface="Trebuchet MS" pitchFamily="34" charset="-120"/>
+              </a:rPr>
+              <a:t>c</a:t>
+            </a:r>
+            <a:endParaRPr lang="en-US" sz="900" dirty="0"/>
+          </a:p>
+        </p:txBody>
+      </p:sp>
+      <p:sp>
+        <p:nvSpPr>
+          <p:cNvPr id="64" name="Shape 62"/>
+          <p:cNvSpPr/>
+          <p:nvPr/>
+        </p:nvSpPr>
+        <p:spPr>
+          <a:xfrm>
+            <a:off x="7941212" y="4169664"/>
+            <a:ext cx="493776" cy="475488"/>
+          </a:xfrm>
+          <a:prstGeom prst="rect">
+            <a:avLst>
+              <a:gd name="adj" fmla="val 7692"/>
+            </a:avLst>
+          </a:prstGeom>
+          <a:solidFill>
+            <a:srgbClr val="FFFFFF"/>
+          </a:solidFill>
+          <a:ln w="12700">
+            <a:solidFill>
+              <a:srgbClr val="DB2777"/>
+            </a:solidFill>
+            <a:prstDash val="solid"/>
+          </a:ln>
+        </p:spPr>
+      </p:sp>
+      <p:sp>
+        <p:nvSpPr>
+          <p:cNvPr id="65" name="Text 63"/>
+          <p:cNvSpPr/>
+          <p:nvPr/>
+        </p:nvSpPr>
+        <p:spPr>
+          <a:xfrm>
+            <a:off x="7941212" y="4169664"/>
+            <a:ext cx="493776" cy="475488"/>
+          </a:xfrm>
+          <a:prstGeom prst="rect">
+            <a:avLst/>
+          </a:prstGeom>
+          <a:noFill/>
+          <a:ln/>
+        </p:spPr>
+        <p:txBody>
+          <a:bodyPr wrap="square" lIns="0" tIns="0" rIns="0" bIns="0" rtlCol="0" anchor="ctr"/>
+          <a:lstStyle/>
+          <a:p>
+            <a:pPr algn="ctr" indent="0" marL="0">
+              <a:buNone/>
+            </a:pPr>
+            <a:r>
+              <a:rPr lang="en-US" sz="900" b="1" dirty="0">
+                <a:solidFill>
+                  <a:srgbClr val="9D174D"/>
+                </a:solidFill>
+                <a:latin typeface="Trebuchet MS" pitchFamily="34" charset="0"/>
+                <a:ea typeface="Trebuchet MS" pitchFamily="34" charset="-122"/>
+                <a:cs typeface="Trebuchet MS" pitchFamily="34" charset="-120"/>
+              </a:rPr>
+              <a:t>e</a:t>
             </a:r>
             <a:endParaRPr lang="en-US" sz="900" dirty="0"/>
           </a:p>
@@ -34983,7 +36066,7 @@
                 <a:ea typeface="Calibri" pitchFamily="34" charset="-122"/>
                 <a:cs typeface="Calibri" pitchFamily="34" charset="-120"/>
               </a:rPr>
-              <a:t>Word Labs  •  wordlabs.app  •  Root: 'sign' = mark, symbol, or signal</a:t>
+              <a:t>Word Labs  •  wordlabs.app  •  Root: 'sign' = mark; signal</a:t>
             </a:r>
             <a:endParaRPr lang="en-US" sz="800" dirty="0"/>
           </a:p>
@@ -36152,7 +37235,7 @@
                 <a:ea typeface="Calibri" pitchFamily="34" charset="-122"/>
                 <a:cs typeface="Calibri" pitchFamily="34" charset="-120"/>
               </a:rPr>
-              <a:t>Word Labs  •  wordlabs.app  •  Root: 'sign' = mark, symbol, or signal</a:t>
+              <a:t>Word Labs  •  wordlabs.app  •  Root: 'sign' = mark; signal</a:t>
             </a:r>
             <a:endParaRPr lang="en-US" sz="800" dirty="0"/>
           </a:p>
@@ -36453,7 +37536,7 @@
                 <a:ea typeface="Trebuchet MS" pitchFamily="34" charset="-122"/>
                 <a:cs typeface="Trebuchet MS" pitchFamily="34" charset="-120"/>
               </a:rPr>
-              <a:t>re-</a:t>
+              <a:t>ad-</a:t>
             </a:r>
             <a:endParaRPr lang="en-US" sz="1300" dirty="0"/>
           </a:p>
@@ -36798,7 +37881,7 @@
                 <a:ea typeface="Trebuchet MS" pitchFamily="34" charset="-122"/>
                 <a:cs typeface="Trebuchet MS" pitchFamily="34" charset="-120"/>
               </a:rPr>
-              <a:t>as-</a:t>
+              <a:t>re-</a:t>
             </a:r>
             <a:endParaRPr lang="en-US" sz="1300" dirty="0"/>
           </a:p>
@@ -36951,7 +38034,7 @@
                 <a:ea typeface="Trebuchet MS" pitchFamily="34" charset="-122"/>
                 <a:cs typeface="Trebuchet MS" pitchFamily="34" charset="-120"/>
               </a:rPr>
-              <a:t>con-</a:t>
+              <a:t>un-</a:t>
             </a:r>
             <a:endParaRPr lang="en-US" sz="1300" dirty="0"/>
           </a:p>
@@ -37040,7 +38123,7 @@
                 <a:ea typeface="Trebuchet MS" pitchFamily="34" charset="-122"/>
                 <a:cs typeface="Trebuchet MS" pitchFamily="34" charset="-120"/>
               </a:rPr>
-              <a:t>-al</a:t>
+              <a:t>-s</a:t>
             </a:r>
             <a:endParaRPr lang="en-US" sz="1300" dirty="0"/>
           </a:p>
@@ -37061,7 +38144,7 @@
             <a:avLst/>
           </a:prstGeom>
           <a:solidFill>
-            <a:srgbClr val="DDD6FE"/>
+            <a:srgbClr val="F8FAFC"/>
           </a:solidFill>
           <a:ln w="12700">
             <a:solidFill>
@@ -37073,14 +38156,64 @@
       </p:sp>
       <p:sp>
         <p:nvSpPr>
-          <p:cNvPr id="39" name="Text 37"/>
-          <p:cNvSpPr/>
-          <p:nvPr/>
-        </p:nvSpPr>
-        <p:spPr>
-          <a:xfrm>
-            <a:off x="365760" y="3246120"/>
-            <a:ext cx="2468880" cy="402336"/>
+          <p:cNvPr id="39" name="Shape 37"/>
+          <p:cNvSpPr/>
+          <p:nvPr/>
+        </p:nvSpPr>
+        <p:spPr>
+          <a:xfrm>
+            <a:off x="2971800" y="3246120"/>
+            <a:ext cx="2834640" cy="402336"/>
+          </a:xfrm>
+          <a:prstGeom prst="rect">
+            <a:avLst/>
+          </a:prstGeom>
+          <a:solidFill>
+            <a:srgbClr val="F8FAFC"/>
+          </a:solidFill>
+          <a:ln w="12700">
+            <a:solidFill>
+              <a:srgbClr val="E2E8F0"/>
+            </a:solidFill>
+            <a:prstDash val="solid"/>
+          </a:ln>
+        </p:spPr>
+      </p:sp>
+      <p:sp>
+        <p:nvSpPr>
+          <p:cNvPr id="40" name="Shape 38"/>
+          <p:cNvSpPr/>
+          <p:nvPr/>
+        </p:nvSpPr>
+        <p:spPr>
+          <a:xfrm>
+            <a:off x="5943600" y="3246120"/>
+            <a:ext cx="2834640" cy="402336"/>
+          </a:xfrm>
+          <a:prstGeom prst="rect">
+            <a:avLst/>
+          </a:prstGeom>
+          <a:solidFill>
+            <a:srgbClr val="FCE7F3"/>
+          </a:solidFill>
+          <a:ln w="12700">
+            <a:solidFill>
+              <a:srgbClr val="E2E8F0"/>
+            </a:solidFill>
+            <a:prstDash val="solid"/>
+          </a:ln>
+        </p:spPr>
+      </p:sp>
+      <p:sp>
+        <p:nvSpPr>
+          <p:cNvPr id="41" name="Text 39"/>
+          <p:cNvSpPr/>
+          <p:nvPr/>
+        </p:nvSpPr>
+        <p:spPr>
+          <a:xfrm>
+            <a:off x="5943600" y="3246120"/>
+            <a:ext cx="2834640" cy="402336"/>
           </a:xfrm>
           <a:prstGeom prst="rect">
             <a:avLst/>
@@ -37098,13 +38231,13 @@
             <a:r>
               <a:rPr lang="en-US" sz="1300" b="1" dirty="0">
                 <a:solidFill>
-                  <a:srgbClr val="4C1D95"/>
+                  <a:srgbClr val="9D174D"/>
                 </a:solidFill>
                 <a:latin typeface="Trebuchet MS" pitchFamily="34" charset="0"/>
                 <a:ea typeface="Trebuchet MS" pitchFamily="34" charset="-122"/>
                 <a:cs typeface="Trebuchet MS" pitchFamily="34" charset="-120"/>
               </a:rPr>
-              <a:t>un-</a:t>
+              <a:t>-ate</a:t>
             </a:r>
             <a:endParaRPr lang="en-US" sz="1300" dirty="0"/>
           </a:p>
@@ -37112,20 +38245,45 @@
       </p:sp>
       <p:sp>
         <p:nvSpPr>
-          <p:cNvPr id="40" name="Shape 38"/>
-          <p:cNvSpPr/>
-          <p:nvPr/>
-        </p:nvSpPr>
-        <p:spPr>
-          <a:xfrm>
-            <a:off x="2971800" y="3246120"/>
+          <p:cNvPr id="42" name="Shape 40"/>
+          <p:cNvSpPr/>
+          <p:nvPr/>
+        </p:nvSpPr>
+        <p:spPr>
+          <a:xfrm>
+            <a:off x="365760" y="3666744"/>
+            <a:ext cx="2468880" cy="402336"/>
+          </a:xfrm>
+          <a:prstGeom prst="rect">
+            <a:avLst/>
+          </a:prstGeom>
+          <a:solidFill>
+            <a:srgbClr val="F1F5F9"/>
+          </a:solidFill>
+          <a:ln w="12700">
+            <a:solidFill>
+              <a:srgbClr val="E2E8F0"/>
+            </a:solidFill>
+            <a:prstDash val="solid"/>
+          </a:ln>
+        </p:spPr>
+      </p:sp>
+      <p:sp>
+        <p:nvSpPr>
+          <p:cNvPr id="43" name="Shape 41"/>
+          <p:cNvSpPr/>
+          <p:nvPr/>
+        </p:nvSpPr>
+        <p:spPr>
+          <a:xfrm>
+            <a:off x="2971800" y="3666744"/>
             <a:ext cx="2834640" cy="402336"/>
           </a:xfrm>
           <a:prstGeom prst="rect">
             <a:avLst/>
           </a:prstGeom>
           <a:solidFill>
-            <a:srgbClr val="F8FAFC"/>
+            <a:srgbClr val="F1F5F9"/>
           </a:solidFill>
           <a:ln w="12700">
             <a:solidFill>
@@ -37137,13 +38295,13 @@
       </p:sp>
       <p:sp>
         <p:nvSpPr>
-          <p:cNvPr id="41" name="Shape 39"/>
-          <p:cNvSpPr/>
-          <p:nvPr/>
-        </p:nvSpPr>
-        <p:spPr>
-          <a:xfrm>
-            <a:off x="5943600" y="3246120"/>
+          <p:cNvPr id="44" name="Shape 42"/>
+          <p:cNvSpPr/>
+          <p:nvPr/>
+        </p:nvSpPr>
+        <p:spPr>
+          <a:xfrm>
+            <a:off x="5943600" y="3666744"/>
             <a:ext cx="2834640" cy="402336"/>
           </a:xfrm>
           <a:prstGeom prst="rect">
@@ -37162,13 +38320,13 @@
       </p:sp>
       <p:sp>
         <p:nvSpPr>
-          <p:cNvPr id="42" name="Text 40"/>
-          <p:cNvSpPr/>
-          <p:nvPr/>
-        </p:nvSpPr>
-        <p:spPr>
-          <a:xfrm>
-            <a:off x="5943600" y="3246120"/>
+          <p:cNvPr id="45" name="Text 43"/>
+          <p:cNvSpPr/>
+          <p:nvPr/>
+        </p:nvSpPr>
+        <p:spPr>
+          <a:xfrm>
+            <a:off x="5943600" y="3666744"/>
             <a:ext cx="2834640" cy="402336"/>
           </a:xfrm>
           <a:prstGeom prst="rect">
@@ -37193,7 +38351,7 @@
                 <a:ea typeface="Trebuchet MS" pitchFamily="34" charset="-122"/>
                 <a:cs typeface="Trebuchet MS" pitchFamily="34" charset="-120"/>
               </a:rPr>
-              <a:t>-ature</a:t>
+              <a:t>-er</a:t>
             </a:r>
             <a:endParaRPr lang="en-US" sz="1300" dirty="0"/>
           </a:p>
@@ -37201,7 +38359,7 @@
       </p:sp>
       <p:sp>
         <p:nvSpPr>
-          <p:cNvPr id="43" name="Text 41"/>
+          <p:cNvPr id="46" name="Text 44"/>
           <p:cNvSpPr/>
           <p:nvPr/>
         </p:nvSpPr>
@@ -37240,7 +38398,7 @@
       </p:sp>
       <p:sp>
         <p:nvSpPr>
-          <p:cNvPr id="44" name="Shape 42"/>
+          <p:cNvPr id="47" name="Shape 45"/>
           <p:cNvSpPr/>
           <p:nvPr/>
         </p:nvSpPr>
@@ -37267,7 +38425,7 @@
       </p:sp>
       <p:sp>
         <p:nvSpPr>
-          <p:cNvPr id="45" name="Text 43"/>
+          <p:cNvPr id="48" name="Text 46"/>
           <p:cNvSpPr/>
           <p:nvPr/>
         </p:nvSpPr>
@@ -37298,7 +38456,7 @@
                 <a:ea typeface="Trebuchet MS" pitchFamily="34" charset="-122"/>
                 <a:cs typeface="Trebuchet MS" pitchFamily="34" charset="-120"/>
               </a:rPr>
-              <a:t>signal</a:t>
+              <a:t>sign</a:t>
             </a:r>
             <a:endParaRPr lang="en-US" sz="1200" dirty="0"/>
           </a:p>
@@ -37306,7 +38464,7 @@
       </p:sp>
       <p:sp>
         <p:nvSpPr>
-          <p:cNvPr id="46" name="Shape 44"/>
+          <p:cNvPr id="49" name="Shape 47"/>
           <p:cNvSpPr/>
           <p:nvPr/>
         </p:nvSpPr>
@@ -37333,7 +38491,7 @@
       </p:sp>
       <p:sp>
         <p:nvSpPr>
-          <p:cNvPr id="47" name="Text 45"/>
+          <p:cNvPr id="50" name="Text 48"/>
           <p:cNvSpPr/>
           <p:nvPr/>
         </p:nvSpPr>
@@ -37364,7 +38522,7 @@
                 <a:ea typeface="Trebuchet MS" pitchFamily="34" charset="-122"/>
                 <a:cs typeface="Trebuchet MS" pitchFamily="34" charset="-120"/>
               </a:rPr>
-              <a:t>signature</a:t>
+              <a:t>signs</a:t>
             </a:r>
             <a:endParaRPr lang="en-US" sz="1200" dirty="0"/>
           </a:p>
@@ -37372,7 +38530,7 @@
       </p:sp>
       <p:sp>
         <p:nvSpPr>
-          <p:cNvPr id="48" name="Shape 46"/>
+          <p:cNvPr id="51" name="Shape 49"/>
           <p:cNvSpPr/>
           <p:nvPr/>
         </p:nvSpPr>
@@ -37399,7 +38557,7 @@
       </p:sp>
       <p:sp>
         <p:nvSpPr>
-          <p:cNvPr id="49" name="Text 47"/>
+          <p:cNvPr id="52" name="Text 50"/>
           <p:cNvSpPr/>
           <p:nvPr/>
         </p:nvSpPr>
@@ -37430,7 +38588,7 @@
                 <a:ea typeface="Trebuchet MS" pitchFamily="34" charset="-122"/>
                 <a:cs typeface="Trebuchet MS" pitchFamily="34" charset="-120"/>
               </a:rPr>
-              <a:t>design</a:t>
+              <a:t>assign</a:t>
             </a:r>
             <a:endParaRPr lang="en-US" sz="1200" dirty="0"/>
           </a:p>
@@ -37438,7 +38596,7 @@
       </p:sp>
       <p:sp>
         <p:nvSpPr>
-          <p:cNvPr id="50" name="Shape 48"/>
+          <p:cNvPr id="53" name="Shape 51"/>
           <p:cNvSpPr/>
           <p:nvPr/>
         </p:nvSpPr>
@@ -37465,7 +38623,7 @@
       </p:sp>
       <p:sp>
         <p:nvSpPr>
-          <p:cNvPr id="51" name="Text 49"/>
+          <p:cNvPr id="54" name="Text 52"/>
           <p:cNvSpPr/>
           <p:nvPr/>
         </p:nvSpPr>
@@ -37496,7 +38654,7 @@
                 <a:ea typeface="Trebuchet MS" pitchFamily="34" charset="-122"/>
                 <a:cs typeface="Trebuchet MS" pitchFamily="34" charset="-120"/>
               </a:rPr>
-              <a:t>assign</a:t>
+              <a:t>design</a:t>
             </a:r>
             <a:endParaRPr lang="en-US" sz="1200" dirty="0"/>
           </a:p>
@@ -37504,7 +38662,7 @@
       </p:sp>
       <p:sp>
         <p:nvSpPr>
-          <p:cNvPr id="52" name="Shape 50"/>
+          <p:cNvPr id="55" name="Shape 53"/>
           <p:cNvSpPr/>
           <p:nvPr/>
         </p:nvSpPr>
@@ -37531,7 +38689,7 @@
       </p:sp>
       <p:sp>
         <p:nvSpPr>
-          <p:cNvPr id="53" name="Text 51"/>
+          <p:cNvPr id="56" name="Text 54"/>
           <p:cNvSpPr/>
           <p:nvPr/>
         </p:nvSpPr>
@@ -37570,7 +38728,7 @@
       </p:sp>
       <p:sp>
         <p:nvSpPr>
-          <p:cNvPr id="54" name="Shape 52"/>
+          <p:cNvPr id="57" name="Shape 55"/>
           <p:cNvSpPr/>
           <p:nvPr/>
         </p:nvSpPr>
@@ -37597,7 +38755,7 @@
       </p:sp>
       <p:sp>
         <p:nvSpPr>
-          <p:cNvPr id="55" name="Text 53"/>
+          <p:cNvPr id="58" name="Text 56"/>
           <p:cNvSpPr/>
           <p:nvPr/>
         </p:nvSpPr>
@@ -37628,7 +38786,7 @@
                 <a:ea typeface="Trebuchet MS" pitchFamily="34" charset="-122"/>
                 <a:cs typeface="Trebuchet MS" pitchFamily="34" charset="-120"/>
               </a:rPr>
-              <a:t>significant</a:t>
+              <a:t>signal</a:t>
             </a:r>
             <a:endParaRPr lang="en-US" sz="1200" dirty="0"/>
           </a:p>
@@ -37636,7 +38794,7 @@
       </p:sp>
       <p:sp>
         <p:nvSpPr>
-          <p:cNvPr id="56" name="Shape 54"/>
+          <p:cNvPr id="59" name="Shape 57"/>
           <p:cNvSpPr/>
           <p:nvPr/>
         </p:nvSpPr>
@@ -37663,7 +38821,7 @@
       </p:sp>
       <p:sp>
         <p:nvSpPr>
-          <p:cNvPr id="57" name="Text 55"/>
+          <p:cNvPr id="60" name="Text 58"/>
           <p:cNvSpPr/>
           <p:nvPr/>
         </p:nvSpPr>
@@ -37694,73 +38852,7 @@
                 <a:ea typeface="Trebuchet MS" pitchFamily="34" charset="-122"/>
                 <a:cs typeface="Trebuchet MS" pitchFamily="34" charset="-120"/>
               </a:rPr>
-              <a:t>designate</a:t>
-            </a:r>
-            <a:endParaRPr lang="en-US" sz="1200" dirty="0"/>
-          </a:p>
-        </p:txBody>
-      </p:sp>
-      <p:sp>
-        <p:nvSpPr>
-          <p:cNvPr id="58" name="Shape 56"/>
-          <p:cNvSpPr/>
-          <p:nvPr/>
-        </p:nvSpPr>
-        <p:spPr>
-          <a:xfrm>
-            <a:off x="6894576" y="4498848"/>
-            <a:ext cx="2011680" cy="402336"/>
-          </a:xfrm>
-          <a:prstGeom prst="rect">
-            <a:avLst>
-              <a:gd name="adj" fmla="val 13636"/>
-            </a:avLst>
-          </a:prstGeom>
-          <a:solidFill>
-            <a:srgbClr val="EEF2FF"/>
-          </a:solidFill>
-          <a:ln w="12700">
-            <a:solidFill>
-              <a:srgbClr val="6366F1"/>
-            </a:solidFill>
-            <a:prstDash val="solid"/>
-          </a:ln>
-        </p:spPr>
-      </p:sp>
-      <p:sp>
-        <p:nvSpPr>
-          <p:cNvPr id="59" name="Text 57"/>
-          <p:cNvSpPr/>
-          <p:nvPr/>
-        </p:nvSpPr>
-        <p:spPr>
-          <a:xfrm>
-            <a:off x="6894576" y="4498848"/>
-            <a:ext cx="2011680" cy="402336"/>
-          </a:xfrm>
-          <a:prstGeom prst="rect">
-            <a:avLst/>
-          </a:prstGeom>
-          <a:noFill/>
-          <a:ln/>
-        </p:spPr>
-        <p:txBody>
-          <a:bodyPr wrap="square" lIns="0" tIns="0" rIns="0" bIns="0" rtlCol="0" anchor="ctr"/>
-          <a:lstStyle/>
-          <a:p>
-            <a:pPr algn="ctr" indent="0" marL="0">
-              <a:buNone/>
-            </a:pPr>
-            <a:r>
-              <a:rPr lang="en-US" sz="1200" b="1" dirty="0">
-                <a:solidFill>
-                  <a:srgbClr val="4338CA"/>
-                </a:solidFill>
-                <a:latin typeface="Trebuchet MS" pitchFamily="34" charset="0"/>
-                <a:ea typeface="Trebuchet MS" pitchFamily="34" charset="-122"/>
-                <a:cs typeface="Trebuchet MS" pitchFamily="34" charset="-120"/>
-              </a:rPr>
-              <a:t>consign</a:t>
+              <a:t>signed</a:t>
             </a:r>
             <a:endParaRPr lang="en-US" sz="1200" dirty="0"/>
           </a:p>
@@ -38052,7 +39144,7 @@
                 <a:ea typeface="Calibri" pitchFamily="34" charset="-122"/>
                 <a:cs typeface="Calibri" pitchFamily="34" charset="-120"/>
               </a:rPr>
-              <a:t>Word Labs  •  wordlabs.app  •  Root: 'sign' = mark, symbol, or signal</a:t>
+              <a:t>Word Labs  •  wordlabs.app  •  Root: 'sign' = mark; signal</a:t>
             </a:r>
             <a:endParaRPr lang="en-US" sz="800" dirty="0"/>
           </a:p>
@@ -38216,7 +39308,7 @@
                 <a:ea typeface="Calibri" pitchFamily="34" charset="-122"/>
                 <a:cs typeface="Calibri" pitchFamily="34" charset="-120"/>
               </a:rPr>
-              <a:t>The core part of a word carrying its basic meaning. For example, 'sign' means 'mark, symbol, or signal'.</a:t>
+              <a:t>The core part of a word carrying its basic meaning. For example, 'sign' means 'mark; signal'.</a:t>
             </a:r>
             <a:endParaRPr lang="en-US" sz="1350" dirty="0"/>
           </a:p>
@@ -38836,7 +39928,7 @@
                 <a:ea typeface="Calibri" pitchFamily="34" charset="-122"/>
                 <a:cs typeface="Calibri" pitchFamily="34" charset="-120"/>
               </a:rPr>
-              <a:t>Word Labs  •  wordlabs.app  •  Root: 'sign' = mark, symbol, or signal</a:t>
+              <a:t>Word Labs  •  wordlabs.app  •  Root: 'sign' = mark; signal</a:t>
             </a:r>
             <a:endParaRPr lang="en-US" sz="800" dirty="0"/>
           </a:p>
@@ -38948,7 +40040,7 @@
                 <a:ea typeface="Calibri" pitchFamily="34" charset="-122"/>
                 <a:cs typeface="Calibri" pitchFamily="34" charset="-120"/>
               </a:rPr>
-              <a:t>1.  The word 'signal' does not contain the root 'sign'.</a:t>
+              <a:t>1.  'signs' means 'loud noises that warn people of danger'.</a:t>
             </a:r>
             <a:endParaRPr lang="en-US" sz="1300" dirty="0"/>
           </a:p>
@@ -39087,7 +40179,7 @@
                 <a:ea typeface="Calibri" pitchFamily="34" charset="-122"/>
                 <a:cs typeface="Calibri" pitchFamily="34" charset="-120"/>
               </a:rPr>
-              <a:t>2.  You can add the prefix 're' to 'sign' to make the word 'resign'.</a:t>
+              <a:t>2.  'sign' means 'mark; signal'.</a:t>
             </a:r>
             <a:endParaRPr lang="en-US" sz="1300" dirty="0"/>
           </a:p>
@@ -39226,7 +40318,7 @@
                 <a:ea typeface="Calibri" pitchFamily="34" charset="-122"/>
                 <a:cs typeface="Calibri" pitchFamily="34" charset="-120"/>
               </a:rPr>
-              <a:t>3.  The root 'sign' comes from a Latin word meaning mark or symbol.</a:t>
+              <a:t>3.  'sign' means 'a loud noise made by an animal'.</a:t>
             </a:r>
             <a:endParaRPr lang="en-US" sz="1300" dirty="0"/>
           </a:p>
@@ -39249,11 +40341,11 @@
             </a:avLst>
           </a:prstGeom>
           <a:solidFill>
-            <a:srgbClr val="DCFCE7"/>
-          </a:solidFill>
-          <a:ln w="12700">
-            <a:solidFill>
-              <a:srgbClr val="16A34A"/>
+            <a:srgbClr val="FEE2E2"/>
+          </a:solidFill>
+          <a:ln w="12700">
+            <a:solidFill>
+              <a:srgbClr val="DC2626"/>
             </a:solidFill>
             <a:prstDash val="solid"/>
           </a:ln>
@@ -39286,13 +40378,13 @@
             <a:r>
               <a:rPr lang="en-US" sz="1100" b="1" dirty="0">
                 <a:solidFill>
-                  <a:srgbClr val="16A34A"/>
+                  <a:srgbClr val="DC2626"/>
                 </a:solidFill>
                 <a:latin typeface="Trebuchet MS" pitchFamily="34" charset="0"/>
                 <a:ea typeface="Trebuchet MS" pitchFamily="34" charset="-122"/>
                 <a:cs typeface="Trebuchet MS" pitchFamily="34" charset="-120"/>
               </a:rPr>
-              <a:t>TRUE</a:t>
+              <a:t>FALSE</a:t>
             </a:r>
             <a:endParaRPr lang="en-US" sz="1100" dirty="0"/>
           </a:p>
@@ -39365,7 +40457,7 @@
                 <a:ea typeface="Calibri" pitchFamily="34" charset="-122"/>
                 <a:cs typeface="Calibri" pitchFamily="34" charset="-120"/>
               </a:rPr>
-              <a:t>4.  The root 'sign' originally came from a Greek word meaning to write.</a:t>
+              <a:t>4.  'signs' means 'boards or notices that give information or instructions'.</a:t>
             </a:r>
             <a:endParaRPr lang="en-US" sz="1300" dirty="0"/>
           </a:p>
@@ -39388,11 +40480,11 @@
             </a:avLst>
           </a:prstGeom>
           <a:solidFill>
-            <a:srgbClr val="FEE2E2"/>
-          </a:solidFill>
-          <a:ln w="12700">
-            <a:solidFill>
-              <a:srgbClr val="DC2626"/>
+            <a:srgbClr val="DCFCE7"/>
+          </a:solidFill>
+          <a:ln w="12700">
+            <a:solidFill>
+              <a:srgbClr val="16A34A"/>
             </a:solidFill>
             <a:prstDash val="solid"/>
           </a:ln>
@@ -39425,13 +40517,13 @@
             <a:r>
               <a:rPr lang="en-US" sz="1100" b="1" dirty="0">
                 <a:solidFill>
-                  <a:srgbClr val="DC2626"/>
+                  <a:srgbClr val="16A34A"/>
                 </a:solidFill>
                 <a:latin typeface="Trebuchet MS" pitchFamily="34" charset="0"/>
                 <a:ea typeface="Trebuchet MS" pitchFamily="34" charset="-122"/>
                 <a:cs typeface="Trebuchet MS" pitchFamily="34" charset="-120"/>
               </a:rPr>
-              <a:t>FALSE</a:t>
+              <a:t>TRUE</a:t>
             </a:r>
             <a:endParaRPr lang="en-US" sz="1100" dirty="0"/>
           </a:p>
@@ -39504,7 +40596,7 @@
                 <a:ea typeface="Calibri" pitchFamily="34" charset="-122"/>
                 <a:cs typeface="Calibri" pitchFamily="34" charset="-120"/>
               </a:rPr>
-              <a:t>5.  A 'signature' is connected to the idea of making a personal mark.</a:t>
+              <a:t>5.  'sign' means 'a notice or symbol that gives information, or to write your name on a document'.</a:t>
             </a:r>
             <a:endParaRPr lang="en-US" sz="1300" dirty="0"/>
           </a:p>
@@ -39862,7 +40954,7 @@
                 <a:ea typeface="Calibri" pitchFamily="34" charset="-122"/>
                 <a:cs typeface="Calibri" pitchFamily="34" charset="-120"/>
               </a:rPr>
-              <a:t>Word Labs  •  wordlabs.app  •  Root: 'sign' = mark, symbol, or signal</a:t>
+              <a:t>Word Labs  •  wordlabs.app  •  Root: 'sign' = mark; signal</a:t>
             </a:r>
             <a:endParaRPr lang="en-US" sz="800" dirty="0"/>
           </a:p>
@@ -39999,7 +41091,7 @@
                 <a:ea typeface="Trebuchet MS" pitchFamily="34" charset="-122"/>
                 <a:cs typeface="Trebuchet MS" pitchFamily="34" charset="-120"/>
               </a:rPr>
-              <a:t>mark, symbol, or signal</a:t>
+              <a:t>mark; signal</a:t>
             </a:r>
             <a:endParaRPr lang="en-US" sz="2000" dirty="0"/>
           </a:p>
@@ -40038,7 +41130,7 @@
                 <a:ea typeface="Calibri" pitchFamily="34" charset="-122"/>
                 <a:cs typeface="Calibri" pitchFamily="34" charset="-120"/>
               </a:rPr>
-              <a:t>Origin: Latin: signum</a:t>
+              <a:t>Origin: Latin root</a:t>
             </a:r>
             <a:endParaRPr lang="en-US" sz="1100" dirty="0"/>
           </a:p>
@@ -40143,7 +41235,7 @@
                 <a:ea typeface="Trebuchet MS" pitchFamily="34" charset="-122"/>
                 <a:cs typeface="Trebuchet MS" pitchFamily="34" charset="-120"/>
               </a:rPr>
-              <a:t>signal</a:t>
+              <a:t>sign</a:t>
             </a:r>
             <a:endParaRPr lang="en-US" sz="1300" dirty="0"/>
           </a:p>
@@ -40209,7 +41301,7 @@
                 <a:ea typeface="Trebuchet MS" pitchFamily="34" charset="-122"/>
                 <a:cs typeface="Trebuchet MS" pitchFamily="34" charset="-120"/>
               </a:rPr>
-              <a:t>signature</a:t>
+              <a:t>signs</a:t>
             </a:r>
             <a:endParaRPr lang="en-US" sz="1300" dirty="0"/>
           </a:p>
@@ -40275,7 +41367,7 @@
                 <a:ea typeface="Trebuchet MS" pitchFamily="34" charset="-122"/>
                 <a:cs typeface="Trebuchet MS" pitchFamily="34" charset="-120"/>
               </a:rPr>
-              <a:t>design</a:t>
+              <a:t>assign</a:t>
             </a:r>
             <a:endParaRPr lang="en-US" sz="1300" dirty="0"/>
           </a:p>
@@ -40341,7 +41433,7 @@
                 <a:ea typeface="Trebuchet MS" pitchFamily="34" charset="-122"/>
                 <a:cs typeface="Trebuchet MS" pitchFamily="34" charset="-120"/>
               </a:rPr>
-              <a:t>assign</a:t>
+              <a:t>design</a:t>
             </a:r>
             <a:endParaRPr lang="en-US" sz="1300" dirty="0"/>
           </a:p>
@@ -40473,7 +41565,7 @@
                 <a:ea typeface="Trebuchet MS" pitchFamily="34" charset="-122"/>
                 <a:cs typeface="Trebuchet MS" pitchFamily="34" charset="-120"/>
               </a:rPr>
-              <a:t>significant</a:t>
+              <a:t>signal</a:t>
             </a:r>
             <a:endParaRPr lang="en-US" sz="1300" dirty="0"/>
           </a:p>
@@ -40539,7 +41631,7 @@
                 <a:ea typeface="Trebuchet MS" pitchFamily="34" charset="-122"/>
                 <a:cs typeface="Trebuchet MS" pitchFamily="34" charset="-120"/>
               </a:rPr>
-              <a:t>designate</a:t>
+              <a:t>signed</a:t>
             </a:r>
             <a:endParaRPr lang="en-US" sz="1300" dirty="0"/>
           </a:p>
@@ -40831,7 +41923,7 @@
                 <a:ea typeface="Calibri" pitchFamily="34" charset="-122"/>
                 <a:cs typeface="Calibri" pitchFamily="34" charset="-120"/>
               </a:rPr>
-              <a:t>Word Labs  •  wordlabs.app  •  Root: 'sign' = mark, symbol, or signal</a:t>
+              <a:t>Word Labs  •  wordlabs.app  •  Root: 'sign' = mark; signal</a:t>
             </a:r>
             <a:endParaRPr lang="en-US" sz="800" dirty="0"/>
           </a:p>
@@ -41132,7 +42224,7 @@
                 <a:ea typeface="Trebuchet MS" pitchFamily="34" charset="-122"/>
                 <a:cs typeface="Trebuchet MS" pitchFamily="34" charset="-120"/>
               </a:rPr>
-              <a:t>re-</a:t>
+              <a:t>ad-</a:t>
             </a:r>
             <a:endParaRPr lang="en-US" sz="1300" dirty="0"/>
           </a:p>
@@ -41477,7 +42569,7 @@
                 <a:ea typeface="Trebuchet MS" pitchFamily="34" charset="-122"/>
                 <a:cs typeface="Trebuchet MS" pitchFamily="34" charset="-120"/>
               </a:rPr>
-              <a:t>as-</a:t>
+              <a:t>re-</a:t>
             </a:r>
             <a:endParaRPr lang="en-US" sz="1300" dirty="0"/>
           </a:p>
@@ -41630,7 +42722,7 @@
                 <a:ea typeface="Trebuchet MS" pitchFamily="34" charset="-122"/>
                 <a:cs typeface="Trebuchet MS" pitchFamily="34" charset="-120"/>
               </a:rPr>
-              <a:t>con-</a:t>
+              <a:t>un-</a:t>
             </a:r>
             <a:endParaRPr lang="en-US" sz="1300" dirty="0"/>
           </a:p>
@@ -41719,7 +42811,7 @@
                 <a:ea typeface="Trebuchet MS" pitchFamily="34" charset="-122"/>
                 <a:cs typeface="Trebuchet MS" pitchFamily="34" charset="-120"/>
               </a:rPr>
-              <a:t>-al</a:t>
+              <a:t>-s</a:t>
             </a:r>
             <a:endParaRPr lang="en-US" sz="1300" dirty="0"/>
           </a:p>
@@ -41740,7 +42832,7 @@
             <a:avLst/>
           </a:prstGeom>
           <a:solidFill>
-            <a:srgbClr val="DDD6FE"/>
+            <a:srgbClr val="F8FAFC"/>
           </a:solidFill>
           <a:ln w="12700">
             <a:solidFill>
@@ -41752,18 +42844,68 @@
       </p:sp>
       <p:sp>
         <p:nvSpPr>
-          <p:cNvPr id="39" name="Text 37"/>
-          <p:cNvSpPr/>
-          <p:nvPr/>
-        </p:nvSpPr>
-        <p:spPr>
-          <a:xfrm>
-            <a:off x="640080" y="3584448"/>
+          <p:cNvPr id="39" name="Shape 37"/>
+          <p:cNvSpPr/>
+          <p:nvPr/>
+        </p:nvSpPr>
+        <p:spPr>
+          <a:xfrm>
+            <a:off x="3291840" y="3584448"/>
+            <a:ext cx="1645920" cy="420624"/>
+          </a:xfrm>
+          <a:prstGeom prst="rect">
+            <a:avLst/>
+          </a:prstGeom>
+          <a:solidFill>
+            <a:srgbClr val="F8FAFC"/>
+          </a:solidFill>
+          <a:ln w="12700">
+            <a:solidFill>
+              <a:srgbClr val="E5E7EB"/>
+            </a:solidFill>
+            <a:prstDash val="solid"/>
+          </a:ln>
+        </p:spPr>
+      </p:sp>
+      <p:sp>
+        <p:nvSpPr>
+          <p:cNvPr id="40" name="Shape 38"/>
+          <p:cNvSpPr/>
+          <p:nvPr/>
+        </p:nvSpPr>
+        <p:spPr>
+          <a:xfrm>
+            <a:off x="5943600" y="3584448"/>
             <a:ext cx="1463040" cy="420624"/>
           </a:xfrm>
           <a:prstGeom prst="rect">
             <a:avLst/>
           </a:prstGeom>
+          <a:solidFill>
+            <a:srgbClr val="FCE7F3"/>
+          </a:solidFill>
+          <a:ln w="12700">
+            <a:solidFill>
+              <a:srgbClr val="E5E7EB"/>
+            </a:solidFill>
+            <a:prstDash val="solid"/>
+          </a:ln>
+        </p:spPr>
+      </p:sp>
+      <p:sp>
+        <p:nvSpPr>
+          <p:cNvPr id="41" name="Text 39"/>
+          <p:cNvSpPr/>
+          <p:nvPr/>
+        </p:nvSpPr>
+        <p:spPr>
+          <a:xfrm>
+            <a:off x="5943600" y="3584448"/>
+            <a:ext cx="1463040" cy="420624"/>
+          </a:xfrm>
+          <a:prstGeom prst="rect">
+            <a:avLst/>
+          </a:prstGeom>
           <a:noFill/>
           <a:ln/>
         </p:spPr>
@@ -41777,13 +42919,13 @@
             <a:r>
               <a:rPr lang="en-US" sz="1300" b="1" dirty="0">
                 <a:solidFill>
-                  <a:srgbClr val="4C1D95"/>
+                  <a:srgbClr val="9D174D"/>
                 </a:solidFill>
                 <a:latin typeface="Trebuchet MS" pitchFamily="34" charset="0"/>
                 <a:ea typeface="Trebuchet MS" pitchFamily="34" charset="-122"/>
                 <a:cs typeface="Trebuchet MS" pitchFamily="34" charset="-120"/>
               </a:rPr>
-              <a:t>un-</a:t>
+              <a:t>-ate</a:t>
             </a:r>
             <a:endParaRPr lang="en-US" sz="1300" dirty="0"/>
           </a:p>
@@ -41791,20 +42933,45 @@
       </p:sp>
       <p:sp>
         <p:nvSpPr>
-          <p:cNvPr id="40" name="Shape 38"/>
-          <p:cNvSpPr/>
-          <p:nvPr/>
-        </p:nvSpPr>
-        <p:spPr>
-          <a:xfrm>
-            <a:off x="3291840" y="3584448"/>
+          <p:cNvPr id="42" name="Shape 40"/>
+          <p:cNvSpPr/>
+          <p:nvPr/>
+        </p:nvSpPr>
+        <p:spPr>
+          <a:xfrm>
+            <a:off x="640080" y="4041648"/>
+            <a:ext cx="1463040" cy="420624"/>
+          </a:xfrm>
+          <a:prstGeom prst="rect">
+            <a:avLst/>
+          </a:prstGeom>
+          <a:solidFill>
+            <a:srgbClr val="F1F5F9"/>
+          </a:solidFill>
+          <a:ln w="12700">
+            <a:solidFill>
+              <a:srgbClr val="E5E7EB"/>
+            </a:solidFill>
+            <a:prstDash val="solid"/>
+          </a:ln>
+        </p:spPr>
+      </p:sp>
+      <p:sp>
+        <p:nvSpPr>
+          <p:cNvPr id="43" name="Shape 41"/>
+          <p:cNvSpPr/>
+          <p:nvPr/>
+        </p:nvSpPr>
+        <p:spPr>
+          <a:xfrm>
+            <a:off x="3291840" y="4041648"/>
             <a:ext cx="1645920" cy="420624"/>
           </a:xfrm>
           <a:prstGeom prst="rect">
             <a:avLst/>
           </a:prstGeom>
           <a:solidFill>
-            <a:srgbClr val="F8FAFC"/>
+            <a:srgbClr val="F1F5F9"/>
           </a:solidFill>
           <a:ln w="12700">
             <a:solidFill>
@@ -41816,13 +42983,13 @@
       </p:sp>
       <p:sp>
         <p:nvSpPr>
-          <p:cNvPr id="41" name="Shape 39"/>
-          <p:cNvSpPr/>
-          <p:nvPr/>
-        </p:nvSpPr>
-        <p:spPr>
-          <a:xfrm>
-            <a:off x="5943600" y="3584448"/>
+          <p:cNvPr id="44" name="Shape 42"/>
+          <p:cNvSpPr/>
+          <p:nvPr/>
+        </p:nvSpPr>
+        <p:spPr>
+          <a:xfrm>
+            <a:off x="5943600" y="4041648"/>
             <a:ext cx="1463040" cy="420624"/>
           </a:xfrm>
           <a:prstGeom prst="rect">
@@ -41841,13 +43008,13 @@
       </p:sp>
       <p:sp>
         <p:nvSpPr>
-          <p:cNvPr id="42" name="Text 40"/>
-          <p:cNvSpPr/>
-          <p:nvPr/>
-        </p:nvSpPr>
-        <p:spPr>
-          <a:xfrm>
-            <a:off x="5943600" y="3584448"/>
+          <p:cNvPr id="45" name="Text 43"/>
+          <p:cNvSpPr/>
+          <p:nvPr/>
+        </p:nvSpPr>
+        <p:spPr>
+          <a:xfrm>
+            <a:off x="5943600" y="4041648"/>
             <a:ext cx="1463040" cy="420624"/>
           </a:xfrm>
           <a:prstGeom prst="rect">
@@ -41872,7 +43039,7 @@
                 <a:ea typeface="Trebuchet MS" pitchFamily="34" charset="-122"/>
                 <a:cs typeface="Trebuchet MS" pitchFamily="34" charset="-120"/>
               </a:rPr>
-              <a:t>-ature</a:t>
+              <a:t>-er</a:t>
             </a:r>
             <a:endParaRPr lang="en-US" sz="1300" dirty="0"/>
           </a:p>
@@ -41880,13 +43047,13 @@
       </p:sp>
       <p:sp>
         <p:nvSpPr>
-          <p:cNvPr id="43" name="Text 41"/>
-          <p:cNvSpPr/>
-          <p:nvPr/>
-        </p:nvSpPr>
-        <p:spPr>
-          <a:xfrm>
-            <a:off x="365760" y="4178808"/>
+          <p:cNvPr id="46" name="Text 44"/>
+          <p:cNvSpPr/>
+          <p:nvPr/>
+        </p:nvSpPr>
+        <p:spPr>
+          <a:xfrm>
+            <a:off x="365760" y="4636008"/>
             <a:ext cx="1097280" cy="420624"/>
           </a:xfrm>
           <a:prstGeom prst="rect">
@@ -41919,13 +43086,13 @@
       </p:sp>
       <p:sp>
         <p:nvSpPr>
-          <p:cNvPr id="44" name="Shape 42"/>
-          <p:cNvSpPr/>
-          <p:nvPr/>
-        </p:nvSpPr>
-        <p:spPr>
-          <a:xfrm>
-            <a:off x="1508760" y="4178808"/>
+          <p:cNvPr id="47" name="Shape 45"/>
+          <p:cNvSpPr/>
+          <p:nvPr/>
+        </p:nvSpPr>
+        <p:spPr>
+          <a:xfrm>
+            <a:off x="1508760" y="4636008"/>
             <a:ext cx="822960" cy="420624"/>
           </a:xfrm>
           <a:prstGeom prst="rect">
@@ -41953,13 +43120,13 @@
       </p:sp>
       <p:sp>
         <p:nvSpPr>
-          <p:cNvPr id="45" name="Text 43"/>
-          <p:cNvSpPr/>
-          <p:nvPr/>
-        </p:nvSpPr>
-        <p:spPr>
-          <a:xfrm>
-            <a:off x="1508760" y="4178808"/>
+          <p:cNvPr id="48" name="Text 46"/>
+          <p:cNvSpPr/>
+          <p:nvPr/>
+        </p:nvSpPr>
+        <p:spPr>
+          <a:xfrm>
+            <a:off x="1508760" y="4636008"/>
             <a:ext cx="822960" cy="420624"/>
           </a:xfrm>
           <a:prstGeom prst="rect">
@@ -41984,7 +43151,7 @@
                 <a:ea typeface="Trebuchet MS" pitchFamily="34" charset="-122"/>
                 <a:cs typeface="Trebuchet MS" pitchFamily="34" charset="-120"/>
               </a:rPr>
-              <a:t>re-</a:t>
+              <a:t>ad-</a:t>
             </a:r>
             <a:endParaRPr lang="en-US" sz="1300" dirty="0"/>
           </a:p>
@@ -41992,13 +43159,13 @@
       </p:sp>
       <p:sp>
         <p:nvSpPr>
-          <p:cNvPr id="46" name="Text 44"/>
-          <p:cNvSpPr/>
-          <p:nvPr/>
-        </p:nvSpPr>
-        <p:spPr>
-          <a:xfrm>
-            <a:off x="2359152" y="4178808"/>
+          <p:cNvPr id="49" name="Text 47"/>
+          <p:cNvSpPr/>
+          <p:nvPr/>
+        </p:nvSpPr>
+        <p:spPr>
+          <a:xfrm>
+            <a:off x="2359152" y="4636008"/>
             <a:ext cx="320040" cy="420624"/>
           </a:xfrm>
           <a:prstGeom prst="rect">
@@ -42031,13 +43198,13 @@
       </p:sp>
       <p:sp>
         <p:nvSpPr>
-          <p:cNvPr id="47" name="Shape 45"/>
-          <p:cNvSpPr/>
-          <p:nvPr/>
-        </p:nvSpPr>
-        <p:spPr>
-          <a:xfrm>
-            <a:off x="2706624" y="4178808"/>
+          <p:cNvPr id="50" name="Shape 48"/>
+          <p:cNvSpPr/>
+          <p:nvPr/>
+        </p:nvSpPr>
+        <p:spPr>
+          <a:xfrm>
+            <a:off x="2706624" y="4636008"/>
             <a:ext cx="1243584" cy="420624"/>
           </a:xfrm>
           <a:prstGeom prst="rect">
@@ -42065,13 +43232,13 @@
       </p:sp>
       <p:sp>
         <p:nvSpPr>
-          <p:cNvPr id="48" name="Text 46"/>
-          <p:cNvSpPr/>
-          <p:nvPr/>
-        </p:nvSpPr>
-        <p:spPr>
-          <a:xfrm>
-            <a:off x="2706624" y="4178808"/>
+          <p:cNvPr id="51" name="Text 49"/>
+          <p:cNvSpPr/>
+          <p:nvPr/>
+        </p:nvSpPr>
+        <p:spPr>
+          <a:xfrm>
+            <a:off x="2706624" y="4636008"/>
             <a:ext cx="1243584" cy="420624"/>
           </a:xfrm>
           <a:prstGeom prst="rect">
@@ -42104,13 +43271,13 @@
       </p:sp>
       <p:sp>
         <p:nvSpPr>
-          <p:cNvPr id="49" name="Text 47"/>
-          <p:cNvSpPr/>
-          <p:nvPr/>
-        </p:nvSpPr>
-        <p:spPr>
-          <a:xfrm>
-            <a:off x="3977640" y="4178808"/>
+          <p:cNvPr id="52" name="Text 50"/>
+          <p:cNvSpPr/>
+          <p:nvPr/>
+        </p:nvSpPr>
+        <p:spPr>
+          <a:xfrm>
+            <a:off x="3977640" y="4636008"/>
             <a:ext cx="320040" cy="420624"/>
           </a:xfrm>
           <a:prstGeom prst="rect">
@@ -42143,13 +43310,13 @@
       </p:sp>
       <p:sp>
         <p:nvSpPr>
-          <p:cNvPr id="50" name="Shape 48"/>
-          <p:cNvSpPr/>
-          <p:nvPr/>
-        </p:nvSpPr>
-        <p:spPr>
-          <a:xfrm>
-            <a:off x="4325112" y="4178808"/>
+          <p:cNvPr id="53" name="Shape 51"/>
+          <p:cNvSpPr/>
+          <p:nvPr/>
+        </p:nvSpPr>
+        <p:spPr>
+          <a:xfrm>
+            <a:off x="4325112" y="4636008"/>
             <a:ext cx="822960" cy="420624"/>
           </a:xfrm>
           <a:prstGeom prst="rect">
@@ -42177,13 +43344,13 @@
       </p:sp>
       <p:sp>
         <p:nvSpPr>
-          <p:cNvPr id="51" name="Text 49"/>
-          <p:cNvSpPr/>
-          <p:nvPr/>
-        </p:nvSpPr>
-        <p:spPr>
-          <a:xfrm>
-            <a:off x="4325112" y="4178808"/>
+          <p:cNvPr id="54" name="Text 52"/>
+          <p:cNvSpPr/>
+          <p:nvPr/>
+        </p:nvSpPr>
+        <p:spPr>
+          <a:xfrm>
+            <a:off x="4325112" y="4636008"/>
             <a:ext cx="822960" cy="420624"/>
           </a:xfrm>
           <a:prstGeom prst="rect">
@@ -42216,13 +43383,13 @@
       </p:sp>
       <p:sp>
         <p:nvSpPr>
-          <p:cNvPr id="52" name="Text 50"/>
-          <p:cNvSpPr/>
-          <p:nvPr/>
-        </p:nvSpPr>
-        <p:spPr>
-          <a:xfrm>
-            <a:off x="5221224" y="4178808"/>
+          <p:cNvPr id="55" name="Text 53"/>
+          <p:cNvSpPr/>
+          <p:nvPr/>
+        </p:nvSpPr>
+        <p:spPr>
+          <a:xfrm>
+            <a:off x="5221224" y="4636008"/>
             <a:ext cx="365760" cy="420624"/>
           </a:xfrm>
           <a:prstGeom prst="rect">
@@ -42255,13 +43422,13 @@
       </p:sp>
       <p:sp>
         <p:nvSpPr>
-          <p:cNvPr id="53" name="Shape 51"/>
-          <p:cNvSpPr/>
-          <p:nvPr/>
-        </p:nvSpPr>
-        <p:spPr>
-          <a:xfrm>
-            <a:off x="5632704" y="4178808"/>
+          <p:cNvPr id="56" name="Shape 54"/>
+          <p:cNvSpPr/>
+          <p:nvPr/>
+        </p:nvSpPr>
+        <p:spPr>
+          <a:xfrm>
+            <a:off x="5632704" y="4636008"/>
             <a:ext cx="2194560" cy="420624"/>
           </a:xfrm>
           <a:prstGeom prst="rect">
@@ -42282,13 +43449,13 @@
       </p:sp>
       <p:sp>
         <p:nvSpPr>
-          <p:cNvPr id="54" name="Text 52"/>
-          <p:cNvSpPr/>
-          <p:nvPr/>
-        </p:nvSpPr>
-        <p:spPr>
-          <a:xfrm>
-            <a:off x="5632704" y="4178808"/>
+          <p:cNvPr id="57" name="Text 55"/>
+          <p:cNvSpPr/>
+          <p:nvPr/>
+        </p:nvSpPr>
+        <p:spPr>
+          <a:xfrm>
+            <a:off x="5632704" y="4636008"/>
             <a:ext cx="2194560" cy="420624"/>
           </a:xfrm>
           <a:prstGeom prst="rect">
@@ -42313,7 +43480,7 @@
                 <a:ea typeface="Trebuchet MS" pitchFamily="34" charset="-122"/>
                 <a:cs typeface="Trebuchet MS" pitchFamily="34" charset="-120"/>
               </a:rPr>
-              <a:t>signal</a:t>
+              <a:t>sign</a:t>
             </a:r>
             <a:endParaRPr lang="en-US" sz="1400" dirty="0"/>
           </a:p>
@@ -42605,7 +43772,7 @@
                 <a:ea typeface="Calibri" pitchFamily="34" charset="-122"/>
                 <a:cs typeface="Calibri" pitchFamily="34" charset="-120"/>
               </a:rPr>
-              <a:t>Word Labs  •  wordlabs.app  •  Root: 'sign' = mark, symbol, or signal</a:t>
+              <a:t>Word Labs  •  wordlabs.app  •  Root: 'sign' = mark; signal</a:t>
             </a:r>
             <a:endParaRPr lang="en-US" sz="800" dirty="0"/>
           </a:p>
@@ -42717,7 +43884,7 @@
                 <a:ea typeface="Trebuchet MS" pitchFamily="34" charset="-122"/>
                 <a:cs typeface="Trebuchet MS" pitchFamily="34" charset="-120"/>
               </a:rPr>
-              <a:t>signal</a:t>
+              <a:t>sign</a:t>
             </a:r>
             <a:endParaRPr lang="en-US" sz="1200" dirty="0"/>
           </a:p>
@@ -42783,7 +43950,7 @@
                 <a:ea typeface="Calibri" pitchFamily="34" charset="-122"/>
                 <a:cs typeface="Calibri" pitchFamily="34" charset="-120"/>
               </a:rPr>
-              <a:t>To choose or mark something for a special purpose.</a:t>
+              <a:t>wrote your name on something, or gave a sign or gesture</a:t>
             </a:r>
             <a:endParaRPr lang="en-US" sz="1200" dirty="0"/>
           </a:p>
@@ -42856,7 +44023,7 @@
                 <a:ea typeface="Trebuchet MS" pitchFamily="34" charset="-122"/>
                 <a:cs typeface="Trebuchet MS" pitchFamily="34" charset="-120"/>
               </a:rPr>
-              <a:t>signature</a:t>
+              <a:t>signs</a:t>
             </a:r>
             <a:endParaRPr lang="en-US" sz="1200" dirty="0"/>
           </a:p>
@@ -42922,7 +44089,7 @@
                 <a:ea typeface="Calibri" pitchFamily="34" charset="-122"/>
                 <a:cs typeface="Calibri" pitchFamily="34" charset="-120"/>
               </a:rPr>
-              <a:t>To officially quit or leave a job or position.</a:t>
+              <a:t>to formally give up a job or position</a:t>
             </a:r>
             <a:endParaRPr lang="en-US" sz="1200" dirty="0"/>
           </a:p>
@@ -42995,7 +44162,7 @@
                 <a:ea typeface="Trebuchet MS" pitchFamily="34" charset="-122"/>
                 <a:cs typeface="Trebuchet MS" pitchFamily="34" charset="-120"/>
               </a:rPr>
-              <a:t>design</a:t>
+              <a:t>assign</a:t>
             </a:r>
             <a:endParaRPr lang="en-US" sz="1200" dirty="0"/>
           </a:p>
@@ -43061,7 +44228,7 @@
                 <a:ea typeface="Calibri" pitchFamily="34" charset="-122"/>
                 <a:cs typeface="Calibri" pitchFamily="34" charset="-120"/>
               </a:rPr>
-              <a:t>To give someone a particular job or task to do.</a:t>
+              <a:t>a plan or drawing showing how something will be made or how it looks</a:t>
             </a:r>
             <a:endParaRPr lang="en-US" sz="1200" dirty="0"/>
           </a:p>
@@ -43134,7 +44301,7 @@
                 <a:ea typeface="Trebuchet MS" pitchFamily="34" charset="-122"/>
                 <a:cs typeface="Trebuchet MS" pitchFamily="34" charset="-120"/>
               </a:rPr>
-              <a:t>assign</a:t>
+              <a:t>design</a:t>
             </a:r>
             <a:endParaRPr lang="en-US" sz="1200" dirty="0"/>
           </a:p>
@@ -43200,7 +44367,7 @@
                 <a:ea typeface="Calibri" pitchFamily="34" charset="-122"/>
                 <a:cs typeface="Calibri" pitchFamily="34" charset="-120"/>
               </a:rPr>
-              <a:t>Something that is important or has great meaning.</a:t>
+              <a:t>a sound, gesture, or sign that gives information or a message</a:t>
             </a:r>
             <a:endParaRPr lang="en-US" sz="1200" dirty="0"/>
           </a:p>
@@ -43339,7 +44506,7 @@
                 <a:ea typeface="Calibri" pitchFamily="34" charset="-122"/>
                 <a:cs typeface="Calibri" pitchFamily="34" charset="-120"/>
               </a:rPr>
-              <a:t>A plan or drawing that shows how something will be made or look.</a:t>
+              <a:t>to give a task or job to someone</a:t>
             </a:r>
             <a:endParaRPr lang="en-US" sz="1200" dirty="0"/>
           </a:p>
@@ -43412,7 +44579,7 @@
                 <a:ea typeface="Trebuchet MS" pitchFamily="34" charset="-122"/>
                 <a:cs typeface="Trebuchet MS" pitchFamily="34" charset="-120"/>
               </a:rPr>
-              <a:t>significant</a:t>
+              <a:t>signal</a:t>
             </a:r>
             <a:endParaRPr lang="en-US" sz="1200" dirty="0"/>
           </a:p>
@@ -43478,7 +44645,7 @@
                 <a:ea typeface="Calibri" pitchFamily="34" charset="-122"/>
                 <a:cs typeface="Calibri" pitchFamily="34" charset="-120"/>
               </a:rPr>
-              <a:t>A sign or movement that sends a message to someone.</a:t>
+              <a:t>a notice or symbol that gives information, or to write your name on a document</a:t>
             </a:r>
             <a:endParaRPr lang="en-US" sz="1200" dirty="0"/>
           </a:p>
@@ -43551,7 +44718,7 @@
                 <a:ea typeface="Trebuchet MS" pitchFamily="34" charset="-122"/>
                 <a:cs typeface="Trebuchet MS" pitchFamily="34" charset="-120"/>
               </a:rPr>
-              <a:t>designate</a:t>
+              <a:t>signed</a:t>
             </a:r>
             <a:endParaRPr lang="en-US" sz="1200" dirty="0"/>
           </a:p>
@@ -43617,7 +44784,7 @@
                 <a:ea typeface="Calibri" pitchFamily="34" charset="-122"/>
                 <a:cs typeface="Calibri" pitchFamily="34" charset="-120"/>
               </a:rPr>
-              <a:t>The special way you write your own name to show something is from you.</a:t>
+              <a:t>boards or notices that give information or instructions</a:t>
             </a:r>
             <a:endParaRPr lang="en-US" sz="1200" dirty="0"/>
           </a:p>
@@ -43909,7 +45076,7 @@
                 <a:ea typeface="Calibri" pitchFamily="34" charset="-122"/>
                 <a:cs typeface="Calibri" pitchFamily="34" charset="-120"/>
               </a:rPr>
-              <a:t>Word Labs  •  wordlabs.app  •  Root: 'sign' = mark, symbol, or signal</a:t>
+              <a:t>Word Labs  •  wordlabs.app  •  Root: 'sign' = mark; signal</a:t>
             </a:r>
             <a:endParaRPr lang="en-US" sz="800" dirty="0"/>
           </a:p>
@@ -44112,7 +45279,7 @@
                 <a:ea typeface="Calibri" pitchFamily="34" charset="-122"/>
                 <a:cs typeface="Calibri" pitchFamily="34" charset="-120"/>
               </a:rPr>
-              <a:t>The teacher will assign each student a different topic to research for the project.</a:t>
+              <a:t>The sign at the entrance said 'No Entry'.</a:t>
             </a:r>
             <a:endParaRPr lang="en-US" sz="1500" dirty="0"/>
           </a:p>
@@ -44276,7 +45443,7 @@
                 <a:ea typeface="Calibri" pitchFamily="34" charset="-122"/>
                 <a:cs typeface="Calibri" pitchFamily="34" charset="-120"/>
               </a:rPr>
-              <a:t>The road sign showed that we were only five kilometres from the city.</a:t>
+              <a:t>There were road signs warning drivers to slow down.</a:t>
             </a:r>
             <a:endParaRPr lang="en-US" sz="1500" dirty="0"/>
           </a:p>
@@ -44440,7 +45607,7 @@
                 <a:ea typeface="Calibri" pitchFamily="34" charset="-122"/>
                 <a:cs typeface="Calibri" pitchFamily="34" charset="-120"/>
               </a:rPr>
-              <a:t>Her signature on the painting showed that she was proud of her artwork.</a:t>
+              <a:t>The teacher will assign homework for the weekend.</a:t>
             </a:r>
             <a:endParaRPr lang="en-US" sz="1500" dirty="0"/>
           </a:p>
